--- a/MLC_IR_A-STREAM2026_v3.pptx
+++ b/MLC_IR_A-STREAM2026_v3.pptx
@@ -12,11 +12,11 @@
     <p:sldId id="265" r:id="rId3"/>
     <p:sldId id="267" r:id="rId4"/>
     <p:sldId id="257" r:id="rId5"/>
-    <p:sldId id="259" r:id="rId6"/>
     <p:sldId id="260" r:id="rId7"/>
     <p:sldId id="261" r:id="rId8"/>
     <p:sldId id="263" r:id="rId9"/>
     <p:sldId id="262" r:id="rId10"/>
+    <p:sldId id="268" r:id="rId18"/>
     <p:sldId id="264" r:id="rId11"/>
     <p:sldId id="266" r:id="rId12"/>
   </p:sldIdLst>
@@ -526,6 +526,99 @@
 </p:notes>
 </file>
 
+<file path=ppt/notesSlides/notesSlide12.xml><?xml version="1.0" encoding="utf-8"?>
+<p:notes xmlns:a="http://schemas.openxmlformats.org/drawingml/2006/main" xmlns:r="http://schemas.openxmlformats.org/officeDocument/2006/relationships" xmlns:p="http://schemas.openxmlformats.org/presentationml/2006/main">
+  <p:cSld>
+    <p:spTree>
+      <p:nvGrpSpPr>
+        <p:cNvPr id="1" name=""/>
+        <p:cNvGrpSpPr/>
+        <p:nvPr/>
+      </p:nvGrpSpPr>
+      <p:grpSpPr>
+        <a:xfrm>
+          <a:off x="0" y="0"/>
+          <a:ext cx="0" cy="0"/>
+          <a:chOff x="0" y="0"/>
+          <a:chExt cx="0" cy="0"/>
+        </a:xfrm>
+      </p:grpSpPr>
+      <p:sp>
+        <p:nvSpPr>
+          <p:cNvPr id="2" name="Slide Image Placeholder 1"/>
+          <p:cNvSpPr>
+            <a:spLocks noGrp="1" noRot="1" noChangeAspect="1"/>
+          </p:cNvSpPr>
+          <p:nvPr>
+            <p:ph type="sldImg"/>
+          </p:nvPr>
+        </p:nvSpPr>
+        <p:spPr/>
+      </p:sp>
+      <p:sp>
+        <p:nvSpPr>
+          <p:cNvPr id="3" name="Notes Placeholder 2"/>
+          <p:cNvSpPr>
+            <a:spLocks noGrp="1"/>
+          </p:cNvSpPr>
+          <p:nvPr>
+            <p:ph type="body" idx="1"/>
+          </p:nvPr>
+        </p:nvSpPr>
+        <p:spPr/>
+        <p:txBody>
+          <a:bodyPr/>
+          <a:lstStyle/>
+          <a:p>
+            <a:r>
+              <a:rPr lang="en-US" dirty="0"/>
+              <a:t>[약 30초]</a:t>
+            </a:r>
+          </a:p>
+          <a:p>
+            <a:r>
+              <a:rPr lang="en-US" dirty="0"/>
+              <a:t>비즈니스 모델입니다. 드론 운용사와 방식 전문 업체가 촬영 데이터를 가져오고 고객을 소개하면, MLC가 위험도를 분석해 고객사에 점검 우선순위 리포트를 드립니다. 매출은 점검 건당 요금과 연 구독으로 시작하고, 장기적으로는 드론과 점검 업체에 분석 엔진을 라이선스하겠습니다. 비용은 드론 촬영 운용과 모델 개발이고, 고객은 선박 용선과 리프트, 로프 액세스 비용을 아낄 수 있습니다.</a:t>
+            </a:r>
+          </a:p>
+        </p:txBody>
+      </p:sp>
+      <p:sp>
+        <p:nvSpPr>
+          <p:cNvPr id="4" name="Slide Number Placeholder 3"/>
+          <p:cNvSpPr>
+            <a:spLocks noGrp="1"/>
+          </p:cNvSpPr>
+          <p:nvPr>
+            <p:ph type="sldNum" sz="quarter" idx="10"/>
+          </p:nvPr>
+        </p:nvSpPr>
+        <p:spPr/>
+        <p:txBody>
+          <a:bodyPr/>
+          <a:lstStyle/>
+          <a:p>
+            <a:fld id="{F7021451-1387-4CA6-816F-3879F97B5CBC}" type="slidenum">
+              <a:rPr lang="en-US"/>
+              <a:t>9</a:t>
+            </a:fld>
+            <a:endParaRPr lang="en-US"/>
+          </a:p>
+        </p:txBody>
+      </p:sp>
+    </p:spTree>
+    <p:extLst>
+      <p:ext uri="{BB962C8B-B14F-4D97-AF65-F5344CB8AC3E}">
+        <p14:creationId xmlns:p14="http://schemas.microsoft.com/office/powerpoint/2010/main" val="1024086991"/>
+      </p:ext>
+    </p:extLst>
+  </p:cSld>
+  <p:clrMapOvr>
+    <a:masterClrMapping/>
+  </p:clrMapOvr>
+</p:notes>
+</file>
+
 <file path=ppt/notesSlides/notesSlide2.xml><?xml version="1.0" encoding="utf-8"?>
 <p:notes xmlns:a="http://schemas.openxmlformats.org/drawingml/2006/main" xmlns:r="http://schemas.openxmlformats.org/officeDocument/2006/relationships" xmlns:p="http://schemas.openxmlformats.org/presentationml/2006/main">
   <p:cSld>
@@ -805,99 +898,6 @@
 </p:notes>
 </file>
 
-<file path=ppt/notesSlides/notesSlide5.xml><?xml version="1.0" encoding="utf-8"?>
-<p:notes xmlns:a="http://schemas.openxmlformats.org/drawingml/2006/main" xmlns:r="http://schemas.openxmlformats.org/officeDocument/2006/relationships" xmlns:p="http://schemas.openxmlformats.org/presentationml/2006/main">
-  <p:cSld>
-    <p:spTree>
-      <p:nvGrpSpPr>
-        <p:cNvPr id="1" name=""/>
-        <p:cNvGrpSpPr/>
-        <p:nvPr/>
-      </p:nvGrpSpPr>
-      <p:grpSpPr>
-        <a:xfrm>
-          <a:off x="0" y="0"/>
-          <a:ext cx="0" cy="0"/>
-          <a:chOff x="0" y="0"/>
-          <a:chExt cx="0" cy="0"/>
-        </a:xfrm>
-      </p:grpSpPr>
-      <p:sp>
-        <p:nvSpPr>
-          <p:cNvPr id="2" name="Slide Image Placeholder 1"/>
-          <p:cNvSpPr>
-            <a:spLocks noGrp="1" noRot="1" noChangeAspect="1"/>
-          </p:cNvSpPr>
-          <p:nvPr>
-            <p:ph type="sldImg"/>
-          </p:nvPr>
-        </p:nvSpPr>
-        <p:spPr/>
-      </p:sp>
-      <p:sp>
-        <p:nvSpPr>
-          <p:cNvPr id="3" name="Notes Placeholder 2"/>
-          <p:cNvSpPr>
-            <a:spLocks noGrp="1"/>
-          </p:cNvSpPr>
-          <p:nvPr>
-            <p:ph type="body" idx="1"/>
-          </p:nvPr>
-        </p:nvSpPr>
-        <p:spPr/>
-        <p:txBody>
-          <a:bodyPr/>
-          <a:lstStyle/>
-          <a:p>
-            <a:r>
-              <a:rPr lang="en-US" dirty="0"/>
-              <a:t>[약 40초]</a:t>
-            </a:r>
-          </a:p>
-          <a:p>
-            <a:r>
-              <a:rPr lang="en-US" dirty="0"/>
-              <a:t>저희는 올해 7월 Tex-Corps 프로그램으로 미국에서 35명을 인터뷰했습니다. 처음 가설은 '검사원마다 판단이 달라 보정 도구가 필요하다'였는데, 현장 인력 11명 모두 아니라고 했습니다. 매뉴얼과 인증 시험으로 이미 해결된 문제였습니다. 대신 Williams의 한 관리자가 방향을 제시했습니다. 접근하기 어려운 곳을 드론으로 먼저 훑어서 정말 가까이 봐야 할 곳만 알려 주면 시간과 비용이 줄어든다는 것입니다. 이후 현장 인력 11명 중 10명이 여기에 공감했고, 의사결정권자 5명 모두 관심을 보이며 파일럿 조건까지 이야기했습니다.</a:t>
-            </a:r>
-          </a:p>
-        </p:txBody>
-      </p:sp>
-      <p:sp>
-        <p:nvSpPr>
-          <p:cNvPr id="4" name="Slide Number Placeholder 3"/>
-          <p:cNvSpPr>
-            <a:spLocks noGrp="1"/>
-          </p:cNvSpPr>
-          <p:nvPr>
-            <p:ph type="sldNum" sz="quarter" idx="10"/>
-          </p:nvPr>
-        </p:nvSpPr>
-        <p:spPr/>
-        <p:txBody>
-          <a:bodyPr/>
-          <a:lstStyle/>
-          <a:p>
-            <a:fld id="{F7021451-1387-4CA6-816F-3879F97B5CBC}" type="slidenum">
-              <a:rPr lang="en-US"/>
-              <a:t>5</a:t>
-            </a:fld>
-            <a:endParaRPr lang="en-US"/>
-          </a:p>
-        </p:txBody>
-      </p:sp>
-    </p:spTree>
-    <p:extLst>
-      <p:ext uri="{BB962C8B-B14F-4D97-AF65-F5344CB8AC3E}">
-        <p14:creationId xmlns:p14="http://schemas.microsoft.com/office/powerpoint/2010/main" val="1024086991"/>
-      </p:ext>
-    </p:extLst>
-  </p:cSld>
-  <p:clrMapOvr>
-    <a:masterClrMapping/>
-  </p:clrMapOvr>
-</p:notes>
-</file>
-
 <file path=ppt/notesSlides/notesSlide6.xml><?xml version="1.0" encoding="utf-8"?>
 <p:notes xmlns:a="http://schemas.openxmlformats.org/drawingml/2006/main" xmlns:r="http://schemas.openxmlformats.org/officeDocument/2006/relationships" xmlns:p="http://schemas.openxmlformats.org/presentationml/2006/main">
   <p:cSld>
@@ -1223,13 +1223,13 @@
           <a:p>
             <a:r>
               <a:rPr lang="en-US" dirty="0"/>
-              <a:t>[약 25초]</a:t>
+              <a:t>[약 30초]</a:t>
             </a:r>
           </a:p>
           <a:p>
             <a:r>
               <a:rPr lang="en-US" dirty="0"/>
-              <a:t>비즈니스 모델입니다. 드론 운용사와 방식 전문 업체가 현장 촬영 데이터를 가져오고 고객을 소개하면, MLC가 위험도를 분석해 해양 석유·가스 운영사에 점검 우선순위 리포트를 드립니다. 요금은 점검 건당 또는 구독형입니다. 고객사 안에서는 현장 검사원이 쓰고, 부식 엔지니어링 매니저가 추천하고, 대표가 결정합니다.</a:t>
+              <a:t>시장 규모입니다. 전체 시장은 글로벌 해양 점검·보수·유지 시장으로 2024년 136억 달러, 연 8.4%씩 성장하고 있습니다. 그중 저희가 바로 들어갈 수 있는 해양 드론 점검 서비스 시장은 15억 달러로, 연 11.5%씩 더 빠르게 커지고 있습니다. 저희는 3년 안에 이 시장의 1%, 1,500만 달러를 목표로 하고, 첫 타깃은 매년 점검을 받아야 하는 멕시코만 유인 생산 플랫폼 371곳입니다.</a:t>
             </a:r>
           </a:p>
         </p:txBody>
@@ -3369,6 +3369,2119 @@
 </p:sld>
 </file>
 
+<file path=ppt/slides/slide12.xml><?xml version="1.0" encoding="utf-8"?>
+<p:sld xmlns:a="http://schemas.openxmlformats.org/drawingml/2006/main" xmlns:r="http://schemas.openxmlformats.org/officeDocument/2006/relationships" xmlns:p="http://schemas.openxmlformats.org/presentationml/2006/main">
+  <p:cSld name="Slide 2">
+    <p:bg>
+      <p:bgPr>
+        <a:solidFill>
+          <a:srgbClr val="FFFFFF"/>
+        </a:solidFill>
+      </p:bgPr>
+    </p:bg>
+    <p:spTree>
+      <p:nvGrpSpPr>
+        <p:cNvPr id="1" name=""/>
+        <p:cNvGrpSpPr/>
+        <p:nvPr/>
+      </p:nvGrpSpPr>
+      <p:grpSpPr>
+        <a:xfrm>
+          <a:off x="0" y="0"/>
+          <a:ext cx="0" cy="0"/>
+          <a:chOff x="0" y="0"/>
+          <a:chExt cx="0" cy="0"/>
+        </a:xfrm>
+      </p:grpSpPr>
+      <p:sp>
+        <p:nvSpPr>
+          <p:cNvPr id="2" name="Text 0"/>
+          <p:cNvSpPr txBox="1"/>
+          <p:nvPr/>
+        </p:nvSpPr>
+        <p:spPr>
+          <a:xfrm>
+            <a:off x="548640" y="292608"/>
+            <a:ext cx="7315200" cy="274320"/>
+          </a:xfrm>
+          <a:prstGeom prst="rect">
+            <a:avLst/>
+          </a:prstGeom>
+          <a:noFill/>
+          <a:ln/>
+        </p:spPr>
+        <p:txBody>
+          <a:bodyPr wrap="square" lIns="0" tIns="0" rIns="0" bIns="0" rtlCol="0" anchor="t"/>
+          <a:lstStyle/>
+          <a:p>
+            <a:pPr indent="0" marL="0">
+              <a:buNone/>
+            </a:pPr>
+            <a:r>
+              <a:rPr lang="en-US" sz="1200" b="1" spc="100" kern="0" dirty="0">
+                <a:solidFill>
+                  <a:srgbClr val="B5501F"/>
+                </a:solidFill>
+                <a:latin typeface="맑은 고딕" pitchFamily="34" charset="0"/>
+                <a:ea typeface="맑은 고딕" pitchFamily="34" charset="-122"/>
+                <a:cs typeface="맑은 고딕" pitchFamily="34" charset="-120"/>
+              </a:rPr>
+              <a:t>BUSINESS MODEL</a:t>
+            </a:r>
+            <a:endParaRPr lang="en-US" sz="1200" dirty="0"/>
+          </a:p>
+        </p:txBody>
+      </p:sp>
+      <p:sp>
+        <p:nvSpPr>
+          <p:cNvPr id="3" name="Text 1"/>
+          <p:cNvSpPr txBox="1"/>
+          <p:nvPr/>
+        </p:nvSpPr>
+        <p:spPr>
+          <a:xfrm>
+            <a:off x="548640" y="566928"/>
+            <a:ext cx="11094415" cy="640080"/>
+          </a:xfrm>
+          <a:prstGeom prst="rect">
+            <a:avLst/>
+          </a:prstGeom>
+          <a:noFill/>
+          <a:ln/>
+        </p:spPr>
+        <p:txBody>
+          <a:bodyPr wrap="square" lIns="0" tIns="0" rIns="0" bIns="0" rtlCol="0" anchor="ctr"/>
+          <a:lstStyle/>
+          <a:p>
+            <a:pPr indent="0" marL="0">
+              <a:buNone/>
+            </a:pPr>
+            <a:r>
+              <a:rPr lang="en-US" sz="2800" b="1" dirty="0">
+                <a:solidFill>
+                  <a:srgbClr val="2B2D31"/>
+                </a:solidFill>
+                <a:latin typeface="맑은 고딕" pitchFamily="34" charset="0"/>
+                <a:ea typeface="맑은 고딕" pitchFamily="34" charset="-122"/>
+                <a:cs typeface="맑은 고딕" pitchFamily="34" charset="-120"/>
+              </a:rPr>
+              <a:t>비즈니스 모델</a:t>
+            </a:r>
+            <a:endParaRPr lang="en-US" sz="2800" dirty="0"/>
+          </a:p>
+        </p:txBody>
+      </p:sp>
+      <p:sp>
+        <p:nvSpPr>
+          <p:cNvPr id="4" name="Text 2"/>
+          <p:cNvSpPr txBox="1"/>
+          <p:nvPr/>
+        </p:nvSpPr>
+        <p:spPr>
+          <a:xfrm>
+            <a:off x="548640" y="6446520"/>
+            <a:ext cx="6400800" cy="274320"/>
+          </a:xfrm>
+          <a:prstGeom prst="rect">
+            <a:avLst/>
+          </a:prstGeom>
+          <a:noFill/>
+          <a:ln/>
+        </p:spPr>
+        <p:txBody>
+          <a:bodyPr wrap="square" lIns="0" tIns="0" rIns="0" bIns="0" rtlCol="0" anchor="t"/>
+          <a:lstStyle/>
+          <a:p>
+            <a:pPr indent="0" marL="0">
+              <a:buNone/>
+            </a:pPr>
+            <a:r>
+              <a:rPr lang="en-US" sz="900" dirty="0">
+                <a:solidFill>
+                  <a:srgbClr val="A3A7AD"/>
+                </a:solidFill>
+                <a:latin typeface="맑은 고딕" pitchFamily="34" charset="0"/>
+                <a:ea typeface="맑은 고딕" pitchFamily="34" charset="-122"/>
+                <a:cs typeface="맑은 고딕" pitchFamily="34" charset="-120"/>
+              </a:rPr>
+              <a:t>MLC  ·  제주 A-STREAM 2026</a:t>
+            </a:r>
+            <a:endParaRPr lang="en-US" sz="900" dirty="0"/>
+          </a:p>
+        </p:txBody>
+      </p:sp>
+      <p:sp>
+        <p:nvSpPr>
+          <p:cNvPr id="5" name="Text 3"/>
+          <p:cNvSpPr txBox="1"/>
+          <p:nvPr/>
+        </p:nvSpPr>
+        <p:spPr>
+          <a:xfrm>
+            <a:off x="10728655" y="6446520"/>
+            <a:ext cx="914400" cy="274320"/>
+          </a:xfrm>
+          <a:prstGeom prst="rect">
+            <a:avLst/>
+          </a:prstGeom>
+          <a:noFill/>
+          <a:ln/>
+        </p:spPr>
+        <p:txBody>
+          <a:bodyPr wrap="square" lIns="0" tIns="0" rIns="0" bIns="0" rtlCol="0" anchor="t"/>
+          <a:lstStyle/>
+          <a:p>
+            <a:pPr algn="r" indent="0" marL="0">
+              <a:buNone/>
+            </a:pPr>
+            <a:r>
+              <a:rPr lang="en-US" sz="900" dirty="0">
+                <a:solidFill>
+                  <a:srgbClr val="A3A7AD"/>
+                </a:solidFill>
+                <a:latin typeface="맑은 고딕" pitchFamily="34" charset="0"/>
+                <a:ea typeface="맑은 고딕" pitchFamily="34" charset="-122"/>
+                <a:cs typeface="맑은 고딕" pitchFamily="34" charset="-120"/>
+              </a:rPr>
+              <a:t>9</a:t>
+            </a:r>
+            <a:endParaRPr lang="en-US" sz="900" dirty="0"/>
+          </a:p>
+        </p:txBody>
+      </p:sp>
+      <p:sp>
+        <p:nvSpPr>
+          <p:cNvPr id="6" name="Shape 4"/>
+          <p:cNvSpPr/>
+          <p:nvPr/>
+        </p:nvSpPr>
+        <p:spPr>
+          <a:xfrm>
+            <a:off x="548640" y="1463040"/>
+            <a:ext cx="2377440" cy="1600200"/>
+          </a:xfrm>
+          <a:prstGeom prst="roundRect">
+            <a:avLst>
+              <a:gd name="adj" fmla="val 5714"/>
+            </a:avLst>
+          </a:prstGeom>
+          <a:solidFill>
+            <a:srgbClr val="FFFFFF"/>
+          </a:solidFill>
+          <a:ln w="15875">
+            <a:solidFill>
+              <a:srgbClr val="1F5F7A"/>
+            </a:solidFill>
+            <a:prstDash val="solid"/>
+          </a:ln>
+        </p:spPr>
+      </p:sp>
+      <p:sp>
+        <p:nvSpPr>
+          <p:cNvPr id="7" name="Shape 5"/>
+          <p:cNvSpPr/>
+          <p:nvPr/>
+        </p:nvSpPr>
+        <p:spPr>
+          <a:xfrm>
+            <a:off x="1463040" y="1627632"/>
+            <a:ext cx="548640" cy="548640"/>
+          </a:xfrm>
+          <a:prstGeom prst="ellipse">
+            <a:avLst/>
+          </a:prstGeom>
+          <a:solidFill>
+            <a:srgbClr val="1F5F7A"/>
+          </a:solidFill>
+          <a:ln w="12700">
+            <a:solidFill>
+              <a:srgbClr val="1F5F7A"/>
+            </a:solidFill>
+            <a:prstDash val="solid"/>
+          </a:ln>
+        </p:spPr>
+      </p:sp>
+      <p:pic>
+        <p:nvPicPr>
+          <p:cNvPr id="8" name="Image 0" descr="preencoded.png">    </p:cNvPr>
+          <p:cNvPicPr>
+            <a:picLocks noChangeAspect="1"/>
+          </p:cNvPicPr>
+          <p:nvPr/>
+        </p:nvPicPr>
+        <p:blipFill>
+          <a:blip r:embed="rId1"/>
+          <a:stretch>
+            <a:fillRect/>
+          </a:stretch>
+        </p:blipFill>
+        <p:spPr>
+          <a:xfrm>
+            <a:off x="1605686" y="1770278"/>
+            <a:ext cx="263347" cy="263347"/>
+          </a:xfrm>
+          <a:prstGeom prst="rect">
+            <a:avLst/>
+          </a:prstGeom>
+        </p:spPr>
+      </p:pic>
+      <p:sp>
+        <p:nvSpPr>
+          <p:cNvPr id="9" name="Text 6"/>
+          <p:cNvSpPr txBox="1"/>
+          <p:nvPr/>
+        </p:nvSpPr>
+        <p:spPr>
+          <a:xfrm>
+            <a:off x="548640" y="2212848"/>
+            <a:ext cx="2377440" cy="365760"/>
+          </a:xfrm>
+          <a:prstGeom prst="rect">
+            <a:avLst/>
+          </a:prstGeom>
+          <a:noFill/>
+          <a:ln/>
+        </p:spPr>
+        <p:txBody>
+          <a:bodyPr wrap="square" lIns="0" tIns="0" rIns="0" bIns="0" rtlCol="0" anchor="ctr"/>
+          <a:lstStyle/>
+          <a:p>
+            <a:pPr algn="ctr" indent="0" marL="0">
+              <a:buNone/>
+            </a:pPr>
+            <a:r>
+              <a:rPr lang="en-US" sz="1800" b="1" dirty="0">
+                <a:solidFill>
+                  <a:srgbClr val="1F5F7A"/>
+                </a:solidFill>
+                <a:latin typeface="맑은 고딕" pitchFamily="34" charset="0"/>
+                <a:ea typeface="맑은 고딕" pitchFamily="34" charset="-122"/>
+                <a:cs typeface="맑은 고딕" pitchFamily="34" charset="-120"/>
+              </a:rPr>
+              <a:t>파트너</a:t>
+            </a:r>
+            <a:endParaRPr lang="en-US" sz="1800" dirty="0"/>
+          </a:p>
+        </p:txBody>
+      </p:sp>
+      <p:sp>
+        <p:nvSpPr>
+          <p:cNvPr id="10" name="Text 7"/>
+          <p:cNvSpPr txBox="1"/>
+          <p:nvPr/>
+        </p:nvSpPr>
+        <p:spPr>
+          <a:xfrm>
+            <a:off x="640080" y="2578608"/>
+            <a:ext cx="2194560" cy="274320"/>
+          </a:xfrm>
+          <a:prstGeom prst="rect">
+            <a:avLst/>
+          </a:prstGeom>
+          <a:noFill/>
+          <a:ln/>
+        </p:spPr>
+        <p:txBody>
+          <a:bodyPr wrap="square" lIns="0" tIns="0" rIns="0" bIns="0" rtlCol="0" anchor="t"/>
+          <a:lstStyle/>
+          <a:p>
+            <a:pPr algn="ctr" indent="0" marL="0">
+              <a:buNone/>
+            </a:pPr>
+            <a:r>
+              <a:rPr lang="en-US" sz="1150" dirty="0">
+                <a:solidFill>
+                  <a:srgbClr val="6B6F76"/>
+                </a:solidFill>
+                <a:latin typeface="맑은 고딕" pitchFamily="34" charset="0"/>
+                <a:ea typeface="맑은 고딕" pitchFamily="34" charset="-122"/>
+                <a:cs typeface="맑은 고딕" pitchFamily="34" charset="-120"/>
+              </a:rPr>
+              <a:t>드론 운용사 · 방식 전문 업체</a:t>
+            </a:r>
+            <a:endParaRPr lang="en-US" sz="1150" dirty="0"/>
+          </a:p>
+        </p:txBody>
+      </p:sp>
+      <p:sp>
+        <p:nvSpPr>
+          <p:cNvPr id="11" name="Shape 8"/>
+          <p:cNvSpPr/>
+          <p:nvPr/>
+        </p:nvSpPr>
+        <p:spPr>
+          <a:xfrm>
+            <a:off x="4907128" y="1463040"/>
+            <a:ext cx="2377440" cy="1600200"/>
+          </a:xfrm>
+          <a:prstGeom prst="roundRect">
+            <a:avLst>
+              <a:gd name="adj" fmla="val 5714"/>
+            </a:avLst>
+          </a:prstGeom>
+          <a:solidFill>
+            <a:srgbClr val="FFFFFF"/>
+          </a:solidFill>
+          <a:ln w="15875">
+            <a:solidFill>
+              <a:srgbClr val="2B2D31"/>
+            </a:solidFill>
+            <a:prstDash val="solid"/>
+          </a:ln>
+        </p:spPr>
+      </p:sp>
+      <p:sp>
+        <p:nvSpPr>
+          <p:cNvPr id="12" name="Shape 9"/>
+          <p:cNvSpPr/>
+          <p:nvPr/>
+        </p:nvSpPr>
+        <p:spPr>
+          <a:xfrm>
+            <a:off x="5821528" y="1627632"/>
+            <a:ext cx="548640" cy="548640"/>
+          </a:xfrm>
+          <a:prstGeom prst="ellipse">
+            <a:avLst/>
+          </a:prstGeom>
+          <a:solidFill>
+            <a:srgbClr val="2B2D31"/>
+          </a:solidFill>
+          <a:ln w="12700">
+            <a:solidFill>
+              <a:srgbClr val="2B2D31"/>
+            </a:solidFill>
+            <a:prstDash val="solid"/>
+          </a:ln>
+        </p:spPr>
+      </p:sp>
+      <p:pic>
+        <p:nvPicPr>
+          <p:cNvPr id="13" name="Image 1" descr="preencoded.png">    </p:cNvPr>
+          <p:cNvPicPr>
+            <a:picLocks noChangeAspect="1"/>
+          </p:cNvPicPr>
+          <p:nvPr/>
+        </p:nvPicPr>
+        <p:blipFill>
+          <a:blip r:embed="rId2"/>
+          <a:stretch>
+            <a:fillRect/>
+          </a:stretch>
+        </p:blipFill>
+        <p:spPr>
+          <a:xfrm>
+            <a:off x="5964174" y="1770278"/>
+            <a:ext cx="263347" cy="263347"/>
+          </a:xfrm>
+          <a:prstGeom prst="rect">
+            <a:avLst/>
+          </a:prstGeom>
+        </p:spPr>
+      </p:pic>
+      <p:sp>
+        <p:nvSpPr>
+          <p:cNvPr id="14" name="Text 10"/>
+          <p:cNvSpPr txBox="1"/>
+          <p:nvPr/>
+        </p:nvSpPr>
+        <p:spPr>
+          <a:xfrm>
+            <a:off x="4907128" y="2212848"/>
+            <a:ext cx="2377440" cy="365760"/>
+          </a:xfrm>
+          <a:prstGeom prst="rect">
+            <a:avLst/>
+          </a:prstGeom>
+          <a:noFill/>
+          <a:ln/>
+        </p:spPr>
+        <p:txBody>
+          <a:bodyPr wrap="square" lIns="0" tIns="0" rIns="0" bIns="0" rtlCol="0" anchor="ctr"/>
+          <a:lstStyle/>
+          <a:p>
+            <a:pPr algn="ctr" indent="0" marL="0">
+              <a:buNone/>
+            </a:pPr>
+            <a:r>
+              <a:rPr lang="en-US" sz="1800" b="1" dirty="0">
+                <a:solidFill>
+                  <a:srgbClr val="2B2D31"/>
+                </a:solidFill>
+                <a:latin typeface="맑은 고딕" pitchFamily="34" charset="0"/>
+                <a:ea typeface="맑은 고딕" pitchFamily="34" charset="-122"/>
+                <a:cs typeface="맑은 고딕" pitchFamily="34" charset="-120"/>
+              </a:rPr>
+              <a:t>MLC</a:t>
+            </a:r>
+            <a:endParaRPr lang="en-US" sz="1800" dirty="0"/>
+          </a:p>
+        </p:txBody>
+      </p:sp>
+      <p:sp>
+        <p:nvSpPr>
+          <p:cNvPr id="15" name="Text 11"/>
+          <p:cNvSpPr txBox="1"/>
+          <p:nvPr/>
+        </p:nvSpPr>
+        <p:spPr>
+          <a:xfrm>
+            <a:off x="4998568" y="2578608"/>
+            <a:ext cx="2194560" cy="274320"/>
+          </a:xfrm>
+          <a:prstGeom prst="rect">
+            <a:avLst/>
+          </a:prstGeom>
+          <a:noFill/>
+          <a:ln/>
+        </p:spPr>
+        <p:txBody>
+          <a:bodyPr wrap="square" lIns="0" tIns="0" rIns="0" bIns="0" rtlCol="0" anchor="t"/>
+          <a:lstStyle/>
+          <a:p>
+            <a:pPr algn="ctr" indent="0" marL="0">
+              <a:buNone/>
+            </a:pPr>
+            <a:r>
+              <a:rPr lang="en-US" sz="1150" dirty="0">
+                <a:solidFill>
+                  <a:srgbClr val="6B6F76"/>
+                </a:solidFill>
+                <a:latin typeface="맑은 고딕" pitchFamily="34" charset="0"/>
+                <a:ea typeface="맑은 고딕" pitchFamily="34" charset="-122"/>
+                <a:cs typeface="맑은 고딕" pitchFamily="34" charset="-120"/>
+              </a:rPr>
+              <a:t>녹 색 기반 위험도 분석</a:t>
+            </a:r>
+            <a:endParaRPr lang="en-US" sz="1150" dirty="0"/>
+          </a:p>
+        </p:txBody>
+      </p:sp>
+      <p:sp>
+        <p:nvSpPr>
+          <p:cNvPr id="16" name="Shape 12"/>
+          <p:cNvSpPr/>
+          <p:nvPr/>
+        </p:nvSpPr>
+        <p:spPr>
+          <a:xfrm>
+            <a:off x="9265615" y="1463040"/>
+            <a:ext cx="2377440" cy="1600200"/>
+          </a:xfrm>
+          <a:prstGeom prst="roundRect">
+            <a:avLst>
+              <a:gd name="adj" fmla="val 5714"/>
+            </a:avLst>
+          </a:prstGeom>
+          <a:solidFill>
+            <a:srgbClr val="FFFFFF"/>
+          </a:solidFill>
+          <a:ln w="15875">
+            <a:solidFill>
+              <a:srgbClr val="B5501F"/>
+            </a:solidFill>
+            <a:prstDash val="solid"/>
+          </a:ln>
+        </p:spPr>
+      </p:sp>
+      <p:sp>
+        <p:nvSpPr>
+          <p:cNvPr id="17" name="Shape 13"/>
+          <p:cNvSpPr/>
+          <p:nvPr/>
+        </p:nvSpPr>
+        <p:spPr>
+          <a:xfrm>
+            <a:off x="10180015" y="1627632"/>
+            <a:ext cx="548640" cy="548640"/>
+          </a:xfrm>
+          <a:prstGeom prst="ellipse">
+            <a:avLst/>
+          </a:prstGeom>
+          <a:solidFill>
+            <a:srgbClr val="B5501F"/>
+          </a:solidFill>
+          <a:ln w="12700">
+            <a:solidFill>
+              <a:srgbClr val="B5501F"/>
+            </a:solidFill>
+            <a:prstDash val="solid"/>
+          </a:ln>
+        </p:spPr>
+      </p:sp>
+      <p:pic>
+        <p:nvPicPr>
+          <p:cNvPr id="18" name="Image 2" descr="preencoded.png">    </p:cNvPr>
+          <p:cNvPicPr>
+            <a:picLocks noChangeAspect="1"/>
+          </p:cNvPicPr>
+          <p:nvPr/>
+        </p:nvPicPr>
+        <p:blipFill>
+          <a:blip r:embed="rId3"/>
+          <a:stretch>
+            <a:fillRect/>
+          </a:stretch>
+        </p:blipFill>
+        <p:spPr>
+          <a:xfrm>
+            <a:off x="10322662" y="1770278"/>
+            <a:ext cx="263347" cy="263347"/>
+          </a:xfrm>
+          <a:prstGeom prst="rect">
+            <a:avLst/>
+          </a:prstGeom>
+        </p:spPr>
+      </p:pic>
+      <p:sp>
+        <p:nvSpPr>
+          <p:cNvPr id="19" name="Text 14"/>
+          <p:cNvSpPr txBox="1"/>
+          <p:nvPr/>
+        </p:nvSpPr>
+        <p:spPr>
+          <a:xfrm>
+            <a:off x="9265615" y="2212848"/>
+            <a:ext cx="2377440" cy="365760"/>
+          </a:xfrm>
+          <a:prstGeom prst="rect">
+            <a:avLst/>
+          </a:prstGeom>
+          <a:noFill/>
+          <a:ln/>
+        </p:spPr>
+        <p:txBody>
+          <a:bodyPr wrap="square" lIns="0" tIns="0" rIns="0" bIns="0" rtlCol="0" anchor="ctr"/>
+          <a:lstStyle/>
+          <a:p>
+            <a:pPr algn="ctr" indent="0" marL="0">
+              <a:buNone/>
+            </a:pPr>
+            <a:r>
+              <a:rPr lang="en-US" sz="1800" b="1" dirty="0">
+                <a:solidFill>
+                  <a:srgbClr val="B5501F"/>
+                </a:solidFill>
+                <a:latin typeface="맑은 고딕" pitchFamily="34" charset="0"/>
+                <a:ea typeface="맑은 고딕" pitchFamily="34" charset="-122"/>
+                <a:cs typeface="맑은 고딕" pitchFamily="34" charset="-120"/>
+              </a:rPr>
+              <a:t>고객사</a:t>
+            </a:r>
+            <a:endParaRPr lang="en-US" sz="1800" dirty="0"/>
+          </a:p>
+        </p:txBody>
+      </p:sp>
+      <p:sp>
+        <p:nvSpPr>
+          <p:cNvPr id="20" name="Text 15"/>
+          <p:cNvSpPr txBox="1"/>
+          <p:nvPr/>
+        </p:nvSpPr>
+        <p:spPr>
+          <a:xfrm>
+            <a:off x="9357055" y="2578608"/>
+            <a:ext cx="2194560" cy="274320"/>
+          </a:xfrm>
+          <a:prstGeom prst="rect">
+            <a:avLst/>
+          </a:prstGeom>
+          <a:noFill/>
+          <a:ln/>
+        </p:spPr>
+        <p:txBody>
+          <a:bodyPr wrap="square" lIns="0" tIns="0" rIns="0" bIns="0" rtlCol="0" anchor="t"/>
+          <a:lstStyle/>
+          <a:p>
+            <a:pPr algn="ctr" indent="0" marL="0">
+              <a:buNone/>
+            </a:pPr>
+            <a:r>
+              <a:rPr lang="en-US" sz="1150" dirty="0">
+                <a:solidFill>
+                  <a:srgbClr val="6B6F76"/>
+                </a:solidFill>
+                <a:latin typeface="맑은 고딕" pitchFamily="34" charset="0"/>
+                <a:ea typeface="맑은 고딕" pitchFamily="34" charset="-122"/>
+                <a:cs typeface="맑은 고딕" pitchFamily="34" charset="-120"/>
+              </a:rPr>
+              <a:t>해양 석유 · 가스 운영사</a:t>
+            </a:r>
+            <a:endParaRPr lang="en-US" sz="1150" dirty="0"/>
+          </a:p>
+        </p:txBody>
+      </p:sp>
+      <p:sp>
+        <p:nvSpPr>
+          <p:cNvPr id="21" name="Text 16"/>
+          <p:cNvSpPr txBox="1"/>
+          <p:nvPr/>
+        </p:nvSpPr>
+        <p:spPr>
+          <a:xfrm>
+            <a:off x="3063240" y="1696212"/>
+            <a:ext cx="1706728" cy="274320"/>
+          </a:xfrm>
+          <a:prstGeom prst="rect">
+            <a:avLst/>
+          </a:prstGeom>
+          <a:noFill/>
+          <a:ln/>
+        </p:spPr>
+        <p:txBody>
+          <a:bodyPr wrap="square" lIns="0" tIns="0" rIns="0" bIns="0" rtlCol="0" anchor="t"/>
+          <a:lstStyle/>
+          <a:p>
+            <a:pPr algn="ctr" indent="0" marL="0">
+              <a:buNone/>
+            </a:pPr>
+            <a:r>
+              <a:rPr lang="en-US" sz="1300" b="1" dirty="0">
+                <a:solidFill>
+                  <a:srgbClr val="B5501F"/>
+                </a:solidFill>
+                <a:latin typeface="맑은 고딕" pitchFamily="34" charset="0"/>
+                <a:ea typeface="맑은 고딕" pitchFamily="34" charset="-122"/>
+                <a:cs typeface="맑은 고딕" pitchFamily="34" charset="-120"/>
+              </a:rPr>
+              <a:t>촬영 데이터 · 소개</a:t>
+            </a:r>
+            <a:endParaRPr lang="en-US" sz="1300" dirty="0"/>
+          </a:p>
+        </p:txBody>
+      </p:sp>
+      <p:sp>
+        <p:nvSpPr>
+          <p:cNvPr id="22" name="Shape 17"/>
+          <p:cNvSpPr/>
+          <p:nvPr/>
+        </p:nvSpPr>
+        <p:spPr>
+          <a:xfrm>
+            <a:off x="3063240" y="2034540"/>
+            <a:ext cx="1706728" cy="0"/>
+          </a:xfrm>
+          <a:prstGeom prst="line">
+            <a:avLst/>
+          </a:prstGeom>
+          <a:noFill/>
+          <a:ln w="28575">
+            <a:solidFill>
+              <a:srgbClr val="B5501F"/>
+            </a:solidFill>
+            <a:prstDash val="solid"/>
+            <a:tailEnd type="triangle"/>
+          </a:ln>
+        </p:spPr>
+      </p:sp>
+      <p:sp>
+        <p:nvSpPr>
+          <p:cNvPr id="23" name="Shape 18"/>
+          <p:cNvSpPr/>
+          <p:nvPr/>
+        </p:nvSpPr>
+        <p:spPr>
+          <a:xfrm>
+            <a:off x="3063240" y="2491740"/>
+            <a:ext cx="1706728" cy="0"/>
+          </a:xfrm>
+          <a:prstGeom prst="line">
+            <a:avLst/>
+          </a:prstGeom>
+          <a:noFill/>
+          <a:ln w="28575">
+            <a:solidFill>
+              <a:srgbClr val="1F5F7A"/>
+            </a:solidFill>
+            <a:prstDash val="dash"/>
+            <a:headEnd type="triangle"/>
+          </a:ln>
+        </p:spPr>
+      </p:sp>
+      <p:sp>
+        <p:nvSpPr>
+          <p:cNvPr id="24" name="Text 19"/>
+          <p:cNvSpPr txBox="1"/>
+          <p:nvPr/>
+        </p:nvSpPr>
+        <p:spPr>
+          <a:xfrm>
+            <a:off x="3063240" y="2564892"/>
+            <a:ext cx="1706728" cy="274320"/>
+          </a:xfrm>
+          <a:prstGeom prst="rect">
+            <a:avLst/>
+          </a:prstGeom>
+          <a:noFill/>
+          <a:ln/>
+        </p:spPr>
+        <p:txBody>
+          <a:bodyPr wrap="square" lIns="0" tIns="0" rIns="0" bIns="0" rtlCol="0" anchor="t"/>
+          <a:lstStyle/>
+          <a:p>
+            <a:pPr algn="ctr" indent="0" marL="0">
+              <a:buNone/>
+            </a:pPr>
+            <a:r>
+              <a:rPr lang="en-US" sz="1300" b="1" dirty="0">
+                <a:solidFill>
+                  <a:srgbClr val="1F5F7A"/>
+                </a:solidFill>
+                <a:latin typeface="맑은 고딕" pitchFamily="34" charset="0"/>
+                <a:ea typeface="맑은 고딕" pitchFamily="34" charset="-122"/>
+                <a:cs typeface="맑은 고딕" pitchFamily="34" charset="-120"/>
+              </a:rPr>
+              <a:t>촬영비 · 소개 수수료</a:t>
+            </a:r>
+            <a:endParaRPr lang="en-US" sz="1300" dirty="0"/>
+          </a:p>
+        </p:txBody>
+      </p:sp>
+      <p:sp>
+        <p:nvSpPr>
+          <p:cNvPr id="25" name="Text 20"/>
+          <p:cNvSpPr txBox="1"/>
+          <p:nvPr/>
+        </p:nvSpPr>
+        <p:spPr>
+          <a:xfrm>
+            <a:off x="7421728" y="1696212"/>
+            <a:ext cx="1706728" cy="274320"/>
+          </a:xfrm>
+          <a:prstGeom prst="rect">
+            <a:avLst/>
+          </a:prstGeom>
+          <a:noFill/>
+          <a:ln/>
+        </p:spPr>
+        <p:txBody>
+          <a:bodyPr wrap="square" lIns="0" tIns="0" rIns="0" bIns="0" rtlCol="0" anchor="t"/>
+          <a:lstStyle/>
+          <a:p>
+            <a:pPr algn="ctr" indent="0" marL="0">
+              <a:buNone/>
+            </a:pPr>
+            <a:r>
+              <a:rPr lang="en-US" sz="1300" b="1" dirty="0">
+                <a:solidFill>
+                  <a:srgbClr val="B5501F"/>
+                </a:solidFill>
+                <a:latin typeface="맑은 고딕" pitchFamily="34" charset="0"/>
+                <a:ea typeface="맑은 고딕" pitchFamily="34" charset="-122"/>
+                <a:cs typeface="맑은 고딕" pitchFamily="34" charset="-120"/>
+              </a:rPr>
+              <a:t>점검 우선순위 리포트</a:t>
+            </a:r>
+            <a:endParaRPr lang="en-US" sz="1300" dirty="0"/>
+          </a:p>
+        </p:txBody>
+      </p:sp>
+      <p:sp>
+        <p:nvSpPr>
+          <p:cNvPr id="26" name="Shape 21"/>
+          <p:cNvSpPr/>
+          <p:nvPr/>
+        </p:nvSpPr>
+        <p:spPr>
+          <a:xfrm>
+            <a:off x="7421728" y="2034540"/>
+            <a:ext cx="1706728" cy="0"/>
+          </a:xfrm>
+          <a:prstGeom prst="line">
+            <a:avLst/>
+          </a:prstGeom>
+          <a:noFill/>
+          <a:ln w="28575">
+            <a:solidFill>
+              <a:srgbClr val="B5501F"/>
+            </a:solidFill>
+            <a:prstDash val="solid"/>
+            <a:tailEnd type="triangle"/>
+          </a:ln>
+        </p:spPr>
+      </p:sp>
+      <p:sp>
+        <p:nvSpPr>
+          <p:cNvPr id="27" name="Shape 22"/>
+          <p:cNvSpPr/>
+          <p:nvPr/>
+        </p:nvSpPr>
+        <p:spPr>
+          <a:xfrm>
+            <a:off x="7421728" y="2491740"/>
+            <a:ext cx="1706728" cy="0"/>
+          </a:xfrm>
+          <a:prstGeom prst="line">
+            <a:avLst/>
+          </a:prstGeom>
+          <a:noFill/>
+          <a:ln w="28575">
+            <a:solidFill>
+              <a:srgbClr val="1F5F7A"/>
+            </a:solidFill>
+            <a:prstDash val="dash"/>
+            <a:headEnd type="triangle"/>
+          </a:ln>
+        </p:spPr>
+      </p:sp>
+      <p:sp>
+        <p:nvSpPr>
+          <p:cNvPr id="28" name="Text 23"/>
+          <p:cNvSpPr txBox="1"/>
+          <p:nvPr/>
+        </p:nvSpPr>
+        <p:spPr>
+          <a:xfrm>
+            <a:off x="7421728" y="2564892"/>
+            <a:ext cx="1706728" cy="274320"/>
+          </a:xfrm>
+          <a:prstGeom prst="rect">
+            <a:avLst/>
+          </a:prstGeom>
+          <a:noFill/>
+          <a:ln/>
+        </p:spPr>
+        <p:txBody>
+          <a:bodyPr wrap="square" lIns="0" tIns="0" rIns="0" bIns="0" rtlCol="0" anchor="t"/>
+          <a:lstStyle/>
+          <a:p>
+            <a:pPr algn="ctr" indent="0" marL="0">
+              <a:buNone/>
+            </a:pPr>
+            <a:r>
+              <a:rPr lang="en-US" sz="1300" b="1" dirty="0">
+                <a:solidFill>
+                  <a:srgbClr val="1F5F7A"/>
+                </a:solidFill>
+                <a:latin typeface="맑은 고딕" pitchFamily="34" charset="0"/>
+                <a:ea typeface="맑은 고딕" pitchFamily="34" charset="-122"/>
+                <a:cs typeface="맑은 고딕" pitchFamily="34" charset="-120"/>
+              </a:rPr>
+              <a:t>점검 건당 · 구독 요금</a:t>
+            </a:r>
+            <a:endParaRPr lang="en-US" sz="1300" dirty="0"/>
+          </a:p>
+        </p:txBody>
+      </p:sp>
+      <p:sp>
+        <p:nvSpPr>
+          <p:cNvPr id="29" name="Shape 24"/>
+          <p:cNvSpPr/>
+          <p:nvPr/>
+        </p:nvSpPr>
+        <p:spPr>
+          <a:xfrm>
+            <a:off x="8625535" y="960120"/>
+            <a:ext cx="411480" cy="0"/>
+          </a:xfrm>
+          <a:prstGeom prst="line">
+            <a:avLst/>
+          </a:prstGeom>
+          <a:noFill/>
+          <a:ln w="28575">
+            <a:solidFill>
+              <a:srgbClr val="B5501F"/>
+            </a:solidFill>
+            <a:prstDash val="solid"/>
+          </a:ln>
+        </p:spPr>
+      </p:sp>
+      <p:sp>
+        <p:nvSpPr>
+          <p:cNvPr id="30" name="Text 25"/>
+          <p:cNvSpPr txBox="1"/>
+          <p:nvPr/>
+        </p:nvSpPr>
+        <p:spPr>
+          <a:xfrm>
+            <a:off x="9128455" y="841248"/>
+            <a:ext cx="914400" cy="237744"/>
+          </a:xfrm>
+          <a:prstGeom prst="rect">
+            <a:avLst/>
+          </a:prstGeom>
+          <a:noFill/>
+          <a:ln/>
+        </p:spPr>
+        <p:txBody>
+          <a:bodyPr wrap="square" lIns="0" tIns="0" rIns="0" bIns="0" rtlCol="0" anchor="t"/>
+          <a:lstStyle/>
+          <a:p>
+            <a:pPr indent="0" marL="0">
+              <a:buNone/>
+            </a:pPr>
+            <a:r>
+              <a:rPr lang="en-US" sz="1100" b="1" dirty="0">
+                <a:solidFill>
+                  <a:srgbClr val="B5501F"/>
+                </a:solidFill>
+                <a:latin typeface="맑은 고딕" pitchFamily="34" charset="0"/>
+                <a:ea typeface="맑은 고딕" pitchFamily="34" charset="-122"/>
+                <a:cs typeface="맑은 고딕" pitchFamily="34" charset="-120"/>
+              </a:rPr>
+              <a:t>가치 흐름</a:t>
+            </a:r>
+            <a:endParaRPr lang="en-US" sz="1100" dirty="0"/>
+          </a:p>
+        </p:txBody>
+      </p:sp>
+      <p:sp>
+        <p:nvSpPr>
+          <p:cNvPr id="31" name="Shape 26"/>
+          <p:cNvSpPr/>
+          <p:nvPr/>
+        </p:nvSpPr>
+        <p:spPr>
+          <a:xfrm>
+            <a:off x="10225735" y="960120"/>
+            <a:ext cx="411480" cy="0"/>
+          </a:xfrm>
+          <a:prstGeom prst="line">
+            <a:avLst/>
+          </a:prstGeom>
+          <a:noFill/>
+          <a:ln w="28575">
+            <a:solidFill>
+              <a:srgbClr val="1F5F7A"/>
+            </a:solidFill>
+            <a:prstDash val="dash"/>
+          </a:ln>
+        </p:spPr>
+      </p:sp>
+      <p:sp>
+        <p:nvSpPr>
+          <p:cNvPr id="32" name="Text 27"/>
+          <p:cNvSpPr txBox="1"/>
+          <p:nvPr/>
+        </p:nvSpPr>
+        <p:spPr>
+          <a:xfrm>
+            <a:off x="10728655" y="841248"/>
+            <a:ext cx="914400" cy="237744"/>
+          </a:xfrm>
+          <a:prstGeom prst="rect">
+            <a:avLst/>
+          </a:prstGeom>
+          <a:noFill/>
+          <a:ln/>
+        </p:spPr>
+        <p:txBody>
+          <a:bodyPr wrap="square" lIns="0" tIns="0" rIns="0" bIns="0" rtlCol="0" anchor="t"/>
+          <a:lstStyle/>
+          <a:p>
+            <a:pPr indent="0" marL="0">
+              <a:buNone/>
+            </a:pPr>
+            <a:r>
+              <a:rPr lang="en-US" sz="1100" b="1" dirty="0">
+                <a:solidFill>
+                  <a:srgbClr val="1F5F7A"/>
+                </a:solidFill>
+                <a:latin typeface="맑은 고딕" pitchFamily="34" charset="0"/>
+                <a:ea typeface="맑은 고딕" pitchFamily="34" charset="-122"/>
+                <a:cs typeface="맑은 고딕" pitchFamily="34" charset="-120"/>
+              </a:rPr>
+              <a:t>돈 흐름</a:t>
+            </a:r>
+            <a:endParaRPr lang="en-US" sz="1100" dirty="0"/>
+          </a:p>
+        </p:txBody>
+      </p:sp>
+      <p:sp>
+        <p:nvSpPr>
+          <p:cNvPr id="33" name="Shape 28"/>
+          <p:cNvSpPr/>
+          <p:nvPr/>
+        </p:nvSpPr>
+        <p:spPr>
+          <a:xfrm>
+            <a:off x="548640" y="3429000"/>
+            <a:ext cx="3576218" cy="2514600"/>
+          </a:xfrm>
+          <a:prstGeom prst="roundRect">
+            <a:avLst>
+              <a:gd name="adj" fmla="val 2909"/>
+            </a:avLst>
+          </a:prstGeom>
+          <a:solidFill>
+            <a:srgbClr val="FBEDE4"/>
+          </a:solidFill>
+          <a:ln w="12700">
+            <a:solidFill>
+              <a:srgbClr val="FBEDE4"/>
+            </a:solidFill>
+            <a:prstDash val="solid"/>
+          </a:ln>
+        </p:spPr>
+      </p:sp>
+      <p:sp>
+        <p:nvSpPr>
+          <p:cNvPr id="34" name="Text 29"/>
+          <p:cNvSpPr txBox="1"/>
+          <p:nvPr/>
+        </p:nvSpPr>
+        <p:spPr>
+          <a:xfrm>
+            <a:off x="777240" y="3566160"/>
+            <a:ext cx="3210458" cy="320040"/>
+          </a:xfrm>
+          <a:prstGeom prst="rect">
+            <a:avLst/>
+          </a:prstGeom>
+          <a:noFill/>
+          <a:ln/>
+        </p:spPr>
+        <p:txBody>
+          <a:bodyPr wrap="square" lIns="0" tIns="0" rIns="0" bIns="0" rtlCol="0" anchor="t"/>
+          <a:lstStyle/>
+          <a:p>
+            <a:pPr indent="0" marL="0">
+              <a:buNone/>
+            </a:pPr>
+            <a:r>
+              <a:rPr lang="en-US" sz="1400" b="1" dirty="0">
+                <a:solidFill>
+                  <a:srgbClr val="B5501F"/>
+                </a:solidFill>
+                <a:latin typeface="맑은 고딕" pitchFamily="34" charset="0"/>
+                <a:ea typeface="맑은 고딕" pitchFamily="34" charset="-122"/>
+                <a:cs typeface="맑은 고딕" pitchFamily="34" charset="-120"/>
+              </a:rPr>
+              <a:t>매출원</a:t>
+            </a:r>
+            <a:endParaRPr lang="en-US" sz="1400" dirty="0"/>
+          </a:p>
+        </p:txBody>
+      </p:sp>
+      <p:sp>
+        <p:nvSpPr>
+          <p:cNvPr id="35" name="Shape 30"/>
+          <p:cNvSpPr/>
+          <p:nvPr/>
+        </p:nvSpPr>
+        <p:spPr>
+          <a:xfrm>
+            <a:off x="777240" y="4014216"/>
+            <a:ext cx="402336" cy="402336"/>
+          </a:xfrm>
+          <a:prstGeom prst="ellipse">
+            <a:avLst/>
+          </a:prstGeom>
+          <a:solidFill>
+            <a:srgbClr val="B5501F"/>
+          </a:solidFill>
+          <a:ln w="12700">
+            <a:solidFill>
+              <a:srgbClr val="B5501F"/>
+            </a:solidFill>
+            <a:prstDash val="solid"/>
+          </a:ln>
+        </p:spPr>
+      </p:sp>
+      <p:pic>
+        <p:nvPicPr>
+          <p:cNvPr id="36" name="Image 3" descr="preencoded.png">    </p:cNvPr>
+          <p:cNvPicPr>
+            <a:picLocks noChangeAspect="1"/>
+          </p:cNvPicPr>
+          <p:nvPr/>
+        </p:nvPicPr>
+        <p:blipFill>
+          <a:blip r:embed="rId4"/>
+          <a:stretch>
+            <a:fillRect/>
+          </a:stretch>
+        </p:blipFill>
+        <p:spPr>
+          <a:xfrm>
+            <a:off x="881847" y="4118823"/>
+            <a:ext cx="193121" cy="193121"/>
+          </a:xfrm>
+          <a:prstGeom prst="rect">
+            <a:avLst/>
+          </a:prstGeom>
+        </p:spPr>
+      </p:pic>
+      <p:sp>
+        <p:nvSpPr>
+          <p:cNvPr id="37" name="Text 31"/>
+          <p:cNvSpPr txBox="1"/>
+          <p:nvPr/>
+        </p:nvSpPr>
+        <p:spPr>
+          <a:xfrm>
+            <a:off x="1298448" y="3995928"/>
+            <a:ext cx="2661818" cy="256032"/>
+          </a:xfrm>
+          <a:prstGeom prst="rect">
+            <a:avLst/>
+          </a:prstGeom>
+          <a:noFill/>
+          <a:ln/>
+        </p:spPr>
+        <p:txBody>
+          <a:bodyPr wrap="square" lIns="0" tIns="0" rIns="0" bIns="0" rtlCol="0" anchor="t"/>
+          <a:lstStyle/>
+          <a:p>
+            <a:pPr indent="0" marL="0">
+              <a:buNone/>
+            </a:pPr>
+            <a:r>
+              <a:rPr lang="en-US" sz="1300" b="1" dirty="0">
+                <a:solidFill>
+                  <a:srgbClr val="2B2D31"/>
+                </a:solidFill>
+                <a:latin typeface="맑은 고딕" pitchFamily="34" charset="0"/>
+                <a:ea typeface="맑은 고딕" pitchFamily="34" charset="-122"/>
+                <a:cs typeface="맑은 고딕" pitchFamily="34" charset="-120"/>
+              </a:rPr>
+              <a:t>점검 건당 요금</a:t>
+            </a:r>
+            <a:endParaRPr lang="en-US" sz="1300" dirty="0"/>
+          </a:p>
+        </p:txBody>
+      </p:sp>
+      <p:sp>
+        <p:nvSpPr>
+          <p:cNvPr id="38" name="Text 32"/>
+          <p:cNvSpPr txBox="1"/>
+          <p:nvPr/>
+        </p:nvSpPr>
+        <p:spPr>
+          <a:xfrm>
+            <a:off x="1298448" y="4251960"/>
+            <a:ext cx="2661818" cy="237744"/>
+          </a:xfrm>
+          <a:prstGeom prst="rect">
+            <a:avLst/>
+          </a:prstGeom>
+          <a:noFill/>
+          <a:ln/>
+        </p:spPr>
+        <p:txBody>
+          <a:bodyPr wrap="square" lIns="0" tIns="0" rIns="0" bIns="0" rtlCol="0" anchor="t"/>
+          <a:lstStyle/>
+          <a:p>
+            <a:pPr indent="0" marL="0">
+              <a:buNone/>
+            </a:pPr>
+            <a:r>
+              <a:rPr lang="en-US" sz="1050" dirty="0">
+                <a:solidFill>
+                  <a:srgbClr val="6B6F76"/>
+                </a:solidFill>
+                <a:latin typeface="맑은 고딕" pitchFamily="34" charset="0"/>
+                <a:ea typeface="맑은 고딕" pitchFamily="34" charset="-122"/>
+                <a:cs typeface="맑은 고딕" pitchFamily="34" charset="-120"/>
+              </a:rPr>
+              <a:t>구조물 1기 스캔 · 리포트</a:t>
+            </a:r>
+            <a:endParaRPr lang="en-US" sz="1050" dirty="0"/>
+          </a:p>
+        </p:txBody>
+      </p:sp>
+      <p:sp>
+        <p:nvSpPr>
+          <p:cNvPr id="39" name="Shape 33"/>
+          <p:cNvSpPr/>
+          <p:nvPr/>
+        </p:nvSpPr>
+        <p:spPr>
+          <a:xfrm>
+            <a:off x="777240" y="4581144"/>
+            <a:ext cx="402336" cy="402336"/>
+          </a:xfrm>
+          <a:prstGeom prst="ellipse">
+            <a:avLst/>
+          </a:prstGeom>
+          <a:solidFill>
+            <a:srgbClr val="B5501F"/>
+          </a:solidFill>
+          <a:ln w="12700">
+            <a:solidFill>
+              <a:srgbClr val="B5501F"/>
+            </a:solidFill>
+            <a:prstDash val="solid"/>
+          </a:ln>
+        </p:spPr>
+      </p:sp>
+      <p:pic>
+        <p:nvPicPr>
+          <p:cNvPr id="40" name="Image 4" descr="preencoded.png">    </p:cNvPr>
+          <p:cNvPicPr>
+            <a:picLocks noChangeAspect="1"/>
+          </p:cNvPicPr>
+          <p:nvPr/>
+        </p:nvPicPr>
+        <p:blipFill>
+          <a:blip r:embed="rId5"/>
+          <a:stretch>
+            <a:fillRect/>
+          </a:stretch>
+        </p:blipFill>
+        <p:spPr>
+          <a:xfrm>
+            <a:off x="881847" y="4685751"/>
+            <a:ext cx="193121" cy="193121"/>
+          </a:xfrm>
+          <a:prstGeom prst="rect">
+            <a:avLst/>
+          </a:prstGeom>
+        </p:spPr>
+      </p:pic>
+      <p:sp>
+        <p:nvSpPr>
+          <p:cNvPr id="41" name="Text 34"/>
+          <p:cNvSpPr txBox="1"/>
+          <p:nvPr/>
+        </p:nvSpPr>
+        <p:spPr>
+          <a:xfrm>
+            <a:off x="1298448" y="4562856"/>
+            <a:ext cx="2661818" cy="256032"/>
+          </a:xfrm>
+          <a:prstGeom prst="rect">
+            <a:avLst/>
+          </a:prstGeom>
+          <a:noFill/>
+          <a:ln/>
+        </p:spPr>
+        <p:txBody>
+          <a:bodyPr wrap="square" lIns="0" tIns="0" rIns="0" bIns="0" rtlCol="0" anchor="t"/>
+          <a:lstStyle/>
+          <a:p>
+            <a:pPr indent="0" marL="0">
+              <a:buNone/>
+            </a:pPr>
+            <a:r>
+              <a:rPr lang="en-US" sz="1300" b="1" dirty="0">
+                <a:solidFill>
+                  <a:srgbClr val="2B2D31"/>
+                </a:solidFill>
+                <a:latin typeface="맑은 고딕" pitchFamily="34" charset="0"/>
+                <a:ea typeface="맑은 고딕" pitchFamily="34" charset="-122"/>
+                <a:cs typeface="맑은 고딕" pitchFamily="34" charset="-120"/>
+              </a:rPr>
+              <a:t>연 구독</a:t>
+            </a:r>
+            <a:endParaRPr lang="en-US" sz="1300" dirty="0"/>
+          </a:p>
+        </p:txBody>
+      </p:sp>
+      <p:sp>
+        <p:nvSpPr>
+          <p:cNvPr id="42" name="Text 35"/>
+          <p:cNvSpPr txBox="1"/>
+          <p:nvPr/>
+        </p:nvSpPr>
+        <p:spPr>
+          <a:xfrm>
+            <a:off x="1298448" y="4818888"/>
+            <a:ext cx="2661818" cy="237744"/>
+          </a:xfrm>
+          <a:prstGeom prst="rect">
+            <a:avLst/>
+          </a:prstGeom>
+          <a:noFill/>
+          <a:ln/>
+        </p:spPr>
+        <p:txBody>
+          <a:bodyPr wrap="square" lIns="0" tIns="0" rIns="0" bIns="0" rtlCol="0" anchor="t"/>
+          <a:lstStyle/>
+          <a:p>
+            <a:pPr indent="0" marL="0">
+              <a:buNone/>
+            </a:pPr>
+            <a:r>
+              <a:rPr lang="en-US" sz="1050" dirty="0">
+                <a:solidFill>
+                  <a:srgbClr val="6B6F76"/>
+                </a:solidFill>
+                <a:latin typeface="맑은 고딕" pitchFamily="34" charset="0"/>
+                <a:ea typeface="맑은 고딕" pitchFamily="34" charset="-122"/>
+                <a:cs typeface="맑은 고딕" pitchFamily="34" charset="-120"/>
+              </a:rPr>
+              <a:t>주기 점검 + 이력 관리</a:t>
+            </a:r>
+            <a:endParaRPr lang="en-US" sz="1050" dirty="0"/>
+          </a:p>
+        </p:txBody>
+      </p:sp>
+      <p:sp>
+        <p:nvSpPr>
+          <p:cNvPr id="43" name="Shape 36"/>
+          <p:cNvSpPr/>
+          <p:nvPr/>
+        </p:nvSpPr>
+        <p:spPr>
+          <a:xfrm>
+            <a:off x="777240" y="5148072"/>
+            <a:ext cx="402336" cy="402336"/>
+          </a:xfrm>
+          <a:prstGeom prst="ellipse">
+            <a:avLst/>
+          </a:prstGeom>
+          <a:solidFill>
+            <a:srgbClr val="B5501F"/>
+          </a:solidFill>
+          <a:ln w="12700">
+            <a:solidFill>
+              <a:srgbClr val="B5501F"/>
+            </a:solidFill>
+            <a:prstDash val="solid"/>
+          </a:ln>
+        </p:spPr>
+      </p:sp>
+      <p:pic>
+        <p:nvPicPr>
+          <p:cNvPr id="44" name="Image 5" descr="preencoded.png">    </p:cNvPr>
+          <p:cNvPicPr>
+            <a:picLocks noChangeAspect="1"/>
+          </p:cNvPicPr>
+          <p:nvPr/>
+        </p:nvPicPr>
+        <p:blipFill>
+          <a:blip r:embed="rId6"/>
+          <a:stretch>
+            <a:fillRect/>
+          </a:stretch>
+        </p:blipFill>
+        <p:spPr>
+          <a:xfrm>
+            <a:off x="881847" y="5252679"/>
+            <a:ext cx="193121" cy="193121"/>
+          </a:xfrm>
+          <a:prstGeom prst="rect">
+            <a:avLst/>
+          </a:prstGeom>
+        </p:spPr>
+      </p:pic>
+      <p:sp>
+        <p:nvSpPr>
+          <p:cNvPr id="45" name="Text 37"/>
+          <p:cNvSpPr txBox="1"/>
+          <p:nvPr/>
+        </p:nvSpPr>
+        <p:spPr>
+          <a:xfrm>
+            <a:off x="1298448" y="5129784"/>
+            <a:ext cx="2661818" cy="256032"/>
+          </a:xfrm>
+          <a:prstGeom prst="rect">
+            <a:avLst/>
+          </a:prstGeom>
+          <a:noFill/>
+          <a:ln/>
+        </p:spPr>
+        <p:txBody>
+          <a:bodyPr wrap="square" lIns="0" tIns="0" rIns="0" bIns="0" rtlCol="0" anchor="t"/>
+          <a:lstStyle/>
+          <a:p>
+            <a:pPr indent="0" marL="0">
+              <a:buNone/>
+            </a:pPr>
+            <a:r>
+              <a:rPr lang="en-US" sz="1300" b="1" dirty="0">
+                <a:solidFill>
+                  <a:srgbClr val="2B2D31"/>
+                </a:solidFill>
+                <a:latin typeface="맑은 고딕" pitchFamily="34" charset="0"/>
+                <a:ea typeface="맑은 고딕" pitchFamily="34" charset="-122"/>
+                <a:cs typeface="맑은 고딕" pitchFamily="34" charset="-120"/>
+              </a:rPr>
+              <a:t>데이터 라이선스 (장기)</a:t>
+            </a:r>
+            <a:endParaRPr lang="en-US" sz="1300" dirty="0"/>
+          </a:p>
+        </p:txBody>
+      </p:sp>
+      <p:sp>
+        <p:nvSpPr>
+          <p:cNvPr id="46" name="Text 38"/>
+          <p:cNvSpPr txBox="1"/>
+          <p:nvPr/>
+        </p:nvSpPr>
+        <p:spPr>
+          <a:xfrm>
+            <a:off x="1298448" y="5385816"/>
+            <a:ext cx="2661818" cy="237744"/>
+          </a:xfrm>
+          <a:prstGeom prst="rect">
+            <a:avLst/>
+          </a:prstGeom>
+          <a:noFill/>
+          <a:ln/>
+        </p:spPr>
+        <p:txBody>
+          <a:bodyPr wrap="square" lIns="0" tIns="0" rIns="0" bIns="0" rtlCol="0" anchor="t"/>
+          <a:lstStyle/>
+          <a:p>
+            <a:pPr indent="0" marL="0">
+              <a:buNone/>
+            </a:pPr>
+            <a:r>
+              <a:rPr lang="en-US" sz="1050" dirty="0">
+                <a:solidFill>
+                  <a:srgbClr val="6B6F76"/>
+                </a:solidFill>
+                <a:latin typeface="맑은 고딕" pitchFamily="34" charset="0"/>
+                <a:ea typeface="맑은 고딕" pitchFamily="34" charset="-122"/>
+                <a:cs typeface="맑은 고딕" pitchFamily="34" charset="-120"/>
+              </a:rPr>
+              <a:t>드론 · 점검 업체에 분석 엔진</a:t>
+            </a:r>
+            <a:endParaRPr lang="en-US" sz="1050" dirty="0"/>
+          </a:p>
+        </p:txBody>
+      </p:sp>
+      <p:sp>
+        <p:nvSpPr>
+          <p:cNvPr id="47" name="Shape 39"/>
+          <p:cNvSpPr/>
+          <p:nvPr/>
+        </p:nvSpPr>
+        <p:spPr>
+          <a:xfrm>
+            <a:off x="4307738" y="3429000"/>
+            <a:ext cx="3576218" cy="2514600"/>
+          </a:xfrm>
+          <a:prstGeom prst="roundRect">
+            <a:avLst>
+              <a:gd name="adj" fmla="val 2909"/>
+            </a:avLst>
+          </a:prstGeom>
+          <a:solidFill>
+            <a:srgbClr val="F3F4F6"/>
+          </a:solidFill>
+          <a:ln w="12700">
+            <a:solidFill>
+              <a:srgbClr val="F3F4F6"/>
+            </a:solidFill>
+            <a:prstDash val="solid"/>
+          </a:ln>
+        </p:spPr>
+      </p:sp>
+      <p:sp>
+        <p:nvSpPr>
+          <p:cNvPr id="48" name="Text 40"/>
+          <p:cNvSpPr txBox="1"/>
+          <p:nvPr/>
+        </p:nvSpPr>
+        <p:spPr>
+          <a:xfrm>
+            <a:off x="4536338" y="3566160"/>
+            <a:ext cx="3210458" cy="320040"/>
+          </a:xfrm>
+          <a:prstGeom prst="rect">
+            <a:avLst/>
+          </a:prstGeom>
+          <a:noFill/>
+          <a:ln/>
+        </p:spPr>
+        <p:txBody>
+          <a:bodyPr wrap="square" lIns="0" tIns="0" rIns="0" bIns="0" rtlCol="0" anchor="t"/>
+          <a:lstStyle/>
+          <a:p>
+            <a:pPr indent="0" marL="0">
+              <a:buNone/>
+            </a:pPr>
+            <a:r>
+              <a:rPr lang="en-US" sz="1400" b="1" dirty="0">
+                <a:solidFill>
+                  <a:srgbClr val="2B2D31"/>
+                </a:solidFill>
+                <a:latin typeface="맑은 고딕" pitchFamily="34" charset="0"/>
+                <a:ea typeface="맑은 고딕" pitchFamily="34" charset="-122"/>
+                <a:cs typeface="맑은 고딕" pitchFamily="34" charset="-120"/>
+              </a:rPr>
+              <a:t>비용 구조</a:t>
+            </a:r>
+            <a:endParaRPr lang="en-US" sz="1400" dirty="0"/>
+          </a:p>
+        </p:txBody>
+      </p:sp>
+      <p:sp>
+        <p:nvSpPr>
+          <p:cNvPr id="49" name="Shape 41"/>
+          <p:cNvSpPr/>
+          <p:nvPr/>
+        </p:nvSpPr>
+        <p:spPr>
+          <a:xfrm>
+            <a:off x="4536338" y="4014216"/>
+            <a:ext cx="402336" cy="402336"/>
+          </a:xfrm>
+          <a:prstGeom prst="ellipse">
+            <a:avLst/>
+          </a:prstGeom>
+          <a:solidFill>
+            <a:srgbClr val="2B2D31"/>
+          </a:solidFill>
+          <a:ln w="12700">
+            <a:solidFill>
+              <a:srgbClr val="2B2D31"/>
+            </a:solidFill>
+            <a:prstDash val="solid"/>
+          </a:ln>
+        </p:spPr>
+      </p:sp>
+      <p:pic>
+        <p:nvPicPr>
+          <p:cNvPr id="50" name="Image 6" descr="preencoded.png">    </p:cNvPr>
+          <p:cNvPicPr>
+            <a:picLocks noChangeAspect="1"/>
+          </p:cNvPicPr>
+          <p:nvPr/>
+        </p:nvPicPr>
+        <p:blipFill>
+          <a:blip r:embed="rId7"/>
+          <a:stretch>
+            <a:fillRect/>
+          </a:stretch>
+        </p:blipFill>
+        <p:spPr>
+          <a:xfrm>
+            <a:off x="4640946" y="4118823"/>
+            <a:ext cx="193121" cy="193121"/>
+          </a:xfrm>
+          <a:prstGeom prst="rect">
+            <a:avLst/>
+          </a:prstGeom>
+        </p:spPr>
+      </p:pic>
+      <p:sp>
+        <p:nvSpPr>
+          <p:cNvPr id="51" name="Text 42"/>
+          <p:cNvSpPr txBox="1"/>
+          <p:nvPr/>
+        </p:nvSpPr>
+        <p:spPr>
+          <a:xfrm>
+            <a:off x="5057546" y="3995928"/>
+            <a:ext cx="2661818" cy="256032"/>
+          </a:xfrm>
+          <a:prstGeom prst="rect">
+            <a:avLst/>
+          </a:prstGeom>
+          <a:noFill/>
+          <a:ln/>
+        </p:spPr>
+        <p:txBody>
+          <a:bodyPr wrap="square" lIns="0" tIns="0" rIns="0" bIns="0" rtlCol="0" anchor="t"/>
+          <a:lstStyle/>
+          <a:p>
+            <a:pPr indent="0" marL="0">
+              <a:buNone/>
+            </a:pPr>
+            <a:r>
+              <a:rPr lang="en-US" sz="1300" b="1" dirty="0">
+                <a:solidFill>
+                  <a:srgbClr val="2B2D31"/>
+                </a:solidFill>
+                <a:latin typeface="맑은 고딕" pitchFamily="34" charset="0"/>
+                <a:ea typeface="맑은 고딕" pitchFamily="34" charset="-122"/>
+                <a:cs typeface="맑은 고딕" pitchFamily="34" charset="-120"/>
+              </a:rPr>
+              <a:t>드론 · 촬영 운용</a:t>
+            </a:r>
+            <a:endParaRPr lang="en-US" sz="1300" dirty="0"/>
+          </a:p>
+        </p:txBody>
+      </p:sp>
+      <p:sp>
+        <p:nvSpPr>
+          <p:cNvPr id="52" name="Text 43"/>
+          <p:cNvSpPr txBox="1"/>
+          <p:nvPr/>
+        </p:nvSpPr>
+        <p:spPr>
+          <a:xfrm>
+            <a:off x="5057546" y="4251960"/>
+            <a:ext cx="2661818" cy="237744"/>
+          </a:xfrm>
+          <a:prstGeom prst="rect">
+            <a:avLst/>
+          </a:prstGeom>
+          <a:noFill/>
+          <a:ln/>
+        </p:spPr>
+        <p:txBody>
+          <a:bodyPr wrap="square" lIns="0" tIns="0" rIns="0" bIns="0" rtlCol="0" anchor="t"/>
+          <a:lstStyle/>
+          <a:p>
+            <a:pPr indent="0" marL="0">
+              <a:buNone/>
+            </a:pPr>
+            <a:r>
+              <a:rPr lang="en-US" sz="1050" dirty="0">
+                <a:solidFill>
+                  <a:srgbClr val="6B6F76"/>
+                </a:solidFill>
+                <a:latin typeface="맑은 고딕" pitchFamily="34" charset="0"/>
+                <a:ea typeface="맑은 고딕" pitchFamily="34" charset="-122"/>
+                <a:cs typeface="맑은 고딕" pitchFamily="34" charset="-120"/>
+              </a:rPr>
+              <a:t>파트너 촬영 대행</a:t>
+            </a:r>
+            <a:endParaRPr lang="en-US" sz="1050" dirty="0"/>
+          </a:p>
+        </p:txBody>
+      </p:sp>
+      <p:sp>
+        <p:nvSpPr>
+          <p:cNvPr id="53" name="Shape 44"/>
+          <p:cNvSpPr/>
+          <p:nvPr/>
+        </p:nvSpPr>
+        <p:spPr>
+          <a:xfrm>
+            <a:off x="4536338" y="4581144"/>
+            <a:ext cx="402336" cy="402336"/>
+          </a:xfrm>
+          <a:prstGeom prst="ellipse">
+            <a:avLst/>
+          </a:prstGeom>
+          <a:solidFill>
+            <a:srgbClr val="2B2D31"/>
+          </a:solidFill>
+          <a:ln w="12700">
+            <a:solidFill>
+              <a:srgbClr val="2B2D31"/>
+            </a:solidFill>
+            <a:prstDash val="solid"/>
+          </a:ln>
+        </p:spPr>
+      </p:sp>
+      <p:pic>
+        <p:nvPicPr>
+          <p:cNvPr id="54" name="Image 7" descr="preencoded.png">    </p:cNvPr>
+          <p:cNvPicPr>
+            <a:picLocks noChangeAspect="1"/>
+          </p:cNvPicPr>
+          <p:nvPr/>
+        </p:nvPicPr>
+        <p:blipFill>
+          <a:blip r:embed="rId8"/>
+          <a:stretch>
+            <a:fillRect/>
+          </a:stretch>
+        </p:blipFill>
+        <p:spPr>
+          <a:xfrm>
+            <a:off x="4640946" y="4685751"/>
+            <a:ext cx="193121" cy="193121"/>
+          </a:xfrm>
+          <a:prstGeom prst="rect">
+            <a:avLst/>
+          </a:prstGeom>
+        </p:spPr>
+      </p:pic>
+      <p:sp>
+        <p:nvSpPr>
+          <p:cNvPr id="55" name="Text 45"/>
+          <p:cNvSpPr txBox="1"/>
+          <p:nvPr/>
+        </p:nvSpPr>
+        <p:spPr>
+          <a:xfrm>
+            <a:off x="5057546" y="4562856"/>
+            <a:ext cx="2661818" cy="256032"/>
+          </a:xfrm>
+          <a:prstGeom prst="rect">
+            <a:avLst/>
+          </a:prstGeom>
+          <a:noFill/>
+          <a:ln/>
+        </p:spPr>
+        <p:txBody>
+          <a:bodyPr wrap="square" lIns="0" tIns="0" rIns="0" bIns="0" rtlCol="0" anchor="t"/>
+          <a:lstStyle/>
+          <a:p>
+            <a:pPr indent="0" marL="0">
+              <a:buNone/>
+            </a:pPr>
+            <a:r>
+              <a:rPr lang="en-US" sz="1300" b="1" dirty="0">
+                <a:solidFill>
+                  <a:srgbClr val="2B2D31"/>
+                </a:solidFill>
+                <a:latin typeface="맑은 고딕" pitchFamily="34" charset="0"/>
+                <a:ea typeface="맑은 고딕" pitchFamily="34" charset="-122"/>
+                <a:cs typeface="맑은 고딕" pitchFamily="34" charset="-120"/>
+              </a:rPr>
+              <a:t>모델 R&amp;D · 현장 시험</a:t>
+            </a:r>
+            <a:endParaRPr lang="en-US" sz="1300" dirty="0"/>
+          </a:p>
+        </p:txBody>
+      </p:sp>
+      <p:sp>
+        <p:nvSpPr>
+          <p:cNvPr id="56" name="Text 46"/>
+          <p:cNvSpPr txBox="1"/>
+          <p:nvPr/>
+        </p:nvSpPr>
+        <p:spPr>
+          <a:xfrm>
+            <a:off x="5057546" y="4818888"/>
+            <a:ext cx="2661818" cy="237744"/>
+          </a:xfrm>
+          <a:prstGeom prst="rect">
+            <a:avLst/>
+          </a:prstGeom>
+          <a:noFill/>
+          <a:ln/>
+        </p:spPr>
+        <p:txBody>
+          <a:bodyPr wrap="square" lIns="0" tIns="0" rIns="0" bIns="0" rtlCol="0" anchor="t"/>
+          <a:lstStyle/>
+          <a:p>
+            <a:pPr indent="0" marL="0">
+              <a:buNone/>
+            </a:pPr>
+            <a:r>
+              <a:rPr lang="en-US" sz="1050" dirty="0">
+                <a:solidFill>
+                  <a:srgbClr val="6B6F76"/>
+                </a:solidFill>
+                <a:latin typeface="맑은 고딕" pitchFamily="34" charset="0"/>
+                <a:ea typeface="맑은 고딕" pitchFamily="34" charset="-122"/>
+                <a:cs typeface="맑은 고딕" pitchFamily="34" charset="-120"/>
+              </a:rPr>
+              <a:t>두께 데이터 결합 · 정확도 향상</a:t>
+            </a:r>
+            <a:endParaRPr lang="en-US" sz="1050" dirty="0"/>
+          </a:p>
+        </p:txBody>
+      </p:sp>
+      <p:sp>
+        <p:nvSpPr>
+          <p:cNvPr id="57" name="Shape 47"/>
+          <p:cNvSpPr/>
+          <p:nvPr/>
+        </p:nvSpPr>
+        <p:spPr>
+          <a:xfrm>
+            <a:off x="8066837" y="3429000"/>
+            <a:ext cx="3576218" cy="2514600"/>
+          </a:xfrm>
+          <a:prstGeom prst="roundRect">
+            <a:avLst>
+              <a:gd name="adj" fmla="val 2909"/>
+            </a:avLst>
+          </a:prstGeom>
+          <a:solidFill>
+            <a:srgbClr val="E3EFF4"/>
+          </a:solidFill>
+          <a:ln w="12700">
+            <a:solidFill>
+              <a:srgbClr val="E3EFF4"/>
+            </a:solidFill>
+            <a:prstDash val="solid"/>
+          </a:ln>
+        </p:spPr>
+      </p:sp>
+      <p:sp>
+        <p:nvSpPr>
+          <p:cNvPr id="58" name="Text 48"/>
+          <p:cNvSpPr txBox="1"/>
+          <p:nvPr/>
+        </p:nvSpPr>
+        <p:spPr>
+          <a:xfrm>
+            <a:off x="8295437" y="3566160"/>
+            <a:ext cx="3210458" cy="320040"/>
+          </a:xfrm>
+          <a:prstGeom prst="rect">
+            <a:avLst/>
+          </a:prstGeom>
+          <a:noFill/>
+          <a:ln/>
+        </p:spPr>
+        <p:txBody>
+          <a:bodyPr wrap="square" lIns="0" tIns="0" rIns="0" bIns="0" rtlCol="0" anchor="t"/>
+          <a:lstStyle/>
+          <a:p>
+            <a:pPr indent="0" marL="0">
+              <a:buNone/>
+            </a:pPr>
+            <a:r>
+              <a:rPr lang="en-US" sz="1400" b="1" dirty="0">
+                <a:solidFill>
+                  <a:srgbClr val="1F5F7A"/>
+                </a:solidFill>
+                <a:latin typeface="맑은 고딕" pitchFamily="34" charset="0"/>
+                <a:ea typeface="맑은 고딕" pitchFamily="34" charset="-122"/>
+                <a:cs typeface="맑은 고딕" pitchFamily="34" charset="-120"/>
+              </a:rPr>
+              <a:t>고객이 아끼는 비용</a:t>
+            </a:r>
+            <a:endParaRPr lang="en-US" sz="1400" dirty="0"/>
+          </a:p>
+        </p:txBody>
+      </p:sp>
+      <p:sp>
+        <p:nvSpPr>
+          <p:cNvPr id="59" name="Shape 49"/>
+          <p:cNvSpPr/>
+          <p:nvPr/>
+        </p:nvSpPr>
+        <p:spPr>
+          <a:xfrm>
+            <a:off x="8295437" y="4014216"/>
+            <a:ext cx="402336" cy="402336"/>
+          </a:xfrm>
+          <a:prstGeom prst="ellipse">
+            <a:avLst/>
+          </a:prstGeom>
+          <a:solidFill>
+            <a:srgbClr val="1F5F7A"/>
+          </a:solidFill>
+          <a:ln w="12700">
+            <a:solidFill>
+              <a:srgbClr val="1F5F7A"/>
+            </a:solidFill>
+            <a:prstDash val="solid"/>
+          </a:ln>
+        </p:spPr>
+      </p:sp>
+      <p:pic>
+        <p:nvPicPr>
+          <p:cNvPr id="60" name="Image 8" descr="preencoded.png">    </p:cNvPr>
+          <p:cNvPicPr>
+            <a:picLocks noChangeAspect="1"/>
+          </p:cNvPicPr>
+          <p:nvPr/>
+        </p:nvPicPr>
+        <p:blipFill>
+          <a:blip r:embed="rId9"/>
+          <a:stretch>
+            <a:fillRect/>
+          </a:stretch>
+        </p:blipFill>
+        <p:spPr>
+          <a:xfrm>
+            <a:off x="8400044" y="4118823"/>
+            <a:ext cx="193121" cy="193121"/>
+          </a:xfrm>
+          <a:prstGeom prst="rect">
+            <a:avLst/>
+          </a:prstGeom>
+        </p:spPr>
+      </p:pic>
+      <p:sp>
+        <p:nvSpPr>
+          <p:cNvPr id="61" name="Text 50"/>
+          <p:cNvSpPr txBox="1"/>
+          <p:nvPr/>
+        </p:nvSpPr>
+        <p:spPr>
+          <a:xfrm>
+            <a:off x="8816645" y="3995928"/>
+            <a:ext cx="2661818" cy="256032"/>
+          </a:xfrm>
+          <a:prstGeom prst="rect">
+            <a:avLst/>
+          </a:prstGeom>
+          <a:noFill/>
+          <a:ln/>
+        </p:spPr>
+        <p:txBody>
+          <a:bodyPr wrap="square" lIns="0" tIns="0" rIns="0" bIns="0" rtlCol="0" anchor="t"/>
+          <a:lstStyle/>
+          <a:p>
+            <a:pPr indent="0" marL="0">
+              <a:buNone/>
+            </a:pPr>
+            <a:r>
+              <a:rPr lang="en-US" sz="1300" b="1" dirty="0">
+                <a:solidFill>
+                  <a:srgbClr val="2B2D31"/>
+                </a:solidFill>
+                <a:latin typeface="맑은 고딕" pitchFamily="34" charset="0"/>
+                <a:ea typeface="맑은 고딕" pitchFamily="34" charset="-122"/>
+                <a:cs typeface="맑은 고딕" pitchFamily="34" charset="-120"/>
+              </a:rPr>
+              <a:t>선박 용선 · 기상 대기</a:t>
+            </a:r>
+            <a:endParaRPr lang="en-US" sz="1300" dirty="0"/>
+          </a:p>
+        </p:txBody>
+      </p:sp>
+      <p:sp>
+        <p:nvSpPr>
+          <p:cNvPr id="62" name="Text 51"/>
+          <p:cNvSpPr txBox="1"/>
+          <p:nvPr/>
+        </p:nvSpPr>
+        <p:spPr>
+          <a:xfrm>
+            <a:off x="8816645" y="4251960"/>
+            <a:ext cx="2661818" cy="237744"/>
+          </a:xfrm>
+          <a:prstGeom prst="rect">
+            <a:avLst/>
+          </a:prstGeom>
+          <a:noFill/>
+          <a:ln/>
+        </p:spPr>
+        <p:txBody>
+          <a:bodyPr wrap="square" lIns="0" tIns="0" rIns="0" bIns="0" rtlCol="0" anchor="t"/>
+          <a:lstStyle/>
+          <a:p>
+            <a:pPr indent="0" marL="0">
+              <a:buNone/>
+            </a:pPr>
+            <a:r>
+              <a:rPr lang="en-US" sz="1050" dirty="0">
+                <a:solidFill>
+                  <a:srgbClr val="6B6F76"/>
+                </a:solidFill>
+                <a:latin typeface="맑은 고딕" pitchFamily="34" charset="0"/>
+                <a:ea typeface="맑은 고딕" pitchFamily="34" charset="-122"/>
+                <a:cs typeface="맑은 고딕" pitchFamily="34" charset="-120"/>
+              </a:rPr>
+              <a:t>위험 지점부터 배 투입</a:t>
+            </a:r>
+            <a:endParaRPr lang="en-US" sz="1050" dirty="0"/>
+          </a:p>
+        </p:txBody>
+      </p:sp>
+      <p:sp>
+        <p:nvSpPr>
+          <p:cNvPr id="63" name="Shape 52"/>
+          <p:cNvSpPr/>
+          <p:nvPr/>
+        </p:nvSpPr>
+        <p:spPr>
+          <a:xfrm>
+            <a:off x="8295437" y="4581144"/>
+            <a:ext cx="402336" cy="402336"/>
+          </a:xfrm>
+          <a:prstGeom prst="ellipse">
+            <a:avLst/>
+          </a:prstGeom>
+          <a:solidFill>
+            <a:srgbClr val="1F5F7A"/>
+          </a:solidFill>
+          <a:ln w="12700">
+            <a:solidFill>
+              <a:srgbClr val="1F5F7A"/>
+            </a:solidFill>
+            <a:prstDash val="solid"/>
+          </a:ln>
+        </p:spPr>
+      </p:sp>
+      <p:pic>
+        <p:nvPicPr>
+          <p:cNvPr id="64" name="Image 9" descr="preencoded.png">    </p:cNvPr>
+          <p:cNvPicPr>
+            <a:picLocks noChangeAspect="1"/>
+          </p:cNvPicPr>
+          <p:nvPr/>
+        </p:nvPicPr>
+        <p:blipFill>
+          <a:blip r:embed="rId10"/>
+          <a:stretch>
+            <a:fillRect/>
+          </a:stretch>
+        </p:blipFill>
+        <p:spPr>
+          <a:xfrm>
+            <a:off x="8400044" y="4685751"/>
+            <a:ext cx="193121" cy="193121"/>
+          </a:xfrm>
+          <a:prstGeom prst="rect">
+            <a:avLst/>
+          </a:prstGeom>
+        </p:spPr>
+      </p:pic>
+      <p:sp>
+        <p:nvSpPr>
+          <p:cNvPr id="65" name="Text 53"/>
+          <p:cNvSpPr txBox="1"/>
+          <p:nvPr/>
+        </p:nvSpPr>
+        <p:spPr>
+          <a:xfrm>
+            <a:off x="8816645" y="4562856"/>
+            <a:ext cx="2661818" cy="256032"/>
+          </a:xfrm>
+          <a:prstGeom prst="rect">
+            <a:avLst/>
+          </a:prstGeom>
+          <a:noFill/>
+          <a:ln/>
+        </p:spPr>
+        <p:txBody>
+          <a:bodyPr wrap="square" lIns="0" tIns="0" rIns="0" bIns="0" rtlCol="0" anchor="t"/>
+          <a:lstStyle/>
+          <a:p>
+            <a:pPr indent="0" marL="0">
+              <a:buNone/>
+            </a:pPr>
+            <a:r>
+              <a:rPr lang="en-US" sz="1300" b="1" dirty="0">
+                <a:solidFill>
+                  <a:srgbClr val="2B2D31"/>
+                </a:solidFill>
+                <a:latin typeface="맑은 고딕" pitchFamily="34" charset="0"/>
+                <a:ea typeface="맑은 고딕" pitchFamily="34" charset="-122"/>
+                <a:cs typeface="맑은 고딕" pitchFamily="34" charset="-120"/>
+              </a:rPr>
+              <a:t>리프트 · 로프 액세스</a:t>
+            </a:r>
+            <a:endParaRPr lang="en-US" sz="1300" dirty="0"/>
+          </a:p>
+        </p:txBody>
+      </p:sp>
+      <p:sp>
+        <p:nvSpPr>
+          <p:cNvPr id="66" name="Text 54"/>
+          <p:cNvSpPr txBox="1"/>
+          <p:nvPr/>
+        </p:nvSpPr>
+        <p:spPr>
+          <a:xfrm>
+            <a:off x="8816645" y="4818888"/>
+            <a:ext cx="2661818" cy="237744"/>
+          </a:xfrm>
+          <a:prstGeom prst="rect">
+            <a:avLst/>
+          </a:prstGeom>
+          <a:noFill/>
+          <a:ln/>
+        </p:spPr>
+        <p:txBody>
+          <a:bodyPr wrap="square" lIns="0" tIns="0" rIns="0" bIns="0" rtlCol="0" anchor="t"/>
+          <a:lstStyle/>
+          <a:p>
+            <a:pPr indent="0" marL="0">
+              <a:buNone/>
+            </a:pPr>
+            <a:r>
+              <a:rPr lang="en-US" sz="1050" dirty="0">
+                <a:solidFill>
+                  <a:srgbClr val="6B6F76"/>
+                </a:solidFill>
+                <a:latin typeface="맑은 고딕" pitchFamily="34" charset="0"/>
+                <a:ea typeface="맑은 고딕" pitchFamily="34" charset="-122"/>
+                <a:cs typeface="맑은 고딕" pitchFamily="34" charset="-120"/>
+              </a:rPr>
+              <a:t>필요한 구간만 · 출동 여부 사전 판단</a:t>
+            </a:r>
+            <a:endParaRPr lang="en-US" sz="1050" dirty="0"/>
+          </a:p>
+        </p:txBody>
+      </p:sp>
+    </p:spTree>
+  </p:cSld>
+  <p:clrMapOvr>
+    <a:masterClrMapping/>
+  </p:clrMapOvr>
+</p:sld>
+</file>
+
 <file path=ppt/slides/slide2.xml><?xml version="1.0" encoding="utf-8"?>
 <p:sld xmlns:a="http://schemas.openxmlformats.org/drawingml/2006/main" xmlns:r="http://schemas.openxmlformats.org/officeDocument/2006/relationships" xmlns:p="http://schemas.openxmlformats.org/presentationml/2006/main">
   <p:cSld name="Slide 10">
@@ -5891,993 +8004,6 @@
 </p:sld>
 </file>
 
-<file path=ppt/slides/slide5.xml><?xml version="1.0" encoding="utf-8"?>
-<p:sld xmlns:a="http://schemas.openxmlformats.org/drawingml/2006/main" xmlns:r="http://schemas.openxmlformats.org/officeDocument/2006/relationships" xmlns:p="http://schemas.openxmlformats.org/presentationml/2006/main">
-  <p:cSld name="Slide 1">
-    <p:bg>
-      <p:bgPr>
-        <a:solidFill>
-          <a:srgbClr val="FFFFFF"/>
-        </a:solidFill>
-      </p:bgPr>
-    </p:bg>
-    <p:spTree>
-      <p:nvGrpSpPr>
-        <p:cNvPr id="1" name=""/>
-        <p:cNvGrpSpPr/>
-        <p:nvPr/>
-      </p:nvGrpSpPr>
-      <p:grpSpPr>
-        <a:xfrm>
-          <a:off x="0" y="0"/>
-          <a:ext cx="0" cy="0"/>
-          <a:chOff x="0" y="0"/>
-          <a:chExt cx="0" cy="0"/>
-        </a:xfrm>
-      </p:grpSpPr>
-      <p:sp>
-        <p:nvSpPr>
-          <p:cNvPr id="2" name="Text 0"/>
-          <p:cNvSpPr txBox="1"/>
-          <p:nvPr/>
-        </p:nvSpPr>
-        <p:spPr>
-          <a:xfrm>
-            <a:off x="548640" y="292608"/>
-            <a:ext cx="7315200" cy="274320"/>
-          </a:xfrm>
-          <a:prstGeom prst="rect">
-            <a:avLst/>
-          </a:prstGeom>
-          <a:noFill/>
-          <a:ln/>
-        </p:spPr>
-        <p:txBody>
-          <a:bodyPr wrap="square" lIns="0" tIns="0" rIns="0" bIns="0" rtlCol="0" anchor="t"/>
-          <a:lstStyle/>
-          <a:p>
-            <a:pPr indent="0" marL="0">
-              <a:buNone/>
-            </a:pPr>
-            <a:r>
-              <a:rPr lang="en-US" sz="1200" b="1" spc="100" kern="0" dirty="0">
-                <a:solidFill>
-                  <a:srgbClr val="B5501F"/>
-                </a:solidFill>
-                <a:latin typeface="맑은 고딕" pitchFamily="34" charset="0"/>
-                <a:ea typeface="맑은 고딕" pitchFamily="34" charset="-122"/>
-                <a:cs typeface="맑은 고딕" pitchFamily="34" charset="-120"/>
-              </a:rPr>
-              <a:t>CUSTOMER DISCOVERY</a:t>
-            </a:r>
-            <a:endParaRPr lang="en-US" sz="1200" dirty="0"/>
-          </a:p>
-        </p:txBody>
-      </p:sp>
-      <p:sp>
-        <p:nvSpPr>
-          <p:cNvPr id="3" name="Text 1"/>
-          <p:cNvSpPr txBox="1"/>
-          <p:nvPr/>
-        </p:nvSpPr>
-        <p:spPr>
-          <a:xfrm>
-            <a:off x="548640" y="566928"/>
-            <a:ext cx="11094415" cy="640080"/>
-          </a:xfrm>
-          <a:prstGeom prst="rect">
-            <a:avLst/>
-          </a:prstGeom>
-          <a:noFill/>
-          <a:ln/>
-        </p:spPr>
-        <p:txBody>
-          <a:bodyPr wrap="square" lIns="0" tIns="0" rIns="0" bIns="0" rtlCol="0" anchor="ctr"/>
-          <a:lstStyle/>
-          <a:p>
-            <a:pPr indent="0" marL="0">
-              <a:buNone/>
-            </a:pPr>
-            <a:r>
-              <a:rPr lang="en-US" sz="2800" b="1" dirty="0">
-                <a:solidFill>
-                  <a:srgbClr val="2B2D31"/>
-                </a:solidFill>
-                <a:latin typeface="맑은 고딕" pitchFamily="34" charset="0"/>
-                <a:ea typeface="맑은 고딕" pitchFamily="34" charset="-122"/>
-                <a:cs typeface="맑은 고딕" pitchFamily="34" charset="-120"/>
-              </a:rPr>
-              <a:t>고객 인터뷰로 바뀐 가설</a:t>
-            </a:r>
-            <a:endParaRPr lang="en-US" sz="2800" dirty="0"/>
-          </a:p>
-        </p:txBody>
-      </p:sp>
-      <p:sp>
-        <p:nvSpPr>
-          <p:cNvPr id="4" name="Text 2"/>
-          <p:cNvSpPr txBox="1"/>
-          <p:nvPr/>
-        </p:nvSpPr>
-        <p:spPr>
-          <a:xfrm>
-            <a:off x="548640" y="6446520"/>
-            <a:ext cx="6400800" cy="274320"/>
-          </a:xfrm>
-          <a:prstGeom prst="rect">
-            <a:avLst/>
-          </a:prstGeom>
-          <a:noFill/>
-          <a:ln/>
-        </p:spPr>
-        <p:txBody>
-          <a:bodyPr wrap="square" lIns="0" tIns="0" rIns="0" bIns="0" rtlCol="0" anchor="t"/>
-          <a:lstStyle/>
-          <a:p>
-            <a:pPr indent="0" marL="0">
-              <a:buNone/>
-            </a:pPr>
-            <a:r>
-              <a:rPr lang="en-US" sz="900" dirty="0">
-                <a:solidFill>
-                  <a:srgbClr val="A3A7AD"/>
-                </a:solidFill>
-                <a:latin typeface="맑은 고딕" pitchFamily="34" charset="0"/>
-                <a:ea typeface="맑은 고딕" pitchFamily="34" charset="-122"/>
-                <a:cs typeface="맑은 고딕" pitchFamily="34" charset="-120"/>
-              </a:rPr>
-              <a:t>MLC  ·  제주 A-STREAM 2026</a:t>
-            </a:r>
-            <a:endParaRPr lang="en-US" sz="900" dirty="0"/>
-          </a:p>
-        </p:txBody>
-      </p:sp>
-      <p:sp>
-        <p:nvSpPr>
-          <p:cNvPr id="5" name="Text 3"/>
-          <p:cNvSpPr txBox="1"/>
-          <p:nvPr/>
-        </p:nvSpPr>
-        <p:spPr>
-          <a:xfrm>
-            <a:off x="10728655" y="6446520"/>
-            <a:ext cx="914400" cy="274320"/>
-          </a:xfrm>
-          <a:prstGeom prst="rect">
-            <a:avLst/>
-          </a:prstGeom>
-          <a:noFill/>
-          <a:ln/>
-        </p:spPr>
-        <p:txBody>
-          <a:bodyPr wrap="square" lIns="0" tIns="0" rIns="0" bIns="0" rtlCol="0" anchor="t"/>
-          <a:lstStyle/>
-          <a:p>
-            <a:pPr algn="r" indent="0" marL="0">
-              <a:buNone/>
-            </a:pPr>
-            <a:r>
-              <a:rPr lang="en-US" sz="900" dirty="0">
-                <a:solidFill>
-                  <a:srgbClr val="A3A7AD"/>
-                </a:solidFill>
-                <a:latin typeface="맑은 고딕" pitchFamily="34" charset="0"/>
-                <a:ea typeface="맑은 고딕" pitchFamily="34" charset="-122"/>
-                <a:cs typeface="맑은 고딕" pitchFamily="34" charset="-120"/>
-              </a:rPr>
-              <a:t>5</a:t>
-            </a:r>
-            <a:endParaRPr lang="en-US" sz="900" dirty="0"/>
-          </a:p>
-        </p:txBody>
-      </p:sp>
-      <p:sp>
-        <p:nvSpPr>
-          <p:cNvPr id="6" name="Text 4"/>
-          <p:cNvSpPr txBox="1"/>
-          <p:nvPr/>
-        </p:nvSpPr>
-        <p:spPr>
-          <a:xfrm>
-            <a:off x="548640" y="1280160"/>
-            <a:ext cx="5486400" cy="292608"/>
-          </a:xfrm>
-          <a:prstGeom prst="rect">
-            <a:avLst/>
-          </a:prstGeom>
-          <a:noFill/>
-          <a:ln/>
-        </p:spPr>
-        <p:txBody>
-          <a:bodyPr wrap="square" lIns="0" tIns="0" rIns="0" bIns="0" rtlCol="0" anchor="t"/>
-          <a:lstStyle/>
-          <a:p>
-            <a:pPr indent="0" marL="0">
-              <a:buNone/>
-            </a:pPr>
-            <a:r>
-              <a:rPr lang="en-US" sz="1300" dirty="0">
-                <a:solidFill>
-                  <a:srgbClr val="6B6F76"/>
-                </a:solidFill>
-                <a:latin typeface="맑은 고딕" pitchFamily="34" charset="0"/>
-                <a:ea typeface="맑은 고딕" pitchFamily="34" charset="-122"/>
-                <a:cs typeface="맑은 고딕" pitchFamily="34" charset="-120"/>
-              </a:rPr>
-              <a:t>미국 현장 인터뷰 35건 · 2026년 7월</a:t>
-            </a:r>
-            <a:endParaRPr lang="en-US" sz="1300" dirty="0"/>
-          </a:p>
-        </p:txBody>
-      </p:sp>
-      <p:sp>
-        <p:nvSpPr>
-          <p:cNvPr id="7" name="Shape 5"/>
-          <p:cNvSpPr/>
-          <p:nvPr/>
-        </p:nvSpPr>
-        <p:spPr>
-          <a:xfrm>
-            <a:off x="548640" y="1828800"/>
-            <a:ext cx="4206240" cy="3931920"/>
-          </a:xfrm>
-          <a:prstGeom prst="roundRect">
-            <a:avLst>
-              <a:gd name="adj" fmla="val 1860"/>
-            </a:avLst>
-          </a:prstGeom>
-          <a:solidFill>
-            <a:srgbClr val="F3F4F6"/>
-          </a:solidFill>
-          <a:ln w="12700">
-            <a:solidFill>
-              <a:srgbClr val="F3F4F6"/>
-            </a:solidFill>
-            <a:prstDash val="solid"/>
-          </a:ln>
-        </p:spPr>
-      </p:sp>
-      <p:sp>
-        <p:nvSpPr>
-          <p:cNvPr id="8" name="Shape 6"/>
-          <p:cNvSpPr/>
-          <p:nvPr/>
-        </p:nvSpPr>
-        <p:spPr>
-          <a:xfrm>
-            <a:off x="914400" y="2194560"/>
-            <a:ext cx="1371600" cy="329184"/>
-          </a:xfrm>
-          <a:prstGeom prst="roundRect">
-            <a:avLst>
-              <a:gd name="adj" fmla="val 50000"/>
-            </a:avLst>
-          </a:prstGeom>
-          <a:solidFill>
-            <a:srgbClr val="A3A7AD"/>
-          </a:solidFill>
-          <a:ln w="12700">
-            <a:solidFill>
-              <a:srgbClr val="A3A7AD"/>
-            </a:solidFill>
-            <a:prstDash val="solid"/>
-          </a:ln>
-        </p:spPr>
-      </p:sp>
-      <p:sp>
-        <p:nvSpPr>
-          <p:cNvPr id="9" name="Text 7"/>
-          <p:cNvSpPr txBox="1"/>
-          <p:nvPr/>
-        </p:nvSpPr>
-        <p:spPr>
-          <a:xfrm>
-            <a:off x="914400" y="2194560"/>
-            <a:ext cx="1371600" cy="329184"/>
-          </a:xfrm>
-          <a:prstGeom prst="rect">
-            <a:avLst/>
-          </a:prstGeom>
-          <a:noFill/>
-          <a:ln/>
-        </p:spPr>
-        <p:txBody>
-          <a:bodyPr wrap="square" lIns="0" tIns="0" rIns="0" bIns="0" rtlCol="0" anchor="ctr"/>
-          <a:lstStyle/>
-          <a:p>
-            <a:pPr algn="ctr" indent="0" marL="0">
-              <a:buNone/>
-            </a:pPr>
-            <a:r>
-              <a:rPr lang="en-US" sz="1200" b="1" dirty="0">
-                <a:solidFill>
-                  <a:srgbClr val="FFFFFF"/>
-                </a:solidFill>
-                <a:latin typeface="맑은 고딕" pitchFamily="34" charset="0"/>
-                <a:ea typeface="맑은 고딕" pitchFamily="34" charset="-122"/>
-                <a:cs typeface="맑은 고딕" pitchFamily="34" charset="-120"/>
-              </a:rPr>
-              <a:t>처음 가설</a:t>
-            </a:r>
-            <a:endParaRPr lang="en-US" sz="1200" dirty="0"/>
-          </a:p>
-        </p:txBody>
-      </p:sp>
-      <p:sp>
-        <p:nvSpPr>
-          <p:cNvPr id="10" name="Text 8"/>
-          <p:cNvSpPr txBox="1"/>
-          <p:nvPr/>
-        </p:nvSpPr>
-        <p:spPr>
-          <a:xfrm>
-            <a:off x="914400" y="2743200"/>
-            <a:ext cx="3474720" cy="914400"/>
-          </a:xfrm>
-          <a:prstGeom prst="rect">
-            <a:avLst/>
-          </a:prstGeom>
-          <a:noFill/>
-          <a:ln/>
-        </p:spPr>
-        <p:txBody>
-          <a:bodyPr wrap="square" lIns="0" tIns="0" rIns="0" bIns="0" rtlCol="0" anchor="t"/>
-          <a:lstStyle/>
-          <a:p>
-            <a:pPr indent="0" marL="0">
-              <a:buNone/>
-            </a:pPr>
-            <a:r>
-              <a:rPr lang="en-US" sz="2400" b="1" dirty="0">
-                <a:solidFill>
-                  <a:srgbClr val="6B6F76"/>
-                </a:solidFill>
-                <a:latin typeface="맑은 고딕" pitchFamily="34" charset="0"/>
-                <a:ea typeface="맑은 고딕" pitchFamily="34" charset="-122"/>
-                <a:cs typeface="맑은 고딕" pitchFamily="34" charset="-120"/>
-              </a:rPr>
-              <a:t>검사원 판단</a:t>
-            </a:r>
-            <a:endParaRPr lang="en-US" sz="2400" dirty="0"/>
-          </a:p>
-          <a:p>
-            <a:pPr indent="0" marL="0">
-              <a:buNone/>
-            </a:pPr>
-            <a:r>
-              <a:rPr lang="en-US" sz="2400" b="1" dirty="0">
-                <a:solidFill>
-                  <a:srgbClr val="6B6F76"/>
-                </a:solidFill>
-                <a:latin typeface="맑은 고딕" pitchFamily="34" charset="0"/>
-                <a:ea typeface="맑은 고딕" pitchFamily="34" charset="-122"/>
-                <a:cs typeface="맑은 고딕" pitchFamily="34" charset="-120"/>
-              </a:rPr>
-              <a:t>보정 도구</a:t>
-            </a:r>
-            <a:endParaRPr lang="en-US" sz="2400" dirty="0"/>
-          </a:p>
-        </p:txBody>
-      </p:sp>
-      <p:sp>
-        <p:nvSpPr>
-          <p:cNvPr id="11" name="Text 9"/>
-          <p:cNvSpPr txBox="1"/>
-          <p:nvPr/>
-        </p:nvSpPr>
-        <p:spPr>
-          <a:xfrm>
-            <a:off x="914400" y="3931920"/>
-            <a:ext cx="3474720" cy="731520"/>
-          </a:xfrm>
-          <a:prstGeom prst="rect">
-            <a:avLst/>
-          </a:prstGeom>
-          <a:noFill/>
-          <a:ln/>
-        </p:spPr>
-        <p:txBody>
-          <a:bodyPr wrap="square" lIns="0" tIns="0" rIns="0" bIns="0" rtlCol="0" anchor="ctr"/>
-          <a:lstStyle/>
-          <a:p>
-            <a:pPr indent="0" marL="0">
-              <a:buNone/>
-            </a:pPr>
-            <a:r>
-              <a:rPr lang="en-US" sz="4000" b="1" dirty="0">
-                <a:solidFill>
-                  <a:srgbClr val="6B6F76"/>
-                </a:solidFill>
-                <a:latin typeface="맑은 고딕" pitchFamily="34" charset="0"/>
-                <a:ea typeface="맑은 고딕" pitchFamily="34" charset="-122"/>
-                <a:cs typeface="맑은 고딕" pitchFamily="34" charset="-120"/>
-              </a:rPr>
-              <a:t>11 / 11</a:t>
-            </a:r>
-            <a:endParaRPr lang="en-US" sz="4000" dirty="0"/>
-          </a:p>
-        </p:txBody>
-      </p:sp>
-      <p:sp>
-        <p:nvSpPr>
-          <p:cNvPr id="12" name="Text 10"/>
-          <p:cNvSpPr txBox="1"/>
-          <p:nvPr/>
-        </p:nvSpPr>
-        <p:spPr>
-          <a:xfrm>
-            <a:off x="914400" y="4663440"/>
-            <a:ext cx="2651760" cy="274320"/>
-          </a:xfrm>
-          <a:prstGeom prst="rect">
-            <a:avLst/>
-          </a:prstGeom>
-          <a:noFill/>
-          <a:ln/>
-        </p:spPr>
-        <p:txBody>
-          <a:bodyPr wrap="square" lIns="0" tIns="0" rIns="0" bIns="0" rtlCol="0" anchor="t"/>
-          <a:lstStyle/>
-          <a:p>
-            <a:pPr indent="0" marL="0">
-              <a:buNone/>
-            </a:pPr>
-            <a:r>
-              <a:rPr lang="en-US" sz="1300" dirty="0">
-                <a:solidFill>
-                  <a:srgbClr val="6B6F76"/>
-                </a:solidFill>
-                <a:latin typeface="맑은 고딕" pitchFamily="34" charset="0"/>
-                <a:ea typeface="맑은 고딕" pitchFamily="34" charset="-122"/>
-                <a:cs typeface="맑은 고딕" pitchFamily="34" charset="-120"/>
-              </a:rPr>
-              <a:t>현장 인력 반대</a:t>
-            </a:r>
-            <a:endParaRPr lang="en-US" sz="1300" dirty="0"/>
-          </a:p>
-        </p:txBody>
-      </p:sp>
-      <p:sp>
-        <p:nvSpPr>
-          <p:cNvPr id="13" name="Shape 11"/>
-          <p:cNvSpPr/>
-          <p:nvPr/>
-        </p:nvSpPr>
-        <p:spPr>
-          <a:xfrm>
-            <a:off x="914400" y="5074920"/>
-            <a:ext cx="384048" cy="384048"/>
-          </a:xfrm>
-          <a:prstGeom prst="ellipse">
-            <a:avLst/>
-          </a:prstGeom>
-          <a:solidFill>
-            <a:srgbClr val="B23A2E"/>
-          </a:solidFill>
-          <a:ln w="12700">
-            <a:solidFill>
-              <a:srgbClr val="B23A2E"/>
-            </a:solidFill>
-            <a:prstDash val="solid"/>
-          </a:ln>
-        </p:spPr>
-      </p:sp>
-      <p:pic>
-        <p:nvPicPr>
-          <p:cNvPr id="14" name="Image 0" descr="preencoded.png">    </p:cNvPr>
-          <p:cNvPicPr>
-            <a:picLocks noChangeAspect="1"/>
-          </p:cNvPicPr>
-          <p:nvPr/>
-        </p:nvPicPr>
-        <p:blipFill>
-          <a:blip r:embed="rId1"/>
-          <a:stretch>
-            <a:fillRect/>
-          </a:stretch>
-        </p:blipFill>
-        <p:spPr>
-          <a:xfrm>
-            <a:off x="1014252" y="5174772"/>
-            <a:ext cx="184343" cy="184343"/>
-          </a:xfrm>
-          <a:prstGeom prst="rect">
-            <a:avLst/>
-          </a:prstGeom>
-        </p:spPr>
-      </p:pic>
-      <p:sp>
-        <p:nvSpPr>
-          <p:cNvPr id="15" name="Text 12"/>
-          <p:cNvSpPr txBox="1"/>
-          <p:nvPr/>
-        </p:nvSpPr>
-        <p:spPr>
-          <a:xfrm>
-            <a:off x="1417320" y="5074920"/>
-            <a:ext cx="3108960" cy="384048"/>
-          </a:xfrm>
-          <a:prstGeom prst="rect">
-            <a:avLst/>
-          </a:prstGeom>
-          <a:noFill/>
-          <a:ln/>
-        </p:spPr>
-        <p:txBody>
-          <a:bodyPr wrap="square" lIns="0" tIns="0" rIns="0" bIns="0" rtlCol="0" anchor="ctr"/>
-          <a:lstStyle/>
-          <a:p>
-            <a:pPr indent="0" marL="0">
-              <a:buNone/>
-            </a:pPr>
-            <a:r>
-              <a:rPr lang="en-US" sz="1500" b="1" dirty="0">
-                <a:solidFill>
-                  <a:srgbClr val="B23A2E"/>
-                </a:solidFill>
-                <a:latin typeface="맑은 고딕" pitchFamily="34" charset="0"/>
-                <a:ea typeface="맑은 고딕" pitchFamily="34" charset="-122"/>
-                <a:cs typeface="맑은 고딕" pitchFamily="34" charset="-120"/>
-              </a:rPr>
-              <a:t>기각  </a:t>
-            </a:r>
-            <a:pPr indent="0" marL="0">
-              <a:buNone/>
-            </a:pPr>
-            <a:r>
-              <a:rPr lang="en-US" sz="1500" dirty="0">
-                <a:solidFill>
-                  <a:srgbClr val="2B2D31"/>
-                </a:solidFill>
-                <a:latin typeface="맑은 고딕" pitchFamily="34" charset="0"/>
-                <a:ea typeface="맑은 고딕" pitchFamily="34" charset="-122"/>
-                <a:cs typeface="맑은 고딕" pitchFamily="34" charset="-120"/>
-              </a:rPr>
-              <a:t>매뉴얼로 이미 해결</a:t>
-            </a:r>
-            <a:endParaRPr lang="en-US" sz="1500" dirty="0"/>
-          </a:p>
-        </p:txBody>
-      </p:sp>
-      <p:pic>
-        <p:nvPicPr>
-          <p:cNvPr id="16" name="Image 1" descr="preencoded.png">    </p:cNvPr>
-          <p:cNvPicPr>
-            <a:picLocks noChangeAspect="1"/>
-          </p:cNvPicPr>
-          <p:nvPr/>
-        </p:nvPicPr>
-        <p:blipFill>
-          <a:blip r:embed="rId2"/>
-          <a:stretch>
-            <a:fillRect/>
-          </a:stretch>
-        </p:blipFill>
-        <p:spPr>
-          <a:xfrm>
-            <a:off x="4937760" y="3566160"/>
-            <a:ext cx="457200" cy="457200"/>
-          </a:xfrm>
-          <a:prstGeom prst="rect">
-            <a:avLst/>
-          </a:prstGeom>
-        </p:spPr>
-      </p:pic>
-      <p:sp>
-        <p:nvSpPr>
-          <p:cNvPr id="17" name="Shape 13"/>
-          <p:cNvSpPr/>
-          <p:nvPr/>
-        </p:nvSpPr>
-        <p:spPr>
-          <a:xfrm>
-            <a:off x="5577840" y="1828800"/>
-            <a:ext cx="6065215" cy="3931920"/>
-          </a:xfrm>
-          <a:prstGeom prst="roundRect">
-            <a:avLst>
-              <a:gd name="adj" fmla="val 1860"/>
-            </a:avLst>
-          </a:prstGeom>
-          <a:solidFill>
-            <a:srgbClr val="FBEDE4"/>
-          </a:solidFill>
-          <a:ln w="15875">
-            <a:solidFill>
-              <a:srgbClr val="B5501F"/>
-            </a:solidFill>
-            <a:prstDash val="solid"/>
-          </a:ln>
-        </p:spPr>
-      </p:sp>
-      <p:sp>
-        <p:nvSpPr>
-          <p:cNvPr id="18" name="Shape 14"/>
-          <p:cNvSpPr/>
-          <p:nvPr/>
-        </p:nvSpPr>
-        <p:spPr>
-          <a:xfrm>
-            <a:off x="5943600" y="2194560"/>
-            <a:ext cx="1737360" cy="329184"/>
-          </a:xfrm>
-          <a:prstGeom prst="roundRect">
-            <a:avLst>
-              <a:gd name="adj" fmla="val 50000"/>
-            </a:avLst>
-          </a:prstGeom>
-          <a:solidFill>
-            <a:srgbClr val="B5501F"/>
-          </a:solidFill>
-          <a:ln w="12700">
-            <a:solidFill>
-              <a:srgbClr val="B5501F"/>
-            </a:solidFill>
-            <a:prstDash val="solid"/>
-          </a:ln>
-        </p:spPr>
-      </p:sp>
-      <p:sp>
-        <p:nvSpPr>
-          <p:cNvPr id="19" name="Text 15"/>
-          <p:cNvSpPr txBox="1"/>
-          <p:nvPr/>
-        </p:nvSpPr>
-        <p:spPr>
-          <a:xfrm>
-            <a:off x="5943600" y="2194560"/>
-            <a:ext cx="1737360" cy="329184"/>
-          </a:xfrm>
-          <a:prstGeom prst="rect">
-            <a:avLst/>
-          </a:prstGeom>
-          <a:noFill/>
-          <a:ln/>
-        </p:spPr>
-        <p:txBody>
-          <a:bodyPr wrap="square" lIns="0" tIns="0" rIns="0" bIns="0" rtlCol="0" anchor="ctr"/>
-          <a:lstStyle/>
-          <a:p>
-            <a:pPr algn="ctr" indent="0" marL="0">
-              <a:buNone/>
-            </a:pPr>
-            <a:r>
-              <a:rPr lang="en-US" sz="1200" b="1" dirty="0">
-                <a:solidFill>
-                  <a:srgbClr val="FFFFFF"/>
-                </a:solidFill>
-                <a:latin typeface="맑은 고딕" pitchFamily="34" charset="0"/>
-                <a:ea typeface="맑은 고딕" pitchFamily="34" charset="-122"/>
-                <a:cs typeface="맑은 고딕" pitchFamily="34" charset="-120"/>
-              </a:rPr>
-              <a:t>현장이 원한 것</a:t>
-            </a:r>
-            <a:endParaRPr lang="en-US" sz="1200" dirty="0"/>
-          </a:p>
-        </p:txBody>
-      </p:sp>
-      <p:sp>
-        <p:nvSpPr>
-          <p:cNvPr id="20" name="Text 16"/>
-          <p:cNvSpPr txBox="1"/>
-          <p:nvPr/>
-        </p:nvSpPr>
-        <p:spPr>
-          <a:xfrm>
-            <a:off x="5943600" y="2743200"/>
-            <a:ext cx="5333695" cy="914400"/>
-          </a:xfrm>
-          <a:prstGeom prst="rect">
-            <a:avLst/>
-          </a:prstGeom>
-          <a:noFill/>
-          <a:ln/>
-        </p:spPr>
-        <p:txBody>
-          <a:bodyPr wrap="square" lIns="0" tIns="0" rIns="0" bIns="0" rtlCol="0" anchor="t"/>
-          <a:lstStyle/>
-          <a:p>
-            <a:pPr indent="0" marL="0">
-              <a:buNone/>
-            </a:pPr>
-            <a:r>
-              <a:rPr lang="en-US" sz="2400" b="1" dirty="0">
-                <a:solidFill>
-                  <a:srgbClr val="2B2D31"/>
-                </a:solidFill>
-                <a:latin typeface="맑은 고딕" pitchFamily="34" charset="0"/>
-                <a:ea typeface="맑은 고딕" pitchFamily="34" charset="-122"/>
-                <a:cs typeface="맑은 고딕" pitchFamily="34" charset="-120"/>
-              </a:rPr>
-              <a:t>드론 사전 스캔으로</a:t>
-            </a:r>
-            <a:endParaRPr lang="en-US" sz="2400" dirty="0"/>
-          </a:p>
-          <a:p>
-            <a:pPr indent="0" marL="0">
-              <a:buNone/>
-            </a:pPr>
-            <a:r>
-              <a:rPr lang="en-US" sz="2400" b="1" dirty="0">
-                <a:solidFill>
-                  <a:srgbClr val="2B2D31"/>
-                </a:solidFill>
-                <a:latin typeface="맑은 고딕" pitchFamily="34" charset="0"/>
-                <a:ea typeface="맑은 고딕" pitchFamily="34" charset="-122"/>
-                <a:cs typeface="맑은 고딕" pitchFamily="34" charset="-120"/>
-              </a:rPr>
-              <a:t>점검 우선순위</a:t>
-            </a:r>
-            <a:endParaRPr lang="en-US" sz="2400" dirty="0"/>
-          </a:p>
-        </p:txBody>
-      </p:sp>
-      <p:sp>
-        <p:nvSpPr>
-          <p:cNvPr id="21" name="Text 17"/>
-          <p:cNvSpPr txBox="1"/>
-          <p:nvPr/>
-        </p:nvSpPr>
-        <p:spPr>
-          <a:xfrm>
-            <a:off x="5943600" y="3931920"/>
-            <a:ext cx="2651760" cy="731520"/>
-          </a:xfrm>
-          <a:prstGeom prst="rect">
-            <a:avLst/>
-          </a:prstGeom>
-          <a:noFill/>
-          <a:ln/>
-        </p:spPr>
-        <p:txBody>
-          <a:bodyPr wrap="square" lIns="0" tIns="0" rIns="0" bIns="0" rtlCol="0" anchor="ctr"/>
-          <a:lstStyle/>
-          <a:p>
-            <a:pPr indent="0" marL="0">
-              <a:buNone/>
-            </a:pPr>
-            <a:r>
-              <a:rPr lang="en-US" sz="4000" b="1" dirty="0">
-                <a:solidFill>
-                  <a:srgbClr val="B5501F"/>
-                </a:solidFill>
-                <a:latin typeface="맑은 고딕" pitchFamily="34" charset="0"/>
-                <a:ea typeface="맑은 고딕" pitchFamily="34" charset="-122"/>
-                <a:cs typeface="맑은 고딕" pitchFamily="34" charset="-120"/>
-              </a:rPr>
-              <a:t>10 / 11</a:t>
-            </a:r>
-            <a:endParaRPr lang="en-US" sz="4000" dirty="0"/>
-          </a:p>
-        </p:txBody>
-      </p:sp>
-      <p:sp>
-        <p:nvSpPr>
-          <p:cNvPr id="22" name="Text 18"/>
-          <p:cNvSpPr txBox="1"/>
-          <p:nvPr/>
-        </p:nvSpPr>
-        <p:spPr>
-          <a:xfrm>
-            <a:off x="5943600" y="4663440"/>
-            <a:ext cx="2651760" cy="274320"/>
-          </a:xfrm>
-          <a:prstGeom prst="rect">
-            <a:avLst/>
-          </a:prstGeom>
-          <a:noFill/>
-          <a:ln/>
-        </p:spPr>
-        <p:txBody>
-          <a:bodyPr wrap="square" lIns="0" tIns="0" rIns="0" bIns="0" rtlCol="0" anchor="t"/>
-          <a:lstStyle/>
-          <a:p>
-            <a:pPr indent="0" marL="0">
-              <a:buNone/>
-            </a:pPr>
-            <a:r>
-              <a:rPr lang="en-US" sz="1300" dirty="0">
-                <a:solidFill>
-                  <a:srgbClr val="6B6F76"/>
-                </a:solidFill>
-                <a:latin typeface="맑은 고딕" pitchFamily="34" charset="0"/>
-                <a:ea typeface="맑은 고딕" pitchFamily="34" charset="-122"/>
-                <a:cs typeface="맑은 고딕" pitchFamily="34" charset="-120"/>
-              </a:rPr>
-              <a:t>현장 인력 공감</a:t>
-            </a:r>
-            <a:endParaRPr lang="en-US" sz="1300" dirty="0"/>
-          </a:p>
-        </p:txBody>
-      </p:sp>
-      <p:sp>
-        <p:nvSpPr>
-          <p:cNvPr id="23" name="Text 19"/>
-          <p:cNvSpPr txBox="1"/>
-          <p:nvPr/>
-        </p:nvSpPr>
-        <p:spPr>
-          <a:xfrm>
-            <a:off x="8686800" y="3931920"/>
-            <a:ext cx="2651760" cy="731520"/>
-          </a:xfrm>
-          <a:prstGeom prst="rect">
-            <a:avLst/>
-          </a:prstGeom>
-          <a:noFill/>
-          <a:ln/>
-        </p:spPr>
-        <p:txBody>
-          <a:bodyPr wrap="square" lIns="0" tIns="0" rIns="0" bIns="0" rtlCol="0" anchor="ctr"/>
-          <a:lstStyle/>
-          <a:p>
-            <a:pPr indent="0" marL="0">
-              <a:buNone/>
-            </a:pPr>
-            <a:r>
-              <a:rPr lang="en-US" sz="4000" b="1" dirty="0">
-                <a:solidFill>
-                  <a:srgbClr val="B5501F"/>
-                </a:solidFill>
-                <a:latin typeface="맑은 고딕" pitchFamily="34" charset="0"/>
-                <a:ea typeface="맑은 고딕" pitchFamily="34" charset="-122"/>
-                <a:cs typeface="맑은 고딕" pitchFamily="34" charset="-120"/>
-              </a:rPr>
-              <a:t>5 / 5</a:t>
-            </a:r>
-            <a:endParaRPr lang="en-US" sz="4000" dirty="0"/>
-          </a:p>
-        </p:txBody>
-      </p:sp>
-      <p:sp>
-        <p:nvSpPr>
-          <p:cNvPr id="24" name="Text 20"/>
-          <p:cNvSpPr txBox="1"/>
-          <p:nvPr/>
-        </p:nvSpPr>
-        <p:spPr>
-          <a:xfrm>
-            <a:off x="8686800" y="4663440"/>
-            <a:ext cx="2651760" cy="274320"/>
-          </a:xfrm>
-          <a:prstGeom prst="rect">
-            <a:avLst/>
-          </a:prstGeom>
-          <a:noFill/>
-          <a:ln/>
-        </p:spPr>
-        <p:txBody>
-          <a:bodyPr wrap="square" lIns="0" tIns="0" rIns="0" bIns="0" rtlCol="0" anchor="t"/>
-          <a:lstStyle/>
-          <a:p>
-            <a:pPr indent="0" marL="0">
-              <a:buNone/>
-            </a:pPr>
-            <a:r>
-              <a:rPr lang="en-US" sz="1300" dirty="0">
-                <a:solidFill>
-                  <a:srgbClr val="6B6F76"/>
-                </a:solidFill>
-                <a:latin typeface="맑은 고딕" pitchFamily="34" charset="0"/>
-                <a:ea typeface="맑은 고딕" pitchFamily="34" charset="-122"/>
-                <a:cs typeface="맑은 고딕" pitchFamily="34" charset="-120"/>
-              </a:rPr>
-              <a:t>의사결정권자 관심</a:t>
-            </a:r>
-            <a:endParaRPr lang="en-US" sz="1300" dirty="0"/>
-          </a:p>
-        </p:txBody>
-      </p:sp>
-      <p:sp>
-        <p:nvSpPr>
-          <p:cNvPr id="25" name="Shape 21"/>
-          <p:cNvSpPr/>
-          <p:nvPr/>
-        </p:nvSpPr>
-        <p:spPr>
-          <a:xfrm>
-            <a:off x="5943600" y="5074920"/>
-            <a:ext cx="384048" cy="384048"/>
-          </a:xfrm>
-          <a:prstGeom prst="ellipse">
-            <a:avLst/>
-          </a:prstGeom>
-          <a:solidFill>
-            <a:srgbClr val="3C8D5A"/>
-          </a:solidFill>
-          <a:ln w="12700">
-            <a:solidFill>
-              <a:srgbClr val="3C8D5A"/>
-            </a:solidFill>
-            <a:prstDash val="solid"/>
-          </a:ln>
-        </p:spPr>
-      </p:sp>
-      <p:pic>
-        <p:nvPicPr>
-          <p:cNvPr id="26" name="Image 2" descr="preencoded.png">    </p:cNvPr>
-          <p:cNvPicPr>
-            <a:picLocks noChangeAspect="1"/>
-          </p:cNvPicPr>
-          <p:nvPr/>
-        </p:nvPicPr>
-        <p:blipFill>
-          <a:blip r:embed="rId3"/>
-          <a:stretch>
-            <a:fillRect/>
-          </a:stretch>
-        </p:blipFill>
-        <p:spPr>
-          <a:xfrm>
-            <a:off x="6043452" y="5174772"/>
-            <a:ext cx="184343" cy="184343"/>
-          </a:xfrm>
-          <a:prstGeom prst="rect">
-            <a:avLst/>
-          </a:prstGeom>
-        </p:spPr>
-      </p:pic>
-      <p:sp>
-        <p:nvSpPr>
-          <p:cNvPr id="27" name="Text 22"/>
-          <p:cNvSpPr txBox="1"/>
-          <p:nvPr/>
-        </p:nvSpPr>
-        <p:spPr>
-          <a:xfrm>
-            <a:off x="6446520" y="5074920"/>
-            <a:ext cx="4967935" cy="384048"/>
-          </a:xfrm>
-          <a:prstGeom prst="rect">
-            <a:avLst/>
-          </a:prstGeom>
-          <a:noFill/>
-          <a:ln/>
-        </p:spPr>
-        <p:txBody>
-          <a:bodyPr wrap="square" lIns="0" tIns="0" rIns="0" bIns="0" rtlCol="0" anchor="ctr"/>
-          <a:lstStyle/>
-          <a:p>
-            <a:pPr indent="0" marL="0">
-              <a:buNone/>
-            </a:pPr>
-            <a:r>
-              <a:rPr lang="en-US" sz="1500" b="1" dirty="0">
-                <a:solidFill>
-                  <a:srgbClr val="3C8D5A"/>
-                </a:solidFill>
-                <a:latin typeface="맑은 고딕" pitchFamily="34" charset="0"/>
-                <a:ea typeface="맑은 고딕" pitchFamily="34" charset="-122"/>
-                <a:cs typeface="맑은 고딕" pitchFamily="34" charset="-120"/>
-              </a:rPr>
-              <a:t>검증  </a:t>
-            </a:r>
-            <a:pPr indent="0" marL="0">
-              <a:buNone/>
-            </a:pPr>
-            <a:r>
-              <a:rPr lang="en-US" sz="1500" dirty="0">
-                <a:solidFill>
-                  <a:srgbClr val="2B2D31"/>
-                </a:solidFill>
-                <a:latin typeface="맑은 고딕" pitchFamily="34" charset="0"/>
-                <a:ea typeface="맑은 고딕" pitchFamily="34" charset="-122"/>
-                <a:cs typeface="맑은 고딕" pitchFamily="34" charset="-120"/>
-              </a:rPr>
-              <a:t>리프트 · 로프 액세스 · 선박 일수 절감</a:t>
-            </a:r>
-            <a:endParaRPr lang="en-US" sz="1500" dirty="0"/>
-          </a:p>
-        </p:txBody>
-      </p:sp>
-    </p:spTree>
-  </p:cSld>
-  <p:clrMapOvr>
-    <a:masterClrMapping/>
-  </p:clrMapOvr>
-</p:sld>
-</file>
-
 <file path=ppt/slides/slide6.xml><?xml version="1.0" encoding="utf-8"?>
 <p:sld xmlns:a="http://schemas.openxmlformats.org/drawingml/2006/main" xmlns:r="http://schemas.openxmlformats.org/officeDocument/2006/relationships" xmlns:p="http://schemas.openxmlformats.org/presentationml/2006/main">
   <p:cSld name="Slide 2">
@@ -7053,7 +8179,7 @@
                 <a:ea typeface="맑은 고딕" pitchFamily="34" charset="-122"/>
                 <a:cs typeface="맑은 고딕" pitchFamily="34" charset="-120"/>
               </a:rPr>
-              <a:t>6</a:t>
+              <a:t>5</a:t>
             </a:r>
             <a:endParaRPr lang="en-US" sz="900" dirty="0"/>
           </a:p>
@@ -8689,7 +9815,7 @@
                 <a:ea typeface="맑은 고딕" pitchFamily="34" charset="-122"/>
                 <a:cs typeface="맑은 고딕" pitchFamily="34" charset="-120"/>
               </a:rPr>
-              <a:t>7</a:t>
+              <a:t>6</a:t>
             </a:r>
             <a:endParaRPr lang="en-US" sz="900" dirty="0"/>
           </a:p>
@@ -10462,7 +11588,7 @@
                 <a:ea typeface="맑은 고딕" pitchFamily="34" charset="-122"/>
                 <a:cs typeface="맑은 고딕" pitchFamily="34" charset="-120"/>
               </a:rPr>
-              <a:t>8</a:t>
+              <a:t>7</a:t>
             </a:r>
             <a:endParaRPr lang="en-US" sz="900" dirty="0"/>
           </a:p>
@@ -11964,13 +13090,12 @@
 
 <file path=ppt/slides/slide9.xml><?xml version="1.0" encoding="utf-8"?>
 <p:sld xmlns:a="http://schemas.openxmlformats.org/drawingml/2006/main" xmlns:r="http://schemas.openxmlformats.org/officeDocument/2006/relationships" xmlns:p="http://schemas.openxmlformats.org/presentationml/2006/main">
-  <p:cSld name="Slide 4">
+  <p:cSld name="Slide 1">
     <p:bg>
       <p:bgPr>
         <a:solidFill>
           <a:srgbClr val="FFFFFF"/>
         </a:solidFill>
-        <a:effectLst/>
       </p:bgPr>
     </p:bg>
     <p:spTree>
@@ -12008,11 +13133,11 @@
           <a:bodyPr wrap="square" lIns="0" tIns="0" rIns="0" bIns="0" rtlCol="0" anchor="t"/>
           <a:lstStyle/>
           <a:p>
-            <a:pPr marL="0" indent="0">
-              <a:buNone/>
-            </a:pPr>
-            <a:r>
-              <a:rPr lang="en-US" sz="1200" b="1" kern="0" spc="100" dirty="0">
+            <a:pPr indent="0" marL="0">
+              <a:buNone/>
+            </a:pPr>
+            <a:r>
+              <a:rPr lang="en-US" sz="1200" b="1" spc="100" kern="0" dirty="0">
                 <a:solidFill>
                   <a:srgbClr val="B5501F"/>
                 </a:solidFill>
@@ -12020,7 +13145,7 @@
                 <a:ea typeface="맑은 고딕" pitchFamily="34" charset="-122"/>
                 <a:cs typeface="맑은 고딕" pitchFamily="34" charset="-120"/>
               </a:rPr>
-              <a:t>BUSINESS MODEL</a:t>
+              <a:t>MARKET SIZE</a:t>
             </a:r>
             <a:endParaRPr lang="en-US" sz="1200" dirty="0"/>
           </a:p>
@@ -12047,7 +13172,7 @@
           <a:bodyPr wrap="square" lIns="0" tIns="0" rIns="0" bIns="0" rtlCol="0" anchor="ctr"/>
           <a:lstStyle/>
           <a:p>
-            <a:pPr marL="0" indent="0">
+            <a:pPr indent="0" marL="0">
               <a:buNone/>
             </a:pPr>
             <a:r>
@@ -12059,7 +13184,7 @@
                 <a:ea typeface="맑은 고딕" pitchFamily="34" charset="-122"/>
                 <a:cs typeface="맑은 고딕" pitchFamily="34" charset="-120"/>
               </a:rPr>
-              <a:t>고객 생태계와 비즈니스 모델</a:t>
+              <a:t>시장 규모</a:t>
             </a:r>
             <a:endParaRPr lang="en-US" sz="2800" dirty="0"/>
           </a:p>
@@ -12086,7 +13211,7 @@
           <a:bodyPr wrap="square" lIns="0" tIns="0" rIns="0" bIns="0" rtlCol="0" anchor="t"/>
           <a:lstStyle/>
           <a:p>
-            <a:pPr marL="0" indent="0">
+            <a:pPr indent="0" marL="0">
               <a:buNone/>
             </a:pPr>
             <a:r>
@@ -12125,7 +13250,7 @@
           <a:bodyPr wrap="square" lIns="0" tIns="0" rIns="0" bIns="0" rtlCol="0" anchor="t"/>
           <a:lstStyle/>
           <a:p>
-            <a:pPr marL="0" indent="0" algn="r">
+            <a:pPr algn="r" indent="0" marL="0">
               <a:buNone/>
             </a:pPr>
             <a:r>
@@ -12137,7 +13262,7 @@
                 <a:ea typeface="맑은 고딕" pitchFamily="34" charset="-122"/>
                 <a:cs typeface="맑은 고딕" pitchFamily="34" charset="-120"/>
               </a:rPr>
-              <a:t>9</a:t>
+              <a:t>8</a:t>
             </a:r>
             <a:endParaRPr lang="en-US" sz="900" dirty="0"/>
           </a:p>
@@ -12151,20 +13276,20 @@
         </p:nvSpPr>
         <p:spPr>
           <a:xfrm>
-            <a:off x="548640" y="1417320"/>
-            <a:ext cx="11094415" cy="1783080"/>
+            <a:off x="548640" y="1508760"/>
+            <a:ext cx="7040880" cy="1188720"/>
           </a:xfrm>
           <a:prstGeom prst="roundRect">
             <a:avLst>
-              <a:gd name="adj" fmla="val 48718"/>
+              <a:gd name="adj" fmla="val 7692"/>
             </a:avLst>
           </a:prstGeom>
           <a:solidFill>
-            <a:srgbClr val="E3EFF4"/>
+            <a:srgbClr val="2B2D31"/>
           </a:solidFill>
           <a:ln w="12700">
             <a:solidFill>
-              <a:srgbClr val="E3EFF4"/>
+              <a:srgbClr val="2B2D31"/>
             </a:solidFill>
             <a:prstDash val="solid"/>
           </a:ln>
@@ -12172,230 +13297,270 @@
       </p:sp>
       <p:sp>
         <p:nvSpPr>
-          <p:cNvPr id="7" name="Shape 5"/>
+          <p:cNvPr id="7" name="Text 5"/>
+          <p:cNvSpPr txBox="1"/>
+          <p:nvPr/>
+        </p:nvSpPr>
+        <p:spPr>
+          <a:xfrm>
+            <a:off x="822960" y="1508760"/>
+            <a:ext cx="914400" cy="1188720"/>
+          </a:xfrm>
+          <a:prstGeom prst="rect">
+            <a:avLst/>
+          </a:prstGeom>
+          <a:noFill/>
+          <a:ln/>
+        </p:spPr>
+        <p:txBody>
+          <a:bodyPr wrap="square" lIns="0" tIns="0" rIns="0" bIns="0" rtlCol="0" anchor="ctr"/>
+          <a:lstStyle/>
+          <a:p>
+            <a:pPr indent="0" marL="0">
+              <a:buNone/>
+            </a:pPr>
+            <a:r>
+              <a:rPr lang="en-US" sz="2200" b="1" dirty="0">
+                <a:solidFill>
+                  <a:srgbClr val="FFFFFF"/>
+                </a:solidFill>
+                <a:latin typeface="맑은 고딕" pitchFamily="34" charset="0"/>
+                <a:ea typeface="맑은 고딕" pitchFamily="34" charset="-122"/>
+                <a:cs typeface="맑은 고딕" pitchFamily="34" charset="-120"/>
+              </a:rPr>
+              <a:t>TAM</a:t>
+            </a:r>
+            <a:endParaRPr lang="en-US" sz="2200" dirty="0"/>
+          </a:p>
+        </p:txBody>
+      </p:sp>
+      <p:sp>
+        <p:nvSpPr>
+          <p:cNvPr id="8" name="Text 6"/>
+          <p:cNvSpPr txBox="1"/>
+          <p:nvPr/>
+        </p:nvSpPr>
+        <p:spPr>
+          <a:xfrm>
+            <a:off x="1783080" y="1600200"/>
+            <a:ext cx="5669280" cy="868680"/>
+          </a:xfrm>
+          <a:prstGeom prst="rect">
+            <a:avLst/>
+          </a:prstGeom>
+          <a:noFill/>
+          <a:ln/>
+        </p:spPr>
+        <p:txBody>
+          <a:bodyPr wrap="square" lIns="0" tIns="0" rIns="0" bIns="0" rtlCol="0" anchor="ctr"/>
+          <a:lstStyle/>
+          <a:p>
+            <a:pPr indent="0" marL="0">
+              <a:buNone/>
+            </a:pPr>
+            <a:r>
+              <a:rPr lang="en-US" sz="1250" dirty="0">
+                <a:solidFill>
+                  <a:srgbClr val="E6E8EB"/>
+                </a:solidFill>
+                <a:latin typeface="맑은 고딕" pitchFamily="34" charset="0"/>
+                <a:ea typeface="맑은 고딕" pitchFamily="34" charset="-122"/>
+                <a:cs typeface="맑은 고딕" pitchFamily="34" charset="-120"/>
+              </a:rPr>
+              <a:t>글로벌 해양 점검 · 보수 · 유지(IRM) 시장</a:t>
+            </a:r>
+            <a:endParaRPr lang="en-US" sz="1400" dirty="0"/>
+          </a:p>
+          <a:p>
+            <a:pPr indent="0" marL="0">
+              <a:buNone/>
+            </a:pPr>
+            <a:r>
+              <a:rPr lang="en-US" sz="2600" b="1" dirty="0">
+                <a:solidFill>
+                  <a:srgbClr val="FFFFFF"/>
+                </a:solidFill>
+                <a:latin typeface="맑은 고딕" pitchFamily="34" charset="0"/>
+                <a:ea typeface="맑은 고딕" pitchFamily="34" charset="-122"/>
+                <a:cs typeface="맑은 고딕" pitchFamily="34" charset="-120"/>
+              </a:rPr>
+              <a:t>136억 달러</a:t>
+            </a:r>
+            <a:endParaRPr lang="en-US" sz="1400" dirty="0"/>
+          </a:p>
+        </p:txBody>
+      </p:sp>
+      <p:sp>
+        <p:nvSpPr>
+          <p:cNvPr id="9" name="Text 7"/>
+          <p:cNvSpPr txBox="1"/>
+          <p:nvPr/>
+        </p:nvSpPr>
+        <p:spPr>
+          <a:xfrm>
+            <a:off x="1783080" y="2395728"/>
+            <a:ext cx="5669280" cy="228600"/>
+          </a:xfrm>
+          <a:prstGeom prst="rect">
+            <a:avLst/>
+          </a:prstGeom>
+          <a:noFill/>
+          <a:ln/>
+        </p:spPr>
+        <p:txBody>
+          <a:bodyPr wrap="square" lIns="0" tIns="0" rIns="0" bIns="0" rtlCol="0" anchor="t"/>
+          <a:lstStyle/>
+          <a:p>
+            <a:pPr indent="0" marL="0">
+              <a:buNone/>
+            </a:pPr>
+            <a:r>
+              <a:rPr lang="en-US" sz="950" i="1" dirty="0">
+                <a:solidFill>
+                  <a:srgbClr val="D5D7DA"/>
+                </a:solidFill>
+                <a:latin typeface="맑은 고딕" pitchFamily="34" charset="0"/>
+                <a:ea typeface="맑은 고딕" pitchFamily="34" charset="-122"/>
+                <a:cs typeface="맑은 고딕" pitchFamily="34" charset="-120"/>
+              </a:rPr>
+              <a:t>Research and Markets (2024)</a:t>
+            </a:r>
+            <a:endParaRPr lang="en-US" sz="950" dirty="0"/>
+          </a:p>
+        </p:txBody>
+      </p:sp>
+      <p:sp>
+        <p:nvSpPr>
+          <p:cNvPr id="10" name="Shape 8"/>
           <p:cNvSpPr/>
           <p:nvPr/>
         </p:nvSpPr>
         <p:spPr>
           <a:xfrm>
-            <a:off x="731520" y="1554480"/>
-            <a:ext cx="1508760" cy="1508760"/>
-          </a:xfrm>
-          <a:prstGeom prst="ellipse">
-            <a:avLst/>
+            <a:off x="1323137" y="2898648"/>
+            <a:ext cx="5491886" cy="1188720"/>
+          </a:xfrm>
+          <a:prstGeom prst="roundRect">
+            <a:avLst>
+              <a:gd name="adj" fmla="val 7692"/>
+            </a:avLst>
           </a:prstGeom>
           <a:solidFill>
             <a:srgbClr val="1F5F7A"/>
           </a:solidFill>
-          <a:ln w="38100">
-            <a:solidFill>
-              <a:srgbClr val="FFFFFF"/>
-            </a:solidFill>
-            <a:prstDash val="solid"/>
-          </a:ln>
-        </p:spPr>
-      </p:sp>
-      <p:sp>
-        <p:nvSpPr>
-          <p:cNvPr id="8" name="Text 6"/>
-          <p:cNvSpPr txBox="1"/>
-          <p:nvPr/>
-        </p:nvSpPr>
-        <p:spPr>
-          <a:xfrm>
-            <a:off x="731520" y="1554480"/>
-            <a:ext cx="1508760" cy="1508760"/>
-          </a:xfrm>
-          <a:prstGeom prst="rect">
-            <a:avLst/>
-          </a:prstGeom>
-          <a:noFill/>
-          <a:ln/>
-        </p:spPr>
-        <p:txBody>
-          <a:bodyPr wrap="square" lIns="0" tIns="0" rIns="0" bIns="0" rtlCol="0" anchor="ctr"/>
-          <a:lstStyle/>
-          <a:p>
-            <a:pPr marL="0" indent="0" algn="ctr">
-              <a:buNone/>
-            </a:pPr>
-            <a:r>
-              <a:rPr lang="en-US" sz="2100" b="1" dirty="0">
-                <a:solidFill>
-                  <a:srgbClr val="FFFFFF"/>
-                </a:solidFill>
-                <a:latin typeface="맑은 고딕" pitchFamily="34" charset="0"/>
-                <a:ea typeface="맑은 고딕" pitchFamily="34" charset="-122"/>
-                <a:cs typeface="맑은 고딕" pitchFamily="34" charset="-120"/>
-              </a:rPr>
-              <a:t>파트너</a:t>
-            </a:r>
-            <a:endParaRPr lang="en-US" sz="2100" dirty="0"/>
-          </a:p>
-        </p:txBody>
-      </p:sp>
-      <p:sp>
-        <p:nvSpPr>
-          <p:cNvPr id="9" name="Shape 7"/>
-          <p:cNvSpPr/>
-          <p:nvPr/>
-        </p:nvSpPr>
-        <p:spPr>
-          <a:xfrm>
-            <a:off x="5341468" y="1554480"/>
-            <a:ext cx="1508760" cy="1508760"/>
-          </a:xfrm>
-          <a:prstGeom prst="ellipse">
-            <a:avLst/>
-          </a:prstGeom>
-          <a:solidFill>
-            <a:srgbClr val="2B2D31"/>
-          </a:solidFill>
-          <a:ln w="38100">
-            <a:solidFill>
-              <a:srgbClr val="FFFFFF"/>
-            </a:solidFill>
-            <a:prstDash val="solid"/>
-          </a:ln>
-        </p:spPr>
-      </p:sp>
-      <p:sp>
-        <p:nvSpPr>
-          <p:cNvPr id="10" name="Text 8"/>
-          <p:cNvSpPr txBox="1"/>
-          <p:nvPr/>
-        </p:nvSpPr>
-        <p:spPr>
-          <a:xfrm>
-            <a:off x="5341468" y="1554480"/>
-            <a:ext cx="1508760" cy="1508760"/>
-          </a:xfrm>
-          <a:prstGeom prst="rect">
-            <a:avLst/>
-          </a:prstGeom>
-          <a:noFill/>
-          <a:ln/>
-        </p:spPr>
-        <p:txBody>
-          <a:bodyPr wrap="square" lIns="0" tIns="0" rIns="0" bIns="0" rtlCol="0" anchor="ctr"/>
-          <a:lstStyle/>
-          <a:p>
-            <a:pPr marL="0" indent="0" algn="ctr">
-              <a:buNone/>
-            </a:pPr>
-            <a:r>
-              <a:rPr lang="en-US" sz="2100" b="1" dirty="0">
-                <a:solidFill>
-                  <a:srgbClr val="FFFFFF"/>
-                </a:solidFill>
-                <a:latin typeface="맑은 고딕" pitchFamily="34" charset="0"/>
-                <a:ea typeface="맑은 고딕" pitchFamily="34" charset="-122"/>
-                <a:cs typeface="맑은 고딕" pitchFamily="34" charset="-120"/>
-              </a:rPr>
-              <a:t>MLC</a:t>
-            </a:r>
-            <a:endParaRPr lang="en-US" sz="2100" dirty="0"/>
-          </a:p>
-        </p:txBody>
-      </p:sp>
-      <p:sp>
-        <p:nvSpPr>
-          <p:cNvPr id="11" name="Shape 9"/>
-          <p:cNvSpPr/>
-          <p:nvPr/>
-        </p:nvSpPr>
-        <p:spPr>
-          <a:xfrm>
-            <a:off x="9951415" y="1554480"/>
-            <a:ext cx="1508760" cy="1508760"/>
-          </a:xfrm>
-          <a:prstGeom prst="ellipse">
-            <a:avLst/>
-          </a:prstGeom>
-          <a:solidFill>
-            <a:srgbClr val="B5501F"/>
-          </a:solidFill>
-          <a:ln w="38100">
-            <a:solidFill>
-              <a:srgbClr val="FFFFFF"/>
-            </a:solidFill>
-            <a:prstDash val="solid"/>
-          </a:ln>
-        </p:spPr>
-      </p:sp>
-      <p:sp>
-        <p:nvSpPr>
-          <p:cNvPr id="12" name="Text 10"/>
-          <p:cNvSpPr txBox="1"/>
-          <p:nvPr/>
-        </p:nvSpPr>
-        <p:spPr>
-          <a:xfrm>
-            <a:off x="9951415" y="1554480"/>
-            <a:ext cx="1508760" cy="1508760"/>
-          </a:xfrm>
-          <a:prstGeom prst="rect">
-            <a:avLst/>
-          </a:prstGeom>
-          <a:noFill/>
-          <a:ln/>
-        </p:spPr>
-        <p:txBody>
-          <a:bodyPr wrap="square" lIns="0" tIns="0" rIns="0" bIns="0" rtlCol="0" anchor="ctr"/>
-          <a:lstStyle/>
-          <a:p>
-            <a:pPr marL="0" indent="0" algn="ctr">
-              <a:buNone/>
-            </a:pPr>
-            <a:r>
-              <a:rPr lang="en-US" sz="2100" b="1" dirty="0">
-                <a:solidFill>
-                  <a:srgbClr val="FFFFFF"/>
-                </a:solidFill>
-                <a:latin typeface="맑은 고딕" pitchFamily="34" charset="0"/>
-                <a:ea typeface="맑은 고딕" pitchFamily="34" charset="-122"/>
-                <a:cs typeface="맑은 고딕" pitchFamily="34" charset="-120"/>
-              </a:rPr>
-              <a:t>고객사</a:t>
-            </a:r>
-            <a:endParaRPr lang="en-US" sz="2100" dirty="0"/>
-          </a:p>
-        </p:txBody>
-      </p:sp>
-      <p:sp>
-        <p:nvSpPr>
-          <p:cNvPr id="13" name="Shape 11"/>
-          <p:cNvSpPr/>
-          <p:nvPr/>
-        </p:nvSpPr>
-        <p:spPr>
-          <a:xfrm>
-            <a:off x="2377440" y="2308860"/>
-            <a:ext cx="2826868" cy="0"/>
-          </a:xfrm>
-          <a:prstGeom prst="line">
-            <a:avLst/>
-          </a:prstGeom>
-          <a:noFill/>
-          <a:ln w="25400">
+          <a:ln w="12700">
             <a:solidFill>
               <a:srgbClr val="1F5F7A"/>
             </a:solidFill>
             <a:prstDash val="solid"/>
-            <a:tailEnd type="triangle"/>
           </a:ln>
         </p:spPr>
       </p:sp>
       <p:sp>
         <p:nvSpPr>
-          <p:cNvPr id="14" name="Text 12"/>
-          <p:cNvSpPr txBox="1"/>
-          <p:nvPr/>
-        </p:nvSpPr>
-        <p:spPr>
-          <a:xfrm>
-            <a:off x="2377440" y="1897380"/>
-            <a:ext cx="2826868" cy="320040"/>
+          <p:cNvPr id="11" name="Text 9"/>
+          <p:cNvSpPr txBox="1"/>
+          <p:nvPr/>
+        </p:nvSpPr>
+        <p:spPr>
+          <a:xfrm>
+            <a:off x="1597457" y="2898648"/>
+            <a:ext cx="914400" cy="1188720"/>
+          </a:xfrm>
+          <a:prstGeom prst="rect">
+            <a:avLst/>
+          </a:prstGeom>
+          <a:noFill/>
+          <a:ln/>
+        </p:spPr>
+        <p:txBody>
+          <a:bodyPr wrap="square" lIns="0" tIns="0" rIns="0" bIns="0" rtlCol="0" anchor="ctr"/>
+          <a:lstStyle/>
+          <a:p>
+            <a:pPr indent="0" marL="0">
+              <a:buNone/>
+            </a:pPr>
+            <a:r>
+              <a:rPr lang="en-US" sz="2200" b="1" dirty="0">
+                <a:solidFill>
+                  <a:srgbClr val="FFFFFF"/>
+                </a:solidFill>
+                <a:latin typeface="맑은 고딕" pitchFamily="34" charset="0"/>
+                <a:ea typeface="맑은 고딕" pitchFamily="34" charset="-122"/>
+                <a:cs typeface="맑은 고딕" pitchFamily="34" charset="-120"/>
+              </a:rPr>
+              <a:t>SAM</a:t>
+            </a:r>
+            <a:endParaRPr lang="en-US" sz="2200" dirty="0"/>
+          </a:p>
+        </p:txBody>
+      </p:sp>
+      <p:sp>
+        <p:nvSpPr>
+          <p:cNvPr id="12" name="Text 10"/>
+          <p:cNvSpPr txBox="1"/>
+          <p:nvPr/>
+        </p:nvSpPr>
+        <p:spPr>
+          <a:xfrm>
+            <a:off x="2557577" y="2990088"/>
+            <a:ext cx="4120286" cy="868680"/>
+          </a:xfrm>
+          <a:prstGeom prst="rect">
+            <a:avLst/>
+          </a:prstGeom>
+          <a:noFill/>
+          <a:ln/>
+        </p:spPr>
+        <p:txBody>
+          <a:bodyPr wrap="square" lIns="0" tIns="0" rIns="0" bIns="0" rtlCol="0" anchor="ctr"/>
+          <a:lstStyle/>
+          <a:p>
+            <a:pPr indent="0" marL="0">
+              <a:buNone/>
+            </a:pPr>
+            <a:r>
+              <a:rPr lang="en-US" sz="1250" dirty="0">
+                <a:solidFill>
+                  <a:srgbClr val="E6E8EB"/>
+                </a:solidFill>
+                <a:latin typeface="맑은 고딕" pitchFamily="34" charset="0"/>
+                <a:ea typeface="맑은 고딕" pitchFamily="34" charset="-122"/>
+                <a:cs typeface="맑은 고딕" pitchFamily="34" charset="-120"/>
+              </a:rPr>
+              <a:t>해양 드론 점검 서비스 시장</a:t>
+            </a:r>
+            <a:endParaRPr lang="en-US" sz="1400" dirty="0"/>
+          </a:p>
+          <a:p>
+            <a:pPr indent="0" marL="0">
+              <a:buNone/>
+            </a:pPr>
+            <a:r>
+              <a:rPr lang="en-US" sz="2600" b="1" dirty="0">
+                <a:solidFill>
+                  <a:srgbClr val="FFFFFF"/>
+                </a:solidFill>
+                <a:latin typeface="맑은 고딕" pitchFamily="34" charset="0"/>
+                <a:ea typeface="맑은 고딕" pitchFamily="34" charset="-122"/>
+                <a:cs typeface="맑은 고딕" pitchFamily="34" charset="-120"/>
+              </a:rPr>
+              <a:t>15억 달러</a:t>
+            </a:r>
+            <a:endParaRPr lang="en-US" sz="1400" dirty="0"/>
+          </a:p>
+        </p:txBody>
+      </p:sp>
+      <p:sp>
+        <p:nvSpPr>
+          <p:cNvPr id="13" name="Text 11"/>
+          <p:cNvSpPr txBox="1"/>
+          <p:nvPr/>
+        </p:nvSpPr>
+        <p:spPr>
+          <a:xfrm>
+            <a:off x="2557577" y="3785616"/>
+            <a:ext cx="4120286" cy="228600"/>
           </a:xfrm>
           <a:prstGeom prst="rect">
             <a:avLst/>
@@ -12407,58 +13572,156 @@
           <a:bodyPr wrap="square" lIns="0" tIns="0" rIns="0" bIns="0" rtlCol="0" anchor="t"/>
           <a:lstStyle/>
           <a:p>
-            <a:pPr marL="0" indent="0" algn="ctr">
-              <a:buNone/>
-            </a:pPr>
-            <a:r>
-              <a:rPr lang="en-US" sz="1400" b="1" dirty="0">
-                <a:solidFill>
-                  <a:srgbClr val="1F5F7A"/>
-                </a:solidFill>
-                <a:latin typeface="맑은 고딕" pitchFamily="34" charset="0"/>
-                <a:ea typeface="맑은 고딕" pitchFamily="34" charset="-122"/>
-                <a:cs typeface="맑은 고딕" pitchFamily="34" charset="-120"/>
-              </a:rPr>
-              <a:t>현장 촬영 데이터 · 고객 소개</a:t>
-            </a:r>
-            <a:endParaRPr lang="en-US" sz="1400" dirty="0"/>
-          </a:p>
-        </p:txBody>
-      </p:sp>
-      <p:sp>
-        <p:nvSpPr>
-          <p:cNvPr id="15" name="Shape 13"/>
+            <a:pPr indent="0" marL="0">
+              <a:buNone/>
+            </a:pPr>
+            <a:r>
+              <a:rPr lang="en-US" sz="950" i="1" dirty="0">
+                <a:solidFill>
+                  <a:srgbClr val="D5D7DA"/>
+                </a:solidFill>
+                <a:latin typeface="맑은 고딕" pitchFamily="34" charset="0"/>
+                <a:ea typeface="맑은 고딕" pitchFamily="34" charset="-122"/>
+                <a:cs typeface="맑은 고딕" pitchFamily="34" charset="-120"/>
+              </a:rPr>
+              <a:t>Exactitude Consultancy (2024)</a:t>
+            </a:r>
+            <a:endParaRPr lang="en-US" sz="950" dirty="0"/>
+          </a:p>
+        </p:txBody>
+      </p:sp>
+      <p:sp>
+        <p:nvSpPr>
+          <p:cNvPr id="14" name="Shape 12"/>
           <p:cNvSpPr/>
           <p:nvPr/>
         </p:nvSpPr>
         <p:spPr>
           <a:xfrm>
-            <a:off x="6987388" y="2308860"/>
-            <a:ext cx="2826868" cy="0"/>
-          </a:xfrm>
-          <a:prstGeom prst="line">
-            <a:avLst/>
-          </a:prstGeom>
-          <a:noFill/>
-          <a:ln w="25400">
+            <a:off x="2097634" y="4288536"/>
+            <a:ext cx="3942893" cy="1188720"/>
+          </a:xfrm>
+          <a:prstGeom prst="roundRect">
+            <a:avLst>
+              <a:gd name="adj" fmla="val 7692"/>
+            </a:avLst>
+          </a:prstGeom>
+          <a:solidFill>
+            <a:srgbClr val="B5501F"/>
+          </a:solidFill>
+          <a:ln w="12700">
             <a:solidFill>
-              <a:srgbClr val="2B2D31"/>
+              <a:srgbClr val="B5501F"/>
             </a:solidFill>
             <a:prstDash val="solid"/>
-            <a:tailEnd type="triangle"/>
           </a:ln>
         </p:spPr>
       </p:sp>
       <p:sp>
         <p:nvSpPr>
+          <p:cNvPr id="15" name="Text 13"/>
+          <p:cNvSpPr txBox="1"/>
+          <p:nvPr/>
+        </p:nvSpPr>
+        <p:spPr>
+          <a:xfrm>
+            <a:off x="2371954" y="4288536"/>
+            <a:ext cx="914400" cy="1188720"/>
+          </a:xfrm>
+          <a:prstGeom prst="rect">
+            <a:avLst/>
+          </a:prstGeom>
+          <a:noFill/>
+          <a:ln/>
+        </p:spPr>
+        <p:txBody>
+          <a:bodyPr wrap="square" lIns="0" tIns="0" rIns="0" bIns="0" rtlCol="0" anchor="ctr"/>
+          <a:lstStyle/>
+          <a:p>
+            <a:pPr indent="0" marL="0">
+              <a:buNone/>
+            </a:pPr>
+            <a:r>
+              <a:rPr lang="en-US" sz="2200" b="1" dirty="0">
+                <a:solidFill>
+                  <a:srgbClr val="FFFFFF"/>
+                </a:solidFill>
+                <a:latin typeface="맑은 고딕" pitchFamily="34" charset="0"/>
+                <a:ea typeface="맑은 고딕" pitchFamily="34" charset="-122"/>
+                <a:cs typeface="맑은 고딕" pitchFamily="34" charset="-120"/>
+              </a:rPr>
+              <a:t>SOM</a:t>
+            </a:r>
+            <a:endParaRPr lang="en-US" sz="2200" dirty="0"/>
+          </a:p>
+        </p:txBody>
+      </p:sp>
+      <p:sp>
+        <p:nvSpPr>
           <p:cNvPr id="16" name="Text 14"/>
           <p:cNvSpPr txBox="1"/>
           <p:nvPr/>
         </p:nvSpPr>
         <p:spPr>
           <a:xfrm>
-            <a:off x="6987388" y="1897380"/>
-            <a:ext cx="2826868" cy="320040"/>
+            <a:off x="3332074" y="4379976"/>
+            <a:ext cx="2571293" cy="868680"/>
+          </a:xfrm>
+          <a:prstGeom prst="rect">
+            <a:avLst/>
+          </a:prstGeom>
+          <a:noFill/>
+          <a:ln/>
+        </p:spPr>
+        <p:txBody>
+          <a:bodyPr wrap="square" lIns="0" tIns="0" rIns="0" bIns="0" rtlCol="0" anchor="ctr"/>
+          <a:lstStyle/>
+          <a:p>
+            <a:pPr indent="0" marL="0">
+              <a:buNone/>
+            </a:pPr>
+            <a:r>
+              <a:rPr lang="en-US" sz="1250" dirty="0">
+                <a:solidFill>
+                  <a:srgbClr val="E6E8EB"/>
+                </a:solidFill>
+                <a:latin typeface="맑은 고딕" pitchFamily="34" charset="0"/>
+                <a:ea typeface="맑은 고딕" pitchFamily="34" charset="-122"/>
+                <a:cs typeface="맑은 고딕" pitchFamily="34" charset="-120"/>
+              </a:rPr>
+              <a:t>3년 내 목표: SAM의 1%</a:t>
+            </a:r>
+            <a:endParaRPr lang="en-US" sz="1400" dirty="0"/>
+          </a:p>
+          <a:p>
+            <a:pPr indent="0" marL="0">
+              <a:buNone/>
+            </a:pPr>
+            <a:r>
+              <a:rPr lang="en-US" sz="2600" b="1" dirty="0">
+                <a:solidFill>
+                  <a:srgbClr val="FFFFFF"/>
+                </a:solidFill>
+                <a:latin typeface="맑은 고딕" pitchFamily="34" charset="0"/>
+                <a:ea typeface="맑은 고딕" pitchFamily="34" charset="-122"/>
+                <a:cs typeface="맑은 고딕" pitchFamily="34" charset="-120"/>
+              </a:rPr>
+              <a:t>1,500만 달러</a:t>
+            </a:r>
+            <a:endParaRPr lang="en-US" sz="1400" dirty="0"/>
+          </a:p>
+        </p:txBody>
+      </p:sp>
+      <p:sp>
+        <p:nvSpPr>
+          <p:cNvPr id="17" name="Text 15"/>
+          <p:cNvSpPr txBox="1"/>
+          <p:nvPr/>
+        </p:nvSpPr>
+        <p:spPr>
+          <a:xfrm>
+            <a:off x="3332074" y="5175504"/>
+            <a:ext cx="2571293" cy="228600"/>
           </a:xfrm>
           <a:prstGeom prst="rect">
             <a:avLst/>
@@ -12470,34 +13733,34 @@
           <a:bodyPr wrap="square" lIns="0" tIns="0" rIns="0" bIns="0" rtlCol="0" anchor="t"/>
           <a:lstStyle/>
           <a:p>
-            <a:pPr marL="0" indent="0" algn="ctr">
-              <a:buNone/>
-            </a:pPr>
-            <a:r>
-              <a:rPr lang="en-US" sz="1400" b="1" dirty="0">
-                <a:solidFill>
-                  <a:srgbClr val="2B2D31"/>
-                </a:solidFill>
-                <a:latin typeface="맑은 고딕" pitchFamily="34" charset="0"/>
-                <a:ea typeface="맑은 고딕" pitchFamily="34" charset="-122"/>
-                <a:cs typeface="맑은 고딕" pitchFamily="34" charset="-120"/>
-              </a:rPr>
-              <a:t>점검 우선순위 리포트</a:t>
-            </a:r>
-            <a:endParaRPr lang="en-US" sz="1400" dirty="0"/>
-          </a:p>
-        </p:txBody>
-      </p:sp>
-      <p:sp>
-        <p:nvSpPr>
-          <p:cNvPr id="17" name="Text 15"/>
-          <p:cNvSpPr txBox="1"/>
-          <p:nvPr/>
-        </p:nvSpPr>
-        <p:spPr>
-          <a:xfrm>
-            <a:off x="6987388" y="2400300"/>
-            <a:ext cx="2826868" cy="292608"/>
+            <a:pPr indent="0" marL="0">
+              <a:buNone/>
+            </a:pPr>
+            <a:r>
+              <a:rPr lang="en-US" sz="950" i="1" dirty="0">
+                <a:solidFill>
+                  <a:srgbClr val="D5D7DA"/>
+                </a:solidFill>
+                <a:latin typeface="맑은 고딕" pitchFamily="34" charset="0"/>
+                <a:ea typeface="맑은 고딕" pitchFamily="34" charset="-122"/>
+                <a:cs typeface="맑은 고딕" pitchFamily="34" charset="-120"/>
+              </a:rPr>
+              <a:t>MLC 목표 (가정)</a:t>
+            </a:r>
+            <a:endParaRPr lang="en-US" sz="950" dirty="0"/>
+          </a:p>
+        </p:txBody>
+      </p:sp>
+      <p:sp>
+        <p:nvSpPr>
+          <p:cNvPr id="18" name="Text 16"/>
+          <p:cNvSpPr txBox="1"/>
+          <p:nvPr/>
+        </p:nvSpPr>
+        <p:spPr>
+          <a:xfrm>
+            <a:off x="8001000" y="1508760"/>
+            <a:ext cx="3642055" cy="274320"/>
           </a:xfrm>
           <a:prstGeom prst="rect">
             <a:avLst/>
@@ -12509,19 +13772,19 @@
           <a:bodyPr wrap="square" lIns="0" tIns="0" rIns="0" bIns="0" rtlCol="0" anchor="t"/>
           <a:lstStyle/>
           <a:p>
-            <a:pPr marL="0" indent="0" algn="ctr">
+            <a:pPr indent="0" marL="0">
               <a:buNone/>
             </a:pPr>
             <a:r>
               <a:rPr lang="en-US" sz="1300" b="1" dirty="0">
                 <a:solidFill>
-                  <a:srgbClr val="B5501F"/>
-                </a:solidFill>
-                <a:latin typeface="맑은 고딕" pitchFamily="34" charset="0"/>
-                <a:ea typeface="맑은 고딕" pitchFamily="34" charset="-122"/>
-                <a:cs typeface="맑은 고딕" pitchFamily="34" charset="-120"/>
-              </a:rPr>
-              <a:t>점검 건당 · 구독형 요금</a:t>
+                  <a:srgbClr val="1F5F7A"/>
+                </a:solidFill>
+                <a:latin typeface="맑은 고딕" pitchFamily="34" charset="0"/>
+                <a:ea typeface="맑은 고딕" pitchFamily="34" charset="-122"/>
+                <a:cs typeface="맑은 고딕" pitchFamily="34" charset="-120"/>
+              </a:rPr>
+              <a:t>성장성</a:t>
             </a:r>
             <a:endParaRPr lang="en-US" sz="1300" dirty="0"/>
           </a:p>
@@ -12529,241 +13792,18 @@
       </p:sp>
       <p:sp>
         <p:nvSpPr>
-          <p:cNvPr id="18" name="Text 16"/>
-          <p:cNvSpPr txBox="1"/>
-          <p:nvPr/>
-        </p:nvSpPr>
-        <p:spPr>
-          <a:xfrm>
-            <a:off x="548640" y="3310128"/>
-            <a:ext cx="2926080" cy="548640"/>
-          </a:xfrm>
-          <a:prstGeom prst="rect">
-            <a:avLst/>
-          </a:prstGeom>
-          <a:noFill/>
-          <a:ln/>
-        </p:spPr>
-        <p:txBody>
-          <a:bodyPr wrap="square" lIns="0" tIns="0" rIns="0" bIns="0" rtlCol="0" anchor="t"/>
-          <a:lstStyle/>
-          <a:p>
-            <a:pPr marL="0" indent="0" algn="l">
-              <a:buNone/>
-            </a:pPr>
-            <a:r>
-              <a:rPr lang="en-US" sz="1300" b="1" dirty="0">
-                <a:solidFill>
-                  <a:srgbClr val="2B2D31"/>
-                </a:solidFill>
-                <a:latin typeface="맑은 고딕" pitchFamily="34" charset="0"/>
-                <a:ea typeface="맑은 고딕" pitchFamily="34" charset="-122"/>
-                <a:cs typeface="맑은 고딕" pitchFamily="34" charset="-120"/>
-              </a:rPr>
-              <a:t>드론 운용사 · 방식 </a:t>
-            </a:r>
-            <a:r>
-              <a:rPr lang="en-US" sz="1300" b="1" dirty="0" err="1">
-                <a:solidFill>
-                  <a:srgbClr val="2B2D31"/>
-                </a:solidFill>
-                <a:latin typeface="맑은 고딕" pitchFamily="34" charset="0"/>
-                <a:ea typeface="맑은 고딕" pitchFamily="34" charset="-122"/>
-                <a:cs typeface="맑은 고딕" pitchFamily="34" charset="-120"/>
-              </a:rPr>
-              <a:t>전문</a:t>
-            </a:r>
-            <a:r>
-              <a:rPr lang="en-US" sz="1300" b="1" dirty="0">
-                <a:solidFill>
-                  <a:srgbClr val="2B2D31"/>
-                </a:solidFill>
-                <a:latin typeface="맑은 고딕" pitchFamily="34" charset="0"/>
-                <a:ea typeface="맑은 고딕" pitchFamily="34" charset="-122"/>
-                <a:cs typeface="맑은 고딕" pitchFamily="34" charset="-120"/>
-              </a:rPr>
-              <a:t> </a:t>
-            </a:r>
-            <a:r>
-              <a:rPr lang="en-US" sz="1300" b="1" dirty="0" err="1">
-                <a:solidFill>
-                  <a:srgbClr val="2B2D31"/>
-                </a:solidFill>
-                <a:latin typeface="맑은 고딕" pitchFamily="34" charset="0"/>
-                <a:ea typeface="맑은 고딕" pitchFamily="34" charset="-122"/>
-                <a:cs typeface="맑은 고딕" pitchFamily="34" charset="-120"/>
-              </a:rPr>
-              <a:t>업체</a:t>
-            </a:r>
-            <a:endParaRPr lang="en-US" sz="1300" dirty="0"/>
-          </a:p>
-        </p:txBody>
-      </p:sp>
-      <p:sp>
-        <p:nvSpPr>
-          <p:cNvPr id="19" name="Text 17"/>
-          <p:cNvSpPr txBox="1"/>
-          <p:nvPr/>
-        </p:nvSpPr>
-        <p:spPr>
-          <a:xfrm>
-            <a:off x="4632808" y="3310128"/>
-            <a:ext cx="2926080" cy="548640"/>
-          </a:xfrm>
-          <a:prstGeom prst="rect">
-            <a:avLst/>
-          </a:prstGeom>
-          <a:noFill/>
-          <a:ln/>
-        </p:spPr>
-        <p:txBody>
-          <a:bodyPr wrap="square" lIns="0" tIns="0" rIns="0" bIns="0" rtlCol="0" anchor="t"/>
-          <a:lstStyle/>
-          <a:p>
-            <a:pPr marL="0" indent="0" algn="ctr">
-              <a:buNone/>
-            </a:pPr>
-            <a:r>
-              <a:rPr lang="en-US" sz="1300" b="1" dirty="0">
-                <a:solidFill>
-                  <a:srgbClr val="2B2D31"/>
-                </a:solidFill>
-                <a:latin typeface="맑은 고딕" pitchFamily="34" charset="0"/>
-                <a:ea typeface="맑은 고딕" pitchFamily="34" charset="-122"/>
-                <a:cs typeface="맑은 고딕" pitchFamily="34" charset="-120"/>
-              </a:rPr>
-              <a:t>녹 색 기반 위험도 분석</a:t>
-            </a:r>
-            <a:endParaRPr lang="en-US" sz="1300" dirty="0"/>
-          </a:p>
-          <a:p>
-            <a:pPr marL="0" indent="0" algn="ctr">
-              <a:buNone/>
-            </a:pPr>
-            <a:r>
-              <a:rPr lang="en-US" sz="1150" dirty="0">
-                <a:solidFill>
-                  <a:srgbClr val="6B6F76"/>
-                </a:solidFill>
-                <a:latin typeface="맑은 고딕" pitchFamily="34" charset="0"/>
-                <a:ea typeface="맑은 고딕" pitchFamily="34" charset="-122"/>
-                <a:cs typeface="맑은 고딕" pitchFamily="34" charset="-120"/>
-              </a:rPr>
-              <a:t>위험도 판정 · 우선순위 지도</a:t>
-            </a:r>
-            <a:endParaRPr lang="en-US" sz="1300" dirty="0"/>
-          </a:p>
-        </p:txBody>
-      </p:sp>
-      <p:sp>
-        <p:nvSpPr>
-          <p:cNvPr id="20" name="Text 18"/>
-          <p:cNvSpPr txBox="1"/>
-          <p:nvPr/>
-        </p:nvSpPr>
-        <p:spPr>
-          <a:xfrm>
-            <a:off x="8716975" y="3310128"/>
-            <a:ext cx="2926080" cy="548640"/>
-          </a:xfrm>
-          <a:prstGeom prst="rect">
-            <a:avLst/>
-          </a:prstGeom>
-          <a:noFill/>
-          <a:ln/>
-        </p:spPr>
-        <p:txBody>
-          <a:bodyPr wrap="square" lIns="0" tIns="0" rIns="0" bIns="0" rtlCol="0" anchor="t"/>
-          <a:lstStyle/>
-          <a:p>
-            <a:pPr marL="0" indent="0" algn="r">
-              <a:buNone/>
-            </a:pPr>
-            <a:r>
-              <a:rPr lang="en-US" sz="1300" b="1" dirty="0">
-                <a:solidFill>
-                  <a:srgbClr val="2B2D31"/>
-                </a:solidFill>
-                <a:latin typeface="맑은 고딕" pitchFamily="34" charset="0"/>
-                <a:ea typeface="맑은 고딕" pitchFamily="34" charset="-122"/>
-                <a:cs typeface="맑은 고딕" pitchFamily="34" charset="-120"/>
-              </a:rPr>
-              <a:t>해양 석유 · 가스 운영사</a:t>
-            </a:r>
-            <a:endParaRPr lang="en-US" sz="1300" dirty="0"/>
-          </a:p>
-          <a:p>
-            <a:pPr marL="0" indent="0" algn="r">
-              <a:buNone/>
-            </a:pPr>
-            <a:r>
-              <a:rPr lang="en-US" sz="1150" dirty="0">
-                <a:solidFill>
-                  <a:srgbClr val="6B6F76"/>
-                </a:solidFill>
-                <a:latin typeface="맑은 고딕" pitchFamily="34" charset="0"/>
-                <a:ea typeface="맑은 고딕" pitchFamily="34" charset="-122"/>
-                <a:cs typeface="맑은 고딕" pitchFamily="34" charset="-120"/>
-              </a:rPr>
-              <a:t>점검 프로그램 매니저</a:t>
-            </a:r>
-            <a:endParaRPr lang="en-US" sz="1300" dirty="0"/>
-          </a:p>
-        </p:txBody>
-      </p:sp>
-      <p:sp>
-        <p:nvSpPr>
-          <p:cNvPr id="21" name="Text 19"/>
-          <p:cNvSpPr txBox="1"/>
-          <p:nvPr/>
-        </p:nvSpPr>
-        <p:spPr>
-          <a:xfrm>
-            <a:off x="548640" y="4114800"/>
-            <a:ext cx="4572000" cy="274320"/>
-          </a:xfrm>
-          <a:prstGeom prst="rect">
-            <a:avLst/>
-          </a:prstGeom>
-          <a:noFill/>
-          <a:ln/>
-        </p:spPr>
-        <p:txBody>
-          <a:bodyPr wrap="square" lIns="0" tIns="0" rIns="0" bIns="0" rtlCol="0" anchor="t"/>
-          <a:lstStyle/>
-          <a:p>
-            <a:pPr marL="0" indent="0">
-              <a:buNone/>
-            </a:pPr>
-            <a:r>
-              <a:rPr lang="en-US" sz="1300" b="1" dirty="0">
-                <a:solidFill>
-                  <a:srgbClr val="1F5F7A"/>
-                </a:solidFill>
-                <a:latin typeface="맑은 고딕" pitchFamily="34" charset="0"/>
-                <a:ea typeface="맑은 고딕" pitchFamily="34" charset="-122"/>
-                <a:cs typeface="맑은 고딕" pitchFamily="34" charset="-120"/>
-              </a:rPr>
-              <a:t>고객사 안의 의사결정 구조</a:t>
-            </a:r>
-            <a:endParaRPr lang="en-US" sz="1300" dirty="0"/>
-          </a:p>
-        </p:txBody>
-      </p:sp>
-      <p:sp>
-        <p:nvSpPr>
-          <p:cNvPr id="22" name="Shape 20"/>
+          <p:cNvPr id="19" name="Shape 17"/>
           <p:cNvSpPr/>
           <p:nvPr/>
         </p:nvSpPr>
         <p:spPr>
           <a:xfrm>
-            <a:off x="548640" y="4480560"/>
-            <a:ext cx="2670734" cy="1371600"/>
+            <a:off x="8001000" y="1874520"/>
+            <a:ext cx="3642055" cy="896112"/>
           </a:xfrm>
           <a:prstGeom prst="roundRect">
             <a:avLst>
-              <a:gd name="adj" fmla="val 5333"/>
+              <a:gd name="adj" fmla="val 8163"/>
             </a:avLst>
           </a:prstGeom>
           <a:solidFill>
@@ -12779,14 +13819,361 @@
       </p:sp>
       <p:sp>
         <p:nvSpPr>
-          <p:cNvPr id="23" name="Shape 21"/>
+          <p:cNvPr id="20" name="Shape 18"/>
           <p:cNvSpPr/>
           <p:nvPr/>
         </p:nvSpPr>
         <p:spPr>
           <a:xfrm>
-            <a:off x="731520" y="4663440"/>
-            <a:ext cx="502920" cy="502920"/>
+            <a:off x="8183880" y="2057400"/>
+            <a:ext cx="530352" cy="530352"/>
+          </a:xfrm>
+          <a:prstGeom prst="ellipse">
+            <a:avLst/>
+          </a:prstGeom>
+          <a:solidFill>
+            <a:srgbClr val="2B2D31"/>
+          </a:solidFill>
+          <a:ln w="12700">
+            <a:solidFill>
+              <a:srgbClr val="2B2D31"/>
+            </a:solidFill>
+            <a:prstDash val="solid"/>
+          </a:ln>
+        </p:spPr>
+      </p:sp>
+      <p:pic>
+        <p:nvPicPr>
+          <p:cNvPr id="21" name="Image 0" descr="preencoded.png">    </p:cNvPr>
+          <p:cNvPicPr>
+            <a:picLocks noChangeAspect="1"/>
+          </p:cNvPicPr>
+          <p:nvPr/>
+        </p:nvPicPr>
+        <p:blipFill>
+          <a:blip r:embed="rId1"/>
+          <a:stretch>
+            <a:fillRect/>
+          </a:stretch>
+        </p:blipFill>
+        <p:spPr>
+          <a:xfrm>
+            <a:off x="8321772" y="2195292"/>
+            <a:ext cx="254569" cy="254569"/>
+          </a:xfrm>
+          <a:prstGeom prst="rect">
+            <a:avLst/>
+          </a:prstGeom>
+        </p:spPr>
+      </p:pic>
+      <p:sp>
+        <p:nvSpPr>
+          <p:cNvPr id="22" name="Text 19"/>
+          <p:cNvSpPr txBox="1"/>
+          <p:nvPr/>
+        </p:nvSpPr>
+        <p:spPr>
+          <a:xfrm>
+            <a:off x="8869680" y="1965960"/>
+            <a:ext cx="2636215" cy="411480"/>
+          </a:xfrm>
+          <a:prstGeom prst="rect">
+            <a:avLst/>
+          </a:prstGeom>
+          <a:noFill/>
+          <a:ln/>
+        </p:spPr>
+        <p:txBody>
+          <a:bodyPr wrap="square" lIns="0" tIns="0" rIns="0" bIns="0" rtlCol="0" anchor="ctr"/>
+          <a:lstStyle/>
+          <a:p>
+            <a:pPr indent="0" marL="0">
+              <a:buNone/>
+            </a:pPr>
+            <a:r>
+              <a:rPr lang="en-US" sz="2200" b="1" dirty="0">
+                <a:solidFill>
+                  <a:srgbClr val="2B2D31"/>
+                </a:solidFill>
+                <a:latin typeface="맑은 고딕" pitchFamily="34" charset="0"/>
+                <a:ea typeface="맑은 고딕" pitchFamily="34" charset="-122"/>
+                <a:cs typeface="맑은 고딕" pitchFamily="34" charset="-120"/>
+              </a:rPr>
+              <a:t>연 8.4%</a:t>
+            </a:r>
+            <a:endParaRPr lang="en-US" sz="2200" dirty="0"/>
+          </a:p>
+        </p:txBody>
+      </p:sp>
+      <p:sp>
+        <p:nvSpPr>
+          <p:cNvPr id="23" name="Text 20"/>
+          <p:cNvSpPr txBox="1"/>
+          <p:nvPr/>
+        </p:nvSpPr>
+        <p:spPr>
+          <a:xfrm>
+            <a:off x="8869680" y="2377440"/>
+            <a:ext cx="2636215" cy="274320"/>
+          </a:xfrm>
+          <a:prstGeom prst="rect">
+            <a:avLst/>
+          </a:prstGeom>
+          <a:noFill/>
+          <a:ln/>
+        </p:spPr>
+        <p:txBody>
+          <a:bodyPr wrap="square" lIns="0" tIns="0" rIns="0" bIns="0" rtlCol="0" anchor="t"/>
+          <a:lstStyle/>
+          <a:p>
+            <a:pPr indent="0" marL="0">
+              <a:buNone/>
+            </a:pPr>
+            <a:r>
+              <a:rPr lang="en-US" sz="1150" dirty="0">
+                <a:solidFill>
+                  <a:srgbClr val="6B6F76"/>
+                </a:solidFill>
+                <a:latin typeface="맑은 고딕" pitchFamily="34" charset="0"/>
+                <a:ea typeface="맑은 고딕" pitchFamily="34" charset="-122"/>
+                <a:cs typeface="맑은 고딕" pitchFamily="34" charset="-120"/>
+              </a:rPr>
+              <a:t>해양 IRM 시장 성장 (~2030)</a:t>
+            </a:r>
+            <a:endParaRPr lang="en-US" sz="1150" dirty="0"/>
+          </a:p>
+        </p:txBody>
+      </p:sp>
+      <p:sp>
+        <p:nvSpPr>
+          <p:cNvPr id="24" name="Shape 21"/>
+          <p:cNvSpPr/>
+          <p:nvPr/>
+        </p:nvSpPr>
+        <p:spPr>
+          <a:xfrm>
+            <a:off x="8001000" y="2898648"/>
+            <a:ext cx="3642055" cy="896112"/>
+          </a:xfrm>
+          <a:prstGeom prst="roundRect">
+            <a:avLst>
+              <a:gd name="adj" fmla="val 8163"/>
+            </a:avLst>
+          </a:prstGeom>
+          <a:solidFill>
+            <a:srgbClr val="F3F4F6"/>
+          </a:solidFill>
+          <a:ln w="12700">
+            <a:solidFill>
+              <a:srgbClr val="F3F4F6"/>
+            </a:solidFill>
+            <a:prstDash val="solid"/>
+          </a:ln>
+        </p:spPr>
+      </p:sp>
+      <p:sp>
+        <p:nvSpPr>
+          <p:cNvPr id="25" name="Shape 22"/>
+          <p:cNvSpPr/>
+          <p:nvPr/>
+        </p:nvSpPr>
+        <p:spPr>
+          <a:xfrm>
+            <a:off x="8183880" y="3081528"/>
+            <a:ext cx="530352" cy="530352"/>
+          </a:xfrm>
+          <a:prstGeom prst="ellipse">
+            <a:avLst/>
+          </a:prstGeom>
+          <a:solidFill>
+            <a:srgbClr val="1F5F7A"/>
+          </a:solidFill>
+          <a:ln w="12700">
+            <a:solidFill>
+              <a:srgbClr val="1F5F7A"/>
+            </a:solidFill>
+            <a:prstDash val="solid"/>
+          </a:ln>
+        </p:spPr>
+      </p:sp>
+      <p:pic>
+        <p:nvPicPr>
+          <p:cNvPr id="26" name="Image 1" descr="preencoded.png">    </p:cNvPr>
+          <p:cNvPicPr>
+            <a:picLocks noChangeAspect="1"/>
+          </p:cNvPicPr>
+          <p:nvPr/>
+        </p:nvPicPr>
+        <p:blipFill>
+          <a:blip r:embed="rId2"/>
+          <a:stretch>
+            <a:fillRect/>
+          </a:stretch>
+        </p:blipFill>
+        <p:spPr>
+          <a:xfrm>
+            <a:off x="8321772" y="3219420"/>
+            <a:ext cx="254569" cy="254569"/>
+          </a:xfrm>
+          <a:prstGeom prst="rect">
+            <a:avLst/>
+          </a:prstGeom>
+        </p:spPr>
+      </p:pic>
+      <p:sp>
+        <p:nvSpPr>
+          <p:cNvPr id="27" name="Text 23"/>
+          <p:cNvSpPr txBox="1"/>
+          <p:nvPr/>
+        </p:nvSpPr>
+        <p:spPr>
+          <a:xfrm>
+            <a:off x="8869680" y="2990088"/>
+            <a:ext cx="2636215" cy="411480"/>
+          </a:xfrm>
+          <a:prstGeom prst="rect">
+            <a:avLst/>
+          </a:prstGeom>
+          <a:noFill/>
+          <a:ln/>
+        </p:spPr>
+        <p:txBody>
+          <a:bodyPr wrap="square" lIns="0" tIns="0" rIns="0" bIns="0" rtlCol="0" anchor="ctr"/>
+          <a:lstStyle/>
+          <a:p>
+            <a:pPr indent="0" marL="0">
+              <a:buNone/>
+            </a:pPr>
+            <a:r>
+              <a:rPr lang="en-US" sz="2200" b="1" dirty="0">
+                <a:solidFill>
+                  <a:srgbClr val="1F5F7A"/>
+                </a:solidFill>
+                <a:latin typeface="맑은 고딕" pitchFamily="34" charset="0"/>
+                <a:ea typeface="맑은 고딕" pitchFamily="34" charset="-122"/>
+                <a:cs typeface="맑은 고딕" pitchFamily="34" charset="-120"/>
+              </a:rPr>
+              <a:t>연 11.5%</a:t>
+            </a:r>
+            <a:endParaRPr lang="en-US" sz="2200" dirty="0"/>
+          </a:p>
+        </p:txBody>
+      </p:sp>
+      <p:sp>
+        <p:nvSpPr>
+          <p:cNvPr id="28" name="Text 24"/>
+          <p:cNvSpPr txBox="1"/>
+          <p:nvPr/>
+        </p:nvSpPr>
+        <p:spPr>
+          <a:xfrm>
+            <a:off x="8869680" y="3401568"/>
+            <a:ext cx="2636215" cy="274320"/>
+          </a:xfrm>
+          <a:prstGeom prst="rect">
+            <a:avLst/>
+          </a:prstGeom>
+          <a:noFill/>
+          <a:ln/>
+        </p:spPr>
+        <p:txBody>
+          <a:bodyPr wrap="square" lIns="0" tIns="0" rIns="0" bIns="0" rtlCol="0" anchor="t"/>
+          <a:lstStyle/>
+          <a:p>
+            <a:pPr indent="0" marL="0">
+              <a:buNone/>
+            </a:pPr>
+            <a:r>
+              <a:rPr lang="en-US" sz="1150" dirty="0">
+                <a:solidFill>
+                  <a:srgbClr val="6B6F76"/>
+                </a:solidFill>
+                <a:latin typeface="맑은 고딕" pitchFamily="34" charset="0"/>
+                <a:ea typeface="맑은 고딕" pitchFamily="34" charset="-122"/>
+                <a:cs typeface="맑은 고딕" pitchFamily="34" charset="-120"/>
+              </a:rPr>
+              <a:t>해양 드론 점검 서비스 성장 (~2034)</a:t>
+            </a:r>
+            <a:endParaRPr lang="en-US" sz="1150" dirty="0"/>
+          </a:p>
+        </p:txBody>
+      </p:sp>
+      <p:sp>
+        <p:nvSpPr>
+          <p:cNvPr id="29" name="Text 25"/>
+          <p:cNvSpPr txBox="1"/>
+          <p:nvPr/>
+        </p:nvSpPr>
+        <p:spPr>
+          <a:xfrm>
+            <a:off x="8001000" y="4041648"/>
+            <a:ext cx="3642055" cy="274320"/>
+          </a:xfrm>
+          <a:prstGeom prst="rect">
+            <a:avLst/>
+          </a:prstGeom>
+          <a:noFill/>
+          <a:ln/>
+        </p:spPr>
+        <p:txBody>
+          <a:bodyPr wrap="square" lIns="0" tIns="0" rIns="0" bIns="0" rtlCol="0" anchor="t"/>
+          <a:lstStyle/>
+          <a:p>
+            <a:pPr indent="0" marL="0">
+              <a:buNone/>
+            </a:pPr>
+            <a:r>
+              <a:rPr lang="en-US" sz="1300" b="1" dirty="0">
+                <a:solidFill>
+                  <a:srgbClr val="B5501F"/>
+                </a:solidFill>
+                <a:latin typeface="맑은 고딕" pitchFamily="34" charset="0"/>
+                <a:ea typeface="맑은 고딕" pitchFamily="34" charset="-122"/>
+                <a:cs typeface="맑은 고딕" pitchFamily="34" charset="-120"/>
+              </a:rPr>
+              <a:t>첫 타깃</a:t>
+            </a:r>
+            <a:endParaRPr lang="en-US" sz="1300" dirty="0"/>
+          </a:p>
+        </p:txBody>
+      </p:sp>
+      <p:sp>
+        <p:nvSpPr>
+          <p:cNvPr id="30" name="Shape 26"/>
+          <p:cNvSpPr/>
+          <p:nvPr/>
+        </p:nvSpPr>
+        <p:spPr>
+          <a:xfrm>
+            <a:off x="8001000" y="4389120"/>
+            <a:ext cx="3642055" cy="1188720"/>
+          </a:xfrm>
+          <a:prstGeom prst="roundRect">
+            <a:avLst>
+              <a:gd name="adj" fmla="val 6154"/>
+            </a:avLst>
+          </a:prstGeom>
+          <a:solidFill>
+            <a:srgbClr val="FBEDE4"/>
+          </a:solidFill>
+          <a:ln w="12700">
+            <a:solidFill>
+              <a:srgbClr val="FBEDE4"/>
+            </a:solidFill>
+            <a:prstDash val="solid"/>
+          </a:ln>
+        </p:spPr>
+      </p:sp>
+      <p:sp>
+        <p:nvSpPr>
+          <p:cNvPr id="31" name="Shape 27"/>
+          <p:cNvSpPr/>
+          <p:nvPr/>
+        </p:nvSpPr>
+        <p:spPr>
+          <a:xfrm>
+            <a:off x="8183880" y="4572000"/>
+            <a:ext cx="530352" cy="530352"/>
           </a:xfrm>
           <a:prstGeom prst="ellipse">
             <a:avLst/>
@@ -12804,7 +14191,7 @@
       </p:sp>
       <p:pic>
         <p:nvPicPr>
-          <p:cNvPr id="24" name="Image 0" descr="preencoded.png"/>
+          <p:cNvPr id="32" name="Image 2" descr="preencoded.png">    </p:cNvPr>
           <p:cNvPicPr>
             <a:picLocks noChangeAspect="1"/>
           </p:cNvPicPr>
@@ -12818,8 +14205,8 @@
         </p:blipFill>
         <p:spPr>
           <a:xfrm>
-            <a:off x="862279" y="4794199"/>
-            <a:ext cx="241402" cy="241402"/>
+            <a:off x="8321772" y="4709892"/>
+            <a:ext cx="254569" cy="254569"/>
           </a:xfrm>
           <a:prstGeom prst="rect">
             <a:avLst/>
@@ -12828,41 +14215,14 @@
       </p:pic>
       <p:sp>
         <p:nvSpPr>
-          <p:cNvPr id="25" name="Shape 22"/>
-          <p:cNvSpPr/>
-          <p:nvPr/>
-        </p:nvSpPr>
-        <p:spPr>
-          <a:xfrm>
-            <a:off x="1371600" y="4764024"/>
-            <a:ext cx="685800" cy="292608"/>
-          </a:xfrm>
-          <a:prstGeom prst="roundRect">
-            <a:avLst>
-              <a:gd name="adj" fmla="val 50000"/>
-            </a:avLst>
-          </a:prstGeom>
-          <a:solidFill>
-            <a:srgbClr val="B5501F"/>
-          </a:solidFill>
-          <a:ln w="12700">
-            <a:solidFill>
-              <a:srgbClr val="B5501F"/>
-            </a:solidFill>
-            <a:prstDash val="solid"/>
-          </a:ln>
-        </p:spPr>
-      </p:sp>
-      <p:sp>
-        <p:nvSpPr>
-          <p:cNvPr id="26" name="Text 23"/>
-          <p:cNvSpPr txBox="1"/>
-          <p:nvPr/>
-        </p:nvSpPr>
-        <p:spPr>
-          <a:xfrm>
-            <a:off x="1371600" y="4764024"/>
-            <a:ext cx="685800" cy="292608"/>
+          <p:cNvPr id="33" name="Text 28"/>
+          <p:cNvSpPr txBox="1"/>
+          <p:nvPr/>
+        </p:nvSpPr>
+        <p:spPr>
+          <a:xfrm>
+            <a:off x="8869680" y="4480560"/>
+            <a:ext cx="2636215" cy="457200"/>
           </a:xfrm>
           <a:prstGeom prst="rect">
             <a:avLst/>
@@ -12874,34 +14234,34 @@
           <a:bodyPr wrap="square" lIns="0" tIns="0" rIns="0" bIns="0" rtlCol="0" anchor="ctr"/>
           <a:lstStyle/>
           <a:p>
-            <a:pPr marL="0" indent="0" algn="ctr">
-              <a:buNone/>
-            </a:pPr>
-            <a:r>
-              <a:rPr lang="en-US" sz="1100" b="1" dirty="0">
-                <a:solidFill>
-                  <a:srgbClr val="FFFFFF"/>
-                </a:solidFill>
-                <a:latin typeface="맑은 고딕" pitchFamily="34" charset="0"/>
-                <a:ea typeface="맑은 고딕" pitchFamily="34" charset="-122"/>
-                <a:cs typeface="맑은 고딕" pitchFamily="34" charset="-120"/>
-              </a:rPr>
-              <a:t>결정</a:t>
-            </a:r>
-            <a:endParaRPr lang="en-US" sz="1100" dirty="0"/>
-          </a:p>
-        </p:txBody>
-      </p:sp>
-      <p:sp>
-        <p:nvSpPr>
-          <p:cNvPr id="27" name="Text 24"/>
-          <p:cNvSpPr txBox="1"/>
-          <p:nvPr/>
-        </p:nvSpPr>
-        <p:spPr>
-          <a:xfrm>
-            <a:off x="731520" y="5257800"/>
-            <a:ext cx="2396414" cy="274320"/>
+            <a:pPr indent="0" marL="0">
+              <a:buNone/>
+            </a:pPr>
+            <a:r>
+              <a:rPr lang="en-US" sz="2400" b="1" dirty="0">
+                <a:solidFill>
+                  <a:srgbClr val="B5501F"/>
+                </a:solidFill>
+                <a:latin typeface="맑은 고딕" pitchFamily="34" charset="0"/>
+                <a:ea typeface="맑은 고딕" pitchFamily="34" charset="-122"/>
+                <a:cs typeface="맑은 고딕" pitchFamily="34" charset="-120"/>
+              </a:rPr>
+              <a:t>371곳</a:t>
+            </a:r>
+            <a:endParaRPr lang="en-US" sz="2400" dirty="0"/>
+          </a:p>
+        </p:txBody>
+      </p:sp>
+      <p:sp>
+        <p:nvSpPr>
+          <p:cNvPr id="34" name="Text 29"/>
+          <p:cNvSpPr txBox="1"/>
+          <p:nvPr/>
+        </p:nvSpPr>
+        <p:spPr>
+          <a:xfrm>
+            <a:off x="8869680" y="4956048"/>
+            <a:ext cx="2636215" cy="566928"/>
           </a:xfrm>
           <a:prstGeom prst="rect">
             <a:avLst/>
@@ -12913,11 +14273,11 @@
           <a:bodyPr wrap="square" lIns="0" tIns="0" rIns="0" bIns="0" rtlCol="0" anchor="t"/>
           <a:lstStyle/>
           <a:p>
-            <a:pPr marL="0" indent="0">
-              <a:buNone/>
-            </a:pPr>
-            <a:r>
-              <a:rPr lang="en-US" sz="1350" b="1" dirty="0">
+            <a:pPr indent="0" marL="0">
+              <a:buNone/>
+            </a:pPr>
+            <a:r>
+              <a:rPr lang="en-US" sz="1150" dirty="0">
                 <a:solidFill>
                   <a:srgbClr val="2B2D31"/>
                 </a:solidFill>
@@ -12925,706 +14285,24 @@
                 <a:ea typeface="맑은 고딕" pitchFamily="34" charset="-122"/>
                 <a:cs typeface="맑은 고딕" pitchFamily="34" charset="-120"/>
               </a:rPr>
-              <a:t>CEO · 대표</a:t>
-            </a:r>
-            <a:endParaRPr lang="en-US" sz="1350" dirty="0"/>
-          </a:p>
-        </p:txBody>
-      </p:sp>
-      <p:sp>
-        <p:nvSpPr>
-          <p:cNvPr id="28" name="Text 25"/>
-          <p:cNvSpPr txBox="1"/>
-          <p:nvPr/>
-        </p:nvSpPr>
-        <p:spPr>
-          <a:xfrm>
-            <a:off x="731520" y="5513832"/>
-            <a:ext cx="2396414" cy="256032"/>
-          </a:xfrm>
-          <a:prstGeom prst="rect">
-            <a:avLst/>
-          </a:prstGeom>
-          <a:noFill/>
-          <a:ln/>
-        </p:spPr>
-        <p:txBody>
-          <a:bodyPr wrap="square" lIns="0" tIns="0" rIns="0" bIns="0" rtlCol="0" anchor="t"/>
-          <a:lstStyle/>
-          <a:p>
-            <a:pPr marL="0" indent="0">
+              <a:t>멕시코만 유인 생산 플랫폼</a:t>
+            </a:r>
+            <a:endParaRPr lang="en-US" sz="1150" dirty="0"/>
+          </a:p>
+          <a:p>
+            <a:pPr indent="0" marL="0">
               <a:buNone/>
             </a:pPr>
             <a:r>
               <a:rPr lang="en-US" sz="1150" dirty="0">
                 <a:solidFill>
-                  <a:srgbClr val="6B6F76"/>
-                </a:solidFill>
-                <a:latin typeface="맑은 고딕" pitchFamily="34" charset="0"/>
-                <a:ea typeface="맑은 고딕" pitchFamily="34" charset="-122"/>
-                <a:cs typeface="맑은 고딕" pitchFamily="34" charset="-120"/>
-              </a:rPr>
-              <a:t>안전 · 비용 · 규제 대응</a:t>
-            </a:r>
-            <a:endParaRPr lang="en-US" sz="1150" dirty="0"/>
-          </a:p>
-        </p:txBody>
-      </p:sp>
-      <p:sp>
-        <p:nvSpPr>
-          <p:cNvPr id="29" name="Shape 26"/>
-          <p:cNvSpPr/>
-          <p:nvPr/>
-        </p:nvSpPr>
-        <p:spPr>
-          <a:xfrm>
-            <a:off x="3356534" y="4480560"/>
-            <a:ext cx="2670734" cy="1371600"/>
-          </a:xfrm>
-          <a:prstGeom prst="roundRect">
-            <a:avLst>
-              <a:gd name="adj" fmla="val 5333"/>
-            </a:avLst>
-          </a:prstGeom>
-          <a:solidFill>
-            <a:srgbClr val="F3F4F6"/>
-          </a:solidFill>
-          <a:ln w="12700">
-            <a:solidFill>
-              <a:srgbClr val="F3F4F6"/>
-            </a:solidFill>
-            <a:prstDash val="solid"/>
-          </a:ln>
-        </p:spPr>
-      </p:sp>
-      <p:sp>
-        <p:nvSpPr>
-          <p:cNvPr id="30" name="Shape 27"/>
-          <p:cNvSpPr/>
-          <p:nvPr/>
-        </p:nvSpPr>
-        <p:spPr>
-          <a:xfrm>
-            <a:off x="3539414" y="4663440"/>
-            <a:ext cx="502920" cy="502920"/>
-          </a:xfrm>
-          <a:prstGeom prst="ellipse">
-            <a:avLst/>
-          </a:prstGeom>
-          <a:solidFill>
-            <a:srgbClr val="1F5F7A"/>
-          </a:solidFill>
-          <a:ln w="12700">
-            <a:solidFill>
-              <a:srgbClr val="1F5F7A"/>
-            </a:solidFill>
-            <a:prstDash val="solid"/>
-          </a:ln>
-        </p:spPr>
-      </p:sp>
-      <p:pic>
-        <p:nvPicPr>
-          <p:cNvPr id="31" name="Image 1" descr="preencoded.png"/>
-          <p:cNvPicPr>
-            <a:picLocks noChangeAspect="1"/>
-          </p:cNvPicPr>
-          <p:nvPr/>
-        </p:nvPicPr>
-        <p:blipFill>
-          <a:blip r:embed="rId4"/>
-          <a:stretch>
-            <a:fillRect/>
-          </a:stretch>
-        </p:blipFill>
-        <p:spPr>
-          <a:xfrm>
-            <a:off x="3670173" y="4794199"/>
-            <a:ext cx="241402" cy="241402"/>
-          </a:xfrm>
-          <a:prstGeom prst="rect">
-            <a:avLst/>
-          </a:prstGeom>
-        </p:spPr>
-      </p:pic>
-      <p:sp>
-        <p:nvSpPr>
-          <p:cNvPr id="32" name="Shape 28"/>
-          <p:cNvSpPr/>
-          <p:nvPr/>
-        </p:nvSpPr>
-        <p:spPr>
-          <a:xfrm>
-            <a:off x="4179494" y="4764024"/>
-            <a:ext cx="685800" cy="292608"/>
-          </a:xfrm>
-          <a:prstGeom prst="roundRect">
-            <a:avLst>
-              <a:gd name="adj" fmla="val 50000"/>
-            </a:avLst>
-          </a:prstGeom>
-          <a:solidFill>
-            <a:srgbClr val="1F5F7A"/>
-          </a:solidFill>
-          <a:ln w="12700">
-            <a:solidFill>
-              <a:srgbClr val="1F5F7A"/>
-            </a:solidFill>
-            <a:prstDash val="solid"/>
-          </a:ln>
-        </p:spPr>
-      </p:sp>
-      <p:sp>
-        <p:nvSpPr>
-          <p:cNvPr id="33" name="Text 29"/>
-          <p:cNvSpPr txBox="1"/>
-          <p:nvPr/>
-        </p:nvSpPr>
-        <p:spPr>
-          <a:xfrm>
-            <a:off x="4179494" y="4764024"/>
-            <a:ext cx="685800" cy="292608"/>
-          </a:xfrm>
-          <a:prstGeom prst="rect">
-            <a:avLst/>
-          </a:prstGeom>
-          <a:noFill/>
-          <a:ln/>
-        </p:spPr>
-        <p:txBody>
-          <a:bodyPr wrap="square" lIns="0" tIns="0" rIns="0" bIns="0" rtlCol="0" anchor="ctr"/>
-          <a:lstStyle/>
-          <a:p>
-            <a:pPr marL="0" indent="0" algn="ctr">
-              <a:buNone/>
-            </a:pPr>
-            <a:r>
-              <a:rPr lang="en-US" sz="1100" b="1" dirty="0">
-                <a:solidFill>
-                  <a:srgbClr val="FFFFFF"/>
-                </a:solidFill>
-                <a:latin typeface="맑은 고딕" pitchFamily="34" charset="0"/>
-                <a:ea typeface="맑은 고딕" pitchFamily="34" charset="-122"/>
-                <a:cs typeface="맑은 고딕" pitchFamily="34" charset="-120"/>
-              </a:rPr>
-              <a:t>추천</a:t>
-            </a:r>
-            <a:endParaRPr lang="en-US" sz="1100" dirty="0"/>
-          </a:p>
-        </p:txBody>
-      </p:sp>
-      <p:sp>
-        <p:nvSpPr>
-          <p:cNvPr id="34" name="Text 30"/>
-          <p:cNvSpPr txBox="1"/>
-          <p:nvPr/>
-        </p:nvSpPr>
-        <p:spPr>
-          <a:xfrm>
-            <a:off x="3539414" y="5257800"/>
-            <a:ext cx="2396414" cy="274320"/>
-          </a:xfrm>
-          <a:prstGeom prst="rect">
-            <a:avLst/>
-          </a:prstGeom>
-          <a:noFill/>
-          <a:ln/>
-        </p:spPr>
-        <p:txBody>
-          <a:bodyPr wrap="square" lIns="0" tIns="0" rIns="0" bIns="0" rtlCol="0" anchor="t"/>
-          <a:lstStyle/>
-          <a:p>
-            <a:pPr marL="0" indent="0">
-              <a:buNone/>
-            </a:pPr>
-            <a:r>
-              <a:rPr lang="en-US" sz="1350" b="1" dirty="0">
-                <a:solidFill>
                   <a:srgbClr val="2B2D31"/>
                 </a:solidFill>
                 <a:latin typeface="맑은 고딕" pitchFamily="34" charset="0"/>
                 <a:ea typeface="맑은 고딕" pitchFamily="34" charset="-122"/>
                 <a:cs typeface="맑은 고딕" pitchFamily="34" charset="-120"/>
               </a:rPr>
-              <a:t>부식 엔지니어링 매니저</a:t>
-            </a:r>
-            <a:endParaRPr lang="en-US" sz="1350" dirty="0"/>
-          </a:p>
-        </p:txBody>
-      </p:sp>
-      <p:sp>
-        <p:nvSpPr>
-          <p:cNvPr id="35" name="Text 31"/>
-          <p:cNvSpPr txBox="1"/>
-          <p:nvPr/>
-        </p:nvSpPr>
-        <p:spPr>
-          <a:xfrm>
-            <a:off x="3539414" y="5513832"/>
-            <a:ext cx="2396414" cy="256032"/>
-          </a:xfrm>
-          <a:prstGeom prst="rect">
-            <a:avLst/>
-          </a:prstGeom>
-          <a:noFill/>
-          <a:ln/>
-        </p:spPr>
-        <p:txBody>
-          <a:bodyPr wrap="square" lIns="0" tIns="0" rIns="0" bIns="0" rtlCol="0" anchor="t"/>
-          <a:lstStyle/>
-          <a:p>
-            <a:pPr marL="0" indent="0">
-              <a:buNone/>
-            </a:pPr>
-            <a:r>
-              <a:rPr lang="en-US" sz="1150" dirty="0">
-                <a:solidFill>
-                  <a:srgbClr val="6B6F76"/>
-                </a:solidFill>
-                <a:latin typeface="맑은 고딕" pitchFamily="34" charset="0"/>
-                <a:ea typeface="맑은 고딕" pitchFamily="34" charset="-122"/>
-                <a:cs typeface="맑은 고딕" pitchFamily="34" charset="-120"/>
-              </a:rPr>
-              <a:t>기술 검토 후 추천</a:t>
-            </a:r>
-            <a:endParaRPr lang="en-US" sz="1150" dirty="0"/>
-          </a:p>
-        </p:txBody>
-      </p:sp>
-      <p:sp>
-        <p:nvSpPr>
-          <p:cNvPr id="36" name="Shape 32"/>
-          <p:cNvSpPr/>
-          <p:nvPr/>
-        </p:nvSpPr>
-        <p:spPr>
-          <a:xfrm>
-            <a:off x="6164428" y="4480560"/>
-            <a:ext cx="2670734" cy="1371600"/>
-          </a:xfrm>
-          <a:prstGeom prst="roundRect">
-            <a:avLst>
-              <a:gd name="adj" fmla="val 5333"/>
-            </a:avLst>
-          </a:prstGeom>
-          <a:solidFill>
-            <a:srgbClr val="F3F4F6"/>
-          </a:solidFill>
-          <a:ln w="12700">
-            <a:solidFill>
-              <a:srgbClr val="F3F4F6"/>
-            </a:solidFill>
-            <a:prstDash val="solid"/>
-          </a:ln>
-        </p:spPr>
-      </p:sp>
-      <p:sp>
-        <p:nvSpPr>
-          <p:cNvPr id="37" name="Shape 33"/>
-          <p:cNvSpPr/>
-          <p:nvPr/>
-        </p:nvSpPr>
-        <p:spPr>
-          <a:xfrm>
-            <a:off x="6347308" y="4663440"/>
-            <a:ext cx="502920" cy="502920"/>
-          </a:xfrm>
-          <a:prstGeom prst="ellipse">
-            <a:avLst/>
-          </a:prstGeom>
-          <a:solidFill>
-            <a:srgbClr val="1F5F7A"/>
-          </a:solidFill>
-          <a:ln w="12700">
-            <a:solidFill>
-              <a:srgbClr val="1F5F7A"/>
-            </a:solidFill>
-            <a:prstDash val="solid"/>
-          </a:ln>
-        </p:spPr>
-      </p:sp>
-      <p:pic>
-        <p:nvPicPr>
-          <p:cNvPr id="38" name="Image 2" descr="preencoded.png"/>
-          <p:cNvPicPr>
-            <a:picLocks noChangeAspect="1"/>
-          </p:cNvPicPr>
-          <p:nvPr/>
-        </p:nvPicPr>
-        <p:blipFill>
-          <a:blip r:embed="rId5"/>
-          <a:stretch>
-            <a:fillRect/>
-          </a:stretch>
-        </p:blipFill>
-        <p:spPr>
-          <a:xfrm>
-            <a:off x="6478067" y="4794199"/>
-            <a:ext cx="241402" cy="241402"/>
-          </a:xfrm>
-          <a:prstGeom prst="rect">
-            <a:avLst/>
-          </a:prstGeom>
-        </p:spPr>
-      </p:pic>
-      <p:sp>
-        <p:nvSpPr>
-          <p:cNvPr id="39" name="Shape 34"/>
-          <p:cNvSpPr/>
-          <p:nvPr/>
-        </p:nvSpPr>
-        <p:spPr>
-          <a:xfrm>
-            <a:off x="6987388" y="4764024"/>
-            <a:ext cx="685800" cy="292608"/>
-          </a:xfrm>
-          <a:prstGeom prst="roundRect">
-            <a:avLst>
-              <a:gd name="adj" fmla="val 50000"/>
-            </a:avLst>
-          </a:prstGeom>
-          <a:solidFill>
-            <a:srgbClr val="1F5F7A"/>
-          </a:solidFill>
-          <a:ln w="12700">
-            <a:solidFill>
-              <a:srgbClr val="1F5F7A"/>
-            </a:solidFill>
-            <a:prstDash val="solid"/>
-          </a:ln>
-        </p:spPr>
-      </p:sp>
-      <p:sp>
-        <p:nvSpPr>
-          <p:cNvPr id="40" name="Text 35"/>
-          <p:cNvSpPr txBox="1"/>
-          <p:nvPr/>
-        </p:nvSpPr>
-        <p:spPr>
-          <a:xfrm>
-            <a:off x="6987388" y="4764024"/>
-            <a:ext cx="685800" cy="292608"/>
-          </a:xfrm>
-          <a:prstGeom prst="rect">
-            <a:avLst/>
-          </a:prstGeom>
-          <a:noFill/>
-          <a:ln/>
-        </p:spPr>
-        <p:txBody>
-          <a:bodyPr wrap="square" lIns="0" tIns="0" rIns="0" bIns="0" rtlCol="0" anchor="ctr"/>
-          <a:lstStyle/>
-          <a:p>
-            <a:pPr marL="0" indent="0" algn="ctr">
-              <a:buNone/>
-            </a:pPr>
-            <a:r>
-              <a:rPr lang="en-US" sz="1100" b="1" dirty="0">
-                <a:solidFill>
-                  <a:srgbClr val="FFFFFF"/>
-                </a:solidFill>
-                <a:latin typeface="맑은 고딕" pitchFamily="34" charset="0"/>
-                <a:ea typeface="맑은 고딕" pitchFamily="34" charset="-122"/>
-                <a:cs typeface="맑은 고딕" pitchFamily="34" charset="-120"/>
-              </a:rPr>
-              <a:t>사용</a:t>
-            </a:r>
-            <a:endParaRPr lang="en-US" sz="1100" dirty="0"/>
-          </a:p>
-        </p:txBody>
-      </p:sp>
-      <p:sp>
-        <p:nvSpPr>
-          <p:cNvPr id="41" name="Text 36"/>
-          <p:cNvSpPr txBox="1"/>
-          <p:nvPr/>
-        </p:nvSpPr>
-        <p:spPr>
-          <a:xfrm>
-            <a:off x="6347308" y="5257800"/>
-            <a:ext cx="2396414" cy="274320"/>
-          </a:xfrm>
-          <a:prstGeom prst="rect">
-            <a:avLst/>
-          </a:prstGeom>
-          <a:noFill/>
-          <a:ln/>
-        </p:spPr>
-        <p:txBody>
-          <a:bodyPr wrap="square" lIns="0" tIns="0" rIns="0" bIns="0" rtlCol="0" anchor="t"/>
-          <a:lstStyle/>
-          <a:p>
-            <a:pPr marL="0" indent="0">
-              <a:buNone/>
-            </a:pPr>
-            <a:r>
-              <a:rPr lang="en-US" sz="1350" b="1" dirty="0">
-                <a:solidFill>
-                  <a:srgbClr val="2B2D31"/>
-                </a:solidFill>
-                <a:latin typeface="맑은 고딕" pitchFamily="34" charset="0"/>
-                <a:ea typeface="맑은 고딕" pitchFamily="34" charset="-122"/>
-                <a:cs typeface="맑은 고딕" pitchFamily="34" charset="-120"/>
-              </a:rPr>
-              <a:t>현장 엔지니어 · 검사원</a:t>
-            </a:r>
-            <a:endParaRPr lang="en-US" sz="1350" dirty="0"/>
-          </a:p>
-        </p:txBody>
-      </p:sp>
-      <p:sp>
-        <p:nvSpPr>
-          <p:cNvPr id="42" name="Text 37"/>
-          <p:cNvSpPr txBox="1"/>
-          <p:nvPr/>
-        </p:nvSpPr>
-        <p:spPr>
-          <a:xfrm>
-            <a:off x="6347308" y="5513832"/>
-            <a:ext cx="2396414" cy="256032"/>
-          </a:xfrm>
-          <a:prstGeom prst="rect">
-            <a:avLst/>
-          </a:prstGeom>
-          <a:noFill/>
-          <a:ln/>
-        </p:spPr>
-        <p:txBody>
-          <a:bodyPr wrap="square" lIns="0" tIns="0" rIns="0" bIns="0" rtlCol="0" anchor="t"/>
-          <a:lstStyle/>
-          <a:p>
-            <a:pPr marL="0" indent="0">
-              <a:buNone/>
-            </a:pPr>
-            <a:r>
-              <a:rPr lang="en-US" sz="1150" dirty="0">
-                <a:solidFill>
-                  <a:srgbClr val="6B6F76"/>
-                </a:solidFill>
-                <a:latin typeface="맑은 고딕" pitchFamily="34" charset="0"/>
-                <a:ea typeface="맑은 고딕" pitchFamily="34" charset="-122"/>
-                <a:cs typeface="맑은 고딕" pitchFamily="34" charset="-120"/>
-              </a:rPr>
-              <a:t>점검 동선 · 출동 결정</a:t>
-            </a:r>
-            <a:endParaRPr lang="en-US" sz="1150" dirty="0"/>
-          </a:p>
-        </p:txBody>
-      </p:sp>
-      <p:sp>
-        <p:nvSpPr>
-          <p:cNvPr id="43" name="Shape 38"/>
-          <p:cNvSpPr/>
-          <p:nvPr/>
-        </p:nvSpPr>
-        <p:spPr>
-          <a:xfrm>
-            <a:off x="8972321" y="4480560"/>
-            <a:ext cx="2670734" cy="1371600"/>
-          </a:xfrm>
-          <a:prstGeom prst="roundRect">
-            <a:avLst>
-              <a:gd name="adj" fmla="val 5333"/>
-            </a:avLst>
-          </a:prstGeom>
-          <a:solidFill>
-            <a:srgbClr val="F3F4F6"/>
-          </a:solidFill>
-          <a:ln w="12700">
-            <a:solidFill>
-              <a:srgbClr val="F3F4F6"/>
-            </a:solidFill>
-            <a:prstDash val="solid"/>
-          </a:ln>
-        </p:spPr>
-      </p:sp>
-      <p:sp>
-        <p:nvSpPr>
-          <p:cNvPr id="44" name="Shape 39"/>
-          <p:cNvSpPr/>
-          <p:nvPr/>
-        </p:nvSpPr>
-        <p:spPr>
-          <a:xfrm>
-            <a:off x="9155201" y="4663440"/>
-            <a:ext cx="502920" cy="502920"/>
-          </a:xfrm>
-          <a:prstGeom prst="ellipse">
-            <a:avLst/>
-          </a:prstGeom>
-          <a:solidFill>
-            <a:srgbClr val="6B6F76"/>
-          </a:solidFill>
-          <a:ln w="12700">
-            <a:solidFill>
-              <a:srgbClr val="6B6F76"/>
-            </a:solidFill>
-            <a:prstDash val="solid"/>
-          </a:ln>
-        </p:spPr>
-      </p:sp>
-      <p:pic>
-        <p:nvPicPr>
-          <p:cNvPr id="45" name="Image 3" descr="preencoded.png"/>
-          <p:cNvPicPr>
-            <a:picLocks noChangeAspect="1"/>
-          </p:cNvPicPr>
-          <p:nvPr/>
-        </p:nvPicPr>
-        <p:blipFill>
-          <a:blip r:embed="rId6"/>
-          <a:stretch>
-            <a:fillRect/>
-          </a:stretch>
-        </p:blipFill>
-        <p:spPr>
-          <a:xfrm>
-            <a:off x="9285961" y="4794199"/>
-            <a:ext cx="241402" cy="241402"/>
-          </a:xfrm>
-          <a:prstGeom prst="rect">
-            <a:avLst/>
-          </a:prstGeom>
-        </p:spPr>
-      </p:pic>
-      <p:sp>
-        <p:nvSpPr>
-          <p:cNvPr id="46" name="Shape 40"/>
-          <p:cNvSpPr/>
-          <p:nvPr/>
-        </p:nvSpPr>
-        <p:spPr>
-          <a:xfrm>
-            <a:off x="9795281" y="4764024"/>
-            <a:ext cx="685800" cy="292608"/>
-          </a:xfrm>
-          <a:prstGeom prst="roundRect">
-            <a:avLst>
-              <a:gd name="adj" fmla="val 50000"/>
-            </a:avLst>
-          </a:prstGeom>
-          <a:solidFill>
-            <a:srgbClr val="6B6F76"/>
-          </a:solidFill>
-          <a:ln w="12700">
-            <a:solidFill>
-              <a:srgbClr val="6B6F76"/>
-            </a:solidFill>
-            <a:prstDash val="solid"/>
-          </a:ln>
-        </p:spPr>
-      </p:sp>
-      <p:sp>
-        <p:nvSpPr>
-          <p:cNvPr id="47" name="Text 41"/>
-          <p:cNvSpPr txBox="1"/>
-          <p:nvPr/>
-        </p:nvSpPr>
-        <p:spPr>
-          <a:xfrm>
-            <a:off x="9795281" y="4764024"/>
-            <a:ext cx="685800" cy="292608"/>
-          </a:xfrm>
-          <a:prstGeom prst="rect">
-            <a:avLst/>
-          </a:prstGeom>
-          <a:noFill/>
-          <a:ln/>
-        </p:spPr>
-        <p:txBody>
-          <a:bodyPr wrap="square" lIns="0" tIns="0" rIns="0" bIns="0" rtlCol="0" anchor="ctr"/>
-          <a:lstStyle/>
-          <a:p>
-            <a:pPr marL="0" indent="0" algn="ctr">
-              <a:buNone/>
-            </a:pPr>
-            <a:r>
-              <a:rPr lang="en-US" sz="1100" b="1" dirty="0">
-                <a:solidFill>
-                  <a:srgbClr val="FFFFFF"/>
-                </a:solidFill>
-                <a:latin typeface="맑은 고딕" pitchFamily="34" charset="0"/>
-                <a:ea typeface="맑은 고딕" pitchFamily="34" charset="-122"/>
-                <a:cs typeface="맑은 고딕" pitchFamily="34" charset="-120"/>
-              </a:rPr>
-              <a:t>영향</a:t>
-            </a:r>
-            <a:endParaRPr lang="en-US" sz="1100" dirty="0"/>
-          </a:p>
-        </p:txBody>
-      </p:sp>
-      <p:sp>
-        <p:nvSpPr>
-          <p:cNvPr id="48" name="Text 42"/>
-          <p:cNvSpPr txBox="1"/>
-          <p:nvPr/>
-        </p:nvSpPr>
-        <p:spPr>
-          <a:xfrm>
-            <a:off x="9155201" y="5257800"/>
-            <a:ext cx="2396414" cy="274320"/>
-          </a:xfrm>
-          <a:prstGeom prst="rect">
-            <a:avLst/>
-          </a:prstGeom>
-          <a:noFill/>
-          <a:ln/>
-        </p:spPr>
-        <p:txBody>
-          <a:bodyPr wrap="square" lIns="0" tIns="0" rIns="0" bIns="0" rtlCol="0" anchor="t"/>
-          <a:lstStyle/>
-          <a:p>
-            <a:pPr marL="0" indent="0">
-              <a:buNone/>
-            </a:pPr>
-            <a:r>
-              <a:rPr lang="en-US" sz="1350" b="1" dirty="0">
-                <a:solidFill>
-                  <a:srgbClr val="2B2D31"/>
-                </a:solidFill>
-                <a:latin typeface="맑은 고딕" pitchFamily="34" charset="0"/>
-                <a:ea typeface="맑은 고딕" pitchFamily="34" charset="-122"/>
-                <a:cs typeface="맑은 고딕" pitchFamily="34" charset="-120"/>
-              </a:rPr>
-              <a:t>방식 전문 업체 · 연구자</a:t>
-            </a:r>
-            <a:endParaRPr lang="en-US" sz="1350" dirty="0"/>
-          </a:p>
-        </p:txBody>
-      </p:sp>
-      <p:sp>
-        <p:nvSpPr>
-          <p:cNvPr id="49" name="Text 43"/>
-          <p:cNvSpPr txBox="1"/>
-          <p:nvPr/>
-        </p:nvSpPr>
-        <p:spPr>
-          <a:xfrm>
-            <a:off x="9155201" y="5513832"/>
-            <a:ext cx="2396414" cy="256032"/>
-          </a:xfrm>
-          <a:prstGeom prst="rect">
-            <a:avLst/>
-          </a:prstGeom>
-          <a:noFill/>
-          <a:ln/>
-        </p:spPr>
-        <p:txBody>
-          <a:bodyPr wrap="square" lIns="0" tIns="0" rIns="0" bIns="0" rtlCol="0" anchor="t"/>
-          <a:lstStyle/>
-          <a:p>
-            <a:pPr marL="0" indent="0">
-              <a:buNone/>
-            </a:pPr>
-            <a:r>
-              <a:rPr lang="en-US" sz="1150" dirty="0">
-                <a:solidFill>
-                  <a:srgbClr val="6B6F76"/>
-                </a:solidFill>
-                <a:latin typeface="맑은 고딕" pitchFamily="34" charset="0"/>
-                <a:ea typeface="맑은 고딕" pitchFamily="34" charset="-122"/>
-                <a:cs typeface="맑은 고딕" pitchFamily="34" charset="-120"/>
-              </a:rPr>
-              <a:t>기술 교차 검증 · 소개</a:t>
+              <a:t>매년 Level I 점검 대상 (BSEE, 2024)</a:t>
             </a:r>
             <a:endParaRPr lang="en-US" sz="1150" dirty="0"/>
           </a:p>

--- a/MLC_IR_A-STREAM2026_v3.pptx
+++ b/MLC_IR_A-STREAM2026_v3.pptx
@@ -1136,7 +1136,7 @@
           <a:p>
             <a:r>
               <a:rPr lang="en-US" dirty="0"/>
-              <a:t>이 시장은 규제가 반복 수요를 만듭니다. 미국 해양 플랫폼은 매년, 3~5년, 6~10년 주기로 점검이 의무입니다. 인터뷰에서 확인한 구매 동기는 안전, 비용, 규제와 보험 대응 세 가지였습니다. MLC는 그중 비용에서 바로 효과를 냅니다. 위험한 지점부터 배를 보내 선박 용선과 기상 대기 일수를 줄이고, 필요한 구간에만 리프트와 비계를 빌리고, 로프 액세스 팀을 보낼지 미리 판단하고, 점검 기록도 사진 리포트로 정리합니다.</a:t>
+              <a:t>이 시장은 법이 반복 수요를 만듭니다. 국내 「시설물안전법」에 따라 관리 대상 시설물 16만여 곳은 반기마다 정기안전점검, 1~3년마다 정밀안전점검을 받고, 제1종 시설물은 4~6년마다 정밀안전진단까지 받아야 합니다. 미국 현장 인터뷰에서 확인한 구매 동기는 안전, 비용, 규제 대응이었고, MLC는 그중 비용에서 바로 효과를 냅니다. 위험한 지점부터 배를 보내고, 필요한 구간에만 리프트와 비계를 빌리고, 로프 액세스 출동 여부를 미리 판단하고, 점검 기록도 사진 리포트로 정리합니다.</a:t>
             </a:r>
           </a:p>
         </p:txBody>
@@ -1223,13 +1223,13 @@
           <a:p>
             <a:r>
               <a:rPr lang="en-US" dirty="0"/>
-              <a:t>[약 30초]</a:t>
+              <a:t>[약 25초]</a:t>
             </a:r>
           </a:p>
           <a:p>
             <a:r>
               <a:rPr lang="en-US" dirty="0"/>
-              <a:t>시장 규모입니다. 전체 시장은 글로벌 해양 점검·보수·유지 시장으로 2024년 136억 달러, 연 8.4%씩 성장하고 있습니다. 그중 저희가 바로 들어갈 수 있는 해양 드론 점검 서비스 시장은 15억 달러로, 연 11.5%씩 더 빠르게 커지고 있습니다. 저희는 3년 안에 이 시장의 1%, 1,500만 달러를 목표로 하고, 첫 타깃은 매년 점검을 받아야 하는 멕시코만 유인 생산 플랫폼 371곳입니다.</a:t>
+              <a:t>시장 규모입니다. 국내 시설물 안전점검·진단 시장은 2021년 5,192억 원으로, 연 15%씩 성장해 왔습니다. 그중 드론 측량·점검·관측 시장이 1,667억 원이고, 저희는 3년 안에 이 시장의 1%, 17억 원을 목표로 합니다. 해양·항만 강구조물과 해상풍력부터 시작하겠습니다.</a:t>
             </a:r>
           </a:p>
         </p:txBody>
@@ -11421,7 +11421,6 @@
         <a:solidFill>
           <a:srgbClr val="FFFFFF"/>
         </a:solidFill>
-        <a:effectLst/>
       </p:bgPr>
     </p:bg>
     <p:spTree>
@@ -11459,11 +11458,11 @@
           <a:bodyPr wrap="square" lIns="0" tIns="0" rIns="0" bIns="0" rtlCol="0" anchor="t"/>
           <a:lstStyle/>
           <a:p>
-            <a:pPr marL="0" indent="0">
-              <a:buNone/>
-            </a:pPr>
-            <a:r>
-              <a:rPr lang="en-US" sz="1200" b="1" kern="0" spc="100" dirty="0">
+            <a:pPr indent="0" marL="0">
+              <a:buNone/>
+            </a:pPr>
+            <a:r>
+              <a:rPr lang="en-US" sz="1200" b="1" spc="100" kern="0" dirty="0">
                 <a:solidFill>
                   <a:srgbClr val="B5501F"/>
                 </a:solidFill>
@@ -11498,7 +11497,7 @@
           <a:bodyPr wrap="square" lIns="0" tIns="0" rIns="0" bIns="0" rtlCol="0" anchor="ctr"/>
           <a:lstStyle/>
           <a:p>
-            <a:pPr marL="0" indent="0">
+            <a:pPr indent="0" marL="0">
               <a:buNone/>
             </a:pPr>
             <a:r>
@@ -11537,7 +11536,7 @@
           <a:bodyPr wrap="square" lIns="0" tIns="0" rIns="0" bIns="0" rtlCol="0" anchor="t"/>
           <a:lstStyle/>
           <a:p>
-            <a:pPr marL="0" indent="0">
+            <a:pPr indent="0" marL="0">
               <a:buNone/>
             </a:pPr>
             <a:r>
@@ -11576,7 +11575,7 @@
           <a:bodyPr wrap="square" lIns="0" tIns="0" rIns="0" bIns="0" rtlCol="0" anchor="t"/>
           <a:lstStyle/>
           <a:p>
-            <a:pPr marL="0" indent="0" algn="r">
+            <a:pPr algn="r" indent="0" marL="0">
               <a:buNone/>
             </a:pPr>
             <a:r>
@@ -11642,7 +11641,7 @@
           <a:bodyPr wrap="square" lIns="0" tIns="0" rIns="0" bIns="0" rtlCol="0" anchor="t"/>
           <a:lstStyle/>
           <a:p>
-            <a:pPr marL="0" indent="0">
+            <a:pPr indent="0" marL="0">
               <a:buNone/>
             </a:pPr>
             <a:r>
@@ -11654,7 +11653,7 @@
                 <a:ea typeface="맑은 고딕" pitchFamily="34" charset="-122"/>
                 <a:cs typeface="맑은 고딕" pitchFamily="34" charset="-120"/>
               </a:rPr>
-              <a:t>Level I</a:t>
+              <a:t>정기안전점검</a:t>
             </a:r>
             <a:endParaRPr lang="en-US" sz="1400" dirty="0"/>
           </a:p>
@@ -11681,7 +11680,7 @@
           <a:bodyPr wrap="square" lIns="0" tIns="0" rIns="0" bIns="0" rtlCol="0" anchor="t"/>
           <a:lstStyle/>
           <a:p>
-            <a:pPr marL="0" indent="0" algn="r">
+            <a:pPr algn="r" indent="0" marL="0">
               <a:buNone/>
             </a:pPr>
             <a:r>
@@ -11693,7 +11692,7 @@
                 <a:ea typeface="맑은 고딕" pitchFamily="34" charset="-122"/>
                 <a:cs typeface="맑은 고딕" pitchFamily="34" charset="-120"/>
               </a:rPr>
-              <a:t>매년</a:t>
+              <a:t>반기 1회</a:t>
             </a:r>
             <a:endParaRPr lang="en-US" sz="2200" dirty="0"/>
           </a:p>
@@ -11720,7 +11719,7 @@
           <a:bodyPr wrap="square" lIns="0" tIns="0" rIns="0" bIns="0" rtlCol="0" anchor="t"/>
           <a:lstStyle/>
           <a:p>
-            <a:pPr marL="0" indent="0">
+            <a:pPr indent="0" marL="0">
               <a:buNone/>
             </a:pPr>
             <a:r>
@@ -11732,7 +11731,7 @@
                 <a:ea typeface="맑은 고딕" pitchFamily="34" charset="-122"/>
                 <a:cs typeface="맑은 고딕" pitchFamily="34" charset="-120"/>
               </a:rPr>
-              <a:t>수상 육안 점검</a:t>
+              <a:t>육안 중심 상태 점검</a:t>
             </a:r>
             <a:endParaRPr lang="en-US" sz="1600" dirty="0"/>
           </a:p>
@@ -11759,7 +11758,7 @@
           <a:bodyPr wrap="square" lIns="0" tIns="0" rIns="0" bIns="0" rtlCol="0" anchor="t"/>
           <a:lstStyle/>
           <a:p>
-            <a:pPr marL="0" indent="0">
+            <a:pPr indent="0" marL="0">
               <a:buNone/>
             </a:pPr>
             <a:r>
@@ -11771,7 +11770,7 @@
                 <a:ea typeface="맑은 고딕" pitchFamily="34" charset="-122"/>
                 <a:cs typeface="맑은 고딕" pitchFamily="34" charset="-120"/>
               </a:rPr>
-              <a:t>도장 · 구조 · 비말대 육안 스캔</a:t>
+              <a:t>A · B · C등급 기준</a:t>
             </a:r>
             <a:endParaRPr lang="en-US" sz="1250" dirty="0"/>
           </a:p>
@@ -11825,7 +11824,7 @@
           <a:bodyPr wrap="square" lIns="0" tIns="0" rIns="0" bIns="0" rtlCol="0" anchor="t"/>
           <a:lstStyle/>
           <a:p>
-            <a:pPr marL="0" indent="0">
+            <a:pPr indent="0" marL="0">
               <a:buNone/>
             </a:pPr>
             <a:r>
@@ -11837,7 +11836,7 @@
                 <a:ea typeface="맑은 고딕" pitchFamily="34" charset="-122"/>
                 <a:cs typeface="맑은 고딕" pitchFamily="34" charset="-120"/>
               </a:rPr>
-              <a:t>Level II</a:t>
+              <a:t>정밀안전점검</a:t>
             </a:r>
             <a:endParaRPr lang="en-US" sz="1400" dirty="0"/>
           </a:p>
@@ -11864,7 +11863,7 @@
           <a:bodyPr wrap="square" lIns="0" tIns="0" rIns="0" bIns="0" rtlCol="0" anchor="t"/>
           <a:lstStyle/>
           <a:p>
-            <a:pPr marL="0" indent="0" algn="r">
+            <a:pPr algn="r" indent="0" marL="0">
               <a:buNone/>
             </a:pPr>
             <a:r>
@@ -11876,7 +11875,7 @@
                 <a:ea typeface="맑은 고딕" pitchFamily="34" charset="-122"/>
                 <a:cs typeface="맑은 고딕" pitchFamily="34" charset="-120"/>
               </a:rPr>
-              <a:t>3–5년</a:t>
+              <a:t>1–3년</a:t>
             </a:r>
             <a:endParaRPr lang="en-US" sz="2200" dirty="0"/>
           </a:p>
@@ -11903,7 +11902,7 @@
           <a:bodyPr wrap="square" lIns="0" tIns="0" rIns="0" bIns="0" rtlCol="0" anchor="t"/>
           <a:lstStyle/>
           <a:p>
-            <a:pPr marL="0" indent="0">
+            <a:pPr indent="0" marL="0">
               <a:buNone/>
             </a:pPr>
             <a:r>
@@ -11915,7 +11914,7 @@
                 <a:ea typeface="맑은 고딕" pitchFamily="34" charset="-122"/>
                 <a:cs typeface="맑은 고딕" pitchFamily="34" charset="-120"/>
               </a:rPr>
-              <a:t>수중 일반 점검</a:t>
+              <a:t>근접 육안 · 측정 장비 점검</a:t>
             </a:r>
             <a:endParaRPr lang="en-US" sz="1600" dirty="0"/>
           </a:p>
@@ -11942,7 +11941,7 @@
           <a:bodyPr wrap="square" lIns="0" tIns="0" rIns="0" bIns="0" rtlCol="0" anchor="t"/>
           <a:lstStyle/>
           <a:p>
-            <a:pPr marL="0" indent="0">
+            <a:pPr indent="0" marL="0">
               <a:buNone/>
             </a:pPr>
             <a:r>
@@ -11954,7 +11953,7 @@
                 <a:ea typeface="맑은 고딕" pitchFamily="34" charset="-122"/>
                 <a:cs typeface="맑은 고딕" pitchFamily="34" charset="-120"/>
               </a:rPr>
-              <a:t>잠수부 · ROV 조사</a:t>
+              <a:t>건축물 외 시설물 · 등급별</a:t>
             </a:r>
             <a:endParaRPr lang="en-US" sz="1250" dirty="0"/>
           </a:p>
@@ -12008,7 +12007,7 @@
           <a:bodyPr wrap="square" lIns="0" tIns="0" rIns="0" bIns="0" rtlCol="0" anchor="t"/>
           <a:lstStyle/>
           <a:p>
-            <a:pPr marL="0" indent="0">
+            <a:pPr indent="0" marL="0">
               <a:buNone/>
             </a:pPr>
             <a:r>
@@ -12020,7 +12019,7 @@
                 <a:ea typeface="맑은 고딕" pitchFamily="34" charset="-122"/>
                 <a:cs typeface="맑은 고딕" pitchFamily="34" charset="-120"/>
               </a:rPr>
-              <a:t>Level III</a:t>
+              <a:t>정밀안전진단</a:t>
             </a:r>
             <a:endParaRPr lang="en-US" sz="1400" dirty="0"/>
           </a:p>
@@ -12047,7 +12046,7 @@
           <a:bodyPr wrap="square" lIns="0" tIns="0" rIns="0" bIns="0" rtlCol="0" anchor="t"/>
           <a:lstStyle/>
           <a:p>
-            <a:pPr marL="0" indent="0" algn="r">
+            <a:pPr algn="r" indent="0" marL="0">
               <a:buNone/>
             </a:pPr>
             <a:r>
@@ -12059,7 +12058,7 @@
                 <a:ea typeface="맑은 고딕" pitchFamily="34" charset="-122"/>
                 <a:cs typeface="맑은 고딕" pitchFamily="34" charset="-120"/>
               </a:rPr>
-              <a:t>6–10년</a:t>
+              <a:t>4–6년</a:t>
             </a:r>
             <a:endParaRPr lang="en-US" sz="2200" dirty="0"/>
           </a:p>
@@ -12086,7 +12085,7 @@
           <a:bodyPr wrap="square" lIns="0" tIns="0" rIns="0" bIns="0" rtlCol="0" anchor="t"/>
           <a:lstStyle/>
           <a:p>
-            <a:pPr marL="0" indent="0">
+            <a:pPr indent="0" marL="0">
               <a:buNone/>
             </a:pPr>
             <a:r>
@@ -12098,7 +12097,7 @@
                 <a:ea typeface="맑은 고딕" pitchFamily="34" charset="-122"/>
                 <a:cs typeface="맑은 고딕" pitchFamily="34" charset="-120"/>
               </a:rPr>
-              <a:t>수중 정밀 점검</a:t>
+              <a:t>재료 시험 · 구조 안전성 평가</a:t>
             </a:r>
             <a:endParaRPr lang="en-US" sz="1600" dirty="0"/>
           </a:p>
@@ -12125,7 +12124,7 @@
           <a:bodyPr wrap="square" lIns="0" tIns="0" rIns="0" bIns="0" rtlCol="0" anchor="t"/>
           <a:lstStyle/>
           <a:p>
-            <a:pPr marL="0" indent="0">
+            <a:pPr indent="0" marL="0">
               <a:buNone/>
             </a:pPr>
             <a:r>
@@ -12137,7 +12136,7 @@
                 <a:ea typeface="맑은 고딕" pitchFamily="34" charset="-122"/>
                 <a:cs typeface="맑은 고딕" pitchFamily="34" charset="-120"/>
               </a:rPr>
-              <a:t>지정 부위 세척 후 근접 육안 · 피트 계측</a:t>
+              <a:t>제1종 시설물 · 등급별</a:t>
             </a:r>
             <a:endParaRPr lang="en-US" sz="1250" dirty="0"/>
           </a:p>
@@ -12145,7 +12144,244 @@
       </p:sp>
       <p:sp>
         <p:nvSpPr>
-          <p:cNvPr id="30" name="Shape 28"/>
+          <p:cNvPr id="21" name="Text 19"/>
+          <p:cNvSpPr txBox="1"/>
+          <p:nvPr/>
+        </p:nvSpPr>
+        <p:spPr>
+          <a:xfrm>
+            <a:off x="548640" y="3127248"/>
+            <a:ext cx="6949440" cy="274320"/>
+          </a:xfrm>
+          <a:prstGeom prst="rect">
+            <a:avLst/>
+          </a:prstGeom>
+          <a:noFill/>
+          <a:ln/>
+        </p:spPr>
+        <p:txBody>
+          <a:bodyPr wrap="square" lIns="0" tIns="0" rIns="0" bIns="0" rtlCol="0" anchor="t"/>
+          <a:lstStyle/>
+          <a:p>
+            <a:pPr indent="0" marL="0">
+              <a:buNone/>
+            </a:pPr>
+            <a:r>
+              <a:rPr lang="en-US" sz="1200" dirty="0">
+                <a:solidFill>
+                  <a:srgbClr val="6B6F76"/>
+                </a:solidFill>
+                <a:latin typeface="맑은 고딕" pitchFamily="34" charset="0"/>
+                <a:ea typeface="맑은 고딕" pitchFamily="34" charset="-122"/>
+                <a:cs typeface="맑은 고딕" pitchFamily="34" charset="-120"/>
+              </a:rPr>
+              <a:t>국내 「시설물안전법」 점검 체계 — 법적 관리 대상 162,481개소 ('22.6, 국토교통부)</a:t>
+            </a:r>
+            <a:endParaRPr lang="en-US" sz="1200" dirty="0"/>
+          </a:p>
+        </p:txBody>
+      </p:sp>
+      <p:sp>
+        <p:nvSpPr>
+          <p:cNvPr id="22" name="Shape 20"/>
+          <p:cNvSpPr/>
+          <p:nvPr/>
+        </p:nvSpPr>
+        <p:spPr>
+          <a:xfrm>
+            <a:off x="7482535" y="3108960"/>
+            <a:ext cx="1234440" cy="310896"/>
+          </a:xfrm>
+          <a:prstGeom prst="roundRect">
+            <a:avLst>
+              <a:gd name="adj" fmla="val 50000"/>
+            </a:avLst>
+          </a:prstGeom>
+          <a:solidFill>
+            <a:srgbClr val="1F5F7A"/>
+          </a:solidFill>
+          <a:ln w="12700">
+            <a:solidFill>
+              <a:srgbClr val="1F5F7A"/>
+            </a:solidFill>
+            <a:prstDash val="solid"/>
+          </a:ln>
+        </p:spPr>
+      </p:sp>
+      <p:sp>
+        <p:nvSpPr>
+          <p:cNvPr id="23" name="Text 21"/>
+          <p:cNvSpPr txBox="1"/>
+          <p:nvPr/>
+        </p:nvSpPr>
+        <p:spPr>
+          <a:xfrm>
+            <a:off x="7482535" y="3108960"/>
+            <a:ext cx="1234440" cy="310896"/>
+          </a:xfrm>
+          <a:prstGeom prst="rect">
+            <a:avLst/>
+          </a:prstGeom>
+          <a:noFill/>
+          <a:ln/>
+        </p:spPr>
+        <p:txBody>
+          <a:bodyPr wrap="square" lIns="0" tIns="0" rIns="0" bIns="0" rtlCol="0" anchor="ctr"/>
+          <a:lstStyle/>
+          <a:p>
+            <a:pPr algn="ctr" indent="0" marL="0">
+              <a:buNone/>
+            </a:pPr>
+            <a:r>
+              <a:rPr lang="en-US" sz="1100" b="1" dirty="0">
+                <a:solidFill>
+                  <a:srgbClr val="FFFFFF"/>
+                </a:solidFill>
+                <a:latin typeface="맑은 고딕" pitchFamily="34" charset="0"/>
+                <a:ea typeface="맑은 고딕" pitchFamily="34" charset="-122"/>
+                <a:cs typeface="맑은 고딕" pitchFamily="34" charset="-120"/>
+              </a:rPr>
+              <a:t>국토교통부</a:t>
+            </a:r>
+            <a:endParaRPr lang="en-US" sz="1100" dirty="0"/>
+          </a:p>
+        </p:txBody>
+      </p:sp>
+      <p:sp>
+        <p:nvSpPr>
+          <p:cNvPr id="24" name="Shape 22"/>
+          <p:cNvSpPr/>
+          <p:nvPr/>
+        </p:nvSpPr>
+        <p:spPr>
+          <a:xfrm>
+            <a:off x="8808415" y="3108960"/>
+            <a:ext cx="1234440" cy="310896"/>
+          </a:xfrm>
+          <a:prstGeom prst="roundRect">
+            <a:avLst>
+              <a:gd name="adj" fmla="val 50000"/>
+            </a:avLst>
+          </a:prstGeom>
+          <a:solidFill>
+            <a:srgbClr val="1F5F7A"/>
+          </a:solidFill>
+          <a:ln w="12700">
+            <a:solidFill>
+              <a:srgbClr val="1F5F7A"/>
+            </a:solidFill>
+            <a:prstDash val="solid"/>
+          </a:ln>
+        </p:spPr>
+      </p:sp>
+      <p:sp>
+        <p:nvSpPr>
+          <p:cNvPr id="25" name="Text 23"/>
+          <p:cNvSpPr txBox="1"/>
+          <p:nvPr/>
+        </p:nvSpPr>
+        <p:spPr>
+          <a:xfrm>
+            <a:off x="8808415" y="3108960"/>
+            <a:ext cx="1234440" cy="310896"/>
+          </a:xfrm>
+          <a:prstGeom prst="rect">
+            <a:avLst/>
+          </a:prstGeom>
+          <a:noFill/>
+          <a:ln/>
+        </p:spPr>
+        <p:txBody>
+          <a:bodyPr wrap="square" lIns="0" tIns="0" rIns="0" bIns="0" rtlCol="0" anchor="ctr"/>
+          <a:lstStyle/>
+          <a:p>
+            <a:pPr algn="ctr" indent="0" marL="0">
+              <a:buNone/>
+            </a:pPr>
+            <a:r>
+              <a:rPr lang="en-US" sz="1100" b="1" dirty="0">
+                <a:solidFill>
+                  <a:srgbClr val="FFFFFF"/>
+                </a:solidFill>
+                <a:latin typeface="맑은 고딕" pitchFamily="34" charset="0"/>
+                <a:ea typeface="맑은 고딕" pitchFamily="34" charset="-122"/>
+                <a:cs typeface="맑은 고딕" pitchFamily="34" charset="-120"/>
+              </a:rPr>
+              <a:t>해양수산부</a:t>
+            </a:r>
+            <a:endParaRPr lang="en-US" sz="1100" dirty="0"/>
+          </a:p>
+        </p:txBody>
+      </p:sp>
+      <p:sp>
+        <p:nvSpPr>
+          <p:cNvPr id="26" name="Shape 24"/>
+          <p:cNvSpPr/>
+          <p:nvPr/>
+        </p:nvSpPr>
+        <p:spPr>
+          <a:xfrm>
+            <a:off x="10134295" y="3108960"/>
+            <a:ext cx="1508760" cy="310896"/>
+          </a:xfrm>
+          <a:prstGeom prst="roundRect">
+            <a:avLst>
+              <a:gd name="adj" fmla="val 50000"/>
+            </a:avLst>
+          </a:prstGeom>
+          <a:solidFill>
+            <a:srgbClr val="1F5F7A"/>
+          </a:solidFill>
+          <a:ln w="12700">
+            <a:solidFill>
+              <a:srgbClr val="1F5F7A"/>
+            </a:solidFill>
+            <a:prstDash val="solid"/>
+          </a:ln>
+        </p:spPr>
+      </p:sp>
+      <p:sp>
+        <p:nvSpPr>
+          <p:cNvPr id="27" name="Text 25"/>
+          <p:cNvSpPr txBox="1"/>
+          <p:nvPr/>
+        </p:nvSpPr>
+        <p:spPr>
+          <a:xfrm>
+            <a:off x="10134295" y="3108960"/>
+            <a:ext cx="1508760" cy="310896"/>
+          </a:xfrm>
+          <a:prstGeom prst="rect">
+            <a:avLst/>
+          </a:prstGeom>
+          <a:noFill/>
+          <a:ln/>
+        </p:spPr>
+        <p:txBody>
+          <a:bodyPr wrap="square" lIns="0" tIns="0" rIns="0" bIns="0" rtlCol="0" anchor="ctr"/>
+          <a:lstStyle/>
+          <a:p>
+            <a:pPr algn="ctr" indent="0" marL="0">
+              <a:buNone/>
+            </a:pPr>
+            <a:r>
+              <a:rPr lang="en-US" sz="1100" b="1" dirty="0">
+                <a:solidFill>
+                  <a:srgbClr val="FFFFFF"/>
+                </a:solidFill>
+                <a:latin typeface="맑은 고딕" pitchFamily="34" charset="0"/>
+                <a:ea typeface="맑은 고딕" pitchFamily="34" charset="-122"/>
+                <a:cs typeface="맑은 고딕" pitchFamily="34" charset="-120"/>
+              </a:rPr>
+              <a:t>국토안전관리원</a:t>
+            </a:r>
+            <a:endParaRPr lang="en-US" sz="1100" dirty="0"/>
+          </a:p>
+        </p:txBody>
+      </p:sp>
+      <p:sp>
+        <p:nvSpPr>
+          <p:cNvPr id="28" name="Shape 26"/>
           <p:cNvSpPr/>
           <p:nvPr/>
         </p:nvSpPr>
@@ -12172,7 +12408,7 @@
       </p:sp>
       <p:sp>
         <p:nvSpPr>
-          <p:cNvPr id="31" name="Text 29"/>
+          <p:cNvPr id="29" name="Text 27"/>
           <p:cNvSpPr txBox="1"/>
           <p:nvPr/>
         </p:nvSpPr>
@@ -12191,7 +12427,7 @@
           <a:bodyPr wrap="square" lIns="0" tIns="0" rIns="0" bIns="0" rtlCol="0" anchor="t"/>
           <a:lstStyle/>
           <a:p>
-            <a:pPr marL="0" indent="0">
+            <a:pPr indent="0" marL="0">
               <a:buNone/>
             </a:pPr>
             <a:r>
@@ -12211,7 +12447,7 @@
       </p:sp>
       <p:sp>
         <p:nvSpPr>
-          <p:cNvPr id="32" name="Shape 30"/>
+          <p:cNvPr id="30" name="Shape 28"/>
           <p:cNvSpPr/>
           <p:nvPr/>
         </p:nvSpPr>
@@ -12236,14 +12472,14 @@
       </p:sp>
       <p:pic>
         <p:nvPicPr>
-          <p:cNvPr id="33" name="Image 0" descr="preencoded.png"/>
+          <p:cNvPr id="31" name="Image 0" descr="preencoded.png">    </p:cNvPr>
           <p:cNvPicPr>
             <a:picLocks noChangeAspect="1"/>
           </p:cNvPicPr>
           <p:nvPr/>
         </p:nvPicPr>
         <p:blipFill>
-          <a:blip r:embed="rId3"/>
+          <a:blip r:embed="rId1"/>
           <a:stretch>
             <a:fillRect/>
           </a:stretch>
@@ -12260,7 +12496,7 @@
       </p:pic>
       <p:sp>
         <p:nvSpPr>
-          <p:cNvPr id="34" name="Text 31"/>
+          <p:cNvPr id="32" name="Text 29"/>
           <p:cNvSpPr txBox="1"/>
           <p:nvPr/>
         </p:nvSpPr>
@@ -12279,7 +12515,7 @@
           <a:bodyPr wrap="square" lIns="0" tIns="0" rIns="0" bIns="0" rtlCol="0" anchor="ctr"/>
           <a:lstStyle/>
           <a:p>
-            <a:pPr marL="0" indent="0">
+            <a:pPr indent="0" marL="0">
               <a:buNone/>
             </a:pPr>
             <a:r>
@@ -12293,6 +12529,9 @@
               </a:rPr>
               <a:t>안전   </a:t>
             </a:r>
+            <a:pPr indent="0" marL="0">
+              <a:buNone/>
+            </a:pPr>
             <a:r>
               <a:rPr lang="en-US" sz="1300" dirty="0">
                 <a:solidFill>
@@ -12310,7 +12549,7 @@
       </p:sp>
       <p:sp>
         <p:nvSpPr>
-          <p:cNvPr id="35" name="Shape 32"/>
+          <p:cNvPr id="33" name="Shape 30"/>
           <p:cNvSpPr/>
           <p:nvPr/>
         </p:nvSpPr>
@@ -12335,14 +12574,14 @@
       </p:sp>
       <p:pic>
         <p:nvPicPr>
-          <p:cNvPr id="36" name="Image 1" descr="preencoded.png"/>
+          <p:cNvPr id="34" name="Image 1" descr="preencoded.png">    </p:cNvPr>
           <p:cNvPicPr>
             <a:picLocks noChangeAspect="1"/>
           </p:cNvPicPr>
           <p:nvPr/>
         </p:nvPicPr>
         <p:blipFill>
-          <a:blip r:embed="rId4"/>
+          <a:blip r:embed="rId2"/>
           <a:stretch>
             <a:fillRect/>
           </a:stretch>
@@ -12359,7 +12598,7 @@
       </p:pic>
       <p:sp>
         <p:nvSpPr>
-          <p:cNvPr id="37" name="Text 33"/>
+          <p:cNvPr id="35" name="Text 31"/>
           <p:cNvSpPr txBox="1"/>
           <p:nvPr/>
         </p:nvSpPr>
@@ -12378,7 +12617,7 @@
           <a:bodyPr wrap="square" lIns="0" tIns="0" rIns="0" bIns="0" rtlCol="0" anchor="ctr"/>
           <a:lstStyle/>
           <a:p>
-            <a:pPr marL="0" indent="0">
+            <a:pPr indent="0" marL="0">
               <a:buNone/>
             </a:pPr>
             <a:r>
@@ -12392,6 +12631,9 @@
               </a:rPr>
               <a:t>비용   </a:t>
             </a:r>
+            <a:pPr indent="0" marL="0">
+              <a:buNone/>
+            </a:pPr>
             <a:r>
               <a:rPr lang="en-US" sz="1300" dirty="0">
                 <a:solidFill>
@@ -12409,7 +12651,7 @@
       </p:sp>
       <p:sp>
         <p:nvSpPr>
-          <p:cNvPr id="38" name="Shape 34"/>
+          <p:cNvPr id="36" name="Shape 32"/>
           <p:cNvSpPr/>
           <p:nvPr/>
         </p:nvSpPr>
@@ -12434,14 +12676,14 @@
       </p:sp>
       <p:pic>
         <p:nvPicPr>
-          <p:cNvPr id="39" name="Image 2" descr="preencoded.png"/>
+          <p:cNvPr id="37" name="Image 2" descr="preencoded.png">    </p:cNvPr>
           <p:cNvPicPr>
             <a:picLocks noChangeAspect="1"/>
           </p:cNvPicPr>
           <p:nvPr/>
         </p:nvPicPr>
         <p:blipFill>
-          <a:blip r:embed="rId5"/>
+          <a:blip r:embed="rId3"/>
           <a:stretch>
             <a:fillRect/>
           </a:stretch>
@@ -12458,7 +12700,7 @@
       </p:pic>
       <p:sp>
         <p:nvSpPr>
-          <p:cNvPr id="40" name="Text 35"/>
+          <p:cNvPr id="38" name="Text 33"/>
           <p:cNvSpPr txBox="1"/>
           <p:nvPr/>
         </p:nvSpPr>
@@ -12477,7 +12719,7 @@
           <a:bodyPr wrap="square" lIns="0" tIns="0" rIns="0" bIns="0" rtlCol="0" anchor="ctr"/>
           <a:lstStyle/>
           <a:p>
-            <a:pPr marL="0" indent="0">
+            <a:pPr indent="0" marL="0">
               <a:buNone/>
             </a:pPr>
             <a:r>
@@ -12491,6 +12733,9 @@
               </a:rPr>
               <a:t>규제 · 보험   </a:t>
             </a:r>
+            <a:pPr indent="0" marL="0">
+              <a:buNone/>
+            </a:pPr>
             <a:r>
               <a:rPr lang="en-US" sz="1300" dirty="0">
                 <a:solidFill>
@@ -12508,7 +12753,7 @@
       </p:sp>
       <p:sp>
         <p:nvSpPr>
-          <p:cNvPr id="41" name="Shape 36"/>
+          <p:cNvPr id="39" name="Shape 34"/>
           <p:cNvSpPr/>
           <p:nvPr/>
         </p:nvSpPr>
@@ -12535,7 +12780,7 @@
       </p:sp>
       <p:sp>
         <p:nvSpPr>
-          <p:cNvPr id="42" name="Text 37"/>
+          <p:cNvPr id="40" name="Text 35"/>
           <p:cNvSpPr txBox="1"/>
           <p:nvPr/>
         </p:nvSpPr>
@@ -12554,7 +12799,7 @@
           <a:bodyPr wrap="square" lIns="0" tIns="0" rIns="0" bIns="0" rtlCol="0" anchor="t"/>
           <a:lstStyle/>
           <a:p>
-            <a:pPr marL="0" indent="0">
+            <a:pPr indent="0" marL="0">
               <a:buNone/>
             </a:pPr>
             <a:r>
@@ -12574,7 +12819,7 @@
       </p:sp>
       <p:sp>
         <p:nvSpPr>
-          <p:cNvPr id="43" name="Shape 38"/>
+          <p:cNvPr id="41" name="Shape 36"/>
           <p:cNvSpPr/>
           <p:nvPr/>
         </p:nvSpPr>
@@ -12599,14 +12844,14 @@
       </p:sp>
       <p:pic>
         <p:nvPicPr>
-          <p:cNvPr id="44" name="Image 3" descr="preencoded.png"/>
+          <p:cNvPr id="42" name="Image 3" descr="preencoded.png">    </p:cNvPr>
           <p:cNvPicPr>
             <a:picLocks noChangeAspect="1"/>
           </p:cNvPicPr>
           <p:nvPr/>
         </p:nvPicPr>
         <p:blipFill>
-          <a:blip r:embed="rId6"/>
+          <a:blip r:embed="rId4"/>
           <a:stretch>
             <a:fillRect/>
           </a:stretch>
@@ -12623,7 +12868,7 @@
       </p:pic>
       <p:sp>
         <p:nvSpPr>
-          <p:cNvPr id="45" name="Text 39"/>
+          <p:cNvPr id="43" name="Text 37"/>
           <p:cNvSpPr txBox="1"/>
           <p:nvPr/>
         </p:nvSpPr>
@@ -12642,7 +12887,7 @@
           <a:bodyPr wrap="square" lIns="0" tIns="0" rIns="0" bIns="0" rtlCol="0" anchor="t"/>
           <a:lstStyle/>
           <a:p>
-            <a:pPr marL="0" indent="0">
+            <a:pPr indent="0" marL="0">
               <a:buNone/>
             </a:pPr>
             <a:r>
@@ -12662,7 +12907,7 @@
       </p:sp>
       <p:sp>
         <p:nvSpPr>
-          <p:cNvPr id="46" name="Text 40"/>
+          <p:cNvPr id="44" name="Text 38"/>
           <p:cNvSpPr txBox="1"/>
           <p:nvPr/>
         </p:nvSpPr>
@@ -12681,7 +12926,7 @@
           <a:bodyPr wrap="square" lIns="0" tIns="0" rIns="0" bIns="0" rtlCol="0" anchor="t"/>
           <a:lstStyle/>
           <a:p>
-            <a:pPr marL="0" indent="0">
+            <a:pPr indent="0" marL="0">
               <a:buNone/>
             </a:pPr>
             <a:r>
@@ -12701,7 +12946,7 @@
       </p:sp>
       <p:sp>
         <p:nvSpPr>
-          <p:cNvPr id="47" name="Shape 41"/>
+          <p:cNvPr id="45" name="Shape 39"/>
           <p:cNvSpPr/>
           <p:nvPr/>
         </p:nvSpPr>
@@ -12726,14 +12971,14 @@
       </p:sp>
       <p:pic>
         <p:nvPicPr>
-          <p:cNvPr id="48" name="Image 4" descr="preencoded.png"/>
+          <p:cNvPr id="46" name="Image 4" descr="preencoded.png">    </p:cNvPr>
           <p:cNvPicPr>
             <a:picLocks noChangeAspect="1"/>
           </p:cNvPicPr>
           <p:nvPr/>
         </p:nvPicPr>
         <p:blipFill>
-          <a:blip r:embed="rId7"/>
+          <a:blip r:embed="rId5"/>
           <a:stretch>
             <a:fillRect/>
           </a:stretch>
@@ -12750,7 +12995,7 @@
       </p:pic>
       <p:sp>
         <p:nvSpPr>
-          <p:cNvPr id="49" name="Text 42"/>
+          <p:cNvPr id="47" name="Text 40"/>
           <p:cNvSpPr txBox="1"/>
           <p:nvPr/>
         </p:nvSpPr>
@@ -12769,7 +13014,7 @@
           <a:bodyPr wrap="square" lIns="0" tIns="0" rIns="0" bIns="0" rtlCol="0" anchor="t"/>
           <a:lstStyle/>
           <a:p>
-            <a:pPr marL="0" indent="0">
+            <a:pPr indent="0" marL="0">
               <a:buNone/>
             </a:pPr>
             <a:r>
@@ -12789,7 +13034,7 @@
       </p:sp>
       <p:sp>
         <p:nvSpPr>
-          <p:cNvPr id="50" name="Text 43"/>
+          <p:cNvPr id="48" name="Text 41"/>
           <p:cNvSpPr txBox="1"/>
           <p:nvPr/>
         </p:nvSpPr>
@@ -12808,7 +13053,7 @@
           <a:bodyPr wrap="square" lIns="0" tIns="0" rIns="0" bIns="0" rtlCol="0" anchor="t"/>
           <a:lstStyle/>
           <a:p>
-            <a:pPr marL="0" indent="0">
+            <a:pPr indent="0" marL="0">
               <a:buNone/>
             </a:pPr>
             <a:r>
@@ -12828,7 +13073,7 @@
       </p:sp>
       <p:sp>
         <p:nvSpPr>
-          <p:cNvPr id="51" name="Shape 44"/>
+          <p:cNvPr id="49" name="Shape 42"/>
           <p:cNvSpPr/>
           <p:nvPr/>
         </p:nvSpPr>
@@ -12853,14 +13098,14 @@
       </p:sp>
       <p:pic>
         <p:nvPicPr>
-          <p:cNvPr id="52" name="Image 5" descr="preencoded.png"/>
+          <p:cNvPr id="50" name="Image 5" descr="preencoded.png">    </p:cNvPr>
           <p:cNvPicPr>
             <a:picLocks noChangeAspect="1"/>
           </p:cNvPicPr>
           <p:nvPr/>
         </p:nvPicPr>
         <p:blipFill>
-          <a:blip r:embed="rId8"/>
+          <a:blip r:embed="rId6"/>
           <a:stretch>
             <a:fillRect/>
           </a:stretch>
@@ -12877,7 +13122,7 @@
       </p:pic>
       <p:sp>
         <p:nvSpPr>
-          <p:cNvPr id="53" name="Text 45"/>
+          <p:cNvPr id="51" name="Text 43"/>
           <p:cNvSpPr txBox="1"/>
           <p:nvPr/>
         </p:nvSpPr>
@@ -12896,7 +13141,7 @@
           <a:bodyPr wrap="square" lIns="0" tIns="0" rIns="0" bIns="0" rtlCol="0" anchor="t"/>
           <a:lstStyle/>
           <a:p>
-            <a:pPr marL="0" indent="0">
+            <a:pPr indent="0" marL="0">
               <a:buNone/>
             </a:pPr>
             <a:r>
@@ -12916,7 +13161,7 @@
       </p:sp>
       <p:sp>
         <p:nvSpPr>
-          <p:cNvPr id="54" name="Text 46"/>
+          <p:cNvPr id="52" name="Text 44"/>
           <p:cNvSpPr txBox="1"/>
           <p:nvPr/>
         </p:nvSpPr>
@@ -12935,7 +13180,7 @@
           <a:bodyPr wrap="square" lIns="0" tIns="0" rIns="0" bIns="0" rtlCol="0" anchor="t"/>
           <a:lstStyle/>
           <a:p>
-            <a:pPr marL="0" indent="0">
+            <a:pPr indent="0" marL="0">
               <a:buNone/>
             </a:pPr>
             <a:r>
@@ -12955,7 +13200,7 @@
       </p:sp>
       <p:sp>
         <p:nvSpPr>
-          <p:cNvPr id="55" name="Shape 47"/>
+          <p:cNvPr id="53" name="Shape 45"/>
           <p:cNvSpPr/>
           <p:nvPr/>
         </p:nvSpPr>
@@ -12980,14 +13225,14 @@
       </p:sp>
       <p:pic>
         <p:nvPicPr>
-          <p:cNvPr id="56" name="Image 6" descr="preencoded.png"/>
+          <p:cNvPr id="54" name="Image 6" descr="preencoded.png">    </p:cNvPr>
           <p:cNvPicPr>
             <a:picLocks noChangeAspect="1"/>
           </p:cNvPicPr>
           <p:nvPr/>
         </p:nvPicPr>
         <p:blipFill>
-          <a:blip r:embed="rId9"/>
+          <a:blip r:embed="rId7"/>
           <a:stretch>
             <a:fillRect/>
           </a:stretch>
@@ -13004,7 +13249,7 @@
       </p:pic>
       <p:sp>
         <p:nvSpPr>
-          <p:cNvPr id="57" name="Text 48"/>
+          <p:cNvPr id="55" name="Text 46"/>
           <p:cNvSpPr txBox="1"/>
           <p:nvPr/>
         </p:nvSpPr>
@@ -13023,7 +13268,7 @@
           <a:bodyPr wrap="square" lIns="0" tIns="0" rIns="0" bIns="0" rtlCol="0" anchor="t"/>
           <a:lstStyle/>
           <a:p>
-            <a:pPr marL="0" indent="0">
+            <a:pPr indent="0" marL="0">
               <a:buNone/>
             </a:pPr>
             <a:r>
@@ -13043,7 +13288,7 @@
       </p:sp>
       <p:sp>
         <p:nvSpPr>
-          <p:cNvPr id="58" name="Text 49"/>
+          <p:cNvPr id="56" name="Text 47"/>
           <p:cNvSpPr txBox="1"/>
           <p:nvPr/>
         </p:nvSpPr>
@@ -13062,7 +13307,7 @@
           <a:bodyPr wrap="square" lIns="0" tIns="0" rIns="0" bIns="0" rtlCol="0" anchor="t"/>
           <a:lstStyle/>
           <a:p>
-            <a:pPr marL="0" indent="0">
+            <a:pPr indent="0" marL="0">
               <a:buNone/>
             </a:pPr>
             <a:r>
@@ -13077,6 +13322,45 @@
               <a:t>사진 리포트로 정리</a:t>
             </a:r>
             <a:endParaRPr lang="en-US" sz="1100" dirty="0"/>
+          </a:p>
+        </p:txBody>
+      </p:sp>
+      <p:sp>
+        <p:nvSpPr>
+          <p:cNvPr id="57" name="Text 48"/>
+          <p:cNvSpPr txBox="1"/>
+          <p:nvPr/>
+        </p:nvSpPr>
+        <p:spPr>
+          <a:xfrm>
+            <a:off x="6507328" y="5733288"/>
+            <a:ext cx="4952848" cy="228600"/>
+          </a:xfrm>
+          <a:prstGeom prst="rect">
+            <a:avLst/>
+          </a:prstGeom>
+          <a:noFill/>
+          <a:ln/>
+        </p:spPr>
+        <p:txBody>
+          <a:bodyPr wrap="square" lIns="0" tIns="0" rIns="0" bIns="0" rtlCol="0" anchor="t"/>
+          <a:lstStyle/>
+          <a:p>
+            <a:pPr indent="0" marL="0">
+              <a:buNone/>
+            </a:pPr>
+            <a:r>
+              <a:rPr lang="en-US" sz="1000" i="1" dirty="0">
+                <a:solidFill>
+                  <a:srgbClr val="A3A7AD"/>
+                </a:solidFill>
+                <a:latin typeface="맑은 고딕" pitchFamily="34" charset="0"/>
+                <a:ea typeface="맑은 고딕" pitchFamily="34" charset="-122"/>
+                <a:cs typeface="맑은 고딕" pitchFamily="34" charset="-120"/>
+              </a:rPr>
+              <a:t>미국 현장 인터뷰 (Deepwater · MISTRAS · Brown Corrosion 등)</a:t>
+            </a:r>
+            <a:endParaRPr lang="en-US" sz="1000" dirty="0"/>
           </a:p>
         </p:txBody>
       </p:sp>
@@ -13090,7 +13374,7 @@
 
 <file path=ppt/slides/slide9.xml><?xml version="1.0" encoding="utf-8"?>
 <p:sld xmlns:a="http://schemas.openxmlformats.org/drawingml/2006/main" xmlns:r="http://schemas.openxmlformats.org/officeDocument/2006/relationships" xmlns:p="http://schemas.openxmlformats.org/presentationml/2006/main">
-  <p:cSld name="Slide 1">
+  <p:cSld name="Slide 2">
     <p:bg>
       <p:bgPr>
         <a:solidFill>
@@ -13184,7 +13468,7 @@
                 <a:ea typeface="맑은 고딕" pitchFamily="34" charset="-122"/>
                 <a:cs typeface="맑은 고딕" pitchFamily="34" charset="-120"/>
               </a:rPr>
-              <a:t>시장 규모</a:t>
+              <a:t>시장 규모 (국내)</a:t>
             </a:r>
             <a:endParaRPr lang="en-US" sz="2800" dirty="0"/>
           </a:p>
@@ -13276,20 +13560,669 @@
         </p:nvSpPr>
         <p:spPr>
           <a:xfrm>
-            <a:off x="548640" y="1508760"/>
-            <a:ext cx="7040880" cy="1188720"/>
-          </a:xfrm>
-          <a:prstGeom prst="roundRect">
-            <a:avLst>
-              <a:gd name="adj" fmla="val 7692"/>
-            </a:avLst>
+            <a:off x="6492240" y="1508760"/>
+            <a:ext cx="4663440" cy="4663440"/>
+          </a:xfrm>
+          <a:prstGeom prst="ellipse">
+            <a:avLst/>
+          </a:prstGeom>
+          <a:solidFill>
+            <a:srgbClr val="B5501F"/>
+          </a:solidFill>
+          <a:ln w="31750">
+            <a:solidFill>
+              <a:srgbClr val="FFFFFF"/>
+            </a:solidFill>
+            <a:prstDash val="solid"/>
+          </a:ln>
+        </p:spPr>
+      </p:sp>
+      <p:sp>
+        <p:nvSpPr>
+          <p:cNvPr id="7" name="Shape 5"/>
+          <p:cNvSpPr/>
+          <p:nvPr/>
+        </p:nvSpPr>
+        <p:spPr>
+          <a:xfrm>
+            <a:off x="7246620" y="3017520"/>
+            <a:ext cx="3154680" cy="3154680"/>
+          </a:xfrm>
+          <a:prstGeom prst="ellipse">
+            <a:avLst/>
+          </a:prstGeom>
+          <a:solidFill>
+            <a:srgbClr val="E8A87C"/>
+          </a:solidFill>
+          <a:ln w="31750">
+            <a:solidFill>
+              <a:srgbClr val="FFFFFF"/>
+            </a:solidFill>
+            <a:prstDash val="solid"/>
+          </a:ln>
+        </p:spPr>
+      </p:sp>
+      <p:sp>
+        <p:nvSpPr>
+          <p:cNvPr id="8" name="Shape 6"/>
+          <p:cNvSpPr/>
+          <p:nvPr/>
+        </p:nvSpPr>
+        <p:spPr>
+          <a:xfrm>
+            <a:off x="7932420" y="4389120"/>
+            <a:ext cx="1783080" cy="1783080"/>
+          </a:xfrm>
+          <a:prstGeom prst="ellipse">
+            <a:avLst/>
+          </a:prstGeom>
+          <a:solidFill>
+            <a:srgbClr val="FFFFFF"/>
+          </a:solidFill>
+          <a:ln w="31750">
+            <a:solidFill>
+              <a:srgbClr val="FFFFFF"/>
+            </a:solidFill>
+            <a:prstDash val="solid"/>
+          </a:ln>
+        </p:spPr>
+      </p:sp>
+      <p:sp>
+        <p:nvSpPr>
+          <p:cNvPr id="9" name="Text 7"/>
+          <p:cNvSpPr txBox="1"/>
+          <p:nvPr/>
+        </p:nvSpPr>
+        <p:spPr>
+          <a:xfrm>
+            <a:off x="7543800" y="1783080"/>
+            <a:ext cx="2560320" cy="777240"/>
+          </a:xfrm>
+          <a:prstGeom prst="rect">
+            <a:avLst/>
+          </a:prstGeom>
+          <a:noFill/>
+          <a:ln/>
+        </p:spPr>
+        <p:txBody>
+          <a:bodyPr wrap="square" lIns="0" tIns="0" rIns="0" bIns="0" rtlCol="0" anchor="ctr"/>
+          <a:lstStyle/>
+          <a:p>
+            <a:pPr algn="ctr" indent="0" marL="0">
+              <a:buNone/>
+            </a:pPr>
+            <a:r>
+              <a:rPr lang="en-US" sz="2000" b="1" dirty="0">
+                <a:solidFill>
+                  <a:srgbClr val="FFFFFF"/>
+                </a:solidFill>
+                <a:latin typeface="맑은 고딕" pitchFamily="34" charset="0"/>
+                <a:ea typeface="맑은 고딕" pitchFamily="34" charset="-122"/>
+                <a:cs typeface="맑은 고딕" pitchFamily="34" charset="-120"/>
+              </a:rPr>
+              <a:t>TAM</a:t>
+            </a:r>
+            <a:endParaRPr lang="en-US" sz="1400" dirty="0"/>
+          </a:p>
+          <a:p>
+            <a:pPr algn="ctr" indent="0" marL="0">
+              <a:buNone/>
+            </a:pPr>
+            <a:r>
+              <a:rPr lang="en-US" sz="2200" b="1" dirty="0">
+                <a:solidFill>
+                  <a:srgbClr val="FFFFFF"/>
+                </a:solidFill>
+                <a:latin typeface="맑은 고딕" pitchFamily="34" charset="0"/>
+                <a:ea typeface="맑은 고딕" pitchFamily="34" charset="-122"/>
+                <a:cs typeface="맑은 고딕" pitchFamily="34" charset="-120"/>
+              </a:rPr>
+              <a:t>5,192억 원</a:t>
+            </a:r>
+            <a:endParaRPr lang="en-US" sz="1400" dirty="0"/>
+          </a:p>
+        </p:txBody>
+      </p:sp>
+      <p:sp>
+        <p:nvSpPr>
+          <p:cNvPr id="10" name="Text 8"/>
+          <p:cNvSpPr txBox="1"/>
+          <p:nvPr/>
+        </p:nvSpPr>
+        <p:spPr>
+          <a:xfrm>
+            <a:off x="7543800" y="3246120"/>
+            <a:ext cx="2560320" cy="777240"/>
+          </a:xfrm>
+          <a:prstGeom prst="rect">
+            <a:avLst/>
+          </a:prstGeom>
+          <a:noFill/>
+          <a:ln/>
+        </p:spPr>
+        <p:txBody>
+          <a:bodyPr wrap="square" lIns="0" tIns="0" rIns="0" bIns="0" rtlCol="0" anchor="ctr"/>
+          <a:lstStyle/>
+          <a:p>
+            <a:pPr algn="ctr" indent="0" marL="0">
+              <a:buNone/>
+            </a:pPr>
+            <a:r>
+              <a:rPr lang="en-US" sz="1800" b="1" dirty="0">
+                <a:solidFill>
+                  <a:srgbClr val="FFFFFF"/>
+                </a:solidFill>
+                <a:latin typeface="맑은 고딕" pitchFamily="34" charset="0"/>
+                <a:ea typeface="맑은 고딕" pitchFamily="34" charset="-122"/>
+                <a:cs typeface="맑은 고딕" pitchFamily="34" charset="-120"/>
+              </a:rPr>
+              <a:t>SAM</a:t>
+            </a:r>
+            <a:endParaRPr lang="en-US" sz="1400" dirty="0"/>
+          </a:p>
+          <a:p>
+            <a:pPr algn="ctr" indent="0" marL="0">
+              <a:buNone/>
+            </a:pPr>
+            <a:r>
+              <a:rPr lang="en-US" sz="1900" b="1" dirty="0">
+                <a:solidFill>
+                  <a:srgbClr val="FFFFFF"/>
+                </a:solidFill>
+                <a:latin typeface="맑은 고딕" pitchFamily="34" charset="0"/>
+                <a:ea typeface="맑은 고딕" pitchFamily="34" charset="-122"/>
+                <a:cs typeface="맑은 고딕" pitchFamily="34" charset="-120"/>
+              </a:rPr>
+              <a:t>1,667억 원</a:t>
+            </a:r>
+            <a:endParaRPr lang="en-US" sz="1400" dirty="0"/>
+          </a:p>
+        </p:txBody>
+      </p:sp>
+      <p:sp>
+        <p:nvSpPr>
+          <p:cNvPr id="11" name="Text 9"/>
+          <p:cNvSpPr txBox="1"/>
+          <p:nvPr/>
+        </p:nvSpPr>
+        <p:spPr>
+          <a:xfrm>
+            <a:off x="7543800" y="4896612"/>
+            <a:ext cx="2560320" cy="777240"/>
+          </a:xfrm>
+          <a:prstGeom prst="rect">
+            <a:avLst/>
+          </a:prstGeom>
+          <a:noFill/>
+          <a:ln/>
+        </p:spPr>
+        <p:txBody>
+          <a:bodyPr wrap="square" lIns="0" tIns="0" rIns="0" bIns="0" rtlCol="0" anchor="ctr"/>
+          <a:lstStyle/>
+          <a:p>
+            <a:pPr algn="ctr" indent="0" marL="0">
+              <a:buNone/>
+            </a:pPr>
+            <a:r>
+              <a:rPr lang="en-US" sz="1600" b="1" dirty="0">
+                <a:solidFill>
+                  <a:srgbClr val="B5501F"/>
+                </a:solidFill>
+                <a:latin typeface="맑은 고딕" pitchFamily="34" charset="0"/>
+                <a:ea typeface="맑은 고딕" pitchFamily="34" charset="-122"/>
+                <a:cs typeface="맑은 고딕" pitchFamily="34" charset="-120"/>
+              </a:rPr>
+              <a:t>SOM</a:t>
+            </a:r>
+            <a:endParaRPr lang="en-US" sz="1400" dirty="0"/>
+          </a:p>
+          <a:p>
+            <a:pPr algn="ctr" indent="0" marL="0">
+              <a:buNone/>
+            </a:pPr>
+            <a:r>
+              <a:rPr lang="en-US" sz="1600" b="1" dirty="0">
+                <a:solidFill>
+                  <a:srgbClr val="B5501F"/>
+                </a:solidFill>
+                <a:latin typeface="맑은 고딕" pitchFamily="34" charset="0"/>
+                <a:ea typeface="맑은 고딕" pitchFamily="34" charset="-122"/>
+                <a:cs typeface="맑은 고딕" pitchFamily="34" charset="-120"/>
+              </a:rPr>
+              <a:t>17억 원</a:t>
+            </a:r>
+            <a:endParaRPr lang="en-US" sz="1400" dirty="0"/>
+          </a:p>
+        </p:txBody>
+      </p:sp>
+      <p:sp>
+        <p:nvSpPr>
+          <p:cNvPr id="12" name="Shape 10"/>
+          <p:cNvSpPr/>
+          <p:nvPr/>
+        </p:nvSpPr>
+        <p:spPr>
+          <a:xfrm>
+            <a:off x="548640" y="1618488"/>
+            <a:ext cx="329184" cy="329184"/>
+          </a:xfrm>
+          <a:prstGeom prst="ellipse">
+            <a:avLst/>
+          </a:prstGeom>
+          <a:solidFill>
+            <a:srgbClr val="B5501F"/>
+          </a:solidFill>
+          <a:ln w="19050">
+            <a:solidFill>
+              <a:srgbClr val="FFFFFF"/>
+            </a:solidFill>
+            <a:prstDash val="solid"/>
+          </a:ln>
+        </p:spPr>
+      </p:sp>
+      <p:sp>
+        <p:nvSpPr>
+          <p:cNvPr id="13" name="Text 11"/>
+          <p:cNvSpPr txBox="1"/>
+          <p:nvPr/>
+        </p:nvSpPr>
+        <p:spPr>
+          <a:xfrm>
+            <a:off x="1005840" y="1563624"/>
+            <a:ext cx="4937760" cy="411480"/>
+          </a:xfrm>
+          <a:prstGeom prst="rect">
+            <a:avLst/>
+          </a:prstGeom>
+          <a:noFill/>
+          <a:ln/>
+        </p:spPr>
+        <p:txBody>
+          <a:bodyPr wrap="square" lIns="0" tIns="0" rIns="0" bIns="0" rtlCol="0" anchor="ctr"/>
+          <a:lstStyle/>
+          <a:p>
+            <a:pPr indent="0" marL="0">
+              <a:buNone/>
+            </a:pPr>
+            <a:r>
+              <a:rPr lang="en-US" sz="2000" b="1" dirty="0">
+                <a:solidFill>
+                  <a:srgbClr val="2B2D31"/>
+                </a:solidFill>
+                <a:latin typeface="맑은 고딕" pitchFamily="34" charset="0"/>
+                <a:ea typeface="맑은 고딕" pitchFamily="34" charset="-122"/>
+                <a:cs typeface="맑은 고딕" pitchFamily="34" charset="-120"/>
+              </a:rPr>
+              <a:t>TAM  5,192억 원</a:t>
+            </a:r>
+            <a:endParaRPr lang="en-US" sz="2000" dirty="0"/>
+          </a:p>
+        </p:txBody>
+      </p:sp>
+      <p:sp>
+        <p:nvSpPr>
+          <p:cNvPr id="14" name="Shape 12"/>
+          <p:cNvSpPr/>
+          <p:nvPr/>
+        </p:nvSpPr>
+        <p:spPr>
+          <a:xfrm>
+            <a:off x="3749040" y="1783080"/>
+            <a:ext cx="3703320" cy="384048"/>
+          </a:xfrm>
+          <a:prstGeom prst="line">
+            <a:avLst/>
+          </a:prstGeom>
+          <a:noFill/>
+          <a:ln w="15875">
+            <a:solidFill>
+              <a:srgbClr val="B5501F"/>
+            </a:solidFill>
+            <a:prstDash val="dash"/>
+          </a:ln>
+        </p:spPr>
+      </p:sp>
+      <p:sp>
+        <p:nvSpPr>
+          <p:cNvPr id="15" name="Text 13"/>
+          <p:cNvSpPr txBox="1"/>
+          <p:nvPr/>
+        </p:nvSpPr>
+        <p:spPr>
+          <a:xfrm>
+            <a:off x="1005840" y="2011680"/>
+            <a:ext cx="4480560" cy="274320"/>
+          </a:xfrm>
+          <a:prstGeom prst="rect">
+            <a:avLst/>
+          </a:prstGeom>
+          <a:noFill/>
+          <a:ln/>
+        </p:spPr>
+        <p:txBody>
+          <a:bodyPr wrap="square" lIns="0" tIns="0" rIns="0" bIns="0" rtlCol="0" anchor="t"/>
+          <a:lstStyle/>
+          <a:p>
+            <a:pPr indent="0" marL="0">
+              <a:buNone/>
+            </a:pPr>
+            <a:r>
+              <a:rPr lang="en-US" sz="1300" dirty="0">
+                <a:solidFill>
+                  <a:srgbClr val="2B2D31"/>
+                </a:solidFill>
+                <a:latin typeface="맑은 고딕" pitchFamily="34" charset="0"/>
+                <a:ea typeface="맑은 고딕" pitchFamily="34" charset="-122"/>
+                <a:cs typeface="맑은 고딕" pitchFamily="34" charset="-120"/>
+              </a:rPr>
+              <a:t>시설물 안전점검 · 진단 시장</a:t>
+            </a:r>
+            <a:endParaRPr lang="en-US" sz="1300" dirty="0"/>
+          </a:p>
+        </p:txBody>
+      </p:sp>
+      <p:sp>
+        <p:nvSpPr>
+          <p:cNvPr id="16" name="Text 14"/>
+          <p:cNvSpPr txBox="1"/>
+          <p:nvPr/>
+        </p:nvSpPr>
+        <p:spPr>
+          <a:xfrm>
+            <a:off x="1005840" y="2295144"/>
+            <a:ext cx="4480560" cy="256032"/>
+          </a:xfrm>
+          <a:prstGeom prst="rect">
+            <a:avLst/>
+          </a:prstGeom>
+          <a:noFill/>
+          <a:ln/>
+        </p:spPr>
+        <p:txBody>
+          <a:bodyPr wrap="square" lIns="0" tIns="0" rIns="0" bIns="0" rtlCol="0" anchor="t"/>
+          <a:lstStyle/>
+          <a:p>
+            <a:pPr indent="0" marL="0">
+              <a:buNone/>
+            </a:pPr>
+            <a:r>
+              <a:rPr lang="en-US" sz="1200" b="1" dirty="0">
+                <a:solidFill>
+                  <a:srgbClr val="B5501F"/>
+                </a:solidFill>
+                <a:latin typeface="맑은 고딕" pitchFamily="34" charset="0"/>
+                <a:ea typeface="맑은 고딕" pitchFamily="34" charset="-122"/>
+                <a:cs typeface="맑은 고딕" pitchFamily="34" charset="-120"/>
+              </a:rPr>
+              <a:t>연 15% 성장 ('17 → '21)</a:t>
+            </a:r>
+            <a:endParaRPr lang="en-US" sz="1200" dirty="0"/>
+          </a:p>
+        </p:txBody>
+      </p:sp>
+      <p:sp>
+        <p:nvSpPr>
+          <p:cNvPr id="17" name="Text 15"/>
+          <p:cNvSpPr txBox="1"/>
+          <p:nvPr/>
+        </p:nvSpPr>
+        <p:spPr>
+          <a:xfrm>
+            <a:off x="1005840" y="2560320"/>
+            <a:ext cx="4480560" cy="256032"/>
+          </a:xfrm>
+          <a:prstGeom prst="rect">
+            <a:avLst/>
+          </a:prstGeom>
+          <a:noFill/>
+          <a:ln/>
+        </p:spPr>
+        <p:txBody>
+          <a:bodyPr wrap="square" lIns="0" tIns="0" rIns="0" bIns="0" rtlCol="0" anchor="t"/>
+          <a:lstStyle/>
+          <a:p>
+            <a:pPr indent="0" marL="0">
+              <a:buNone/>
+            </a:pPr>
+            <a:r>
+              <a:rPr lang="en-US" sz="950" i="1" dirty="0">
+                <a:solidFill>
+                  <a:srgbClr val="A3A7AD"/>
+                </a:solidFill>
+                <a:latin typeface="맑은 고딕" pitchFamily="34" charset="0"/>
+                <a:ea typeface="맑은 고딕" pitchFamily="34" charset="-122"/>
+                <a:cs typeface="맑은 고딕" pitchFamily="34" charset="-120"/>
+              </a:rPr>
+              <a:t>국토교통부 제5차 시설물 안전 및 유지관리 기본계획 (2021년 기준)</a:t>
+            </a:r>
+            <a:endParaRPr lang="en-US" sz="950" dirty="0"/>
+          </a:p>
+        </p:txBody>
+      </p:sp>
+      <p:sp>
+        <p:nvSpPr>
+          <p:cNvPr id="18" name="Shape 16"/>
+          <p:cNvSpPr/>
+          <p:nvPr/>
+        </p:nvSpPr>
+        <p:spPr>
+          <a:xfrm>
+            <a:off x="548640" y="3035808"/>
+            <a:ext cx="329184" cy="329184"/>
+          </a:xfrm>
+          <a:prstGeom prst="ellipse">
+            <a:avLst/>
+          </a:prstGeom>
+          <a:solidFill>
+            <a:srgbClr val="E8A87C"/>
+          </a:solidFill>
+          <a:ln w="19050">
+            <a:solidFill>
+              <a:srgbClr val="FFFFFF"/>
+            </a:solidFill>
+            <a:prstDash val="solid"/>
+          </a:ln>
+        </p:spPr>
+      </p:sp>
+      <p:sp>
+        <p:nvSpPr>
+          <p:cNvPr id="19" name="Text 17"/>
+          <p:cNvSpPr txBox="1"/>
+          <p:nvPr/>
+        </p:nvSpPr>
+        <p:spPr>
+          <a:xfrm>
+            <a:off x="1005840" y="2980944"/>
+            <a:ext cx="4937760" cy="411480"/>
+          </a:xfrm>
+          <a:prstGeom prst="rect">
+            <a:avLst/>
+          </a:prstGeom>
+          <a:noFill/>
+          <a:ln/>
+        </p:spPr>
+        <p:txBody>
+          <a:bodyPr wrap="square" lIns="0" tIns="0" rIns="0" bIns="0" rtlCol="0" anchor="ctr"/>
+          <a:lstStyle/>
+          <a:p>
+            <a:pPr indent="0" marL="0">
+              <a:buNone/>
+            </a:pPr>
+            <a:r>
+              <a:rPr lang="en-US" sz="2000" b="1" dirty="0">
+                <a:solidFill>
+                  <a:srgbClr val="2B2D31"/>
+                </a:solidFill>
+                <a:latin typeface="맑은 고딕" pitchFamily="34" charset="0"/>
+                <a:ea typeface="맑은 고딕" pitchFamily="34" charset="-122"/>
+                <a:cs typeface="맑은 고딕" pitchFamily="34" charset="-120"/>
+              </a:rPr>
+              <a:t>SAM  1,667억 원</a:t>
+            </a:r>
+            <a:endParaRPr lang="en-US" sz="2000" dirty="0"/>
+          </a:p>
+        </p:txBody>
+      </p:sp>
+      <p:sp>
+        <p:nvSpPr>
+          <p:cNvPr id="20" name="Shape 18"/>
+          <p:cNvSpPr/>
+          <p:nvPr/>
+        </p:nvSpPr>
+        <p:spPr>
+          <a:xfrm>
+            <a:off x="3749040" y="3200400"/>
+            <a:ext cx="3703320" cy="429768"/>
+          </a:xfrm>
+          <a:prstGeom prst="line">
+            <a:avLst/>
+          </a:prstGeom>
+          <a:noFill/>
+          <a:ln w="15875">
+            <a:solidFill>
+              <a:srgbClr val="E8A87C"/>
+            </a:solidFill>
+            <a:prstDash val="dash"/>
+          </a:ln>
+        </p:spPr>
+      </p:sp>
+      <p:sp>
+        <p:nvSpPr>
+          <p:cNvPr id="21" name="Text 19"/>
+          <p:cNvSpPr txBox="1"/>
+          <p:nvPr/>
+        </p:nvSpPr>
+        <p:spPr>
+          <a:xfrm>
+            <a:off x="1005840" y="3429000"/>
+            <a:ext cx="4480560" cy="274320"/>
+          </a:xfrm>
+          <a:prstGeom prst="rect">
+            <a:avLst/>
+          </a:prstGeom>
+          <a:noFill/>
+          <a:ln/>
+        </p:spPr>
+        <p:txBody>
+          <a:bodyPr wrap="square" lIns="0" tIns="0" rIns="0" bIns="0" rtlCol="0" anchor="t"/>
+          <a:lstStyle/>
+          <a:p>
+            <a:pPr indent="0" marL="0">
+              <a:buNone/>
+            </a:pPr>
+            <a:r>
+              <a:rPr lang="en-US" sz="1300" dirty="0">
+                <a:solidFill>
+                  <a:srgbClr val="2B2D31"/>
+                </a:solidFill>
+                <a:latin typeface="맑은 고딕" pitchFamily="34" charset="0"/>
+                <a:ea typeface="맑은 고딕" pitchFamily="34" charset="-122"/>
+                <a:cs typeface="맑은 고딕" pitchFamily="34" charset="-120"/>
+              </a:rPr>
+              <a:t>드론 측량 · 점검 · 관측 시장</a:t>
+            </a:r>
+            <a:endParaRPr lang="en-US" sz="1300" dirty="0"/>
+          </a:p>
+        </p:txBody>
+      </p:sp>
+      <p:sp>
+        <p:nvSpPr>
+          <p:cNvPr id="22" name="Text 20"/>
+          <p:cNvSpPr txBox="1"/>
+          <p:nvPr/>
+        </p:nvSpPr>
+        <p:spPr>
+          <a:xfrm>
+            <a:off x="1005840" y="3712464"/>
+            <a:ext cx="4480560" cy="256032"/>
+          </a:xfrm>
+          <a:prstGeom prst="rect">
+            <a:avLst/>
+          </a:prstGeom>
+          <a:noFill/>
+          <a:ln/>
+        </p:spPr>
+        <p:txBody>
+          <a:bodyPr wrap="square" lIns="0" tIns="0" rIns="0" bIns="0" rtlCol="0" anchor="t"/>
+          <a:lstStyle/>
+          <a:p>
+            <a:pPr indent="0" marL="0">
+              <a:buNone/>
+            </a:pPr>
+            <a:r>
+              <a:rPr lang="en-US" sz="1200" b="1" dirty="0">
+                <a:solidFill>
+                  <a:srgbClr val="B5501F"/>
+                </a:solidFill>
+                <a:latin typeface="맑은 고딕" pitchFamily="34" charset="0"/>
+                <a:ea typeface="맑은 고딕" pitchFamily="34" charset="-122"/>
+                <a:cs typeface="맑은 고딕" pitchFamily="34" charset="-120"/>
+              </a:rPr>
+              <a:t>드론 활용 분야 중 26%</a:t>
+            </a:r>
+            <a:endParaRPr lang="en-US" sz="1200" dirty="0"/>
+          </a:p>
+        </p:txBody>
+      </p:sp>
+      <p:sp>
+        <p:nvSpPr>
+          <p:cNvPr id="23" name="Text 21"/>
+          <p:cNvSpPr txBox="1"/>
+          <p:nvPr/>
+        </p:nvSpPr>
+        <p:spPr>
+          <a:xfrm>
+            <a:off x="1005840" y="3977640"/>
+            <a:ext cx="4480560" cy="256032"/>
+          </a:xfrm>
+          <a:prstGeom prst="rect">
+            <a:avLst/>
+          </a:prstGeom>
+          <a:noFill/>
+          <a:ln/>
+        </p:spPr>
+        <p:txBody>
+          <a:bodyPr wrap="square" lIns="0" tIns="0" rIns="0" bIns="0" rtlCol="0" anchor="t"/>
+          <a:lstStyle/>
+          <a:p>
+            <a:pPr indent="0" marL="0">
+              <a:buNone/>
+            </a:pPr>
+            <a:r>
+              <a:rPr lang="en-US" sz="950" i="1" dirty="0">
+                <a:solidFill>
+                  <a:srgbClr val="A3A7AD"/>
+                </a:solidFill>
+                <a:latin typeface="맑은 고딕" pitchFamily="34" charset="0"/>
+                <a:ea typeface="맑은 고딕" pitchFamily="34" charset="-122"/>
+                <a:cs typeface="맑은 고딕" pitchFamily="34" charset="-120"/>
+              </a:rPr>
+              <a:t>드론정보포털 활용업체 시장 통계</a:t>
+            </a:r>
+            <a:endParaRPr lang="en-US" sz="950" dirty="0"/>
+          </a:p>
+        </p:txBody>
+      </p:sp>
+      <p:sp>
+        <p:nvSpPr>
+          <p:cNvPr id="24" name="Shape 22"/>
+          <p:cNvSpPr/>
+          <p:nvPr/>
+        </p:nvSpPr>
+        <p:spPr>
+          <a:xfrm>
+            <a:off x="548640" y="4453128"/>
+            <a:ext cx="329184" cy="329184"/>
+          </a:xfrm>
+          <a:prstGeom prst="ellipse">
+            <a:avLst/>
           </a:prstGeom>
           <a:solidFill>
             <a:srgbClr val="2B2D31"/>
           </a:solidFill>
-          <a:ln w="12700">
+          <a:ln w="19050">
             <a:solidFill>
-              <a:srgbClr val="2B2D31"/>
+              <a:srgbClr val="FFFFFF"/>
             </a:solidFill>
             <a:prstDash val="solid"/>
           </a:ln>
@@ -13297,14 +14230,14 @@
       </p:sp>
       <p:sp>
         <p:nvSpPr>
-          <p:cNvPr id="7" name="Text 5"/>
-          <p:cNvSpPr txBox="1"/>
-          <p:nvPr/>
-        </p:nvSpPr>
-        <p:spPr>
-          <a:xfrm>
-            <a:off x="822960" y="1508760"/>
-            <a:ext cx="914400" cy="1188720"/>
+          <p:cNvPr id="25" name="Text 23"/>
+          <p:cNvSpPr txBox="1"/>
+          <p:nvPr/>
+        </p:nvSpPr>
+        <p:spPr>
+          <a:xfrm>
+            <a:off x="1005840" y="4398264"/>
+            <a:ext cx="4937760" cy="411480"/>
           </a:xfrm>
           <a:prstGeom prst="rect">
             <a:avLst/>
@@ -13320,86 +14253,131 @@
               <a:buNone/>
             </a:pPr>
             <a:r>
-              <a:rPr lang="en-US" sz="2200" b="1" dirty="0">
-                <a:solidFill>
-                  <a:srgbClr val="FFFFFF"/>
-                </a:solidFill>
-                <a:latin typeface="맑은 고딕" pitchFamily="34" charset="0"/>
-                <a:ea typeface="맑은 고딕" pitchFamily="34" charset="-122"/>
-                <a:cs typeface="맑은 고딕" pitchFamily="34" charset="-120"/>
-              </a:rPr>
-              <a:t>TAM</a:t>
-            </a:r>
-            <a:endParaRPr lang="en-US" sz="2200" dirty="0"/>
-          </a:p>
-        </p:txBody>
-      </p:sp>
-      <p:sp>
-        <p:nvSpPr>
-          <p:cNvPr id="8" name="Text 6"/>
-          <p:cNvSpPr txBox="1"/>
-          <p:nvPr/>
-        </p:nvSpPr>
-        <p:spPr>
-          <a:xfrm>
-            <a:off x="1783080" y="1600200"/>
-            <a:ext cx="5669280" cy="868680"/>
-          </a:xfrm>
-          <a:prstGeom prst="rect">
-            <a:avLst/>
-          </a:prstGeom>
-          <a:noFill/>
-          <a:ln/>
-        </p:spPr>
-        <p:txBody>
-          <a:bodyPr wrap="square" lIns="0" tIns="0" rIns="0" bIns="0" rtlCol="0" anchor="ctr"/>
+              <a:rPr lang="en-US" sz="2000" b="1" dirty="0">
+                <a:solidFill>
+                  <a:srgbClr val="2B2D31"/>
+                </a:solidFill>
+                <a:latin typeface="맑은 고딕" pitchFamily="34" charset="0"/>
+                <a:ea typeface="맑은 고딕" pitchFamily="34" charset="-122"/>
+                <a:cs typeface="맑은 고딕" pitchFamily="34" charset="-120"/>
+              </a:rPr>
+              <a:t>SOM  17억 원</a:t>
+            </a:r>
+            <a:endParaRPr lang="en-US" sz="2000" dirty="0"/>
+          </a:p>
+        </p:txBody>
+      </p:sp>
+      <p:sp>
+        <p:nvSpPr>
+          <p:cNvPr id="26" name="Shape 24"/>
+          <p:cNvSpPr/>
+          <p:nvPr/>
+        </p:nvSpPr>
+        <p:spPr>
+          <a:xfrm>
+            <a:off x="3749040" y="4617720"/>
+            <a:ext cx="3703320" cy="662940"/>
+          </a:xfrm>
+          <a:prstGeom prst="line">
+            <a:avLst/>
+          </a:prstGeom>
+          <a:noFill/>
+          <a:ln w="15875">
+            <a:solidFill>
+              <a:srgbClr val="A3A7AD"/>
+            </a:solidFill>
+            <a:prstDash val="dash"/>
+          </a:ln>
+        </p:spPr>
+      </p:sp>
+      <p:sp>
+        <p:nvSpPr>
+          <p:cNvPr id="27" name="Text 25"/>
+          <p:cNvSpPr txBox="1"/>
+          <p:nvPr/>
+        </p:nvSpPr>
+        <p:spPr>
+          <a:xfrm>
+            <a:off x="1005840" y="4846320"/>
+            <a:ext cx="4480560" cy="274320"/>
+          </a:xfrm>
+          <a:prstGeom prst="rect">
+            <a:avLst/>
+          </a:prstGeom>
+          <a:noFill/>
+          <a:ln/>
+        </p:spPr>
+        <p:txBody>
+          <a:bodyPr wrap="square" lIns="0" tIns="0" rIns="0" bIns="0" rtlCol="0" anchor="t"/>
           <a:lstStyle/>
           <a:p>
             <a:pPr indent="0" marL="0">
               <a:buNone/>
             </a:pPr>
             <a:r>
-              <a:rPr lang="en-US" sz="1250" dirty="0">
-                <a:solidFill>
-                  <a:srgbClr val="E6E8EB"/>
-                </a:solidFill>
-                <a:latin typeface="맑은 고딕" pitchFamily="34" charset="0"/>
-                <a:ea typeface="맑은 고딕" pitchFamily="34" charset="-122"/>
-                <a:cs typeface="맑은 고딕" pitchFamily="34" charset="-120"/>
-              </a:rPr>
-              <a:t>글로벌 해양 점검 · 보수 · 유지(IRM) 시장</a:t>
-            </a:r>
-            <a:endParaRPr lang="en-US" sz="1400" dirty="0"/>
-          </a:p>
+              <a:rPr lang="en-US" sz="1300" dirty="0">
+                <a:solidFill>
+                  <a:srgbClr val="2B2D31"/>
+                </a:solidFill>
+                <a:latin typeface="맑은 고딕" pitchFamily="34" charset="0"/>
+                <a:ea typeface="맑은 고딕" pitchFamily="34" charset="-122"/>
+                <a:cs typeface="맑은 고딕" pitchFamily="34" charset="-120"/>
+              </a:rPr>
+              <a:t>3년 내 목표: SAM의 1%</a:t>
+            </a:r>
+            <a:endParaRPr lang="en-US" sz="1300" dirty="0"/>
+          </a:p>
+        </p:txBody>
+      </p:sp>
+      <p:sp>
+        <p:nvSpPr>
+          <p:cNvPr id="28" name="Text 26"/>
+          <p:cNvSpPr txBox="1"/>
+          <p:nvPr/>
+        </p:nvSpPr>
+        <p:spPr>
+          <a:xfrm>
+            <a:off x="1005840" y="5129784"/>
+            <a:ext cx="4480560" cy="256032"/>
+          </a:xfrm>
+          <a:prstGeom prst="rect">
+            <a:avLst/>
+          </a:prstGeom>
+          <a:noFill/>
+          <a:ln/>
+        </p:spPr>
+        <p:txBody>
+          <a:bodyPr wrap="square" lIns="0" tIns="0" rIns="0" bIns="0" rtlCol="0" anchor="t"/>
+          <a:lstStyle/>
           <a:p>
             <a:pPr indent="0" marL="0">
               <a:buNone/>
             </a:pPr>
             <a:r>
-              <a:rPr lang="en-US" sz="2600" b="1" dirty="0">
-                <a:solidFill>
-                  <a:srgbClr val="FFFFFF"/>
-                </a:solidFill>
-                <a:latin typeface="맑은 고딕" pitchFamily="34" charset="0"/>
-                <a:ea typeface="맑은 고딕" pitchFamily="34" charset="-122"/>
-                <a:cs typeface="맑은 고딕" pitchFamily="34" charset="-120"/>
-              </a:rPr>
-              <a:t>136억 달러</a:t>
-            </a:r>
-            <a:endParaRPr lang="en-US" sz="1400" dirty="0"/>
-          </a:p>
-        </p:txBody>
-      </p:sp>
-      <p:sp>
-        <p:nvSpPr>
-          <p:cNvPr id="9" name="Text 7"/>
-          <p:cNvSpPr txBox="1"/>
-          <p:nvPr/>
-        </p:nvSpPr>
-        <p:spPr>
-          <a:xfrm>
-            <a:off x="1783080" y="2395728"/>
-            <a:ext cx="5669280" cy="228600"/>
+              <a:rPr lang="en-US" sz="1200" b="1" dirty="0">
+                <a:solidFill>
+                  <a:srgbClr val="B5501F"/>
+                </a:solidFill>
+                <a:latin typeface="맑은 고딕" pitchFamily="34" charset="0"/>
+                <a:ea typeface="맑은 고딕" pitchFamily="34" charset="-122"/>
+                <a:cs typeface="맑은 고딕" pitchFamily="34" charset="-120"/>
+              </a:rPr>
+              <a:t>해양 · 항만 강구조물 · 해상풍력부터</a:t>
+            </a:r>
+            <a:endParaRPr lang="en-US" sz="1200" dirty="0"/>
+          </a:p>
+        </p:txBody>
+      </p:sp>
+      <p:sp>
+        <p:nvSpPr>
+          <p:cNvPr id="29" name="Text 27"/>
+          <p:cNvSpPr txBox="1"/>
+          <p:nvPr/>
+        </p:nvSpPr>
+        <p:spPr>
+          <a:xfrm>
+            <a:off x="1005840" y="5394960"/>
+            <a:ext cx="4480560" cy="256032"/>
           </a:xfrm>
           <a:prstGeom prst="rect">
             <a:avLst/>
@@ -13417,894 +14395,15 @@
             <a:r>
               <a:rPr lang="en-US" sz="950" i="1" dirty="0">
                 <a:solidFill>
-                  <a:srgbClr val="D5D7DA"/>
-                </a:solidFill>
-                <a:latin typeface="맑은 고딕" pitchFamily="34" charset="0"/>
-                <a:ea typeface="맑은 고딕" pitchFamily="34" charset="-122"/>
-                <a:cs typeface="맑은 고딕" pitchFamily="34" charset="-120"/>
-              </a:rPr>
-              <a:t>Research and Markets (2024)</a:t>
+                  <a:srgbClr val="A3A7AD"/>
+                </a:solidFill>
+                <a:latin typeface="맑은 고딕" pitchFamily="34" charset="0"/>
+                <a:ea typeface="맑은 고딕" pitchFamily="34" charset="-122"/>
+                <a:cs typeface="맑은 고딕" pitchFamily="34" charset="-120"/>
+              </a:rPr>
+              <a:t>MLC 목표 (가정)</a:t>
             </a:r>
             <a:endParaRPr lang="en-US" sz="950" dirty="0"/>
-          </a:p>
-        </p:txBody>
-      </p:sp>
-      <p:sp>
-        <p:nvSpPr>
-          <p:cNvPr id="10" name="Shape 8"/>
-          <p:cNvSpPr/>
-          <p:nvPr/>
-        </p:nvSpPr>
-        <p:spPr>
-          <a:xfrm>
-            <a:off x="1323137" y="2898648"/>
-            <a:ext cx="5491886" cy="1188720"/>
-          </a:xfrm>
-          <a:prstGeom prst="roundRect">
-            <a:avLst>
-              <a:gd name="adj" fmla="val 7692"/>
-            </a:avLst>
-          </a:prstGeom>
-          <a:solidFill>
-            <a:srgbClr val="1F5F7A"/>
-          </a:solidFill>
-          <a:ln w="12700">
-            <a:solidFill>
-              <a:srgbClr val="1F5F7A"/>
-            </a:solidFill>
-            <a:prstDash val="solid"/>
-          </a:ln>
-        </p:spPr>
-      </p:sp>
-      <p:sp>
-        <p:nvSpPr>
-          <p:cNvPr id="11" name="Text 9"/>
-          <p:cNvSpPr txBox="1"/>
-          <p:nvPr/>
-        </p:nvSpPr>
-        <p:spPr>
-          <a:xfrm>
-            <a:off x="1597457" y="2898648"/>
-            <a:ext cx="914400" cy="1188720"/>
-          </a:xfrm>
-          <a:prstGeom prst="rect">
-            <a:avLst/>
-          </a:prstGeom>
-          <a:noFill/>
-          <a:ln/>
-        </p:spPr>
-        <p:txBody>
-          <a:bodyPr wrap="square" lIns="0" tIns="0" rIns="0" bIns="0" rtlCol="0" anchor="ctr"/>
-          <a:lstStyle/>
-          <a:p>
-            <a:pPr indent="0" marL="0">
-              <a:buNone/>
-            </a:pPr>
-            <a:r>
-              <a:rPr lang="en-US" sz="2200" b="1" dirty="0">
-                <a:solidFill>
-                  <a:srgbClr val="FFFFFF"/>
-                </a:solidFill>
-                <a:latin typeface="맑은 고딕" pitchFamily="34" charset="0"/>
-                <a:ea typeface="맑은 고딕" pitchFamily="34" charset="-122"/>
-                <a:cs typeface="맑은 고딕" pitchFamily="34" charset="-120"/>
-              </a:rPr>
-              <a:t>SAM</a:t>
-            </a:r>
-            <a:endParaRPr lang="en-US" sz="2200" dirty="0"/>
-          </a:p>
-        </p:txBody>
-      </p:sp>
-      <p:sp>
-        <p:nvSpPr>
-          <p:cNvPr id="12" name="Text 10"/>
-          <p:cNvSpPr txBox="1"/>
-          <p:nvPr/>
-        </p:nvSpPr>
-        <p:spPr>
-          <a:xfrm>
-            <a:off x="2557577" y="2990088"/>
-            <a:ext cx="4120286" cy="868680"/>
-          </a:xfrm>
-          <a:prstGeom prst="rect">
-            <a:avLst/>
-          </a:prstGeom>
-          <a:noFill/>
-          <a:ln/>
-        </p:spPr>
-        <p:txBody>
-          <a:bodyPr wrap="square" lIns="0" tIns="0" rIns="0" bIns="0" rtlCol="0" anchor="ctr"/>
-          <a:lstStyle/>
-          <a:p>
-            <a:pPr indent="0" marL="0">
-              <a:buNone/>
-            </a:pPr>
-            <a:r>
-              <a:rPr lang="en-US" sz="1250" dirty="0">
-                <a:solidFill>
-                  <a:srgbClr val="E6E8EB"/>
-                </a:solidFill>
-                <a:latin typeface="맑은 고딕" pitchFamily="34" charset="0"/>
-                <a:ea typeface="맑은 고딕" pitchFamily="34" charset="-122"/>
-                <a:cs typeface="맑은 고딕" pitchFamily="34" charset="-120"/>
-              </a:rPr>
-              <a:t>해양 드론 점검 서비스 시장</a:t>
-            </a:r>
-            <a:endParaRPr lang="en-US" sz="1400" dirty="0"/>
-          </a:p>
-          <a:p>
-            <a:pPr indent="0" marL="0">
-              <a:buNone/>
-            </a:pPr>
-            <a:r>
-              <a:rPr lang="en-US" sz="2600" b="1" dirty="0">
-                <a:solidFill>
-                  <a:srgbClr val="FFFFFF"/>
-                </a:solidFill>
-                <a:latin typeface="맑은 고딕" pitchFamily="34" charset="0"/>
-                <a:ea typeface="맑은 고딕" pitchFamily="34" charset="-122"/>
-                <a:cs typeface="맑은 고딕" pitchFamily="34" charset="-120"/>
-              </a:rPr>
-              <a:t>15억 달러</a:t>
-            </a:r>
-            <a:endParaRPr lang="en-US" sz="1400" dirty="0"/>
-          </a:p>
-        </p:txBody>
-      </p:sp>
-      <p:sp>
-        <p:nvSpPr>
-          <p:cNvPr id="13" name="Text 11"/>
-          <p:cNvSpPr txBox="1"/>
-          <p:nvPr/>
-        </p:nvSpPr>
-        <p:spPr>
-          <a:xfrm>
-            <a:off x="2557577" y="3785616"/>
-            <a:ext cx="4120286" cy="228600"/>
-          </a:xfrm>
-          <a:prstGeom prst="rect">
-            <a:avLst/>
-          </a:prstGeom>
-          <a:noFill/>
-          <a:ln/>
-        </p:spPr>
-        <p:txBody>
-          <a:bodyPr wrap="square" lIns="0" tIns="0" rIns="0" bIns="0" rtlCol="0" anchor="t"/>
-          <a:lstStyle/>
-          <a:p>
-            <a:pPr indent="0" marL="0">
-              <a:buNone/>
-            </a:pPr>
-            <a:r>
-              <a:rPr lang="en-US" sz="950" i="1" dirty="0">
-                <a:solidFill>
-                  <a:srgbClr val="D5D7DA"/>
-                </a:solidFill>
-                <a:latin typeface="맑은 고딕" pitchFamily="34" charset="0"/>
-                <a:ea typeface="맑은 고딕" pitchFamily="34" charset="-122"/>
-                <a:cs typeface="맑은 고딕" pitchFamily="34" charset="-120"/>
-              </a:rPr>
-              <a:t>Exactitude Consultancy (2024)</a:t>
-            </a:r>
-            <a:endParaRPr lang="en-US" sz="950" dirty="0"/>
-          </a:p>
-        </p:txBody>
-      </p:sp>
-      <p:sp>
-        <p:nvSpPr>
-          <p:cNvPr id="14" name="Shape 12"/>
-          <p:cNvSpPr/>
-          <p:nvPr/>
-        </p:nvSpPr>
-        <p:spPr>
-          <a:xfrm>
-            <a:off x="2097634" y="4288536"/>
-            <a:ext cx="3942893" cy="1188720"/>
-          </a:xfrm>
-          <a:prstGeom prst="roundRect">
-            <a:avLst>
-              <a:gd name="adj" fmla="val 7692"/>
-            </a:avLst>
-          </a:prstGeom>
-          <a:solidFill>
-            <a:srgbClr val="B5501F"/>
-          </a:solidFill>
-          <a:ln w="12700">
-            <a:solidFill>
-              <a:srgbClr val="B5501F"/>
-            </a:solidFill>
-            <a:prstDash val="solid"/>
-          </a:ln>
-        </p:spPr>
-      </p:sp>
-      <p:sp>
-        <p:nvSpPr>
-          <p:cNvPr id="15" name="Text 13"/>
-          <p:cNvSpPr txBox="1"/>
-          <p:nvPr/>
-        </p:nvSpPr>
-        <p:spPr>
-          <a:xfrm>
-            <a:off x="2371954" y="4288536"/>
-            <a:ext cx="914400" cy="1188720"/>
-          </a:xfrm>
-          <a:prstGeom prst="rect">
-            <a:avLst/>
-          </a:prstGeom>
-          <a:noFill/>
-          <a:ln/>
-        </p:spPr>
-        <p:txBody>
-          <a:bodyPr wrap="square" lIns="0" tIns="0" rIns="0" bIns="0" rtlCol="0" anchor="ctr"/>
-          <a:lstStyle/>
-          <a:p>
-            <a:pPr indent="0" marL="0">
-              <a:buNone/>
-            </a:pPr>
-            <a:r>
-              <a:rPr lang="en-US" sz="2200" b="1" dirty="0">
-                <a:solidFill>
-                  <a:srgbClr val="FFFFFF"/>
-                </a:solidFill>
-                <a:latin typeface="맑은 고딕" pitchFamily="34" charset="0"/>
-                <a:ea typeface="맑은 고딕" pitchFamily="34" charset="-122"/>
-                <a:cs typeface="맑은 고딕" pitchFamily="34" charset="-120"/>
-              </a:rPr>
-              <a:t>SOM</a:t>
-            </a:r>
-            <a:endParaRPr lang="en-US" sz="2200" dirty="0"/>
-          </a:p>
-        </p:txBody>
-      </p:sp>
-      <p:sp>
-        <p:nvSpPr>
-          <p:cNvPr id="16" name="Text 14"/>
-          <p:cNvSpPr txBox="1"/>
-          <p:nvPr/>
-        </p:nvSpPr>
-        <p:spPr>
-          <a:xfrm>
-            <a:off x="3332074" y="4379976"/>
-            <a:ext cx="2571293" cy="868680"/>
-          </a:xfrm>
-          <a:prstGeom prst="rect">
-            <a:avLst/>
-          </a:prstGeom>
-          <a:noFill/>
-          <a:ln/>
-        </p:spPr>
-        <p:txBody>
-          <a:bodyPr wrap="square" lIns="0" tIns="0" rIns="0" bIns="0" rtlCol="0" anchor="ctr"/>
-          <a:lstStyle/>
-          <a:p>
-            <a:pPr indent="0" marL="0">
-              <a:buNone/>
-            </a:pPr>
-            <a:r>
-              <a:rPr lang="en-US" sz="1250" dirty="0">
-                <a:solidFill>
-                  <a:srgbClr val="E6E8EB"/>
-                </a:solidFill>
-                <a:latin typeface="맑은 고딕" pitchFamily="34" charset="0"/>
-                <a:ea typeface="맑은 고딕" pitchFamily="34" charset="-122"/>
-                <a:cs typeface="맑은 고딕" pitchFamily="34" charset="-120"/>
-              </a:rPr>
-              <a:t>3년 내 목표: SAM의 1%</a:t>
-            </a:r>
-            <a:endParaRPr lang="en-US" sz="1400" dirty="0"/>
-          </a:p>
-          <a:p>
-            <a:pPr indent="0" marL="0">
-              <a:buNone/>
-            </a:pPr>
-            <a:r>
-              <a:rPr lang="en-US" sz="2600" b="1" dirty="0">
-                <a:solidFill>
-                  <a:srgbClr val="FFFFFF"/>
-                </a:solidFill>
-                <a:latin typeface="맑은 고딕" pitchFamily="34" charset="0"/>
-                <a:ea typeface="맑은 고딕" pitchFamily="34" charset="-122"/>
-                <a:cs typeface="맑은 고딕" pitchFamily="34" charset="-120"/>
-              </a:rPr>
-              <a:t>1,500만 달러</a:t>
-            </a:r>
-            <a:endParaRPr lang="en-US" sz="1400" dirty="0"/>
-          </a:p>
-        </p:txBody>
-      </p:sp>
-      <p:sp>
-        <p:nvSpPr>
-          <p:cNvPr id="17" name="Text 15"/>
-          <p:cNvSpPr txBox="1"/>
-          <p:nvPr/>
-        </p:nvSpPr>
-        <p:spPr>
-          <a:xfrm>
-            <a:off x="3332074" y="5175504"/>
-            <a:ext cx="2571293" cy="228600"/>
-          </a:xfrm>
-          <a:prstGeom prst="rect">
-            <a:avLst/>
-          </a:prstGeom>
-          <a:noFill/>
-          <a:ln/>
-        </p:spPr>
-        <p:txBody>
-          <a:bodyPr wrap="square" lIns="0" tIns="0" rIns="0" bIns="0" rtlCol="0" anchor="t"/>
-          <a:lstStyle/>
-          <a:p>
-            <a:pPr indent="0" marL="0">
-              <a:buNone/>
-            </a:pPr>
-            <a:r>
-              <a:rPr lang="en-US" sz="950" i="1" dirty="0">
-                <a:solidFill>
-                  <a:srgbClr val="D5D7DA"/>
-                </a:solidFill>
-                <a:latin typeface="맑은 고딕" pitchFamily="34" charset="0"/>
-                <a:ea typeface="맑은 고딕" pitchFamily="34" charset="-122"/>
-                <a:cs typeface="맑은 고딕" pitchFamily="34" charset="-120"/>
-              </a:rPr>
-              <a:t>MLC 목표 (가정)</a:t>
-            </a:r>
-            <a:endParaRPr lang="en-US" sz="950" dirty="0"/>
-          </a:p>
-        </p:txBody>
-      </p:sp>
-      <p:sp>
-        <p:nvSpPr>
-          <p:cNvPr id="18" name="Text 16"/>
-          <p:cNvSpPr txBox="1"/>
-          <p:nvPr/>
-        </p:nvSpPr>
-        <p:spPr>
-          <a:xfrm>
-            <a:off x="8001000" y="1508760"/>
-            <a:ext cx="3642055" cy="274320"/>
-          </a:xfrm>
-          <a:prstGeom prst="rect">
-            <a:avLst/>
-          </a:prstGeom>
-          <a:noFill/>
-          <a:ln/>
-        </p:spPr>
-        <p:txBody>
-          <a:bodyPr wrap="square" lIns="0" tIns="0" rIns="0" bIns="0" rtlCol="0" anchor="t"/>
-          <a:lstStyle/>
-          <a:p>
-            <a:pPr indent="0" marL="0">
-              <a:buNone/>
-            </a:pPr>
-            <a:r>
-              <a:rPr lang="en-US" sz="1300" b="1" dirty="0">
-                <a:solidFill>
-                  <a:srgbClr val="1F5F7A"/>
-                </a:solidFill>
-                <a:latin typeface="맑은 고딕" pitchFamily="34" charset="0"/>
-                <a:ea typeface="맑은 고딕" pitchFamily="34" charset="-122"/>
-                <a:cs typeface="맑은 고딕" pitchFamily="34" charset="-120"/>
-              </a:rPr>
-              <a:t>성장성</a:t>
-            </a:r>
-            <a:endParaRPr lang="en-US" sz="1300" dirty="0"/>
-          </a:p>
-        </p:txBody>
-      </p:sp>
-      <p:sp>
-        <p:nvSpPr>
-          <p:cNvPr id="19" name="Shape 17"/>
-          <p:cNvSpPr/>
-          <p:nvPr/>
-        </p:nvSpPr>
-        <p:spPr>
-          <a:xfrm>
-            <a:off x="8001000" y="1874520"/>
-            <a:ext cx="3642055" cy="896112"/>
-          </a:xfrm>
-          <a:prstGeom prst="roundRect">
-            <a:avLst>
-              <a:gd name="adj" fmla="val 8163"/>
-            </a:avLst>
-          </a:prstGeom>
-          <a:solidFill>
-            <a:srgbClr val="F3F4F6"/>
-          </a:solidFill>
-          <a:ln w="12700">
-            <a:solidFill>
-              <a:srgbClr val="F3F4F6"/>
-            </a:solidFill>
-            <a:prstDash val="solid"/>
-          </a:ln>
-        </p:spPr>
-      </p:sp>
-      <p:sp>
-        <p:nvSpPr>
-          <p:cNvPr id="20" name="Shape 18"/>
-          <p:cNvSpPr/>
-          <p:nvPr/>
-        </p:nvSpPr>
-        <p:spPr>
-          <a:xfrm>
-            <a:off x="8183880" y="2057400"/>
-            <a:ext cx="530352" cy="530352"/>
-          </a:xfrm>
-          <a:prstGeom prst="ellipse">
-            <a:avLst/>
-          </a:prstGeom>
-          <a:solidFill>
-            <a:srgbClr val="2B2D31"/>
-          </a:solidFill>
-          <a:ln w="12700">
-            <a:solidFill>
-              <a:srgbClr val="2B2D31"/>
-            </a:solidFill>
-            <a:prstDash val="solid"/>
-          </a:ln>
-        </p:spPr>
-      </p:sp>
-      <p:pic>
-        <p:nvPicPr>
-          <p:cNvPr id="21" name="Image 0" descr="preencoded.png">    </p:cNvPr>
-          <p:cNvPicPr>
-            <a:picLocks noChangeAspect="1"/>
-          </p:cNvPicPr>
-          <p:nvPr/>
-        </p:nvPicPr>
-        <p:blipFill>
-          <a:blip r:embed="rId1"/>
-          <a:stretch>
-            <a:fillRect/>
-          </a:stretch>
-        </p:blipFill>
-        <p:spPr>
-          <a:xfrm>
-            <a:off x="8321772" y="2195292"/>
-            <a:ext cx="254569" cy="254569"/>
-          </a:xfrm>
-          <a:prstGeom prst="rect">
-            <a:avLst/>
-          </a:prstGeom>
-        </p:spPr>
-      </p:pic>
-      <p:sp>
-        <p:nvSpPr>
-          <p:cNvPr id="22" name="Text 19"/>
-          <p:cNvSpPr txBox="1"/>
-          <p:nvPr/>
-        </p:nvSpPr>
-        <p:spPr>
-          <a:xfrm>
-            <a:off x="8869680" y="1965960"/>
-            <a:ext cx="2636215" cy="411480"/>
-          </a:xfrm>
-          <a:prstGeom prst="rect">
-            <a:avLst/>
-          </a:prstGeom>
-          <a:noFill/>
-          <a:ln/>
-        </p:spPr>
-        <p:txBody>
-          <a:bodyPr wrap="square" lIns="0" tIns="0" rIns="0" bIns="0" rtlCol="0" anchor="ctr"/>
-          <a:lstStyle/>
-          <a:p>
-            <a:pPr indent="0" marL="0">
-              <a:buNone/>
-            </a:pPr>
-            <a:r>
-              <a:rPr lang="en-US" sz="2200" b="1" dirty="0">
-                <a:solidFill>
-                  <a:srgbClr val="2B2D31"/>
-                </a:solidFill>
-                <a:latin typeface="맑은 고딕" pitchFamily="34" charset="0"/>
-                <a:ea typeface="맑은 고딕" pitchFamily="34" charset="-122"/>
-                <a:cs typeface="맑은 고딕" pitchFamily="34" charset="-120"/>
-              </a:rPr>
-              <a:t>연 8.4%</a:t>
-            </a:r>
-            <a:endParaRPr lang="en-US" sz="2200" dirty="0"/>
-          </a:p>
-        </p:txBody>
-      </p:sp>
-      <p:sp>
-        <p:nvSpPr>
-          <p:cNvPr id="23" name="Text 20"/>
-          <p:cNvSpPr txBox="1"/>
-          <p:nvPr/>
-        </p:nvSpPr>
-        <p:spPr>
-          <a:xfrm>
-            <a:off x="8869680" y="2377440"/>
-            <a:ext cx="2636215" cy="274320"/>
-          </a:xfrm>
-          <a:prstGeom prst="rect">
-            <a:avLst/>
-          </a:prstGeom>
-          <a:noFill/>
-          <a:ln/>
-        </p:spPr>
-        <p:txBody>
-          <a:bodyPr wrap="square" lIns="0" tIns="0" rIns="0" bIns="0" rtlCol="0" anchor="t"/>
-          <a:lstStyle/>
-          <a:p>
-            <a:pPr indent="0" marL="0">
-              <a:buNone/>
-            </a:pPr>
-            <a:r>
-              <a:rPr lang="en-US" sz="1150" dirty="0">
-                <a:solidFill>
-                  <a:srgbClr val="6B6F76"/>
-                </a:solidFill>
-                <a:latin typeface="맑은 고딕" pitchFamily="34" charset="0"/>
-                <a:ea typeface="맑은 고딕" pitchFamily="34" charset="-122"/>
-                <a:cs typeface="맑은 고딕" pitchFamily="34" charset="-120"/>
-              </a:rPr>
-              <a:t>해양 IRM 시장 성장 (~2030)</a:t>
-            </a:r>
-            <a:endParaRPr lang="en-US" sz="1150" dirty="0"/>
-          </a:p>
-        </p:txBody>
-      </p:sp>
-      <p:sp>
-        <p:nvSpPr>
-          <p:cNvPr id="24" name="Shape 21"/>
-          <p:cNvSpPr/>
-          <p:nvPr/>
-        </p:nvSpPr>
-        <p:spPr>
-          <a:xfrm>
-            <a:off x="8001000" y="2898648"/>
-            <a:ext cx="3642055" cy="896112"/>
-          </a:xfrm>
-          <a:prstGeom prst="roundRect">
-            <a:avLst>
-              <a:gd name="adj" fmla="val 8163"/>
-            </a:avLst>
-          </a:prstGeom>
-          <a:solidFill>
-            <a:srgbClr val="F3F4F6"/>
-          </a:solidFill>
-          <a:ln w="12700">
-            <a:solidFill>
-              <a:srgbClr val="F3F4F6"/>
-            </a:solidFill>
-            <a:prstDash val="solid"/>
-          </a:ln>
-        </p:spPr>
-      </p:sp>
-      <p:sp>
-        <p:nvSpPr>
-          <p:cNvPr id="25" name="Shape 22"/>
-          <p:cNvSpPr/>
-          <p:nvPr/>
-        </p:nvSpPr>
-        <p:spPr>
-          <a:xfrm>
-            <a:off x="8183880" y="3081528"/>
-            <a:ext cx="530352" cy="530352"/>
-          </a:xfrm>
-          <a:prstGeom prst="ellipse">
-            <a:avLst/>
-          </a:prstGeom>
-          <a:solidFill>
-            <a:srgbClr val="1F5F7A"/>
-          </a:solidFill>
-          <a:ln w="12700">
-            <a:solidFill>
-              <a:srgbClr val="1F5F7A"/>
-            </a:solidFill>
-            <a:prstDash val="solid"/>
-          </a:ln>
-        </p:spPr>
-      </p:sp>
-      <p:pic>
-        <p:nvPicPr>
-          <p:cNvPr id="26" name="Image 1" descr="preencoded.png">    </p:cNvPr>
-          <p:cNvPicPr>
-            <a:picLocks noChangeAspect="1"/>
-          </p:cNvPicPr>
-          <p:nvPr/>
-        </p:nvPicPr>
-        <p:blipFill>
-          <a:blip r:embed="rId2"/>
-          <a:stretch>
-            <a:fillRect/>
-          </a:stretch>
-        </p:blipFill>
-        <p:spPr>
-          <a:xfrm>
-            <a:off x="8321772" y="3219420"/>
-            <a:ext cx="254569" cy="254569"/>
-          </a:xfrm>
-          <a:prstGeom prst="rect">
-            <a:avLst/>
-          </a:prstGeom>
-        </p:spPr>
-      </p:pic>
-      <p:sp>
-        <p:nvSpPr>
-          <p:cNvPr id="27" name="Text 23"/>
-          <p:cNvSpPr txBox="1"/>
-          <p:nvPr/>
-        </p:nvSpPr>
-        <p:spPr>
-          <a:xfrm>
-            <a:off x="8869680" y="2990088"/>
-            <a:ext cx="2636215" cy="411480"/>
-          </a:xfrm>
-          <a:prstGeom prst="rect">
-            <a:avLst/>
-          </a:prstGeom>
-          <a:noFill/>
-          <a:ln/>
-        </p:spPr>
-        <p:txBody>
-          <a:bodyPr wrap="square" lIns="0" tIns="0" rIns="0" bIns="0" rtlCol="0" anchor="ctr"/>
-          <a:lstStyle/>
-          <a:p>
-            <a:pPr indent="0" marL="0">
-              <a:buNone/>
-            </a:pPr>
-            <a:r>
-              <a:rPr lang="en-US" sz="2200" b="1" dirty="0">
-                <a:solidFill>
-                  <a:srgbClr val="1F5F7A"/>
-                </a:solidFill>
-                <a:latin typeface="맑은 고딕" pitchFamily="34" charset="0"/>
-                <a:ea typeface="맑은 고딕" pitchFamily="34" charset="-122"/>
-                <a:cs typeface="맑은 고딕" pitchFamily="34" charset="-120"/>
-              </a:rPr>
-              <a:t>연 11.5%</a:t>
-            </a:r>
-            <a:endParaRPr lang="en-US" sz="2200" dirty="0"/>
-          </a:p>
-        </p:txBody>
-      </p:sp>
-      <p:sp>
-        <p:nvSpPr>
-          <p:cNvPr id="28" name="Text 24"/>
-          <p:cNvSpPr txBox="1"/>
-          <p:nvPr/>
-        </p:nvSpPr>
-        <p:spPr>
-          <a:xfrm>
-            <a:off x="8869680" y="3401568"/>
-            <a:ext cx="2636215" cy="274320"/>
-          </a:xfrm>
-          <a:prstGeom prst="rect">
-            <a:avLst/>
-          </a:prstGeom>
-          <a:noFill/>
-          <a:ln/>
-        </p:spPr>
-        <p:txBody>
-          <a:bodyPr wrap="square" lIns="0" tIns="0" rIns="0" bIns="0" rtlCol="0" anchor="t"/>
-          <a:lstStyle/>
-          <a:p>
-            <a:pPr indent="0" marL="0">
-              <a:buNone/>
-            </a:pPr>
-            <a:r>
-              <a:rPr lang="en-US" sz="1150" dirty="0">
-                <a:solidFill>
-                  <a:srgbClr val="6B6F76"/>
-                </a:solidFill>
-                <a:latin typeface="맑은 고딕" pitchFamily="34" charset="0"/>
-                <a:ea typeface="맑은 고딕" pitchFamily="34" charset="-122"/>
-                <a:cs typeface="맑은 고딕" pitchFamily="34" charset="-120"/>
-              </a:rPr>
-              <a:t>해양 드론 점검 서비스 성장 (~2034)</a:t>
-            </a:r>
-            <a:endParaRPr lang="en-US" sz="1150" dirty="0"/>
-          </a:p>
-        </p:txBody>
-      </p:sp>
-      <p:sp>
-        <p:nvSpPr>
-          <p:cNvPr id="29" name="Text 25"/>
-          <p:cNvSpPr txBox="1"/>
-          <p:nvPr/>
-        </p:nvSpPr>
-        <p:spPr>
-          <a:xfrm>
-            <a:off x="8001000" y="4041648"/>
-            <a:ext cx="3642055" cy="274320"/>
-          </a:xfrm>
-          <a:prstGeom prst="rect">
-            <a:avLst/>
-          </a:prstGeom>
-          <a:noFill/>
-          <a:ln/>
-        </p:spPr>
-        <p:txBody>
-          <a:bodyPr wrap="square" lIns="0" tIns="0" rIns="0" bIns="0" rtlCol="0" anchor="t"/>
-          <a:lstStyle/>
-          <a:p>
-            <a:pPr indent="0" marL="0">
-              <a:buNone/>
-            </a:pPr>
-            <a:r>
-              <a:rPr lang="en-US" sz="1300" b="1" dirty="0">
-                <a:solidFill>
-                  <a:srgbClr val="B5501F"/>
-                </a:solidFill>
-                <a:latin typeface="맑은 고딕" pitchFamily="34" charset="0"/>
-                <a:ea typeface="맑은 고딕" pitchFamily="34" charset="-122"/>
-                <a:cs typeface="맑은 고딕" pitchFamily="34" charset="-120"/>
-              </a:rPr>
-              <a:t>첫 타깃</a:t>
-            </a:r>
-            <a:endParaRPr lang="en-US" sz="1300" dirty="0"/>
-          </a:p>
-        </p:txBody>
-      </p:sp>
-      <p:sp>
-        <p:nvSpPr>
-          <p:cNvPr id="30" name="Shape 26"/>
-          <p:cNvSpPr/>
-          <p:nvPr/>
-        </p:nvSpPr>
-        <p:spPr>
-          <a:xfrm>
-            <a:off x="8001000" y="4389120"/>
-            <a:ext cx="3642055" cy="1188720"/>
-          </a:xfrm>
-          <a:prstGeom prst="roundRect">
-            <a:avLst>
-              <a:gd name="adj" fmla="val 6154"/>
-            </a:avLst>
-          </a:prstGeom>
-          <a:solidFill>
-            <a:srgbClr val="FBEDE4"/>
-          </a:solidFill>
-          <a:ln w="12700">
-            <a:solidFill>
-              <a:srgbClr val="FBEDE4"/>
-            </a:solidFill>
-            <a:prstDash val="solid"/>
-          </a:ln>
-        </p:spPr>
-      </p:sp>
-      <p:sp>
-        <p:nvSpPr>
-          <p:cNvPr id="31" name="Shape 27"/>
-          <p:cNvSpPr/>
-          <p:nvPr/>
-        </p:nvSpPr>
-        <p:spPr>
-          <a:xfrm>
-            <a:off x="8183880" y="4572000"/>
-            <a:ext cx="530352" cy="530352"/>
-          </a:xfrm>
-          <a:prstGeom prst="ellipse">
-            <a:avLst/>
-          </a:prstGeom>
-          <a:solidFill>
-            <a:srgbClr val="B5501F"/>
-          </a:solidFill>
-          <a:ln w="12700">
-            <a:solidFill>
-              <a:srgbClr val="B5501F"/>
-            </a:solidFill>
-            <a:prstDash val="solid"/>
-          </a:ln>
-        </p:spPr>
-      </p:sp>
-      <p:pic>
-        <p:nvPicPr>
-          <p:cNvPr id="32" name="Image 2" descr="preencoded.png">    </p:cNvPr>
-          <p:cNvPicPr>
-            <a:picLocks noChangeAspect="1"/>
-          </p:cNvPicPr>
-          <p:nvPr/>
-        </p:nvPicPr>
-        <p:blipFill>
-          <a:blip r:embed="rId3"/>
-          <a:stretch>
-            <a:fillRect/>
-          </a:stretch>
-        </p:blipFill>
-        <p:spPr>
-          <a:xfrm>
-            <a:off x="8321772" y="4709892"/>
-            <a:ext cx="254569" cy="254569"/>
-          </a:xfrm>
-          <a:prstGeom prst="rect">
-            <a:avLst/>
-          </a:prstGeom>
-        </p:spPr>
-      </p:pic>
-      <p:sp>
-        <p:nvSpPr>
-          <p:cNvPr id="33" name="Text 28"/>
-          <p:cNvSpPr txBox="1"/>
-          <p:nvPr/>
-        </p:nvSpPr>
-        <p:spPr>
-          <a:xfrm>
-            <a:off x="8869680" y="4480560"/>
-            <a:ext cx="2636215" cy="457200"/>
-          </a:xfrm>
-          <a:prstGeom prst="rect">
-            <a:avLst/>
-          </a:prstGeom>
-          <a:noFill/>
-          <a:ln/>
-        </p:spPr>
-        <p:txBody>
-          <a:bodyPr wrap="square" lIns="0" tIns="0" rIns="0" bIns="0" rtlCol="0" anchor="ctr"/>
-          <a:lstStyle/>
-          <a:p>
-            <a:pPr indent="0" marL="0">
-              <a:buNone/>
-            </a:pPr>
-            <a:r>
-              <a:rPr lang="en-US" sz="2400" b="1" dirty="0">
-                <a:solidFill>
-                  <a:srgbClr val="B5501F"/>
-                </a:solidFill>
-                <a:latin typeface="맑은 고딕" pitchFamily="34" charset="0"/>
-                <a:ea typeface="맑은 고딕" pitchFamily="34" charset="-122"/>
-                <a:cs typeface="맑은 고딕" pitchFamily="34" charset="-120"/>
-              </a:rPr>
-              <a:t>371곳</a:t>
-            </a:r>
-            <a:endParaRPr lang="en-US" sz="2400" dirty="0"/>
-          </a:p>
-        </p:txBody>
-      </p:sp>
-      <p:sp>
-        <p:nvSpPr>
-          <p:cNvPr id="34" name="Text 29"/>
-          <p:cNvSpPr txBox="1"/>
-          <p:nvPr/>
-        </p:nvSpPr>
-        <p:spPr>
-          <a:xfrm>
-            <a:off x="8869680" y="4956048"/>
-            <a:ext cx="2636215" cy="566928"/>
-          </a:xfrm>
-          <a:prstGeom prst="rect">
-            <a:avLst/>
-          </a:prstGeom>
-          <a:noFill/>
-          <a:ln/>
-        </p:spPr>
-        <p:txBody>
-          <a:bodyPr wrap="square" lIns="0" tIns="0" rIns="0" bIns="0" rtlCol="0" anchor="t"/>
-          <a:lstStyle/>
-          <a:p>
-            <a:pPr indent="0" marL="0">
-              <a:buNone/>
-            </a:pPr>
-            <a:r>
-              <a:rPr lang="en-US" sz="1150" dirty="0">
-                <a:solidFill>
-                  <a:srgbClr val="2B2D31"/>
-                </a:solidFill>
-                <a:latin typeface="맑은 고딕" pitchFamily="34" charset="0"/>
-                <a:ea typeface="맑은 고딕" pitchFamily="34" charset="-122"/>
-                <a:cs typeface="맑은 고딕" pitchFamily="34" charset="-120"/>
-              </a:rPr>
-              <a:t>멕시코만 유인 생산 플랫폼</a:t>
-            </a:r>
-            <a:endParaRPr lang="en-US" sz="1150" dirty="0"/>
-          </a:p>
-          <a:p>
-            <a:pPr indent="0" marL="0">
-              <a:buNone/>
-            </a:pPr>
-            <a:r>
-              <a:rPr lang="en-US" sz="1150" dirty="0">
-                <a:solidFill>
-                  <a:srgbClr val="2B2D31"/>
-                </a:solidFill>
-                <a:latin typeface="맑은 고딕" pitchFamily="34" charset="0"/>
-                <a:ea typeface="맑은 고딕" pitchFamily="34" charset="-122"/>
-                <a:cs typeface="맑은 고딕" pitchFamily="34" charset="-120"/>
-              </a:rPr>
-              <a:t>매년 Level I 점검 대상 (BSEE, 2024)</a:t>
-            </a:r>
-            <a:endParaRPr lang="en-US" sz="1150" dirty="0"/>
           </a:p>
         </p:txBody>
       </p:sp>

--- a/MLC_IR_A-STREAM2026_v3.pptx
+++ b/MLC_IR_A-STREAM2026_v3.pptx
@@ -12,11 +12,11 @@
     <p:sldId id="265" r:id="rId3"/>
     <p:sldId id="267" r:id="rId4"/>
     <p:sldId id="257" r:id="rId5"/>
-    <p:sldId id="260" r:id="rId7"/>
-    <p:sldId id="261" r:id="rId8"/>
-    <p:sldId id="263" r:id="rId9"/>
-    <p:sldId id="262" r:id="rId10"/>
-    <p:sldId id="268" r:id="rId18"/>
+    <p:sldId id="260" r:id="rId6"/>
+    <p:sldId id="261" r:id="rId7"/>
+    <p:sldId id="263" r:id="rId8"/>
+    <p:sldId id="262" r:id="rId9"/>
+    <p:sldId id="268" r:id="rId10"/>
     <p:sldId id="264" r:id="rId11"/>
     <p:sldId id="266" r:id="rId12"/>
   </p:sldIdLst>
@@ -526,99 +526,6 @@
 </p:notes>
 </file>
 
-<file path=ppt/notesSlides/notesSlide12.xml><?xml version="1.0" encoding="utf-8"?>
-<p:notes xmlns:a="http://schemas.openxmlformats.org/drawingml/2006/main" xmlns:r="http://schemas.openxmlformats.org/officeDocument/2006/relationships" xmlns:p="http://schemas.openxmlformats.org/presentationml/2006/main">
-  <p:cSld>
-    <p:spTree>
-      <p:nvGrpSpPr>
-        <p:cNvPr id="1" name=""/>
-        <p:cNvGrpSpPr/>
-        <p:nvPr/>
-      </p:nvGrpSpPr>
-      <p:grpSpPr>
-        <a:xfrm>
-          <a:off x="0" y="0"/>
-          <a:ext cx="0" cy="0"/>
-          <a:chOff x="0" y="0"/>
-          <a:chExt cx="0" cy="0"/>
-        </a:xfrm>
-      </p:grpSpPr>
-      <p:sp>
-        <p:nvSpPr>
-          <p:cNvPr id="2" name="Slide Image Placeholder 1"/>
-          <p:cNvSpPr>
-            <a:spLocks noGrp="1" noRot="1" noChangeAspect="1"/>
-          </p:cNvSpPr>
-          <p:nvPr>
-            <p:ph type="sldImg"/>
-          </p:nvPr>
-        </p:nvSpPr>
-        <p:spPr/>
-      </p:sp>
-      <p:sp>
-        <p:nvSpPr>
-          <p:cNvPr id="3" name="Notes Placeholder 2"/>
-          <p:cNvSpPr>
-            <a:spLocks noGrp="1"/>
-          </p:cNvSpPr>
-          <p:nvPr>
-            <p:ph type="body" idx="1"/>
-          </p:nvPr>
-        </p:nvSpPr>
-        <p:spPr/>
-        <p:txBody>
-          <a:bodyPr/>
-          <a:lstStyle/>
-          <a:p>
-            <a:r>
-              <a:rPr lang="en-US" dirty="0"/>
-              <a:t>[약 30초]</a:t>
-            </a:r>
-          </a:p>
-          <a:p>
-            <a:r>
-              <a:rPr lang="en-US" dirty="0"/>
-              <a:t>비즈니스 모델입니다. 드론 운용사와 방식 전문 업체가 촬영 데이터를 가져오고 고객을 소개하면, MLC가 위험도를 분석해 고객사에 점검 우선순위 리포트를 드립니다. 매출은 점검 건당 요금과 연 구독으로 시작하고, 장기적으로는 드론과 점검 업체에 분석 엔진을 라이선스하겠습니다. 비용은 드론 촬영 운용과 모델 개발이고, 고객은 선박 용선과 리프트, 로프 액세스 비용을 아낄 수 있습니다.</a:t>
-            </a:r>
-          </a:p>
-        </p:txBody>
-      </p:sp>
-      <p:sp>
-        <p:nvSpPr>
-          <p:cNvPr id="4" name="Slide Number Placeholder 3"/>
-          <p:cNvSpPr>
-            <a:spLocks noGrp="1"/>
-          </p:cNvSpPr>
-          <p:nvPr>
-            <p:ph type="sldNum" sz="quarter" idx="10"/>
-          </p:nvPr>
-        </p:nvSpPr>
-        <p:spPr/>
-        <p:txBody>
-          <a:bodyPr/>
-          <a:lstStyle/>
-          <a:p>
-            <a:fld id="{F7021451-1387-4CA6-816F-3879F97B5CBC}" type="slidenum">
-              <a:rPr lang="en-US"/>
-              <a:t>9</a:t>
-            </a:fld>
-            <a:endParaRPr lang="en-US"/>
-          </a:p>
-        </p:txBody>
-      </p:sp>
-    </p:spTree>
-    <p:extLst>
-      <p:ext uri="{BB962C8B-B14F-4D97-AF65-F5344CB8AC3E}">
-        <p14:creationId xmlns:p14="http://schemas.microsoft.com/office/powerpoint/2010/main" val="1024086991"/>
-      </p:ext>
-    </p:extLst>
-  </p:cSld>
-  <p:clrMapOvr>
-    <a:masterClrMapping/>
-  </p:clrMapOvr>
-</p:notes>
-</file>
-
 <file path=ppt/notesSlides/notesSlide2.xml><?xml version="1.0" encoding="utf-8"?>
 <p:notes xmlns:a="http://schemas.openxmlformats.org/drawingml/2006/main" xmlns:r="http://schemas.openxmlformats.org/officeDocument/2006/relationships" xmlns:p="http://schemas.openxmlformats.org/presentationml/2006/main">
   <p:cSld>
@@ -898,6 +805,99 @@
 </p:notes>
 </file>
 
+<file path=ppt/notesSlides/notesSlide5.xml><?xml version="1.0" encoding="utf-8"?>
+<p:notes xmlns:a="http://schemas.openxmlformats.org/drawingml/2006/main" xmlns:r="http://schemas.openxmlformats.org/officeDocument/2006/relationships" xmlns:p="http://schemas.openxmlformats.org/presentationml/2006/main">
+  <p:cSld>
+    <p:spTree>
+      <p:nvGrpSpPr>
+        <p:cNvPr id="1" name=""/>
+        <p:cNvGrpSpPr/>
+        <p:nvPr/>
+      </p:nvGrpSpPr>
+      <p:grpSpPr>
+        <a:xfrm>
+          <a:off x="0" y="0"/>
+          <a:ext cx="0" cy="0"/>
+          <a:chOff x="0" y="0"/>
+          <a:chExt cx="0" cy="0"/>
+        </a:xfrm>
+      </p:grpSpPr>
+      <p:sp>
+        <p:nvSpPr>
+          <p:cNvPr id="2" name="Slide Image Placeholder 1"/>
+          <p:cNvSpPr>
+            <a:spLocks noGrp="1" noRot="1" noChangeAspect="1"/>
+          </p:cNvSpPr>
+          <p:nvPr>
+            <p:ph type="sldImg"/>
+          </p:nvPr>
+        </p:nvSpPr>
+        <p:spPr/>
+      </p:sp>
+      <p:sp>
+        <p:nvSpPr>
+          <p:cNvPr id="3" name="Notes Placeholder 2"/>
+          <p:cNvSpPr>
+            <a:spLocks noGrp="1"/>
+          </p:cNvSpPr>
+          <p:nvPr>
+            <p:ph type="body" idx="1"/>
+          </p:nvPr>
+        </p:nvSpPr>
+        <p:spPr/>
+        <p:txBody>
+          <a:bodyPr/>
+          <a:lstStyle/>
+          <a:p>
+            <a:r>
+              <a:rPr lang="en-US" dirty="0"/>
+              <a:t>[약 32초]</a:t>
+            </a:r>
+          </a:p>
+          <a:p>
+            <a:r>
+              <a:rPr lang="en-US" dirty="0"/>
+              <a:t>MLC는 이렇게 작동합니다. 드론이나 카메라로 접근이 어려운 구간을 먼저 찍고, 녹이 있는 부분만 자동으로 골라낸 뒤, 그 녹의 색으로 위험도를 높음, 중간, 낮음으로 판정합니다. 마지막으로 구조물 사진 위에 위험한 지점부터 번호를 매긴 지도를 드립니다. 시편을 자르지 않고 사진 한 장으로 판정한다는 점, 그리고 규제 주기는 그대로 지키면서 사람과 배와 리프트를 위험한 곳에 먼저 보낼 수 있다는 점이 차별점입니다.</a:t>
+            </a:r>
+          </a:p>
+        </p:txBody>
+      </p:sp>
+      <p:sp>
+        <p:nvSpPr>
+          <p:cNvPr id="4" name="Slide Number Placeholder 3"/>
+          <p:cNvSpPr>
+            <a:spLocks noGrp="1"/>
+          </p:cNvSpPr>
+          <p:nvPr>
+            <p:ph type="sldNum" sz="quarter" idx="10"/>
+          </p:nvPr>
+        </p:nvSpPr>
+        <p:spPr/>
+        <p:txBody>
+          <a:bodyPr/>
+          <a:lstStyle/>
+          <a:p>
+            <a:fld id="{F7021451-1387-4CA6-816F-3879F97B5CBC}" type="slidenum">
+              <a:rPr lang="en-US"/>
+              <a:t>5</a:t>
+            </a:fld>
+            <a:endParaRPr lang="en-US"/>
+          </a:p>
+        </p:txBody>
+      </p:sp>
+    </p:spTree>
+    <p:extLst>
+      <p:ext uri="{BB962C8B-B14F-4D97-AF65-F5344CB8AC3E}">
+        <p14:creationId xmlns:p14="http://schemas.microsoft.com/office/powerpoint/2010/main" val="1024086991"/>
+      </p:ext>
+    </p:extLst>
+  </p:cSld>
+  <p:clrMapOvr>
+    <a:masterClrMapping/>
+  </p:clrMapOvr>
+</p:notes>
+</file>
+
 <file path=ppt/notesSlides/notesSlide6.xml><?xml version="1.0" encoding="utf-8"?>
 <p:notes xmlns:a="http://schemas.openxmlformats.org/drawingml/2006/main" xmlns:r="http://schemas.openxmlformats.org/officeDocument/2006/relationships" xmlns:p="http://schemas.openxmlformats.org/presentationml/2006/main">
   <p:cSld>
@@ -944,13 +944,13 @@
           <a:p>
             <a:r>
               <a:rPr lang="en-US" dirty="0"/>
-              <a:t>[약 32초]</a:t>
+              <a:t>[약 35초]</a:t>
             </a:r>
           </a:p>
           <a:p>
             <a:r>
               <a:rPr lang="en-US" dirty="0"/>
-              <a:t>MLC는 이렇게 작동합니다. 드론이나 카메라로 접근이 어려운 구간을 먼저 찍고, 녹이 있는 부분만 자동으로 골라낸 뒤, 그 녹의 색으로 위험도를 높음, 중간, 낮음으로 판정합니다. 마지막으로 구조물 사진 위에 위험한 지점부터 번호를 매긴 지도를 드립니다. 시편을 자르지 않고 사진 한 장으로 판정한다는 점, 그리고 규제 주기는 그대로 지키면서 사람과 배와 리프트를 위험한 곳에 먼저 보낼 수 있다는 점이 차별점입니다.</a:t>
+              <a:t>핵심 기술은 실험실에서 검증했습니다. 탄소강을 240시간 촉진부식 시키며 측정했습니다. 보시는 것처럼 표면의 녹 색이 변하면서 색 좌표 b* 값이 1.7에서 13.1로 커지고, 같은 기간 실제 부식 속도는 연 0.34mm에서 1.45mm로 약 4배 빨라졌습니다. 색과 부식 속도의 순위 상관계수는 0.88이고, 위험도 세 구간의 부식 속도는 서로 겹치지 않습니다. 이 색 변화는 부식을 빠르게 만드는 다공성 녹 성분이 늘어나면서 생기기 때문에, 색과 속도가 함께 움직이는 물리적 근거도 있습니다. 이 결과는 SEM, XRD, 전기화학 등 여섯 가지 분석으로 교차 검증했습니다.</a:t>
             </a:r>
           </a:p>
         </p:txBody>
@@ -1037,13 +1037,13 @@
           <a:p>
             <a:r>
               <a:rPr lang="en-US" dirty="0"/>
-              <a:t>[약 35초]</a:t>
+              <a:t>[약 30초]</a:t>
             </a:r>
           </a:p>
           <a:p>
             <a:r>
               <a:rPr lang="en-US" dirty="0"/>
-              <a:t>핵심 기술은 실험실에서 검증했습니다. 탄소강을 240시간 촉진부식 시키며 측정했습니다. 보시는 것처럼 표면의 녹 색이 변하면서 색 좌표 b* 값이 1.7에서 13.1로 커지고, 같은 기간 실제 부식 속도는 연 0.34mm에서 1.45mm로 약 4배 빨라졌습니다. 색과 부식 속도의 순위 상관계수는 0.88이고, 위험도 세 구간의 부식 속도는 서로 겹치지 않습니다. 이 색 변화는 부식을 빠르게 만드는 다공성 녹 성분이 늘어나면서 생기기 때문에, 색과 속도가 함께 움직이는 물리적 근거도 있습니다. 이 결과는 SEM, XRD, 전기화학 등 여섯 가지 분석으로 교차 검증했습니다.</a:t>
+              <a:t>이 시장은 법이 반복 수요를 만듭니다. 국내 「시설물안전법」에 따라 관리 대상 시설물 16만여 곳은 반기마다 정기안전점검, 1~3년마다 정밀안전점검을 받고, 제1종 시설물은 4~6년마다 정밀안전진단까지 받아야 합니다. 미국 현장 인터뷰에서 확인한 구매 동기는 안전, 비용, 규제 대응이었고, MLC는 그중 비용에서 바로 효과를 냅니다. 위험한 지점부터 배를 보내고, 필요한 구간에만 리프트와 비계를 빌리고, 로프 액세스 출동 여부를 미리 판단하고, 점검 기록도 사진 리포트로 정리합니다.</a:t>
             </a:r>
           </a:p>
         </p:txBody>
@@ -1130,13 +1130,13 @@
           <a:p>
             <a:r>
               <a:rPr lang="en-US" dirty="0"/>
-              <a:t>[약 30초]</a:t>
+              <a:t>[약 25초]</a:t>
             </a:r>
           </a:p>
           <a:p>
             <a:r>
               <a:rPr lang="en-US" dirty="0"/>
-              <a:t>이 시장은 법이 반복 수요를 만듭니다. 국내 「시설물안전법」에 따라 관리 대상 시설물 16만여 곳은 반기마다 정기안전점검, 1~3년마다 정밀안전점검을 받고, 제1종 시설물은 4~6년마다 정밀안전진단까지 받아야 합니다. 미국 현장 인터뷰에서 확인한 구매 동기는 안전, 비용, 규제 대응이었고, MLC는 그중 비용에서 바로 효과를 냅니다. 위험한 지점부터 배를 보내고, 필요한 구간에만 리프트와 비계를 빌리고, 로프 액세스 출동 여부를 미리 판단하고, 점검 기록도 사진 리포트로 정리합니다.</a:t>
+              <a:t>시장 규모입니다. 국내 시설물 안전점검·진단 시장은 2021년 5,192억 원으로, 연 15%씩 성장해 왔습니다. 그중 드론 측량·점검·관측 시장이 1,667억 원이고, 저희는 3년 안에 이 시장의 1%, 17억 원을 목표로 합니다. 해양·항만 강구조물과 해상풍력부터 시작하겠습니다.</a:t>
             </a:r>
           </a:p>
         </p:txBody>
@@ -1223,13 +1223,13 @@
           <a:p>
             <a:r>
               <a:rPr lang="en-US" dirty="0"/>
-              <a:t>[약 25초]</a:t>
+              <a:t>[약 30초]</a:t>
             </a:r>
           </a:p>
           <a:p>
             <a:r>
               <a:rPr lang="en-US" dirty="0"/>
-              <a:t>시장 규모입니다. 국내 시설물 안전점검·진단 시장은 2021년 5,192억 원으로, 연 15%씩 성장해 왔습니다. 그중 드론 측량·점검·관측 시장이 1,667억 원이고, 저희는 3년 안에 이 시장의 1%, 17억 원을 목표로 합니다. 해양·항만 강구조물과 해상풍력부터 시작하겠습니다.</a:t>
+              <a:t>비즈니스 모델입니다. 드론 운용사와 방식 전문 업체가 촬영 데이터를 가져오고 고객을 소개하면, MLC가 위험도를 분석해 고객사에 점검 우선순위 리포트를 드립니다. 매출은 점검 건당 요금과 연 구독으로 시작하고, 장기적으로는 드론과 점검 업체에 분석 엔진을 라이선스하겠습니다. 비용은 드론 촬영 운용과 모델 개발이고, 고객은 선박 용선과 리프트, 로프 액세스 비용을 아낄 수 있습니다.</a:t>
             </a:r>
           </a:p>
         </p:txBody>
@@ -2232,7 +2232,7 @@
               <a:buNone/>
             </a:pPr>
             <a:r>
-              <a:rPr lang="en-US" sz="1350" b="1" dirty="0">
+              <a:rPr lang="ko-KR" altLang="en-US" sz="1350" b="1" dirty="0">
                 <a:solidFill>
                   <a:srgbClr val="FFFFFF"/>
                 </a:solidFill>
@@ -2240,24 +2240,7 @@
                 <a:ea typeface="맑은 고딕" pitchFamily="34" charset="-122"/>
                 <a:cs typeface="맑은 고딕" pitchFamily="34" charset="-120"/>
               </a:rPr>
-              <a:t>미국 고객</a:t>
-            </a:r>
-            <a:endParaRPr lang="en-US" sz="1350" dirty="0"/>
-          </a:p>
-          <a:p>
-            <a:pPr marL="0" indent="0" algn="ctr">
-              <a:buNone/>
-            </a:pPr>
-            <a:r>
-              <a:rPr lang="en-US" sz="1350" b="1" dirty="0">
-                <a:solidFill>
-                  <a:srgbClr val="FFFFFF"/>
-                </a:solidFill>
-                <a:latin typeface="맑은 고딕" pitchFamily="34" charset="0"/>
-                <a:ea typeface="맑은 고딕" pitchFamily="34" charset="-122"/>
-                <a:cs typeface="맑은 고딕" pitchFamily="34" charset="-120"/>
-              </a:rPr>
-              <a:t>인터뷰 35건</a:t>
+              <a:t>시장 조사</a:t>
             </a:r>
             <a:endParaRPr lang="en-US" sz="1350" dirty="0"/>
           </a:p>
@@ -2561,7 +2544,7 @@
                 <a:ea typeface="맑은 고딕" pitchFamily="34" charset="-122"/>
                 <a:cs typeface="맑은 고딕" pitchFamily="34" charset="-120"/>
               </a:rPr>
-              <a:t>사진이 못 보는</a:t>
+              <a:t>사진 사각지대</a:t>
             </a:r>
             <a:endParaRPr lang="en-US" sz="1200" dirty="0"/>
           </a:p>
@@ -2578,7 +2561,7 @@
                 <a:ea typeface="맑은 고딕" pitchFamily="34" charset="-122"/>
                 <a:cs typeface="맑은 고딕" pitchFamily="34" charset="-120"/>
               </a:rPr>
-              <a:t>두께 감소를 보정</a:t>
+              <a:t>두께 감소 보정</a:t>
             </a:r>
             <a:endParaRPr lang="en-US" sz="1200" dirty="0"/>
           </a:p>
@@ -2779,7 +2762,7 @@
                 <a:ea typeface="맑은 고딕" pitchFamily="34" charset="-122"/>
                 <a:cs typeface="맑은 고딕" pitchFamily="34" charset="-120"/>
               </a:rPr>
-              <a:t>절감액으로 ROI 산출</a:t>
+              <a:t>절감액 기반 ROI 산출</a:t>
             </a:r>
             <a:endParaRPr lang="en-US" sz="1200" dirty="0"/>
           </a:p>
@@ -3369,2119 +3352,6 @@
 </p:sld>
 </file>
 
-<file path=ppt/slides/slide12.xml><?xml version="1.0" encoding="utf-8"?>
-<p:sld xmlns:a="http://schemas.openxmlformats.org/drawingml/2006/main" xmlns:r="http://schemas.openxmlformats.org/officeDocument/2006/relationships" xmlns:p="http://schemas.openxmlformats.org/presentationml/2006/main">
-  <p:cSld name="Slide 2">
-    <p:bg>
-      <p:bgPr>
-        <a:solidFill>
-          <a:srgbClr val="FFFFFF"/>
-        </a:solidFill>
-      </p:bgPr>
-    </p:bg>
-    <p:spTree>
-      <p:nvGrpSpPr>
-        <p:cNvPr id="1" name=""/>
-        <p:cNvGrpSpPr/>
-        <p:nvPr/>
-      </p:nvGrpSpPr>
-      <p:grpSpPr>
-        <a:xfrm>
-          <a:off x="0" y="0"/>
-          <a:ext cx="0" cy="0"/>
-          <a:chOff x="0" y="0"/>
-          <a:chExt cx="0" cy="0"/>
-        </a:xfrm>
-      </p:grpSpPr>
-      <p:sp>
-        <p:nvSpPr>
-          <p:cNvPr id="2" name="Text 0"/>
-          <p:cNvSpPr txBox="1"/>
-          <p:nvPr/>
-        </p:nvSpPr>
-        <p:spPr>
-          <a:xfrm>
-            <a:off x="548640" y="292608"/>
-            <a:ext cx="7315200" cy="274320"/>
-          </a:xfrm>
-          <a:prstGeom prst="rect">
-            <a:avLst/>
-          </a:prstGeom>
-          <a:noFill/>
-          <a:ln/>
-        </p:spPr>
-        <p:txBody>
-          <a:bodyPr wrap="square" lIns="0" tIns="0" rIns="0" bIns="0" rtlCol="0" anchor="t"/>
-          <a:lstStyle/>
-          <a:p>
-            <a:pPr indent="0" marL="0">
-              <a:buNone/>
-            </a:pPr>
-            <a:r>
-              <a:rPr lang="en-US" sz="1200" b="1" spc="100" kern="0" dirty="0">
-                <a:solidFill>
-                  <a:srgbClr val="B5501F"/>
-                </a:solidFill>
-                <a:latin typeface="맑은 고딕" pitchFamily="34" charset="0"/>
-                <a:ea typeface="맑은 고딕" pitchFamily="34" charset="-122"/>
-                <a:cs typeface="맑은 고딕" pitchFamily="34" charset="-120"/>
-              </a:rPr>
-              <a:t>BUSINESS MODEL</a:t>
-            </a:r>
-            <a:endParaRPr lang="en-US" sz="1200" dirty="0"/>
-          </a:p>
-        </p:txBody>
-      </p:sp>
-      <p:sp>
-        <p:nvSpPr>
-          <p:cNvPr id="3" name="Text 1"/>
-          <p:cNvSpPr txBox="1"/>
-          <p:nvPr/>
-        </p:nvSpPr>
-        <p:spPr>
-          <a:xfrm>
-            <a:off x="548640" y="566928"/>
-            <a:ext cx="11094415" cy="640080"/>
-          </a:xfrm>
-          <a:prstGeom prst="rect">
-            <a:avLst/>
-          </a:prstGeom>
-          <a:noFill/>
-          <a:ln/>
-        </p:spPr>
-        <p:txBody>
-          <a:bodyPr wrap="square" lIns="0" tIns="0" rIns="0" bIns="0" rtlCol="0" anchor="ctr"/>
-          <a:lstStyle/>
-          <a:p>
-            <a:pPr indent="0" marL="0">
-              <a:buNone/>
-            </a:pPr>
-            <a:r>
-              <a:rPr lang="en-US" sz="2800" b="1" dirty="0">
-                <a:solidFill>
-                  <a:srgbClr val="2B2D31"/>
-                </a:solidFill>
-                <a:latin typeface="맑은 고딕" pitchFamily="34" charset="0"/>
-                <a:ea typeface="맑은 고딕" pitchFamily="34" charset="-122"/>
-                <a:cs typeface="맑은 고딕" pitchFamily="34" charset="-120"/>
-              </a:rPr>
-              <a:t>비즈니스 모델</a:t>
-            </a:r>
-            <a:endParaRPr lang="en-US" sz="2800" dirty="0"/>
-          </a:p>
-        </p:txBody>
-      </p:sp>
-      <p:sp>
-        <p:nvSpPr>
-          <p:cNvPr id="4" name="Text 2"/>
-          <p:cNvSpPr txBox="1"/>
-          <p:nvPr/>
-        </p:nvSpPr>
-        <p:spPr>
-          <a:xfrm>
-            <a:off x="548640" y="6446520"/>
-            <a:ext cx="6400800" cy="274320"/>
-          </a:xfrm>
-          <a:prstGeom prst="rect">
-            <a:avLst/>
-          </a:prstGeom>
-          <a:noFill/>
-          <a:ln/>
-        </p:spPr>
-        <p:txBody>
-          <a:bodyPr wrap="square" lIns="0" tIns="0" rIns="0" bIns="0" rtlCol="0" anchor="t"/>
-          <a:lstStyle/>
-          <a:p>
-            <a:pPr indent="0" marL="0">
-              <a:buNone/>
-            </a:pPr>
-            <a:r>
-              <a:rPr lang="en-US" sz="900" dirty="0">
-                <a:solidFill>
-                  <a:srgbClr val="A3A7AD"/>
-                </a:solidFill>
-                <a:latin typeface="맑은 고딕" pitchFamily="34" charset="0"/>
-                <a:ea typeface="맑은 고딕" pitchFamily="34" charset="-122"/>
-                <a:cs typeface="맑은 고딕" pitchFamily="34" charset="-120"/>
-              </a:rPr>
-              <a:t>MLC  ·  제주 A-STREAM 2026</a:t>
-            </a:r>
-            <a:endParaRPr lang="en-US" sz="900" dirty="0"/>
-          </a:p>
-        </p:txBody>
-      </p:sp>
-      <p:sp>
-        <p:nvSpPr>
-          <p:cNvPr id="5" name="Text 3"/>
-          <p:cNvSpPr txBox="1"/>
-          <p:nvPr/>
-        </p:nvSpPr>
-        <p:spPr>
-          <a:xfrm>
-            <a:off x="10728655" y="6446520"/>
-            <a:ext cx="914400" cy="274320"/>
-          </a:xfrm>
-          <a:prstGeom prst="rect">
-            <a:avLst/>
-          </a:prstGeom>
-          <a:noFill/>
-          <a:ln/>
-        </p:spPr>
-        <p:txBody>
-          <a:bodyPr wrap="square" lIns="0" tIns="0" rIns="0" bIns="0" rtlCol="0" anchor="t"/>
-          <a:lstStyle/>
-          <a:p>
-            <a:pPr algn="r" indent="0" marL="0">
-              <a:buNone/>
-            </a:pPr>
-            <a:r>
-              <a:rPr lang="en-US" sz="900" dirty="0">
-                <a:solidFill>
-                  <a:srgbClr val="A3A7AD"/>
-                </a:solidFill>
-                <a:latin typeface="맑은 고딕" pitchFamily="34" charset="0"/>
-                <a:ea typeface="맑은 고딕" pitchFamily="34" charset="-122"/>
-                <a:cs typeface="맑은 고딕" pitchFamily="34" charset="-120"/>
-              </a:rPr>
-              <a:t>9</a:t>
-            </a:r>
-            <a:endParaRPr lang="en-US" sz="900" dirty="0"/>
-          </a:p>
-        </p:txBody>
-      </p:sp>
-      <p:sp>
-        <p:nvSpPr>
-          <p:cNvPr id="6" name="Shape 4"/>
-          <p:cNvSpPr/>
-          <p:nvPr/>
-        </p:nvSpPr>
-        <p:spPr>
-          <a:xfrm>
-            <a:off x="548640" y="1463040"/>
-            <a:ext cx="2377440" cy="1600200"/>
-          </a:xfrm>
-          <a:prstGeom prst="roundRect">
-            <a:avLst>
-              <a:gd name="adj" fmla="val 5714"/>
-            </a:avLst>
-          </a:prstGeom>
-          <a:solidFill>
-            <a:srgbClr val="FFFFFF"/>
-          </a:solidFill>
-          <a:ln w="15875">
-            <a:solidFill>
-              <a:srgbClr val="1F5F7A"/>
-            </a:solidFill>
-            <a:prstDash val="solid"/>
-          </a:ln>
-        </p:spPr>
-      </p:sp>
-      <p:sp>
-        <p:nvSpPr>
-          <p:cNvPr id="7" name="Shape 5"/>
-          <p:cNvSpPr/>
-          <p:nvPr/>
-        </p:nvSpPr>
-        <p:spPr>
-          <a:xfrm>
-            <a:off x="1463040" y="1627632"/>
-            <a:ext cx="548640" cy="548640"/>
-          </a:xfrm>
-          <a:prstGeom prst="ellipse">
-            <a:avLst/>
-          </a:prstGeom>
-          <a:solidFill>
-            <a:srgbClr val="1F5F7A"/>
-          </a:solidFill>
-          <a:ln w="12700">
-            <a:solidFill>
-              <a:srgbClr val="1F5F7A"/>
-            </a:solidFill>
-            <a:prstDash val="solid"/>
-          </a:ln>
-        </p:spPr>
-      </p:sp>
-      <p:pic>
-        <p:nvPicPr>
-          <p:cNvPr id="8" name="Image 0" descr="preencoded.png">    </p:cNvPr>
-          <p:cNvPicPr>
-            <a:picLocks noChangeAspect="1"/>
-          </p:cNvPicPr>
-          <p:nvPr/>
-        </p:nvPicPr>
-        <p:blipFill>
-          <a:blip r:embed="rId1"/>
-          <a:stretch>
-            <a:fillRect/>
-          </a:stretch>
-        </p:blipFill>
-        <p:spPr>
-          <a:xfrm>
-            <a:off x="1605686" y="1770278"/>
-            <a:ext cx="263347" cy="263347"/>
-          </a:xfrm>
-          <a:prstGeom prst="rect">
-            <a:avLst/>
-          </a:prstGeom>
-        </p:spPr>
-      </p:pic>
-      <p:sp>
-        <p:nvSpPr>
-          <p:cNvPr id="9" name="Text 6"/>
-          <p:cNvSpPr txBox="1"/>
-          <p:nvPr/>
-        </p:nvSpPr>
-        <p:spPr>
-          <a:xfrm>
-            <a:off x="548640" y="2212848"/>
-            <a:ext cx="2377440" cy="365760"/>
-          </a:xfrm>
-          <a:prstGeom prst="rect">
-            <a:avLst/>
-          </a:prstGeom>
-          <a:noFill/>
-          <a:ln/>
-        </p:spPr>
-        <p:txBody>
-          <a:bodyPr wrap="square" lIns="0" tIns="0" rIns="0" bIns="0" rtlCol="0" anchor="ctr"/>
-          <a:lstStyle/>
-          <a:p>
-            <a:pPr algn="ctr" indent="0" marL="0">
-              <a:buNone/>
-            </a:pPr>
-            <a:r>
-              <a:rPr lang="en-US" sz="1800" b="1" dirty="0">
-                <a:solidFill>
-                  <a:srgbClr val="1F5F7A"/>
-                </a:solidFill>
-                <a:latin typeface="맑은 고딕" pitchFamily="34" charset="0"/>
-                <a:ea typeface="맑은 고딕" pitchFamily="34" charset="-122"/>
-                <a:cs typeface="맑은 고딕" pitchFamily="34" charset="-120"/>
-              </a:rPr>
-              <a:t>파트너</a:t>
-            </a:r>
-            <a:endParaRPr lang="en-US" sz="1800" dirty="0"/>
-          </a:p>
-        </p:txBody>
-      </p:sp>
-      <p:sp>
-        <p:nvSpPr>
-          <p:cNvPr id="10" name="Text 7"/>
-          <p:cNvSpPr txBox="1"/>
-          <p:nvPr/>
-        </p:nvSpPr>
-        <p:spPr>
-          <a:xfrm>
-            <a:off x="640080" y="2578608"/>
-            <a:ext cx="2194560" cy="274320"/>
-          </a:xfrm>
-          <a:prstGeom prst="rect">
-            <a:avLst/>
-          </a:prstGeom>
-          <a:noFill/>
-          <a:ln/>
-        </p:spPr>
-        <p:txBody>
-          <a:bodyPr wrap="square" lIns="0" tIns="0" rIns="0" bIns="0" rtlCol="0" anchor="t"/>
-          <a:lstStyle/>
-          <a:p>
-            <a:pPr algn="ctr" indent="0" marL="0">
-              <a:buNone/>
-            </a:pPr>
-            <a:r>
-              <a:rPr lang="en-US" sz="1150" dirty="0">
-                <a:solidFill>
-                  <a:srgbClr val="6B6F76"/>
-                </a:solidFill>
-                <a:latin typeface="맑은 고딕" pitchFamily="34" charset="0"/>
-                <a:ea typeface="맑은 고딕" pitchFamily="34" charset="-122"/>
-                <a:cs typeface="맑은 고딕" pitchFamily="34" charset="-120"/>
-              </a:rPr>
-              <a:t>드론 운용사 · 방식 전문 업체</a:t>
-            </a:r>
-            <a:endParaRPr lang="en-US" sz="1150" dirty="0"/>
-          </a:p>
-        </p:txBody>
-      </p:sp>
-      <p:sp>
-        <p:nvSpPr>
-          <p:cNvPr id="11" name="Shape 8"/>
-          <p:cNvSpPr/>
-          <p:nvPr/>
-        </p:nvSpPr>
-        <p:spPr>
-          <a:xfrm>
-            <a:off x="4907128" y="1463040"/>
-            <a:ext cx="2377440" cy="1600200"/>
-          </a:xfrm>
-          <a:prstGeom prst="roundRect">
-            <a:avLst>
-              <a:gd name="adj" fmla="val 5714"/>
-            </a:avLst>
-          </a:prstGeom>
-          <a:solidFill>
-            <a:srgbClr val="FFFFFF"/>
-          </a:solidFill>
-          <a:ln w="15875">
-            <a:solidFill>
-              <a:srgbClr val="2B2D31"/>
-            </a:solidFill>
-            <a:prstDash val="solid"/>
-          </a:ln>
-        </p:spPr>
-      </p:sp>
-      <p:sp>
-        <p:nvSpPr>
-          <p:cNvPr id="12" name="Shape 9"/>
-          <p:cNvSpPr/>
-          <p:nvPr/>
-        </p:nvSpPr>
-        <p:spPr>
-          <a:xfrm>
-            <a:off x="5821528" y="1627632"/>
-            <a:ext cx="548640" cy="548640"/>
-          </a:xfrm>
-          <a:prstGeom prst="ellipse">
-            <a:avLst/>
-          </a:prstGeom>
-          <a:solidFill>
-            <a:srgbClr val="2B2D31"/>
-          </a:solidFill>
-          <a:ln w="12700">
-            <a:solidFill>
-              <a:srgbClr val="2B2D31"/>
-            </a:solidFill>
-            <a:prstDash val="solid"/>
-          </a:ln>
-        </p:spPr>
-      </p:sp>
-      <p:pic>
-        <p:nvPicPr>
-          <p:cNvPr id="13" name="Image 1" descr="preencoded.png">    </p:cNvPr>
-          <p:cNvPicPr>
-            <a:picLocks noChangeAspect="1"/>
-          </p:cNvPicPr>
-          <p:nvPr/>
-        </p:nvPicPr>
-        <p:blipFill>
-          <a:blip r:embed="rId2"/>
-          <a:stretch>
-            <a:fillRect/>
-          </a:stretch>
-        </p:blipFill>
-        <p:spPr>
-          <a:xfrm>
-            <a:off x="5964174" y="1770278"/>
-            <a:ext cx="263347" cy="263347"/>
-          </a:xfrm>
-          <a:prstGeom prst="rect">
-            <a:avLst/>
-          </a:prstGeom>
-        </p:spPr>
-      </p:pic>
-      <p:sp>
-        <p:nvSpPr>
-          <p:cNvPr id="14" name="Text 10"/>
-          <p:cNvSpPr txBox="1"/>
-          <p:nvPr/>
-        </p:nvSpPr>
-        <p:spPr>
-          <a:xfrm>
-            <a:off x="4907128" y="2212848"/>
-            <a:ext cx="2377440" cy="365760"/>
-          </a:xfrm>
-          <a:prstGeom prst="rect">
-            <a:avLst/>
-          </a:prstGeom>
-          <a:noFill/>
-          <a:ln/>
-        </p:spPr>
-        <p:txBody>
-          <a:bodyPr wrap="square" lIns="0" tIns="0" rIns="0" bIns="0" rtlCol="0" anchor="ctr"/>
-          <a:lstStyle/>
-          <a:p>
-            <a:pPr algn="ctr" indent="0" marL="0">
-              <a:buNone/>
-            </a:pPr>
-            <a:r>
-              <a:rPr lang="en-US" sz="1800" b="1" dirty="0">
-                <a:solidFill>
-                  <a:srgbClr val="2B2D31"/>
-                </a:solidFill>
-                <a:latin typeface="맑은 고딕" pitchFamily="34" charset="0"/>
-                <a:ea typeface="맑은 고딕" pitchFamily="34" charset="-122"/>
-                <a:cs typeface="맑은 고딕" pitchFamily="34" charset="-120"/>
-              </a:rPr>
-              <a:t>MLC</a:t>
-            </a:r>
-            <a:endParaRPr lang="en-US" sz="1800" dirty="0"/>
-          </a:p>
-        </p:txBody>
-      </p:sp>
-      <p:sp>
-        <p:nvSpPr>
-          <p:cNvPr id="15" name="Text 11"/>
-          <p:cNvSpPr txBox="1"/>
-          <p:nvPr/>
-        </p:nvSpPr>
-        <p:spPr>
-          <a:xfrm>
-            <a:off x="4998568" y="2578608"/>
-            <a:ext cx="2194560" cy="274320"/>
-          </a:xfrm>
-          <a:prstGeom prst="rect">
-            <a:avLst/>
-          </a:prstGeom>
-          <a:noFill/>
-          <a:ln/>
-        </p:spPr>
-        <p:txBody>
-          <a:bodyPr wrap="square" lIns="0" tIns="0" rIns="0" bIns="0" rtlCol="0" anchor="t"/>
-          <a:lstStyle/>
-          <a:p>
-            <a:pPr algn="ctr" indent="0" marL="0">
-              <a:buNone/>
-            </a:pPr>
-            <a:r>
-              <a:rPr lang="en-US" sz="1150" dirty="0">
-                <a:solidFill>
-                  <a:srgbClr val="6B6F76"/>
-                </a:solidFill>
-                <a:latin typeface="맑은 고딕" pitchFamily="34" charset="0"/>
-                <a:ea typeface="맑은 고딕" pitchFamily="34" charset="-122"/>
-                <a:cs typeface="맑은 고딕" pitchFamily="34" charset="-120"/>
-              </a:rPr>
-              <a:t>녹 색 기반 위험도 분석</a:t>
-            </a:r>
-            <a:endParaRPr lang="en-US" sz="1150" dirty="0"/>
-          </a:p>
-        </p:txBody>
-      </p:sp>
-      <p:sp>
-        <p:nvSpPr>
-          <p:cNvPr id="16" name="Shape 12"/>
-          <p:cNvSpPr/>
-          <p:nvPr/>
-        </p:nvSpPr>
-        <p:spPr>
-          <a:xfrm>
-            <a:off x="9265615" y="1463040"/>
-            <a:ext cx="2377440" cy="1600200"/>
-          </a:xfrm>
-          <a:prstGeom prst="roundRect">
-            <a:avLst>
-              <a:gd name="adj" fmla="val 5714"/>
-            </a:avLst>
-          </a:prstGeom>
-          <a:solidFill>
-            <a:srgbClr val="FFFFFF"/>
-          </a:solidFill>
-          <a:ln w="15875">
-            <a:solidFill>
-              <a:srgbClr val="B5501F"/>
-            </a:solidFill>
-            <a:prstDash val="solid"/>
-          </a:ln>
-        </p:spPr>
-      </p:sp>
-      <p:sp>
-        <p:nvSpPr>
-          <p:cNvPr id="17" name="Shape 13"/>
-          <p:cNvSpPr/>
-          <p:nvPr/>
-        </p:nvSpPr>
-        <p:spPr>
-          <a:xfrm>
-            <a:off x="10180015" y="1627632"/>
-            <a:ext cx="548640" cy="548640"/>
-          </a:xfrm>
-          <a:prstGeom prst="ellipse">
-            <a:avLst/>
-          </a:prstGeom>
-          <a:solidFill>
-            <a:srgbClr val="B5501F"/>
-          </a:solidFill>
-          <a:ln w="12700">
-            <a:solidFill>
-              <a:srgbClr val="B5501F"/>
-            </a:solidFill>
-            <a:prstDash val="solid"/>
-          </a:ln>
-        </p:spPr>
-      </p:sp>
-      <p:pic>
-        <p:nvPicPr>
-          <p:cNvPr id="18" name="Image 2" descr="preencoded.png">    </p:cNvPr>
-          <p:cNvPicPr>
-            <a:picLocks noChangeAspect="1"/>
-          </p:cNvPicPr>
-          <p:nvPr/>
-        </p:nvPicPr>
-        <p:blipFill>
-          <a:blip r:embed="rId3"/>
-          <a:stretch>
-            <a:fillRect/>
-          </a:stretch>
-        </p:blipFill>
-        <p:spPr>
-          <a:xfrm>
-            <a:off x="10322662" y="1770278"/>
-            <a:ext cx="263347" cy="263347"/>
-          </a:xfrm>
-          <a:prstGeom prst="rect">
-            <a:avLst/>
-          </a:prstGeom>
-        </p:spPr>
-      </p:pic>
-      <p:sp>
-        <p:nvSpPr>
-          <p:cNvPr id="19" name="Text 14"/>
-          <p:cNvSpPr txBox="1"/>
-          <p:nvPr/>
-        </p:nvSpPr>
-        <p:spPr>
-          <a:xfrm>
-            <a:off x="9265615" y="2212848"/>
-            <a:ext cx="2377440" cy="365760"/>
-          </a:xfrm>
-          <a:prstGeom prst="rect">
-            <a:avLst/>
-          </a:prstGeom>
-          <a:noFill/>
-          <a:ln/>
-        </p:spPr>
-        <p:txBody>
-          <a:bodyPr wrap="square" lIns="0" tIns="0" rIns="0" bIns="0" rtlCol="0" anchor="ctr"/>
-          <a:lstStyle/>
-          <a:p>
-            <a:pPr algn="ctr" indent="0" marL="0">
-              <a:buNone/>
-            </a:pPr>
-            <a:r>
-              <a:rPr lang="en-US" sz="1800" b="1" dirty="0">
-                <a:solidFill>
-                  <a:srgbClr val="B5501F"/>
-                </a:solidFill>
-                <a:latin typeface="맑은 고딕" pitchFamily="34" charset="0"/>
-                <a:ea typeface="맑은 고딕" pitchFamily="34" charset="-122"/>
-                <a:cs typeface="맑은 고딕" pitchFamily="34" charset="-120"/>
-              </a:rPr>
-              <a:t>고객사</a:t>
-            </a:r>
-            <a:endParaRPr lang="en-US" sz="1800" dirty="0"/>
-          </a:p>
-        </p:txBody>
-      </p:sp>
-      <p:sp>
-        <p:nvSpPr>
-          <p:cNvPr id="20" name="Text 15"/>
-          <p:cNvSpPr txBox="1"/>
-          <p:nvPr/>
-        </p:nvSpPr>
-        <p:spPr>
-          <a:xfrm>
-            <a:off x="9357055" y="2578608"/>
-            <a:ext cx="2194560" cy="274320"/>
-          </a:xfrm>
-          <a:prstGeom prst="rect">
-            <a:avLst/>
-          </a:prstGeom>
-          <a:noFill/>
-          <a:ln/>
-        </p:spPr>
-        <p:txBody>
-          <a:bodyPr wrap="square" lIns="0" tIns="0" rIns="0" bIns="0" rtlCol="0" anchor="t"/>
-          <a:lstStyle/>
-          <a:p>
-            <a:pPr algn="ctr" indent="0" marL="0">
-              <a:buNone/>
-            </a:pPr>
-            <a:r>
-              <a:rPr lang="en-US" sz="1150" dirty="0">
-                <a:solidFill>
-                  <a:srgbClr val="6B6F76"/>
-                </a:solidFill>
-                <a:latin typeface="맑은 고딕" pitchFamily="34" charset="0"/>
-                <a:ea typeface="맑은 고딕" pitchFamily="34" charset="-122"/>
-                <a:cs typeface="맑은 고딕" pitchFamily="34" charset="-120"/>
-              </a:rPr>
-              <a:t>해양 석유 · 가스 운영사</a:t>
-            </a:r>
-            <a:endParaRPr lang="en-US" sz="1150" dirty="0"/>
-          </a:p>
-        </p:txBody>
-      </p:sp>
-      <p:sp>
-        <p:nvSpPr>
-          <p:cNvPr id="21" name="Text 16"/>
-          <p:cNvSpPr txBox="1"/>
-          <p:nvPr/>
-        </p:nvSpPr>
-        <p:spPr>
-          <a:xfrm>
-            <a:off x="3063240" y="1696212"/>
-            <a:ext cx="1706728" cy="274320"/>
-          </a:xfrm>
-          <a:prstGeom prst="rect">
-            <a:avLst/>
-          </a:prstGeom>
-          <a:noFill/>
-          <a:ln/>
-        </p:spPr>
-        <p:txBody>
-          <a:bodyPr wrap="square" lIns="0" tIns="0" rIns="0" bIns="0" rtlCol="0" anchor="t"/>
-          <a:lstStyle/>
-          <a:p>
-            <a:pPr algn="ctr" indent="0" marL="0">
-              <a:buNone/>
-            </a:pPr>
-            <a:r>
-              <a:rPr lang="en-US" sz="1300" b="1" dirty="0">
-                <a:solidFill>
-                  <a:srgbClr val="B5501F"/>
-                </a:solidFill>
-                <a:latin typeface="맑은 고딕" pitchFamily="34" charset="0"/>
-                <a:ea typeface="맑은 고딕" pitchFamily="34" charset="-122"/>
-                <a:cs typeface="맑은 고딕" pitchFamily="34" charset="-120"/>
-              </a:rPr>
-              <a:t>촬영 데이터 · 소개</a:t>
-            </a:r>
-            <a:endParaRPr lang="en-US" sz="1300" dirty="0"/>
-          </a:p>
-        </p:txBody>
-      </p:sp>
-      <p:sp>
-        <p:nvSpPr>
-          <p:cNvPr id="22" name="Shape 17"/>
-          <p:cNvSpPr/>
-          <p:nvPr/>
-        </p:nvSpPr>
-        <p:spPr>
-          <a:xfrm>
-            <a:off x="3063240" y="2034540"/>
-            <a:ext cx="1706728" cy="0"/>
-          </a:xfrm>
-          <a:prstGeom prst="line">
-            <a:avLst/>
-          </a:prstGeom>
-          <a:noFill/>
-          <a:ln w="28575">
-            <a:solidFill>
-              <a:srgbClr val="B5501F"/>
-            </a:solidFill>
-            <a:prstDash val="solid"/>
-            <a:tailEnd type="triangle"/>
-          </a:ln>
-        </p:spPr>
-      </p:sp>
-      <p:sp>
-        <p:nvSpPr>
-          <p:cNvPr id="23" name="Shape 18"/>
-          <p:cNvSpPr/>
-          <p:nvPr/>
-        </p:nvSpPr>
-        <p:spPr>
-          <a:xfrm>
-            <a:off x="3063240" y="2491740"/>
-            <a:ext cx="1706728" cy="0"/>
-          </a:xfrm>
-          <a:prstGeom prst="line">
-            <a:avLst/>
-          </a:prstGeom>
-          <a:noFill/>
-          <a:ln w="28575">
-            <a:solidFill>
-              <a:srgbClr val="1F5F7A"/>
-            </a:solidFill>
-            <a:prstDash val="dash"/>
-            <a:headEnd type="triangle"/>
-          </a:ln>
-        </p:spPr>
-      </p:sp>
-      <p:sp>
-        <p:nvSpPr>
-          <p:cNvPr id="24" name="Text 19"/>
-          <p:cNvSpPr txBox="1"/>
-          <p:nvPr/>
-        </p:nvSpPr>
-        <p:spPr>
-          <a:xfrm>
-            <a:off x="3063240" y="2564892"/>
-            <a:ext cx="1706728" cy="274320"/>
-          </a:xfrm>
-          <a:prstGeom prst="rect">
-            <a:avLst/>
-          </a:prstGeom>
-          <a:noFill/>
-          <a:ln/>
-        </p:spPr>
-        <p:txBody>
-          <a:bodyPr wrap="square" lIns="0" tIns="0" rIns="0" bIns="0" rtlCol="0" anchor="t"/>
-          <a:lstStyle/>
-          <a:p>
-            <a:pPr algn="ctr" indent="0" marL="0">
-              <a:buNone/>
-            </a:pPr>
-            <a:r>
-              <a:rPr lang="en-US" sz="1300" b="1" dirty="0">
-                <a:solidFill>
-                  <a:srgbClr val="1F5F7A"/>
-                </a:solidFill>
-                <a:latin typeface="맑은 고딕" pitchFamily="34" charset="0"/>
-                <a:ea typeface="맑은 고딕" pitchFamily="34" charset="-122"/>
-                <a:cs typeface="맑은 고딕" pitchFamily="34" charset="-120"/>
-              </a:rPr>
-              <a:t>촬영비 · 소개 수수료</a:t>
-            </a:r>
-            <a:endParaRPr lang="en-US" sz="1300" dirty="0"/>
-          </a:p>
-        </p:txBody>
-      </p:sp>
-      <p:sp>
-        <p:nvSpPr>
-          <p:cNvPr id="25" name="Text 20"/>
-          <p:cNvSpPr txBox="1"/>
-          <p:nvPr/>
-        </p:nvSpPr>
-        <p:spPr>
-          <a:xfrm>
-            <a:off x="7421728" y="1696212"/>
-            <a:ext cx="1706728" cy="274320"/>
-          </a:xfrm>
-          <a:prstGeom prst="rect">
-            <a:avLst/>
-          </a:prstGeom>
-          <a:noFill/>
-          <a:ln/>
-        </p:spPr>
-        <p:txBody>
-          <a:bodyPr wrap="square" lIns="0" tIns="0" rIns="0" bIns="0" rtlCol="0" anchor="t"/>
-          <a:lstStyle/>
-          <a:p>
-            <a:pPr algn="ctr" indent="0" marL="0">
-              <a:buNone/>
-            </a:pPr>
-            <a:r>
-              <a:rPr lang="en-US" sz="1300" b="1" dirty="0">
-                <a:solidFill>
-                  <a:srgbClr val="B5501F"/>
-                </a:solidFill>
-                <a:latin typeface="맑은 고딕" pitchFamily="34" charset="0"/>
-                <a:ea typeface="맑은 고딕" pitchFamily="34" charset="-122"/>
-                <a:cs typeface="맑은 고딕" pitchFamily="34" charset="-120"/>
-              </a:rPr>
-              <a:t>점검 우선순위 리포트</a:t>
-            </a:r>
-            <a:endParaRPr lang="en-US" sz="1300" dirty="0"/>
-          </a:p>
-        </p:txBody>
-      </p:sp>
-      <p:sp>
-        <p:nvSpPr>
-          <p:cNvPr id="26" name="Shape 21"/>
-          <p:cNvSpPr/>
-          <p:nvPr/>
-        </p:nvSpPr>
-        <p:spPr>
-          <a:xfrm>
-            <a:off x="7421728" y="2034540"/>
-            <a:ext cx="1706728" cy="0"/>
-          </a:xfrm>
-          <a:prstGeom prst="line">
-            <a:avLst/>
-          </a:prstGeom>
-          <a:noFill/>
-          <a:ln w="28575">
-            <a:solidFill>
-              <a:srgbClr val="B5501F"/>
-            </a:solidFill>
-            <a:prstDash val="solid"/>
-            <a:tailEnd type="triangle"/>
-          </a:ln>
-        </p:spPr>
-      </p:sp>
-      <p:sp>
-        <p:nvSpPr>
-          <p:cNvPr id="27" name="Shape 22"/>
-          <p:cNvSpPr/>
-          <p:nvPr/>
-        </p:nvSpPr>
-        <p:spPr>
-          <a:xfrm>
-            <a:off x="7421728" y="2491740"/>
-            <a:ext cx="1706728" cy="0"/>
-          </a:xfrm>
-          <a:prstGeom prst="line">
-            <a:avLst/>
-          </a:prstGeom>
-          <a:noFill/>
-          <a:ln w="28575">
-            <a:solidFill>
-              <a:srgbClr val="1F5F7A"/>
-            </a:solidFill>
-            <a:prstDash val="dash"/>
-            <a:headEnd type="triangle"/>
-          </a:ln>
-        </p:spPr>
-      </p:sp>
-      <p:sp>
-        <p:nvSpPr>
-          <p:cNvPr id="28" name="Text 23"/>
-          <p:cNvSpPr txBox="1"/>
-          <p:nvPr/>
-        </p:nvSpPr>
-        <p:spPr>
-          <a:xfrm>
-            <a:off x="7421728" y="2564892"/>
-            <a:ext cx="1706728" cy="274320"/>
-          </a:xfrm>
-          <a:prstGeom prst="rect">
-            <a:avLst/>
-          </a:prstGeom>
-          <a:noFill/>
-          <a:ln/>
-        </p:spPr>
-        <p:txBody>
-          <a:bodyPr wrap="square" lIns="0" tIns="0" rIns="0" bIns="0" rtlCol="0" anchor="t"/>
-          <a:lstStyle/>
-          <a:p>
-            <a:pPr algn="ctr" indent="0" marL="0">
-              <a:buNone/>
-            </a:pPr>
-            <a:r>
-              <a:rPr lang="en-US" sz="1300" b="1" dirty="0">
-                <a:solidFill>
-                  <a:srgbClr val="1F5F7A"/>
-                </a:solidFill>
-                <a:latin typeface="맑은 고딕" pitchFamily="34" charset="0"/>
-                <a:ea typeface="맑은 고딕" pitchFamily="34" charset="-122"/>
-                <a:cs typeface="맑은 고딕" pitchFamily="34" charset="-120"/>
-              </a:rPr>
-              <a:t>점검 건당 · 구독 요금</a:t>
-            </a:r>
-            <a:endParaRPr lang="en-US" sz="1300" dirty="0"/>
-          </a:p>
-        </p:txBody>
-      </p:sp>
-      <p:sp>
-        <p:nvSpPr>
-          <p:cNvPr id="29" name="Shape 24"/>
-          <p:cNvSpPr/>
-          <p:nvPr/>
-        </p:nvSpPr>
-        <p:spPr>
-          <a:xfrm>
-            <a:off x="8625535" y="960120"/>
-            <a:ext cx="411480" cy="0"/>
-          </a:xfrm>
-          <a:prstGeom prst="line">
-            <a:avLst/>
-          </a:prstGeom>
-          <a:noFill/>
-          <a:ln w="28575">
-            <a:solidFill>
-              <a:srgbClr val="B5501F"/>
-            </a:solidFill>
-            <a:prstDash val="solid"/>
-          </a:ln>
-        </p:spPr>
-      </p:sp>
-      <p:sp>
-        <p:nvSpPr>
-          <p:cNvPr id="30" name="Text 25"/>
-          <p:cNvSpPr txBox="1"/>
-          <p:nvPr/>
-        </p:nvSpPr>
-        <p:spPr>
-          <a:xfrm>
-            <a:off x="9128455" y="841248"/>
-            <a:ext cx="914400" cy="237744"/>
-          </a:xfrm>
-          <a:prstGeom prst="rect">
-            <a:avLst/>
-          </a:prstGeom>
-          <a:noFill/>
-          <a:ln/>
-        </p:spPr>
-        <p:txBody>
-          <a:bodyPr wrap="square" lIns="0" tIns="0" rIns="0" bIns="0" rtlCol="0" anchor="t"/>
-          <a:lstStyle/>
-          <a:p>
-            <a:pPr indent="0" marL="0">
-              <a:buNone/>
-            </a:pPr>
-            <a:r>
-              <a:rPr lang="en-US" sz="1100" b="1" dirty="0">
-                <a:solidFill>
-                  <a:srgbClr val="B5501F"/>
-                </a:solidFill>
-                <a:latin typeface="맑은 고딕" pitchFamily="34" charset="0"/>
-                <a:ea typeface="맑은 고딕" pitchFamily="34" charset="-122"/>
-                <a:cs typeface="맑은 고딕" pitchFamily="34" charset="-120"/>
-              </a:rPr>
-              <a:t>가치 흐름</a:t>
-            </a:r>
-            <a:endParaRPr lang="en-US" sz="1100" dirty="0"/>
-          </a:p>
-        </p:txBody>
-      </p:sp>
-      <p:sp>
-        <p:nvSpPr>
-          <p:cNvPr id="31" name="Shape 26"/>
-          <p:cNvSpPr/>
-          <p:nvPr/>
-        </p:nvSpPr>
-        <p:spPr>
-          <a:xfrm>
-            <a:off x="10225735" y="960120"/>
-            <a:ext cx="411480" cy="0"/>
-          </a:xfrm>
-          <a:prstGeom prst="line">
-            <a:avLst/>
-          </a:prstGeom>
-          <a:noFill/>
-          <a:ln w="28575">
-            <a:solidFill>
-              <a:srgbClr val="1F5F7A"/>
-            </a:solidFill>
-            <a:prstDash val="dash"/>
-          </a:ln>
-        </p:spPr>
-      </p:sp>
-      <p:sp>
-        <p:nvSpPr>
-          <p:cNvPr id="32" name="Text 27"/>
-          <p:cNvSpPr txBox="1"/>
-          <p:nvPr/>
-        </p:nvSpPr>
-        <p:spPr>
-          <a:xfrm>
-            <a:off x="10728655" y="841248"/>
-            <a:ext cx="914400" cy="237744"/>
-          </a:xfrm>
-          <a:prstGeom prst="rect">
-            <a:avLst/>
-          </a:prstGeom>
-          <a:noFill/>
-          <a:ln/>
-        </p:spPr>
-        <p:txBody>
-          <a:bodyPr wrap="square" lIns="0" tIns="0" rIns="0" bIns="0" rtlCol="0" anchor="t"/>
-          <a:lstStyle/>
-          <a:p>
-            <a:pPr indent="0" marL="0">
-              <a:buNone/>
-            </a:pPr>
-            <a:r>
-              <a:rPr lang="en-US" sz="1100" b="1" dirty="0">
-                <a:solidFill>
-                  <a:srgbClr val="1F5F7A"/>
-                </a:solidFill>
-                <a:latin typeface="맑은 고딕" pitchFamily="34" charset="0"/>
-                <a:ea typeface="맑은 고딕" pitchFamily="34" charset="-122"/>
-                <a:cs typeface="맑은 고딕" pitchFamily="34" charset="-120"/>
-              </a:rPr>
-              <a:t>돈 흐름</a:t>
-            </a:r>
-            <a:endParaRPr lang="en-US" sz="1100" dirty="0"/>
-          </a:p>
-        </p:txBody>
-      </p:sp>
-      <p:sp>
-        <p:nvSpPr>
-          <p:cNvPr id="33" name="Shape 28"/>
-          <p:cNvSpPr/>
-          <p:nvPr/>
-        </p:nvSpPr>
-        <p:spPr>
-          <a:xfrm>
-            <a:off x="548640" y="3429000"/>
-            <a:ext cx="3576218" cy="2514600"/>
-          </a:xfrm>
-          <a:prstGeom prst="roundRect">
-            <a:avLst>
-              <a:gd name="adj" fmla="val 2909"/>
-            </a:avLst>
-          </a:prstGeom>
-          <a:solidFill>
-            <a:srgbClr val="FBEDE4"/>
-          </a:solidFill>
-          <a:ln w="12700">
-            <a:solidFill>
-              <a:srgbClr val="FBEDE4"/>
-            </a:solidFill>
-            <a:prstDash val="solid"/>
-          </a:ln>
-        </p:spPr>
-      </p:sp>
-      <p:sp>
-        <p:nvSpPr>
-          <p:cNvPr id="34" name="Text 29"/>
-          <p:cNvSpPr txBox="1"/>
-          <p:nvPr/>
-        </p:nvSpPr>
-        <p:spPr>
-          <a:xfrm>
-            <a:off x="777240" y="3566160"/>
-            <a:ext cx="3210458" cy="320040"/>
-          </a:xfrm>
-          <a:prstGeom prst="rect">
-            <a:avLst/>
-          </a:prstGeom>
-          <a:noFill/>
-          <a:ln/>
-        </p:spPr>
-        <p:txBody>
-          <a:bodyPr wrap="square" lIns="0" tIns="0" rIns="0" bIns="0" rtlCol="0" anchor="t"/>
-          <a:lstStyle/>
-          <a:p>
-            <a:pPr indent="0" marL="0">
-              <a:buNone/>
-            </a:pPr>
-            <a:r>
-              <a:rPr lang="en-US" sz="1400" b="1" dirty="0">
-                <a:solidFill>
-                  <a:srgbClr val="B5501F"/>
-                </a:solidFill>
-                <a:latin typeface="맑은 고딕" pitchFamily="34" charset="0"/>
-                <a:ea typeface="맑은 고딕" pitchFamily="34" charset="-122"/>
-                <a:cs typeface="맑은 고딕" pitchFamily="34" charset="-120"/>
-              </a:rPr>
-              <a:t>매출원</a:t>
-            </a:r>
-            <a:endParaRPr lang="en-US" sz="1400" dirty="0"/>
-          </a:p>
-        </p:txBody>
-      </p:sp>
-      <p:sp>
-        <p:nvSpPr>
-          <p:cNvPr id="35" name="Shape 30"/>
-          <p:cNvSpPr/>
-          <p:nvPr/>
-        </p:nvSpPr>
-        <p:spPr>
-          <a:xfrm>
-            <a:off x="777240" y="4014216"/>
-            <a:ext cx="402336" cy="402336"/>
-          </a:xfrm>
-          <a:prstGeom prst="ellipse">
-            <a:avLst/>
-          </a:prstGeom>
-          <a:solidFill>
-            <a:srgbClr val="B5501F"/>
-          </a:solidFill>
-          <a:ln w="12700">
-            <a:solidFill>
-              <a:srgbClr val="B5501F"/>
-            </a:solidFill>
-            <a:prstDash val="solid"/>
-          </a:ln>
-        </p:spPr>
-      </p:sp>
-      <p:pic>
-        <p:nvPicPr>
-          <p:cNvPr id="36" name="Image 3" descr="preencoded.png">    </p:cNvPr>
-          <p:cNvPicPr>
-            <a:picLocks noChangeAspect="1"/>
-          </p:cNvPicPr>
-          <p:nvPr/>
-        </p:nvPicPr>
-        <p:blipFill>
-          <a:blip r:embed="rId4"/>
-          <a:stretch>
-            <a:fillRect/>
-          </a:stretch>
-        </p:blipFill>
-        <p:spPr>
-          <a:xfrm>
-            <a:off x="881847" y="4118823"/>
-            <a:ext cx="193121" cy="193121"/>
-          </a:xfrm>
-          <a:prstGeom prst="rect">
-            <a:avLst/>
-          </a:prstGeom>
-        </p:spPr>
-      </p:pic>
-      <p:sp>
-        <p:nvSpPr>
-          <p:cNvPr id="37" name="Text 31"/>
-          <p:cNvSpPr txBox="1"/>
-          <p:nvPr/>
-        </p:nvSpPr>
-        <p:spPr>
-          <a:xfrm>
-            <a:off x="1298448" y="3995928"/>
-            <a:ext cx="2661818" cy="256032"/>
-          </a:xfrm>
-          <a:prstGeom prst="rect">
-            <a:avLst/>
-          </a:prstGeom>
-          <a:noFill/>
-          <a:ln/>
-        </p:spPr>
-        <p:txBody>
-          <a:bodyPr wrap="square" lIns="0" tIns="0" rIns="0" bIns="0" rtlCol="0" anchor="t"/>
-          <a:lstStyle/>
-          <a:p>
-            <a:pPr indent="0" marL="0">
-              <a:buNone/>
-            </a:pPr>
-            <a:r>
-              <a:rPr lang="en-US" sz="1300" b="1" dirty="0">
-                <a:solidFill>
-                  <a:srgbClr val="2B2D31"/>
-                </a:solidFill>
-                <a:latin typeface="맑은 고딕" pitchFamily="34" charset="0"/>
-                <a:ea typeface="맑은 고딕" pitchFamily="34" charset="-122"/>
-                <a:cs typeface="맑은 고딕" pitchFamily="34" charset="-120"/>
-              </a:rPr>
-              <a:t>점검 건당 요금</a:t>
-            </a:r>
-            <a:endParaRPr lang="en-US" sz="1300" dirty="0"/>
-          </a:p>
-        </p:txBody>
-      </p:sp>
-      <p:sp>
-        <p:nvSpPr>
-          <p:cNvPr id="38" name="Text 32"/>
-          <p:cNvSpPr txBox="1"/>
-          <p:nvPr/>
-        </p:nvSpPr>
-        <p:spPr>
-          <a:xfrm>
-            <a:off x="1298448" y="4251960"/>
-            <a:ext cx="2661818" cy="237744"/>
-          </a:xfrm>
-          <a:prstGeom prst="rect">
-            <a:avLst/>
-          </a:prstGeom>
-          <a:noFill/>
-          <a:ln/>
-        </p:spPr>
-        <p:txBody>
-          <a:bodyPr wrap="square" lIns="0" tIns="0" rIns="0" bIns="0" rtlCol="0" anchor="t"/>
-          <a:lstStyle/>
-          <a:p>
-            <a:pPr indent="0" marL="0">
-              <a:buNone/>
-            </a:pPr>
-            <a:r>
-              <a:rPr lang="en-US" sz="1050" dirty="0">
-                <a:solidFill>
-                  <a:srgbClr val="6B6F76"/>
-                </a:solidFill>
-                <a:latin typeface="맑은 고딕" pitchFamily="34" charset="0"/>
-                <a:ea typeface="맑은 고딕" pitchFamily="34" charset="-122"/>
-                <a:cs typeface="맑은 고딕" pitchFamily="34" charset="-120"/>
-              </a:rPr>
-              <a:t>구조물 1기 스캔 · 리포트</a:t>
-            </a:r>
-            <a:endParaRPr lang="en-US" sz="1050" dirty="0"/>
-          </a:p>
-        </p:txBody>
-      </p:sp>
-      <p:sp>
-        <p:nvSpPr>
-          <p:cNvPr id="39" name="Shape 33"/>
-          <p:cNvSpPr/>
-          <p:nvPr/>
-        </p:nvSpPr>
-        <p:spPr>
-          <a:xfrm>
-            <a:off x="777240" y="4581144"/>
-            <a:ext cx="402336" cy="402336"/>
-          </a:xfrm>
-          <a:prstGeom prst="ellipse">
-            <a:avLst/>
-          </a:prstGeom>
-          <a:solidFill>
-            <a:srgbClr val="B5501F"/>
-          </a:solidFill>
-          <a:ln w="12700">
-            <a:solidFill>
-              <a:srgbClr val="B5501F"/>
-            </a:solidFill>
-            <a:prstDash val="solid"/>
-          </a:ln>
-        </p:spPr>
-      </p:sp>
-      <p:pic>
-        <p:nvPicPr>
-          <p:cNvPr id="40" name="Image 4" descr="preencoded.png">    </p:cNvPr>
-          <p:cNvPicPr>
-            <a:picLocks noChangeAspect="1"/>
-          </p:cNvPicPr>
-          <p:nvPr/>
-        </p:nvPicPr>
-        <p:blipFill>
-          <a:blip r:embed="rId5"/>
-          <a:stretch>
-            <a:fillRect/>
-          </a:stretch>
-        </p:blipFill>
-        <p:spPr>
-          <a:xfrm>
-            <a:off x="881847" y="4685751"/>
-            <a:ext cx="193121" cy="193121"/>
-          </a:xfrm>
-          <a:prstGeom prst="rect">
-            <a:avLst/>
-          </a:prstGeom>
-        </p:spPr>
-      </p:pic>
-      <p:sp>
-        <p:nvSpPr>
-          <p:cNvPr id="41" name="Text 34"/>
-          <p:cNvSpPr txBox="1"/>
-          <p:nvPr/>
-        </p:nvSpPr>
-        <p:spPr>
-          <a:xfrm>
-            <a:off x="1298448" y="4562856"/>
-            <a:ext cx="2661818" cy="256032"/>
-          </a:xfrm>
-          <a:prstGeom prst="rect">
-            <a:avLst/>
-          </a:prstGeom>
-          <a:noFill/>
-          <a:ln/>
-        </p:spPr>
-        <p:txBody>
-          <a:bodyPr wrap="square" lIns="0" tIns="0" rIns="0" bIns="0" rtlCol="0" anchor="t"/>
-          <a:lstStyle/>
-          <a:p>
-            <a:pPr indent="0" marL="0">
-              <a:buNone/>
-            </a:pPr>
-            <a:r>
-              <a:rPr lang="en-US" sz="1300" b="1" dirty="0">
-                <a:solidFill>
-                  <a:srgbClr val="2B2D31"/>
-                </a:solidFill>
-                <a:latin typeface="맑은 고딕" pitchFamily="34" charset="0"/>
-                <a:ea typeface="맑은 고딕" pitchFamily="34" charset="-122"/>
-                <a:cs typeface="맑은 고딕" pitchFamily="34" charset="-120"/>
-              </a:rPr>
-              <a:t>연 구독</a:t>
-            </a:r>
-            <a:endParaRPr lang="en-US" sz="1300" dirty="0"/>
-          </a:p>
-        </p:txBody>
-      </p:sp>
-      <p:sp>
-        <p:nvSpPr>
-          <p:cNvPr id="42" name="Text 35"/>
-          <p:cNvSpPr txBox="1"/>
-          <p:nvPr/>
-        </p:nvSpPr>
-        <p:spPr>
-          <a:xfrm>
-            <a:off x="1298448" y="4818888"/>
-            <a:ext cx="2661818" cy="237744"/>
-          </a:xfrm>
-          <a:prstGeom prst="rect">
-            <a:avLst/>
-          </a:prstGeom>
-          <a:noFill/>
-          <a:ln/>
-        </p:spPr>
-        <p:txBody>
-          <a:bodyPr wrap="square" lIns="0" tIns="0" rIns="0" bIns="0" rtlCol="0" anchor="t"/>
-          <a:lstStyle/>
-          <a:p>
-            <a:pPr indent="0" marL="0">
-              <a:buNone/>
-            </a:pPr>
-            <a:r>
-              <a:rPr lang="en-US" sz="1050" dirty="0">
-                <a:solidFill>
-                  <a:srgbClr val="6B6F76"/>
-                </a:solidFill>
-                <a:latin typeface="맑은 고딕" pitchFamily="34" charset="0"/>
-                <a:ea typeface="맑은 고딕" pitchFamily="34" charset="-122"/>
-                <a:cs typeface="맑은 고딕" pitchFamily="34" charset="-120"/>
-              </a:rPr>
-              <a:t>주기 점검 + 이력 관리</a:t>
-            </a:r>
-            <a:endParaRPr lang="en-US" sz="1050" dirty="0"/>
-          </a:p>
-        </p:txBody>
-      </p:sp>
-      <p:sp>
-        <p:nvSpPr>
-          <p:cNvPr id="43" name="Shape 36"/>
-          <p:cNvSpPr/>
-          <p:nvPr/>
-        </p:nvSpPr>
-        <p:spPr>
-          <a:xfrm>
-            <a:off x="777240" y="5148072"/>
-            <a:ext cx="402336" cy="402336"/>
-          </a:xfrm>
-          <a:prstGeom prst="ellipse">
-            <a:avLst/>
-          </a:prstGeom>
-          <a:solidFill>
-            <a:srgbClr val="B5501F"/>
-          </a:solidFill>
-          <a:ln w="12700">
-            <a:solidFill>
-              <a:srgbClr val="B5501F"/>
-            </a:solidFill>
-            <a:prstDash val="solid"/>
-          </a:ln>
-        </p:spPr>
-      </p:sp>
-      <p:pic>
-        <p:nvPicPr>
-          <p:cNvPr id="44" name="Image 5" descr="preencoded.png">    </p:cNvPr>
-          <p:cNvPicPr>
-            <a:picLocks noChangeAspect="1"/>
-          </p:cNvPicPr>
-          <p:nvPr/>
-        </p:nvPicPr>
-        <p:blipFill>
-          <a:blip r:embed="rId6"/>
-          <a:stretch>
-            <a:fillRect/>
-          </a:stretch>
-        </p:blipFill>
-        <p:spPr>
-          <a:xfrm>
-            <a:off x="881847" y="5252679"/>
-            <a:ext cx="193121" cy="193121"/>
-          </a:xfrm>
-          <a:prstGeom prst="rect">
-            <a:avLst/>
-          </a:prstGeom>
-        </p:spPr>
-      </p:pic>
-      <p:sp>
-        <p:nvSpPr>
-          <p:cNvPr id="45" name="Text 37"/>
-          <p:cNvSpPr txBox="1"/>
-          <p:nvPr/>
-        </p:nvSpPr>
-        <p:spPr>
-          <a:xfrm>
-            <a:off x="1298448" y="5129784"/>
-            <a:ext cx="2661818" cy="256032"/>
-          </a:xfrm>
-          <a:prstGeom prst="rect">
-            <a:avLst/>
-          </a:prstGeom>
-          <a:noFill/>
-          <a:ln/>
-        </p:spPr>
-        <p:txBody>
-          <a:bodyPr wrap="square" lIns="0" tIns="0" rIns="0" bIns="0" rtlCol="0" anchor="t"/>
-          <a:lstStyle/>
-          <a:p>
-            <a:pPr indent="0" marL="0">
-              <a:buNone/>
-            </a:pPr>
-            <a:r>
-              <a:rPr lang="en-US" sz="1300" b="1" dirty="0">
-                <a:solidFill>
-                  <a:srgbClr val="2B2D31"/>
-                </a:solidFill>
-                <a:latin typeface="맑은 고딕" pitchFamily="34" charset="0"/>
-                <a:ea typeface="맑은 고딕" pitchFamily="34" charset="-122"/>
-                <a:cs typeface="맑은 고딕" pitchFamily="34" charset="-120"/>
-              </a:rPr>
-              <a:t>데이터 라이선스 (장기)</a:t>
-            </a:r>
-            <a:endParaRPr lang="en-US" sz="1300" dirty="0"/>
-          </a:p>
-        </p:txBody>
-      </p:sp>
-      <p:sp>
-        <p:nvSpPr>
-          <p:cNvPr id="46" name="Text 38"/>
-          <p:cNvSpPr txBox="1"/>
-          <p:nvPr/>
-        </p:nvSpPr>
-        <p:spPr>
-          <a:xfrm>
-            <a:off x="1298448" y="5385816"/>
-            <a:ext cx="2661818" cy="237744"/>
-          </a:xfrm>
-          <a:prstGeom prst="rect">
-            <a:avLst/>
-          </a:prstGeom>
-          <a:noFill/>
-          <a:ln/>
-        </p:spPr>
-        <p:txBody>
-          <a:bodyPr wrap="square" lIns="0" tIns="0" rIns="0" bIns="0" rtlCol="0" anchor="t"/>
-          <a:lstStyle/>
-          <a:p>
-            <a:pPr indent="0" marL="0">
-              <a:buNone/>
-            </a:pPr>
-            <a:r>
-              <a:rPr lang="en-US" sz="1050" dirty="0">
-                <a:solidFill>
-                  <a:srgbClr val="6B6F76"/>
-                </a:solidFill>
-                <a:latin typeface="맑은 고딕" pitchFamily="34" charset="0"/>
-                <a:ea typeface="맑은 고딕" pitchFamily="34" charset="-122"/>
-                <a:cs typeface="맑은 고딕" pitchFamily="34" charset="-120"/>
-              </a:rPr>
-              <a:t>드론 · 점검 업체에 분석 엔진</a:t>
-            </a:r>
-            <a:endParaRPr lang="en-US" sz="1050" dirty="0"/>
-          </a:p>
-        </p:txBody>
-      </p:sp>
-      <p:sp>
-        <p:nvSpPr>
-          <p:cNvPr id="47" name="Shape 39"/>
-          <p:cNvSpPr/>
-          <p:nvPr/>
-        </p:nvSpPr>
-        <p:spPr>
-          <a:xfrm>
-            <a:off x="4307738" y="3429000"/>
-            <a:ext cx="3576218" cy="2514600"/>
-          </a:xfrm>
-          <a:prstGeom prst="roundRect">
-            <a:avLst>
-              <a:gd name="adj" fmla="val 2909"/>
-            </a:avLst>
-          </a:prstGeom>
-          <a:solidFill>
-            <a:srgbClr val="F3F4F6"/>
-          </a:solidFill>
-          <a:ln w="12700">
-            <a:solidFill>
-              <a:srgbClr val="F3F4F6"/>
-            </a:solidFill>
-            <a:prstDash val="solid"/>
-          </a:ln>
-        </p:spPr>
-      </p:sp>
-      <p:sp>
-        <p:nvSpPr>
-          <p:cNvPr id="48" name="Text 40"/>
-          <p:cNvSpPr txBox="1"/>
-          <p:nvPr/>
-        </p:nvSpPr>
-        <p:spPr>
-          <a:xfrm>
-            <a:off x="4536338" y="3566160"/>
-            <a:ext cx="3210458" cy="320040"/>
-          </a:xfrm>
-          <a:prstGeom prst="rect">
-            <a:avLst/>
-          </a:prstGeom>
-          <a:noFill/>
-          <a:ln/>
-        </p:spPr>
-        <p:txBody>
-          <a:bodyPr wrap="square" lIns="0" tIns="0" rIns="0" bIns="0" rtlCol="0" anchor="t"/>
-          <a:lstStyle/>
-          <a:p>
-            <a:pPr indent="0" marL="0">
-              <a:buNone/>
-            </a:pPr>
-            <a:r>
-              <a:rPr lang="en-US" sz="1400" b="1" dirty="0">
-                <a:solidFill>
-                  <a:srgbClr val="2B2D31"/>
-                </a:solidFill>
-                <a:latin typeface="맑은 고딕" pitchFamily="34" charset="0"/>
-                <a:ea typeface="맑은 고딕" pitchFamily="34" charset="-122"/>
-                <a:cs typeface="맑은 고딕" pitchFamily="34" charset="-120"/>
-              </a:rPr>
-              <a:t>비용 구조</a:t>
-            </a:r>
-            <a:endParaRPr lang="en-US" sz="1400" dirty="0"/>
-          </a:p>
-        </p:txBody>
-      </p:sp>
-      <p:sp>
-        <p:nvSpPr>
-          <p:cNvPr id="49" name="Shape 41"/>
-          <p:cNvSpPr/>
-          <p:nvPr/>
-        </p:nvSpPr>
-        <p:spPr>
-          <a:xfrm>
-            <a:off x="4536338" y="4014216"/>
-            <a:ext cx="402336" cy="402336"/>
-          </a:xfrm>
-          <a:prstGeom prst="ellipse">
-            <a:avLst/>
-          </a:prstGeom>
-          <a:solidFill>
-            <a:srgbClr val="2B2D31"/>
-          </a:solidFill>
-          <a:ln w="12700">
-            <a:solidFill>
-              <a:srgbClr val="2B2D31"/>
-            </a:solidFill>
-            <a:prstDash val="solid"/>
-          </a:ln>
-        </p:spPr>
-      </p:sp>
-      <p:pic>
-        <p:nvPicPr>
-          <p:cNvPr id="50" name="Image 6" descr="preencoded.png">    </p:cNvPr>
-          <p:cNvPicPr>
-            <a:picLocks noChangeAspect="1"/>
-          </p:cNvPicPr>
-          <p:nvPr/>
-        </p:nvPicPr>
-        <p:blipFill>
-          <a:blip r:embed="rId7"/>
-          <a:stretch>
-            <a:fillRect/>
-          </a:stretch>
-        </p:blipFill>
-        <p:spPr>
-          <a:xfrm>
-            <a:off x="4640946" y="4118823"/>
-            <a:ext cx="193121" cy="193121"/>
-          </a:xfrm>
-          <a:prstGeom prst="rect">
-            <a:avLst/>
-          </a:prstGeom>
-        </p:spPr>
-      </p:pic>
-      <p:sp>
-        <p:nvSpPr>
-          <p:cNvPr id="51" name="Text 42"/>
-          <p:cNvSpPr txBox="1"/>
-          <p:nvPr/>
-        </p:nvSpPr>
-        <p:spPr>
-          <a:xfrm>
-            <a:off x="5057546" y="3995928"/>
-            <a:ext cx="2661818" cy="256032"/>
-          </a:xfrm>
-          <a:prstGeom prst="rect">
-            <a:avLst/>
-          </a:prstGeom>
-          <a:noFill/>
-          <a:ln/>
-        </p:spPr>
-        <p:txBody>
-          <a:bodyPr wrap="square" lIns="0" tIns="0" rIns="0" bIns="0" rtlCol="0" anchor="t"/>
-          <a:lstStyle/>
-          <a:p>
-            <a:pPr indent="0" marL="0">
-              <a:buNone/>
-            </a:pPr>
-            <a:r>
-              <a:rPr lang="en-US" sz="1300" b="1" dirty="0">
-                <a:solidFill>
-                  <a:srgbClr val="2B2D31"/>
-                </a:solidFill>
-                <a:latin typeface="맑은 고딕" pitchFamily="34" charset="0"/>
-                <a:ea typeface="맑은 고딕" pitchFamily="34" charset="-122"/>
-                <a:cs typeface="맑은 고딕" pitchFamily="34" charset="-120"/>
-              </a:rPr>
-              <a:t>드론 · 촬영 운용</a:t>
-            </a:r>
-            <a:endParaRPr lang="en-US" sz="1300" dirty="0"/>
-          </a:p>
-        </p:txBody>
-      </p:sp>
-      <p:sp>
-        <p:nvSpPr>
-          <p:cNvPr id="52" name="Text 43"/>
-          <p:cNvSpPr txBox="1"/>
-          <p:nvPr/>
-        </p:nvSpPr>
-        <p:spPr>
-          <a:xfrm>
-            <a:off x="5057546" y="4251960"/>
-            <a:ext cx="2661818" cy="237744"/>
-          </a:xfrm>
-          <a:prstGeom prst="rect">
-            <a:avLst/>
-          </a:prstGeom>
-          <a:noFill/>
-          <a:ln/>
-        </p:spPr>
-        <p:txBody>
-          <a:bodyPr wrap="square" lIns="0" tIns="0" rIns="0" bIns="0" rtlCol="0" anchor="t"/>
-          <a:lstStyle/>
-          <a:p>
-            <a:pPr indent="0" marL="0">
-              <a:buNone/>
-            </a:pPr>
-            <a:r>
-              <a:rPr lang="en-US" sz="1050" dirty="0">
-                <a:solidFill>
-                  <a:srgbClr val="6B6F76"/>
-                </a:solidFill>
-                <a:latin typeface="맑은 고딕" pitchFamily="34" charset="0"/>
-                <a:ea typeface="맑은 고딕" pitchFamily="34" charset="-122"/>
-                <a:cs typeface="맑은 고딕" pitchFamily="34" charset="-120"/>
-              </a:rPr>
-              <a:t>파트너 촬영 대행</a:t>
-            </a:r>
-            <a:endParaRPr lang="en-US" sz="1050" dirty="0"/>
-          </a:p>
-        </p:txBody>
-      </p:sp>
-      <p:sp>
-        <p:nvSpPr>
-          <p:cNvPr id="53" name="Shape 44"/>
-          <p:cNvSpPr/>
-          <p:nvPr/>
-        </p:nvSpPr>
-        <p:spPr>
-          <a:xfrm>
-            <a:off x="4536338" y="4581144"/>
-            <a:ext cx="402336" cy="402336"/>
-          </a:xfrm>
-          <a:prstGeom prst="ellipse">
-            <a:avLst/>
-          </a:prstGeom>
-          <a:solidFill>
-            <a:srgbClr val="2B2D31"/>
-          </a:solidFill>
-          <a:ln w="12700">
-            <a:solidFill>
-              <a:srgbClr val="2B2D31"/>
-            </a:solidFill>
-            <a:prstDash val="solid"/>
-          </a:ln>
-        </p:spPr>
-      </p:sp>
-      <p:pic>
-        <p:nvPicPr>
-          <p:cNvPr id="54" name="Image 7" descr="preencoded.png">    </p:cNvPr>
-          <p:cNvPicPr>
-            <a:picLocks noChangeAspect="1"/>
-          </p:cNvPicPr>
-          <p:nvPr/>
-        </p:nvPicPr>
-        <p:blipFill>
-          <a:blip r:embed="rId8"/>
-          <a:stretch>
-            <a:fillRect/>
-          </a:stretch>
-        </p:blipFill>
-        <p:spPr>
-          <a:xfrm>
-            <a:off x="4640946" y="4685751"/>
-            <a:ext cx="193121" cy="193121"/>
-          </a:xfrm>
-          <a:prstGeom prst="rect">
-            <a:avLst/>
-          </a:prstGeom>
-        </p:spPr>
-      </p:pic>
-      <p:sp>
-        <p:nvSpPr>
-          <p:cNvPr id="55" name="Text 45"/>
-          <p:cNvSpPr txBox="1"/>
-          <p:nvPr/>
-        </p:nvSpPr>
-        <p:spPr>
-          <a:xfrm>
-            <a:off x="5057546" y="4562856"/>
-            <a:ext cx="2661818" cy="256032"/>
-          </a:xfrm>
-          <a:prstGeom prst="rect">
-            <a:avLst/>
-          </a:prstGeom>
-          <a:noFill/>
-          <a:ln/>
-        </p:spPr>
-        <p:txBody>
-          <a:bodyPr wrap="square" lIns="0" tIns="0" rIns="0" bIns="0" rtlCol="0" anchor="t"/>
-          <a:lstStyle/>
-          <a:p>
-            <a:pPr indent="0" marL="0">
-              <a:buNone/>
-            </a:pPr>
-            <a:r>
-              <a:rPr lang="en-US" sz="1300" b="1" dirty="0">
-                <a:solidFill>
-                  <a:srgbClr val="2B2D31"/>
-                </a:solidFill>
-                <a:latin typeface="맑은 고딕" pitchFamily="34" charset="0"/>
-                <a:ea typeface="맑은 고딕" pitchFamily="34" charset="-122"/>
-                <a:cs typeface="맑은 고딕" pitchFamily="34" charset="-120"/>
-              </a:rPr>
-              <a:t>모델 R&amp;D · 현장 시험</a:t>
-            </a:r>
-            <a:endParaRPr lang="en-US" sz="1300" dirty="0"/>
-          </a:p>
-        </p:txBody>
-      </p:sp>
-      <p:sp>
-        <p:nvSpPr>
-          <p:cNvPr id="56" name="Text 46"/>
-          <p:cNvSpPr txBox="1"/>
-          <p:nvPr/>
-        </p:nvSpPr>
-        <p:spPr>
-          <a:xfrm>
-            <a:off x="5057546" y="4818888"/>
-            <a:ext cx="2661818" cy="237744"/>
-          </a:xfrm>
-          <a:prstGeom prst="rect">
-            <a:avLst/>
-          </a:prstGeom>
-          <a:noFill/>
-          <a:ln/>
-        </p:spPr>
-        <p:txBody>
-          <a:bodyPr wrap="square" lIns="0" tIns="0" rIns="0" bIns="0" rtlCol="0" anchor="t"/>
-          <a:lstStyle/>
-          <a:p>
-            <a:pPr indent="0" marL="0">
-              <a:buNone/>
-            </a:pPr>
-            <a:r>
-              <a:rPr lang="en-US" sz="1050" dirty="0">
-                <a:solidFill>
-                  <a:srgbClr val="6B6F76"/>
-                </a:solidFill>
-                <a:latin typeface="맑은 고딕" pitchFamily="34" charset="0"/>
-                <a:ea typeface="맑은 고딕" pitchFamily="34" charset="-122"/>
-                <a:cs typeface="맑은 고딕" pitchFamily="34" charset="-120"/>
-              </a:rPr>
-              <a:t>두께 데이터 결합 · 정확도 향상</a:t>
-            </a:r>
-            <a:endParaRPr lang="en-US" sz="1050" dirty="0"/>
-          </a:p>
-        </p:txBody>
-      </p:sp>
-      <p:sp>
-        <p:nvSpPr>
-          <p:cNvPr id="57" name="Shape 47"/>
-          <p:cNvSpPr/>
-          <p:nvPr/>
-        </p:nvSpPr>
-        <p:spPr>
-          <a:xfrm>
-            <a:off x="8066837" y="3429000"/>
-            <a:ext cx="3576218" cy="2514600"/>
-          </a:xfrm>
-          <a:prstGeom prst="roundRect">
-            <a:avLst>
-              <a:gd name="adj" fmla="val 2909"/>
-            </a:avLst>
-          </a:prstGeom>
-          <a:solidFill>
-            <a:srgbClr val="E3EFF4"/>
-          </a:solidFill>
-          <a:ln w="12700">
-            <a:solidFill>
-              <a:srgbClr val="E3EFF4"/>
-            </a:solidFill>
-            <a:prstDash val="solid"/>
-          </a:ln>
-        </p:spPr>
-      </p:sp>
-      <p:sp>
-        <p:nvSpPr>
-          <p:cNvPr id="58" name="Text 48"/>
-          <p:cNvSpPr txBox="1"/>
-          <p:nvPr/>
-        </p:nvSpPr>
-        <p:spPr>
-          <a:xfrm>
-            <a:off x="8295437" y="3566160"/>
-            <a:ext cx="3210458" cy="320040"/>
-          </a:xfrm>
-          <a:prstGeom prst="rect">
-            <a:avLst/>
-          </a:prstGeom>
-          <a:noFill/>
-          <a:ln/>
-        </p:spPr>
-        <p:txBody>
-          <a:bodyPr wrap="square" lIns="0" tIns="0" rIns="0" bIns="0" rtlCol="0" anchor="t"/>
-          <a:lstStyle/>
-          <a:p>
-            <a:pPr indent="0" marL="0">
-              <a:buNone/>
-            </a:pPr>
-            <a:r>
-              <a:rPr lang="en-US" sz="1400" b="1" dirty="0">
-                <a:solidFill>
-                  <a:srgbClr val="1F5F7A"/>
-                </a:solidFill>
-                <a:latin typeface="맑은 고딕" pitchFamily="34" charset="0"/>
-                <a:ea typeface="맑은 고딕" pitchFamily="34" charset="-122"/>
-                <a:cs typeface="맑은 고딕" pitchFamily="34" charset="-120"/>
-              </a:rPr>
-              <a:t>고객이 아끼는 비용</a:t>
-            </a:r>
-            <a:endParaRPr lang="en-US" sz="1400" dirty="0"/>
-          </a:p>
-        </p:txBody>
-      </p:sp>
-      <p:sp>
-        <p:nvSpPr>
-          <p:cNvPr id="59" name="Shape 49"/>
-          <p:cNvSpPr/>
-          <p:nvPr/>
-        </p:nvSpPr>
-        <p:spPr>
-          <a:xfrm>
-            <a:off x="8295437" y="4014216"/>
-            <a:ext cx="402336" cy="402336"/>
-          </a:xfrm>
-          <a:prstGeom prst="ellipse">
-            <a:avLst/>
-          </a:prstGeom>
-          <a:solidFill>
-            <a:srgbClr val="1F5F7A"/>
-          </a:solidFill>
-          <a:ln w="12700">
-            <a:solidFill>
-              <a:srgbClr val="1F5F7A"/>
-            </a:solidFill>
-            <a:prstDash val="solid"/>
-          </a:ln>
-        </p:spPr>
-      </p:sp>
-      <p:pic>
-        <p:nvPicPr>
-          <p:cNvPr id="60" name="Image 8" descr="preencoded.png">    </p:cNvPr>
-          <p:cNvPicPr>
-            <a:picLocks noChangeAspect="1"/>
-          </p:cNvPicPr>
-          <p:nvPr/>
-        </p:nvPicPr>
-        <p:blipFill>
-          <a:blip r:embed="rId9"/>
-          <a:stretch>
-            <a:fillRect/>
-          </a:stretch>
-        </p:blipFill>
-        <p:spPr>
-          <a:xfrm>
-            <a:off x="8400044" y="4118823"/>
-            <a:ext cx="193121" cy="193121"/>
-          </a:xfrm>
-          <a:prstGeom prst="rect">
-            <a:avLst/>
-          </a:prstGeom>
-        </p:spPr>
-      </p:pic>
-      <p:sp>
-        <p:nvSpPr>
-          <p:cNvPr id="61" name="Text 50"/>
-          <p:cNvSpPr txBox="1"/>
-          <p:nvPr/>
-        </p:nvSpPr>
-        <p:spPr>
-          <a:xfrm>
-            <a:off x="8816645" y="3995928"/>
-            <a:ext cx="2661818" cy="256032"/>
-          </a:xfrm>
-          <a:prstGeom prst="rect">
-            <a:avLst/>
-          </a:prstGeom>
-          <a:noFill/>
-          <a:ln/>
-        </p:spPr>
-        <p:txBody>
-          <a:bodyPr wrap="square" lIns="0" tIns="0" rIns="0" bIns="0" rtlCol="0" anchor="t"/>
-          <a:lstStyle/>
-          <a:p>
-            <a:pPr indent="0" marL="0">
-              <a:buNone/>
-            </a:pPr>
-            <a:r>
-              <a:rPr lang="en-US" sz="1300" b="1" dirty="0">
-                <a:solidFill>
-                  <a:srgbClr val="2B2D31"/>
-                </a:solidFill>
-                <a:latin typeface="맑은 고딕" pitchFamily="34" charset="0"/>
-                <a:ea typeface="맑은 고딕" pitchFamily="34" charset="-122"/>
-                <a:cs typeface="맑은 고딕" pitchFamily="34" charset="-120"/>
-              </a:rPr>
-              <a:t>선박 용선 · 기상 대기</a:t>
-            </a:r>
-            <a:endParaRPr lang="en-US" sz="1300" dirty="0"/>
-          </a:p>
-        </p:txBody>
-      </p:sp>
-      <p:sp>
-        <p:nvSpPr>
-          <p:cNvPr id="62" name="Text 51"/>
-          <p:cNvSpPr txBox="1"/>
-          <p:nvPr/>
-        </p:nvSpPr>
-        <p:spPr>
-          <a:xfrm>
-            <a:off x="8816645" y="4251960"/>
-            <a:ext cx="2661818" cy="237744"/>
-          </a:xfrm>
-          <a:prstGeom prst="rect">
-            <a:avLst/>
-          </a:prstGeom>
-          <a:noFill/>
-          <a:ln/>
-        </p:spPr>
-        <p:txBody>
-          <a:bodyPr wrap="square" lIns="0" tIns="0" rIns="0" bIns="0" rtlCol="0" anchor="t"/>
-          <a:lstStyle/>
-          <a:p>
-            <a:pPr indent="0" marL="0">
-              <a:buNone/>
-            </a:pPr>
-            <a:r>
-              <a:rPr lang="en-US" sz="1050" dirty="0">
-                <a:solidFill>
-                  <a:srgbClr val="6B6F76"/>
-                </a:solidFill>
-                <a:latin typeface="맑은 고딕" pitchFamily="34" charset="0"/>
-                <a:ea typeface="맑은 고딕" pitchFamily="34" charset="-122"/>
-                <a:cs typeface="맑은 고딕" pitchFamily="34" charset="-120"/>
-              </a:rPr>
-              <a:t>위험 지점부터 배 투입</a:t>
-            </a:r>
-            <a:endParaRPr lang="en-US" sz="1050" dirty="0"/>
-          </a:p>
-        </p:txBody>
-      </p:sp>
-      <p:sp>
-        <p:nvSpPr>
-          <p:cNvPr id="63" name="Shape 52"/>
-          <p:cNvSpPr/>
-          <p:nvPr/>
-        </p:nvSpPr>
-        <p:spPr>
-          <a:xfrm>
-            <a:off x="8295437" y="4581144"/>
-            <a:ext cx="402336" cy="402336"/>
-          </a:xfrm>
-          <a:prstGeom prst="ellipse">
-            <a:avLst/>
-          </a:prstGeom>
-          <a:solidFill>
-            <a:srgbClr val="1F5F7A"/>
-          </a:solidFill>
-          <a:ln w="12700">
-            <a:solidFill>
-              <a:srgbClr val="1F5F7A"/>
-            </a:solidFill>
-            <a:prstDash val="solid"/>
-          </a:ln>
-        </p:spPr>
-      </p:sp>
-      <p:pic>
-        <p:nvPicPr>
-          <p:cNvPr id="64" name="Image 9" descr="preencoded.png">    </p:cNvPr>
-          <p:cNvPicPr>
-            <a:picLocks noChangeAspect="1"/>
-          </p:cNvPicPr>
-          <p:nvPr/>
-        </p:nvPicPr>
-        <p:blipFill>
-          <a:blip r:embed="rId10"/>
-          <a:stretch>
-            <a:fillRect/>
-          </a:stretch>
-        </p:blipFill>
-        <p:spPr>
-          <a:xfrm>
-            <a:off x="8400044" y="4685751"/>
-            <a:ext cx="193121" cy="193121"/>
-          </a:xfrm>
-          <a:prstGeom prst="rect">
-            <a:avLst/>
-          </a:prstGeom>
-        </p:spPr>
-      </p:pic>
-      <p:sp>
-        <p:nvSpPr>
-          <p:cNvPr id="65" name="Text 53"/>
-          <p:cNvSpPr txBox="1"/>
-          <p:nvPr/>
-        </p:nvSpPr>
-        <p:spPr>
-          <a:xfrm>
-            <a:off x="8816645" y="4562856"/>
-            <a:ext cx="2661818" cy="256032"/>
-          </a:xfrm>
-          <a:prstGeom prst="rect">
-            <a:avLst/>
-          </a:prstGeom>
-          <a:noFill/>
-          <a:ln/>
-        </p:spPr>
-        <p:txBody>
-          <a:bodyPr wrap="square" lIns="0" tIns="0" rIns="0" bIns="0" rtlCol="0" anchor="t"/>
-          <a:lstStyle/>
-          <a:p>
-            <a:pPr indent="0" marL="0">
-              <a:buNone/>
-            </a:pPr>
-            <a:r>
-              <a:rPr lang="en-US" sz="1300" b="1" dirty="0">
-                <a:solidFill>
-                  <a:srgbClr val="2B2D31"/>
-                </a:solidFill>
-                <a:latin typeface="맑은 고딕" pitchFamily="34" charset="0"/>
-                <a:ea typeface="맑은 고딕" pitchFamily="34" charset="-122"/>
-                <a:cs typeface="맑은 고딕" pitchFamily="34" charset="-120"/>
-              </a:rPr>
-              <a:t>리프트 · 로프 액세스</a:t>
-            </a:r>
-            <a:endParaRPr lang="en-US" sz="1300" dirty="0"/>
-          </a:p>
-        </p:txBody>
-      </p:sp>
-      <p:sp>
-        <p:nvSpPr>
-          <p:cNvPr id="66" name="Text 54"/>
-          <p:cNvSpPr txBox="1"/>
-          <p:nvPr/>
-        </p:nvSpPr>
-        <p:spPr>
-          <a:xfrm>
-            <a:off x="8816645" y="4818888"/>
-            <a:ext cx="2661818" cy="237744"/>
-          </a:xfrm>
-          <a:prstGeom prst="rect">
-            <a:avLst/>
-          </a:prstGeom>
-          <a:noFill/>
-          <a:ln/>
-        </p:spPr>
-        <p:txBody>
-          <a:bodyPr wrap="square" lIns="0" tIns="0" rIns="0" bIns="0" rtlCol="0" anchor="t"/>
-          <a:lstStyle/>
-          <a:p>
-            <a:pPr indent="0" marL="0">
-              <a:buNone/>
-            </a:pPr>
-            <a:r>
-              <a:rPr lang="en-US" sz="1050" dirty="0">
-                <a:solidFill>
-                  <a:srgbClr val="6B6F76"/>
-                </a:solidFill>
-                <a:latin typeface="맑은 고딕" pitchFamily="34" charset="0"/>
-                <a:ea typeface="맑은 고딕" pitchFamily="34" charset="-122"/>
-                <a:cs typeface="맑은 고딕" pitchFamily="34" charset="-120"/>
-              </a:rPr>
-              <a:t>필요한 구간만 · 출동 여부 사전 판단</a:t>
-            </a:r>
-            <a:endParaRPr lang="en-US" sz="1050" dirty="0"/>
-          </a:p>
-        </p:txBody>
-      </p:sp>
-    </p:spTree>
-  </p:cSld>
-  <p:clrMapOvr>
-    <a:masterClrMapping/>
-  </p:clrMapOvr>
-</p:sld>
-</file>
-
 <file path=ppt/slides/slide2.xml><?xml version="1.0" encoding="utf-8"?>
 <p:sld xmlns:a="http://schemas.openxmlformats.org/drawingml/2006/main" xmlns:r="http://schemas.openxmlformats.org/officeDocument/2006/relationships" xmlns:p="http://schemas.openxmlformats.org/presentationml/2006/main">
   <p:cSld name="Slide 10">
@@ -7077,7 +4947,7 @@
                 <a:ea typeface="맑은 고딕" pitchFamily="34" charset="-122"/>
                 <a:cs typeface="맑은 고딕" pitchFamily="34" charset="-120"/>
               </a:rPr>
-              <a:t>매년 생산되는 철강 중</a:t>
+              <a:t>연간 철강 생산량 중</a:t>
             </a:r>
             <a:endParaRPr lang="en-US" sz="1250" dirty="0"/>
           </a:p>
@@ -7094,7 +4964,7 @@
                 <a:ea typeface="맑은 고딕" pitchFamily="34" charset="-122"/>
                 <a:cs typeface="맑은 고딕" pitchFamily="34" charset="-120"/>
               </a:rPr>
-              <a:t>부식 손실을 메우는 데 쓰이는 비율</a:t>
+              <a:t>부식 손실 보충 비율</a:t>
             </a:r>
             <a:endParaRPr lang="en-US" sz="1250" dirty="0"/>
           </a:p>
@@ -7160,7 +5030,7 @@
                 <a:ea typeface="맑은 고딕" pitchFamily="34" charset="-122"/>
                 <a:cs typeface="맑은 고딕" pitchFamily="34" charset="-120"/>
               </a:rPr>
-              <a:t>제때 찾아 관리하면 </a:t>
+              <a:t>적기 관리 시 </a:t>
             </a:r>
             <a:r>
               <a:rPr lang="en-US" sz="1900" b="1" dirty="0">
@@ -7171,7 +5041,7 @@
                 <a:ea typeface="맑은 고딕" pitchFamily="34" charset="-122"/>
                 <a:cs typeface="맑은 고딕" pitchFamily="34" charset="-120"/>
               </a:rPr>
-              <a:t>부식 비용의 15–35%</a:t>
+              <a:t>부식 비용 15–35% 절감</a:t>
             </a:r>
             <a:r>
               <a:rPr lang="en-US" sz="1900" b="1" dirty="0">
@@ -7182,7 +5052,7 @@
                 <a:ea typeface="맑은 고딕" pitchFamily="34" charset="-122"/>
                 <a:cs typeface="맑은 고딕" pitchFamily="34" charset="-120"/>
               </a:rPr>
-              <a:t> (연 US$ 3,750–8,750억)를 줄일 수 있습니다</a:t>
+              <a:t>  (연 US$ 3,750–8,750억)</a:t>
             </a:r>
             <a:endParaRPr lang="en-US" sz="1900" dirty="0"/>
           </a:p>
@@ -7532,7 +5402,7 @@
                 <a:ea typeface="맑은 고딕" pitchFamily="34" charset="-122"/>
                 <a:cs typeface="맑은 고딕" pitchFamily="34" charset="-120"/>
               </a:rPr>
-              <a:t>모든 지점을 똑같이 순회</a:t>
+              <a:t>전 지점 동일 순회</a:t>
             </a:r>
             <a:endParaRPr lang="en-US" sz="1550" dirty="0"/>
           </a:p>
@@ -7571,7 +5441,7 @@
                 <a:ea typeface="맑은 고딕" pitchFamily="34" charset="-122"/>
                 <a:cs typeface="맑은 고딕" pitchFamily="34" charset="-120"/>
               </a:rPr>
-              <a:t>상태와 관계없이 정해진 목록을 전부 방문</a:t>
+              <a:t>상태 무관 · 정해진 목록 전수 방문</a:t>
             </a:r>
             <a:endParaRPr lang="en-US" sz="1250" dirty="0"/>
           </a:p>
@@ -7686,7 +5556,7 @@
                 <a:ea typeface="맑은 고딕" pitchFamily="34" charset="-122"/>
                 <a:cs typeface="맑은 고딕" pitchFamily="34" charset="-120"/>
               </a:rPr>
-              <a:t>비말대 · 해저 구간은 접근 자체가 어려움</a:t>
+              <a:t>비말대 · 해저 구간 접근 한계</a:t>
             </a:r>
             <a:endParaRPr lang="en-US" sz="1550" dirty="0"/>
           </a:p>
@@ -7725,7 +5595,7 @@
                 <a:ea typeface="맑은 고딕" pitchFamily="34" charset="-122"/>
                 <a:cs typeface="맑은 고딕" pitchFamily="34" charset="-120"/>
               </a:rPr>
-              <a:t>로프 액세스 · 잠수 · ROV를 미리 일정 잡아야만 확인 가능</a:t>
+              <a:t>로프 액세스 · 잠수 · ROV 사전 일정 필수</a:t>
             </a:r>
             <a:endParaRPr lang="en-US" sz="1250" dirty="0"/>
           </a:p>
@@ -7840,7 +5710,7 @@
                 <a:ea typeface="맑은 고딕" pitchFamily="34" charset="-122"/>
                 <a:cs typeface="맑은 고딕" pitchFamily="34" charset="-120"/>
               </a:rPr>
-              <a:t>검사 비용에 이동 · 대기 비용까지</a:t>
+              <a:t>검사 + 이동 · 대기 비용</a:t>
             </a:r>
             <a:endParaRPr lang="en-US" sz="1550" dirty="0"/>
           </a:p>
@@ -7940,25 +5810,16 @@
               <a:buNone/>
             </a:pPr>
             <a:r>
-              <a:rPr lang="en-US" sz="1700" dirty="0">
-                <a:solidFill>
-                  <a:srgbClr val="D5D7DA"/>
-                </a:solidFill>
-                <a:latin typeface="맑은 고딕" pitchFamily="34" charset="0"/>
-                <a:ea typeface="맑은 고딕" pitchFamily="34" charset="-122"/>
-                <a:cs typeface="맑은 고딕" pitchFamily="34" charset="-120"/>
-              </a:rPr>
-              <a:t>점검 주기는 규제로 정해져 줄일 수 없습니다.</a:t>
-            </a:r>
-            <a:endParaRPr lang="en-US" sz="1700" dirty="0"/>
-          </a:p>
-          <a:p>
-            <a:pPr marL="0" indent="0">
-              <a:spcAft>
-                <a:spcPts val="400"/>
-              </a:spcAft>
-              <a:buNone/>
-            </a:pPr>
+              <a:rPr lang="en-US" sz="1700" b="1" dirty="0" err="1">
+                <a:solidFill>
+                  <a:srgbClr val="FFFFFF"/>
+                </a:solidFill>
+                <a:latin typeface="맑은 고딕" pitchFamily="34" charset="0"/>
+                <a:ea typeface="맑은 고딕" pitchFamily="34" charset="-122"/>
+                <a:cs typeface="맑은 고딕" pitchFamily="34" charset="-120"/>
+              </a:rPr>
+              <a:t>핵심 과제</a:t>
+            </a:r>
             <a:r>
               <a:rPr lang="en-US" sz="1700" b="1" dirty="0">
                 <a:solidFill>
@@ -7968,18 +5829,73 @@
                 <a:ea typeface="맑은 고딕" pitchFamily="34" charset="-122"/>
                 <a:cs typeface="맑은 고딕" pitchFamily="34" charset="-120"/>
               </a:rPr>
-              <a:t>문제는 그 주기 안에서 </a:t>
+              <a:t>  </a:t>
+            </a:r>
+            <a:r>
+              <a:rPr lang="en-US" sz="1700" b="1" dirty="0" err="1">
+                <a:solidFill>
+                  <a:srgbClr val="FFFFFF"/>
+                </a:solidFill>
+                <a:latin typeface="맑은 고딕" pitchFamily="34" charset="0"/>
+                <a:ea typeface="맑은 고딕" pitchFamily="34" charset="-122"/>
+                <a:cs typeface="맑은 고딕" pitchFamily="34" charset="-120"/>
+              </a:rPr>
+              <a:t>→</a:t>
             </a:r>
             <a:r>
               <a:rPr lang="en-US" sz="1700" b="1" dirty="0">
                 <a:solidFill>
+                  <a:srgbClr val="FFFFFF"/>
+                </a:solidFill>
+                <a:latin typeface="맑은 고딕" pitchFamily="34" charset="0"/>
+                <a:ea typeface="맑은 고딕" pitchFamily="34" charset="-122"/>
+                <a:cs typeface="맑은 고딕" pitchFamily="34" charset="-120"/>
+              </a:rPr>
+              <a:t> </a:t>
+            </a:r>
+            <a:r>
+              <a:rPr lang="ko-KR" altLang="en-US" sz="1700" b="1" dirty="0">
+                <a:solidFill>
+                  <a:srgbClr val="FFFFFF"/>
+                </a:solidFill>
+                <a:latin typeface="맑은 고딕" pitchFamily="34" charset="0"/>
+                <a:ea typeface="맑은 고딕" pitchFamily="34" charset="-122"/>
+                <a:cs typeface="맑은 고딕" pitchFamily="34" charset="-120"/>
+              </a:rPr>
+              <a:t/>
+            </a:r>
+            <a:r>
+              <a:rPr lang="en-US" sz="1700" b="1" dirty="0" err="1">
+                <a:solidFill>
+                  <a:srgbClr val="FFFFFF"/>
+                </a:solidFill>
+                <a:latin typeface="맑은 고딕" pitchFamily="34" charset="0"/>
+                <a:ea typeface="맑은 고딕" pitchFamily="34" charset="-122"/>
+                <a:cs typeface="맑은 고딕" pitchFamily="34" charset="-120"/>
+              </a:rPr>
+              <a:t/>
+            </a:r>
+            <a:r>
+              <a:rPr lang="en-US" sz="1700" b="1" dirty="0">
+                <a:solidFill>
+                  <a:srgbClr val="FFFFFF"/>
+                </a:solidFill>
+                <a:latin typeface="맑은 고딕" pitchFamily="34" charset="0"/>
+                <a:ea typeface="맑은 고딕" pitchFamily="34" charset="-122"/>
+                <a:cs typeface="맑은 고딕" pitchFamily="34" charset="-120"/>
+              </a:rPr>
+              <a:t> </a:t>
+            </a:r>
+            <a:r>
+              <a:rPr lang="en-US" sz="1700" b="1" dirty="0">
+                <a:solidFill>
                   <a:srgbClr val="E8A87C"/>
                 </a:solidFill>
                 <a:latin typeface="맑은 고딕" pitchFamily="34" charset="0"/>
                 <a:ea typeface="맑은 고딕" pitchFamily="34" charset="-122"/>
                 <a:cs typeface="맑은 고딕" pitchFamily="34" charset="-120"/>
               </a:rPr>
-              <a:t>어디에 사람과 배를 보낼지</a:t>
+              <a:t>주기 내 사람 · 배 투입 우선순위</a:t>
             </a:r>
             <a:r>
               <a:rPr lang="en-US" sz="1700" b="1" dirty="0">
@@ -7990,7 +5906,7 @@
                 <a:ea typeface="맑은 고딕" pitchFamily="34" charset="-122"/>
                 <a:cs typeface="맑은 고딕" pitchFamily="34" charset="-120"/>
               </a:rPr>
-              <a:t>입니다.</a:t>
+              <a:t/>
             </a:r>
             <a:endParaRPr lang="en-US" sz="1700" dirty="0"/>
           </a:p>
@@ -8004,7 +5920,7 @@
 </p:sld>
 </file>
 
-<file path=ppt/slides/slide6.xml><?xml version="1.0" encoding="utf-8"?>
+<file path=ppt/slides/slide5.xml><?xml version="1.0" encoding="utf-8"?>
 <p:sld xmlns:a="http://schemas.openxmlformats.org/drawingml/2006/main" xmlns:r="http://schemas.openxmlformats.org/officeDocument/2006/relationships" xmlns:p="http://schemas.openxmlformats.org/presentationml/2006/main">
   <p:cSld name="Slide 2">
     <p:bg>
@@ -8933,45 +6849,6 @@
       </p:sp>
       <p:sp>
         <p:nvSpPr>
-          <p:cNvPr id="31" name="Text 23"/>
-          <p:cNvSpPr txBox="1"/>
-          <p:nvPr/>
-        </p:nvSpPr>
-        <p:spPr>
-          <a:xfrm>
-            <a:off x="9357055" y="1078992"/>
-            <a:ext cx="2286000" cy="228600"/>
-          </a:xfrm>
-          <a:prstGeom prst="rect">
-            <a:avLst/>
-          </a:prstGeom>
-          <a:noFill/>
-          <a:ln/>
-        </p:spPr>
-        <p:txBody>
-          <a:bodyPr wrap="square" lIns="0" tIns="0" rIns="0" bIns="0" rtlCol="0" anchor="t"/>
-          <a:lstStyle/>
-          <a:p>
-            <a:pPr marL="0" indent="0" algn="r">
-              <a:buNone/>
-            </a:pPr>
-            <a:r>
-              <a:rPr lang="en-US" sz="1000" i="1" dirty="0">
-                <a:solidFill>
-                  <a:srgbClr val="A3A7AD"/>
-                </a:solidFill>
-                <a:latin typeface="맑은 고딕" pitchFamily="34" charset="0"/>
-                <a:ea typeface="맑은 고딕" pitchFamily="34" charset="-122"/>
-                <a:cs typeface="맑은 고딕" pitchFamily="34" charset="-120"/>
-              </a:rPr>
-              <a:t>예시 화면 (개념도)</a:t>
-            </a:r>
-            <a:endParaRPr lang="en-US" sz="1000" dirty="0"/>
-          </a:p>
-        </p:txBody>
-      </p:sp>
-      <p:sp>
-        <p:nvSpPr>
           <p:cNvPr id="32" name="Shape 24"/>
           <p:cNvSpPr/>
           <p:nvPr/>
@@ -9207,7 +7084,7 @@
                 <a:ea typeface="맑은 고딕" pitchFamily="34" charset="-122"/>
                 <a:cs typeface="맑은 고딕" pitchFamily="34" charset="-120"/>
               </a:rPr>
-              <a:t>시편 절단 · 실험실 분석 없이 판정</a:t>
+              <a:t>시편 절단 · 실험실 분석 불필요</a:t>
             </a:r>
             <a:endParaRPr lang="en-US" sz="1350" dirty="0"/>
           </a:p>
@@ -9295,7 +7172,7 @@
                 <a:ea typeface="맑은 고딕" pitchFamily="34" charset="-122"/>
                 <a:cs typeface="맑은 고딕" pitchFamily="34" charset="-120"/>
               </a:rPr>
-              <a:t>접근 어려운 비말대도 드론으로 촬영</a:t>
+              <a:t>비말대 등 접근 난구간 드론 촬영</a:t>
             </a:r>
             <a:endParaRPr lang="en-US" sz="1350" dirty="0"/>
           </a:p>
@@ -9538,7 +7415,7 @@
                 <a:ea typeface="맑은 고딕" pitchFamily="34" charset="-122"/>
                 <a:cs typeface="맑은 고딕" pitchFamily="34" charset="-120"/>
               </a:rPr>
-              <a:t>위험 지점부터 사람 · 배 · 리프트 투입</a:t>
+              <a:t>위험 지점 우선 투입 (사람 · 배 · 리프트)</a:t>
             </a:r>
             <a:endParaRPr lang="en-US" sz="1350" dirty="0"/>
           </a:p>
@@ -9640,7 +7517,7 @@
 </p:sld>
 </file>
 
-<file path=ppt/slides/slide7.xml><?xml version="1.0" encoding="utf-8"?>
+<file path=ppt/slides/slide6.xml><?xml version="1.0" encoding="utf-8"?>
 <p:sld xmlns:a="http://schemas.openxmlformats.org/drawingml/2006/main" xmlns:r="http://schemas.openxmlformats.org/officeDocument/2006/relationships" xmlns:p="http://schemas.openxmlformats.org/presentationml/2006/main">
   <p:cSld name="Slide 3">
     <p:bg>
@@ -11413,7 +9290,7 @@
 </p:sld>
 </file>
 
-<file path=ppt/slides/slide8.xml><?xml version="1.0" encoding="utf-8"?>
+<file path=ppt/slides/slide7.xml><?xml version="1.0" encoding="utf-8"?>
 <p:sld xmlns:a="http://schemas.openxmlformats.org/drawingml/2006/main" xmlns:r="http://schemas.openxmlformats.org/officeDocument/2006/relationships" xmlns:p="http://schemas.openxmlformats.org/presentationml/2006/main">
   <p:cSld name="Slide 1">
     <p:bg>
@@ -11421,6 +9298,7 @@
         <a:solidFill>
           <a:srgbClr val="FFFFFF"/>
         </a:solidFill>
+        <a:effectLst/>
       </p:bgPr>
     </p:bg>
     <p:spTree>
@@ -11458,11 +9336,11 @@
           <a:bodyPr wrap="square" lIns="0" tIns="0" rIns="0" bIns="0" rtlCol="0" anchor="t"/>
           <a:lstStyle/>
           <a:p>
-            <a:pPr indent="0" marL="0">
-              <a:buNone/>
-            </a:pPr>
-            <a:r>
-              <a:rPr lang="en-US" sz="1200" b="1" spc="100" kern="0" dirty="0">
+            <a:pPr marL="0" indent="0">
+              <a:buNone/>
+            </a:pPr>
+            <a:r>
+              <a:rPr lang="en-US" sz="1200" b="1" kern="0" spc="100" dirty="0">
                 <a:solidFill>
                   <a:srgbClr val="B5501F"/>
                 </a:solidFill>
@@ -11497,7 +9375,7 @@
           <a:bodyPr wrap="square" lIns="0" tIns="0" rIns="0" bIns="0" rtlCol="0" anchor="ctr"/>
           <a:lstStyle/>
           <a:p>
-            <a:pPr indent="0" marL="0">
+            <a:pPr marL="0" indent="0">
               <a:buNone/>
             </a:pPr>
             <a:r>
@@ -11536,7 +9414,7 @@
           <a:bodyPr wrap="square" lIns="0" tIns="0" rIns="0" bIns="0" rtlCol="0" anchor="t"/>
           <a:lstStyle/>
           <a:p>
-            <a:pPr indent="0" marL="0">
+            <a:pPr marL="0" indent="0">
               <a:buNone/>
             </a:pPr>
             <a:r>
@@ -11575,7 +9453,7 @@
           <a:bodyPr wrap="square" lIns="0" tIns="0" rIns="0" bIns="0" rtlCol="0" anchor="t"/>
           <a:lstStyle/>
           <a:p>
-            <a:pPr algn="r" indent="0" marL="0">
+            <a:pPr marL="0" indent="0" algn="r">
               <a:buNone/>
             </a:pPr>
             <a:r>
@@ -11641,7 +9519,7 @@
           <a:bodyPr wrap="square" lIns="0" tIns="0" rIns="0" bIns="0" rtlCol="0" anchor="t"/>
           <a:lstStyle/>
           <a:p>
-            <a:pPr indent="0" marL="0">
+            <a:pPr marL="0" indent="0">
               <a:buNone/>
             </a:pPr>
             <a:r>
@@ -11680,7 +9558,7 @@
           <a:bodyPr wrap="square" lIns="0" tIns="0" rIns="0" bIns="0" rtlCol="0" anchor="t"/>
           <a:lstStyle/>
           <a:p>
-            <a:pPr algn="r" indent="0" marL="0">
+            <a:pPr marL="0" indent="0" algn="r">
               <a:buNone/>
             </a:pPr>
             <a:r>
@@ -11719,7 +9597,7 @@
           <a:bodyPr wrap="square" lIns="0" tIns="0" rIns="0" bIns="0" rtlCol="0" anchor="t"/>
           <a:lstStyle/>
           <a:p>
-            <a:pPr indent="0" marL="0">
+            <a:pPr marL="0" indent="0">
               <a:buNone/>
             </a:pPr>
             <a:r>
@@ -11758,7 +9636,7 @@
           <a:bodyPr wrap="square" lIns="0" tIns="0" rIns="0" bIns="0" rtlCol="0" anchor="t"/>
           <a:lstStyle/>
           <a:p>
-            <a:pPr indent="0" marL="0">
+            <a:pPr marL="0" indent="0">
               <a:buNone/>
             </a:pPr>
             <a:r>
@@ -11824,7 +9702,7 @@
           <a:bodyPr wrap="square" lIns="0" tIns="0" rIns="0" bIns="0" rtlCol="0" anchor="t"/>
           <a:lstStyle/>
           <a:p>
-            <a:pPr indent="0" marL="0">
+            <a:pPr marL="0" indent="0">
               <a:buNone/>
             </a:pPr>
             <a:r>
@@ -11863,7 +9741,7 @@
           <a:bodyPr wrap="square" lIns="0" tIns="0" rIns="0" bIns="0" rtlCol="0" anchor="t"/>
           <a:lstStyle/>
           <a:p>
-            <a:pPr algn="r" indent="0" marL="0">
+            <a:pPr marL="0" indent="0" algn="r">
               <a:buNone/>
             </a:pPr>
             <a:r>
@@ -11902,7 +9780,7 @@
           <a:bodyPr wrap="square" lIns="0" tIns="0" rIns="0" bIns="0" rtlCol="0" anchor="t"/>
           <a:lstStyle/>
           <a:p>
-            <a:pPr indent="0" marL="0">
+            <a:pPr marL="0" indent="0">
               <a:buNone/>
             </a:pPr>
             <a:r>
@@ -11941,7 +9819,7 @@
           <a:bodyPr wrap="square" lIns="0" tIns="0" rIns="0" bIns="0" rtlCol="0" anchor="t"/>
           <a:lstStyle/>
           <a:p>
-            <a:pPr indent="0" marL="0">
+            <a:pPr marL="0" indent="0">
               <a:buNone/>
             </a:pPr>
             <a:r>
@@ -12007,7 +9885,7 @@
           <a:bodyPr wrap="square" lIns="0" tIns="0" rIns="0" bIns="0" rtlCol="0" anchor="t"/>
           <a:lstStyle/>
           <a:p>
-            <a:pPr indent="0" marL="0">
+            <a:pPr marL="0" indent="0">
               <a:buNone/>
             </a:pPr>
             <a:r>
@@ -12046,7 +9924,7 @@
           <a:bodyPr wrap="square" lIns="0" tIns="0" rIns="0" bIns="0" rtlCol="0" anchor="t"/>
           <a:lstStyle/>
           <a:p>
-            <a:pPr algn="r" indent="0" marL="0">
+            <a:pPr marL="0" indent="0" algn="r">
               <a:buNone/>
             </a:pPr>
             <a:r>
@@ -12085,7 +9963,7 @@
           <a:bodyPr wrap="square" lIns="0" tIns="0" rIns="0" bIns="0" rtlCol="0" anchor="t"/>
           <a:lstStyle/>
           <a:p>
-            <a:pPr indent="0" marL="0">
+            <a:pPr marL="0" indent="0">
               <a:buNone/>
             </a:pPr>
             <a:r>
@@ -12124,7 +10002,7 @@
           <a:bodyPr wrap="square" lIns="0" tIns="0" rIns="0" bIns="0" rtlCol="0" anchor="t"/>
           <a:lstStyle/>
           <a:p>
-            <a:pPr indent="0" marL="0">
+            <a:pPr marL="0" indent="0">
               <a:buNone/>
             </a:pPr>
             <a:r>
@@ -12139,243 +10017,6 @@
               <a:t>제1종 시설물 · 등급별</a:t>
             </a:r>
             <a:endParaRPr lang="en-US" sz="1250" dirty="0"/>
-          </a:p>
-        </p:txBody>
-      </p:sp>
-      <p:sp>
-        <p:nvSpPr>
-          <p:cNvPr id="21" name="Text 19"/>
-          <p:cNvSpPr txBox="1"/>
-          <p:nvPr/>
-        </p:nvSpPr>
-        <p:spPr>
-          <a:xfrm>
-            <a:off x="548640" y="3127248"/>
-            <a:ext cx="6949440" cy="274320"/>
-          </a:xfrm>
-          <a:prstGeom prst="rect">
-            <a:avLst/>
-          </a:prstGeom>
-          <a:noFill/>
-          <a:ln/>
-        </p:spPr>
-        <p:txBody>
-          <a:bodyPr wrap="square" lIns="0" tIns="0" rIns="0" bIns="0" rtlCol="0" anchor="t"/>
-          <a:lstStyle/>
-          <a:p>
-            <a:pPr indent="0" marL="0">
-              <a:buNone/>
-            </a:pPr>
-            <a:r>
-              <a:rPr lang="en-US" sz="1200" dirty="0">
-                <a:solidFill>
-                  <a:srgbClr val="6B6F76"/>
-                </a:solidFill>
-                <a:latin typeface="맑은 고딕" pitchFamily="34" charset="0"/>
-                <a:ea typeface="맑은 고딕" pitchFamily="34" charset="-122"/>
-                <a:cs typeface="맑은 고딕" pitchFamily="34" charset="-120"/>
-              </a:rPr>
-              <a:t>국내 「시설물안전법」 점검 체계 — 법적 관리 대상 162,481개소 ('22.6, 국토교통부)</a:t>
-            </a:r>
-            <a:endParaRPr lang="en-US" sz="1200" dirty="0"/>
-          </a:p>
-        </p:txBody>
-      </p:sp>
-      <p:sp>
-        <p:nvSpPr>
-          <p:cNvPr id="22" name="Shape 20"/>
-          <p:cNvSpPr/>
-          <p:nvPr/>
-        </p:nvSpPr>
-        <p:spPr>
-          <a:xfrm>
-            <a:off x="7482535" y="3108960"/>
-            <a:ext cx="1234440" cy="310896"/>
-          </a:xfrm>
-          <a:prstGeom prst="roundRect">
-            <a:avLst>
-              <a:gd name="adj" fmla="val 50000"/>
-            </a:avLst>
-          </a:prstGeom>
-          <a:solidFill>
-            <a:srgbClr val="1F5F7A"/>
-          </a:solidFill>
-          <a:ln w="12700">
-            <a:solidFill>
-              <a:srgbClr val="1F5F7A"/>
-            </a:solidFill>
-            <a:prstDash val="solid"/>
-          </a:ln>
-        </p:spPr>
-      </p:sp>
-      <p:sp>
-        <p:nvSpPr>
-          <p:cNvPr id="23" name="Text 21"/>
-          <p:cNvSpPr txBox="1"/>
-          <p:nvPr/>
-        </p:nvSpPr>
-        <p:spPr>
-          <a:xfrm>
-            <a:off x="7482535" y="3108960"/>
-            <a:ext cx="1234440" cy="310896"/>
-          </a:xfrm>
-          <a:prstGeom prst="rect">
-            <a:avLst/>
-          </a:prstGeom>
-          <a:noFill/>
-          <a:ln/>
-        </p:spPr>
-        <p:txBody>
-          <a:bodyPr wrap="square" lIns="0" tIns="0" rIns="0" bIns="0" rtlCol="0" anchor="ctr"/>
-          <a:lstStyle/>
-          <a:p>
-            <a:pPr algn="ctr" indent="0" marL="0">
-              <a:buNone/>
-            </a:pPr>
-            <a:r>
-              <a:rPr lang="en-US" sz="1100" b="1" dirty="0">
-                <a:solidFill>
-                  <a:srgbClr val="FFFFFF"/>
-                </a:solidFill>
-                <a:latin typeface="맑은 고딕" pitchFamily="34" charset="0"/>
-                <a:ea typeface="맑은 고딕" pitchFamily="34" charset="-122"/>
-                <a:cs typeface="맑은 고딕" pitchFamily="34" charset="-120"/>
-              </a:rPr>
-              <a:t>국토교통부</a:t>
-            </a:r>
-            <a:endParaRPr lang="en-US" sz="1100" dirty="0"/>
-          </a:p>
-        </p:txBody>
-      </p:sp>
-      <p:sp>
-        <p:nvSpPr>
-          <p:cNvPr id="24" name="Shape 22"/>
-          <p:cNvSpPr/>
-          <p:nvPr/>
-        </p:nvSpPr>
-        <p:spPr>
-          <a:xfrm>
-            <a:off x="8808415" y="3108960"/>
-            <a:ext cx="1234440" cy="310896"/>
-          </a:xfrm>
-          <a:prstGeom prst="roundRect">
-            <a:avLst>
-              <a:gd name="adj" fmla="val 50000"/>
-            </a:avLst>
-          </a:prstGeom>
-          <a:solidFill>
-            <a:srgbClr val="1F5F7A"/>
-          </a:solidFill>
-          <a:ln w="12700">
-            <a:solidFill>
-              <a:srgbClr val="1F5F7A"/>
-            </a:solidFill>
-            <a:prstDash val="solid"/>
-          </a:ln>
-        </p:spPr>
-      </p:sp>
-      <p:sp>
-        <p:nvSpPr>
-          <p:cNvPr id="25" name="Text 23"/>
-          <p:cNvSpPr txBox="1"/>
-          <p:nvPr/>
-        </p:nvSpPr>
-        <p:spPr>
-          <a:xfrm>
-            <a:off x="8808415" y="3108960"/>
-            <a:ext cx="1234440" cy="310896"/>
-          </a:xfrm>
-          <a:prstGeom prst="rect">
-            <a:avLst/>
-          </a:prstGeom>
-          <a:noFill/>
-          <a:ln/>
-        </p:spPr>
-        <p:txBody>
-          <a:bodyPr wrap="square" lIns="0" tIns="0" rIns="0" bIns="0" rtlCol="0" anchor="ctr"/>
-          <a:lstStyle/>
-          <a:p>
-            <a:pPr algn="ctr" indent="0" marL="0">
-              <a:buNone/>
-            </a:pPr>
-            <a:r>
-              <a:rPr lang="en-US" sz="1100" b="1" dirty="0">
-                <a:solidFill>
-                  <a:srgbClr val="FFFFFF"/>
-                </a:solidFill>
-                <a:latin typeface="맑은 고딕" pitchFamily="34" charset="0"/>
-                <a:ea typeface="맑은 고딕" pitchFamily="34" charset="-122"/>
-                <a:cs typeface="맑은 고딕" pitchFamily="34" charset="-120"/>
-              </a:rPr>
-              <a:t>해양수산부</a:t>
-            </a:r>
-            <a:endParaRPr lang="en-US" sz="1100" dirty="0"/>
-          </a:p>
-        </p:txBody>
-      </p:sp>
-      <p:sp>
-        <p:nvSpPr>
-          <p:cNvPr id="26" name="Shape 24"/>
-          <p:cNvSpPr/>
-          <p:nvPr/>
-        </p:nvSpPr>
-        <p:spPr>
-          <a:xfrm>
-            <a:off x="10134295" y="3108960"/>
-            <a:ext cx="1508760" cy="310896"/>
-          </a:xfrm>
-          <a:prstGeom prst="roundRect">
-            <a:avLst>
-              <a:gd name="adj" fmla="val 50000"/>
-            </a:avLst>
-          </a:prstGeom>
-          <a:solidFill>
-            <a:srgbClr val="1F5F7A"/>
-          </a:solidFill>
-          <a:ln w="12700">
-            <a:solidFill>
-              <a:srgbClr val="1F5F7A"/>
-            </a:solidFill>
-            <a:prstDash val="solid"/>
-          </a:ln>
-        </p:spPr>
-      </p:sp>
-      <p:sp>
-        <p:nvSpPr>
-          <p:cNvPr id="27" name="Text 25"/>
-          <p:cNvSpPr txBox="1"/>
-          <p:nvPr/>
-        </p:nvSpPr>
-        <p:spPr>
-          <a:xfrm>
-            <a:off x="10134295" y="3108960"/>
-            <a:ext cx="1508760" cy="310896"/>
-          </a:xfrm>
-          <a:prstGeom prst="rect">
-            <a:avLst/>
-          </a:prstGeom>
-          <a:noFill/>
-          <a:ln/>
-        </p:spPr>
-        <p:txBody>
-          <a:bodyPr wrap="square" lIns="0" tIns="0" rIns="0" bIns="0" rtlCol="0" anchor="ctr"/>
-          <a:lstStyle/>
-          <a:p>
-            <a:pPr algn="ctr" indent="0" marL="0">
-              <a:buNone/>
-            </a:pPr>
-            <a:r>
-              <a:rPr lang="en-US" sz="1100" b="1" dirty="0">
-                <a:solidFill>
-                  <a:srgbClr val="FFFFFF"/>
-                </a:solidFill>
-                <a:latin typeface="맑은 고딕" pitchFamily="34" charset="0"/>
-                <a:ea typeface="맑은 고딕" pitchFamily="34" charset="-122"/>
-                <a:cs typeface="맑은 고딕" pitchFamily="34" charset="-120"/>
-              </a:rPr>
-              <a:t>국토안전관리원</a:t>
-            </a:r>
-            <a:endParaRPr lang="en-US" sz="1100" dirty="0"/>
           </a:p>
         </p:txBody>
       </p:sp>
@@ -12427,7 +10068,7 @@
           <a:bodyPr wrap="square" lIns="0" tIns="0" rIns="0" bIns="0" rtlCol="0" anchor="t"/>
           <a:lstStyle/>
           <a:p>
-            <a:pPr indent="0" marL="0">
+            <a:pPr marL="0" indent="0">
               <a:buNone/>
             </a:pPr>
             <a:r>
@@ -12472,14 +10113,14 @@
       </p:sp>
       <p:pic>
         <p:nvPicPr>
-          <p:cNvPr id="31" name="Image 0" descr="preencoded.png">    </p:cNvPr>
+          <p:cNvPr id="31" name="Image 0" descr="preencoded.png"/>
           <p:cNvPicPr>
             <a:picLocks noChangeAspect="1"/>
           </p:cNvPicPr>
           <p:nvPr/>
         </p:nvPicPr>
         <p:blipFill>
-          <a:blip r:embed="rId1"/>
+          <a:blip r:embed="rId3"/>
           <a:stretch>
             <a:fillRect/>
           </a:stretch>
@@ -12515,7 +10156,7 @@
           <a:bodyPr wrap="square" lIns="0" tIns="0" rIns="0" bIns="0" rtlCol="0" anchor="ctr"/>
           <a:lstStyle/>
           <a:p>
-            <a:pPr indent="0" marL="0">
+            <a:pPr marL="0" indent="0">
               <a:buNone/>
             </a:pPr>
             <a:r>
@@ -12529,9 +10170,6 @@
               </a:rPr>
               <a:t>안전   </a:t>
             </a:r>
-            <a:pPr indent="0" marL="0">
-              <a:buNone/>
-            </a:pPr>
             <a:r>
               <a:rPr lang="en-US" sz="1300" dirty="0">
                 <a:solidFill>
@@ -12574,14 +10212,14 @@
       </p:sp>
       <p:pic>
         <p:nvPicPr>
-          <p:cNvPr id="34" name="Image 1" descr="preencoded.png">    </p:cNvPr>
+          <p:cNvPr id="34" name="Image 1" descr="preencoded.png"/>
           <p:cNvPicPr>
             <a:picLocks noChangeAspect="1"/>
           </p:cNvPicPr>
           <p:nvPr/>
         </p:nvPicPr>
         <p:blipFill>
-          <a:blip r:embed="rId2"/>
+          <a:blip r:embed="rId4"/>
           <a:stretch>
             <a:fillRect/>
           </a:stretch>
@@ -12617,7 +10255,7 @@
           <a:bodyPr wrap="square" lIns="0" tIns="0" rIns="0" bIns="0" rtlCol="0" anchor="ctr"/>
           <a:lstStyle/>
           <a:p>
-            <a:pPr indent="0" marL="0">
+            <a:pPr marL="0" indent="0">
               <a:buNone/>
             </a:pPr>
             <a:r>
@@ -12631,9 +10269,6 @@
               </a:rPr>
               <a:t>비용   </a:t>
             </a:r>
-            <a:pPr indent="0" marL="0">
-              <a:buNone/>
-            </a:pPr>
             <a:r>
               <a:rPr lang="en-US" sz="1300" dirty="0">
                 <a:solidFill>
@@ -12676,14 +10311,14 @@
       </p:sp>
       <p:pic>
         <p:nvPicPr>
-          <p:cNvPr id="37" name="Image 2" descr="preencoded.png">    </p:cNvPr>
+          <p:cNvPr id="37" name="Image 2" descr="preencoded.png"/>
           <p:cNvPicPr>
             <a:picLocks noChangeAspect="1"/>
           </p:cNvPicPr>
           <p:nvPr/>
         </p:nvPicPr>
         <p:blipFill>
-          <a:blip r:embed="rId3"/>
+          <a:blip r:embed="rId5"/>
           <a:stretch>
             <a:fillRect/>
           </a:stretch>
@@ -12719,7 +10354,7 @@
           <a:bodyPr wrap="square" lIns="0" tIns="0" rIns="0" bIns="0" rtlCol="0" anchor="ctr"/>
           <a:lstStyle/>
           <a:p>
-            <a:pPr indent="0" marL="0">
+            <a:pPr marL="0" indent="0">
               <a:buNone/>
             </a:pPr>
             <a:r>
@@ -12733,9 +10368,6 @@
               </a:rPr>
               <a:t>규제 · 보험   </a:t>
             </a:r>
-            <a:pPr indent="0" marL="0">
-              <a:buNone/>
-            </a:pPr>
             <a:r>
               <a:rPr lang="en-US" sz="1300" dirty="0">
                 <a:solidFill>
@@ -12799,7 +10431,7 @@
           <a:bodyPr wrap="square" lIns="0" tIns="0" rIns="0" bIns="0" rtlCol="0" anchor="t"/>
           <a:lstStyle/>
           <a:p>
-            <a:pPr indent="0" marL="0">
+            <a:pPr marL="0" indent="0">
               <a:buNone/>
             </a:pPr>
             <a:r>
@@ -12844,14 +10476,14 @@
       </p:sp>
       <p:pic>
         <p:nvPicPr>
-          <p:cNvPr id="42" name="Image 3" descr="preencoded.png">    </p:cNvPr>
+          <p:cNvPr id="42" name="Image 3" descr="preencoded.png"/>
           <p:cNvPicPr>
             <a:picLocks noChangeAspect="1"/>
           </p:cNvPicPr>
           <p:nvPr/>
         </p:nvPicPr>
         <p:blipFill>
-          <a:blip r:embed="rId4"/>
+          <a:blip r:embed="rId6"/>
           <a:stretch>
             <a:fillRect/>
           </a:stretch>
@@ -12887,7 +10519,7 @@
           <a:bodyPr wrap="square" lIns="0" tIns="0" rIns="0" bIns="0" rtlCol="0" anchor="t"/>
           <a:lstStyle/>
           <a:p>
-            <a:pPr indent="0" marL="0">
+            <a:pPr marL="0" indent="0">
               <a:buNone/>
             </a:pPr>
             <a:r>
@@ -12926,7 +10558,7 @@
           <a:bodyPr wrap="square" lIns="0" tIns="0" rIns="0" bIns="0" rtlCol="0" anchor="t"/>
           <a:lstStyle/>
           <a:p>
-            <a:pPr indent="0" marL="0">
+            <a:pPr marL="0" indent="0">
               <a:buNone/>
             </a:pPr>
             <a:r>
@@ -12938,7 +10570,7 @@
                 <a:ea typeface="맑은 고딕" pitchFamily="34" charset="-122"/>
                 <a:cs typeface="맑은 고딕" pitchFamily="34" charset="-120"/>
               </a:rPr>
-              <a:t>위험 지점부터 배 투입</a:t>
+              <a:t>위험 지점 우선 투입</a:t>
             </a:r>
             <a:endParaRPr lang="en-US" sz="1100" dirty="0"/>
           </a:p>
@@ -12971,14 +10603,14 @@
       </p:sp>
       <p:pic>
         <p:nvPicPr>
-          <p:cNvPr id="46" name="Image 4" descr="preencoded.png">    </p:cNvPr>
+          <p:cNvPr id="46" name="Image 4" descr="preencoded.png"/>
           <p:cNvPicPr>
             <a:picLocks noChangeAspect="1"/>
           </p:cNvPicPr>
           <p:nvPr/>
         </p:nvPicPr>
         <p:blipFill>
-          <a:blip r:embed="rId5"/>
+          <a:blip r:embed="rId7"/>
           <a:stretch>
             <a:fillRect/>
           </a:stretch>
@@ -13014,7 +10646,7 @@
           <a:bodyPr wrap="square" lIns="0" tIns="0" rIns="0" bIns="0" rtlCol="0" anchor="t"/>
           <a:lstStyle/>
           <a:p>
-            <a:pPr indent="0" marL="0">
+            <a:pPr marL="0" indent="0">
               <a:buNone/>
             </a:pPr>
             <a:r>
@@ -13053,7 +10685,7 @@
           <a:bodyPr wrap="square" lIns="0" tIns="0" rIns="0" bIns="0" rtlCol="0" anchor="t"/>
           <a:lstStyle/>
           <a:p>
-            <a:pPr indent="0" marL="0">
+            <a:pPr marL="0" indent="0">
               <a:buNone/>
             </a:pPr>
             <a:r>
@@ -13065,7 +10697,7 @@
                 <a:ea typeface="맑은 고딕" pitchFamily="34" charset="-122"/>
                 <a:cs typeface="맑은 고딕" pitchFamily="34" charset="-120"/>
               </a:rPr>
-              <a:t>필요한 구간만 골라 임대</a:t>
+              <a:t>필요 구간만 임대</a:t>
             </a:r>
             <a:endParaRPr lang="en-US" sz="1100" dirty="0"/>
           </a:p>
@@ -13098,14 +10730,14 @@
       </p:sp>
       <p:pic>
         <p:nvPicPr>
-          <p:cNvPr id="50" name="Image 5" descr="preencoded.png">    </p:cNvPr>
+          <p:cNvPr id="50" name="Image 5" descr="preencoded.png"/>
           <p:cNvPicPr>
             <a:picLocks noChangeAspect="1"/>
           </p:cNvPicPr>
           <p:nvPr/>
         </p:nvPicPr>
         <p:blipFill>
-          <a:blip r:embed="rId6"/>
+          <a:blip r:embed="rId8"/>
           <a:stretch>
             <a:fillRect/>
           </a:stretch>
@@ -13141,7 +10773,7 @@
           <a:bodyPr wrap="square" lIns="0" tIns="0" rIns="0" bIns="0" rtlCol="0" anchor="t"/>
           <a:lstStyle/>
           <a:p>
-            <a:pPr indent="0" marL="0">
+            <a:pPr marL="0" indent="0">
               <a:buNone/>
             </a:pPr>
             <a:r>
@@ -13180,7 +10812,7 @@
           <a:bodyPr wrap="square" lIns="0" tIns="0" rIns="0" bIns="0" rtlCol="0" anchor="t"/>
           <a:lstStyle/>
           <a:p>
-            <a:pPr indent="0" marL="0">
+            <a:pPr marL="0" indent="0">
               <a:buNone/>
             </a:pPr>
             <a:r>
@@ -13225,14 +10857,14 @@
       </p:sp>
       <p:pic>
         <p:nvPicPr>
-          <p:cNvPr id="54" name="Image 6" descr="preencoded.png">    </p:cNvPr>
+          <p:cNvPr id="54" name="Image 6" descr="preencoded.png"/>
           <p:cNvPicPr>
             <a:picLocks noChangeAspect="1"/>
           </p:cNvPicPr>
           <p:nvPr/>
         </p:nvPicPr>
         <p:blipFill>
-          <a:blip r:embed="rId7"/>
+          <a:blip r:embed="rId9"/>
           <a:stretch>
             <a:fillRect/>
           </a:stretch>
@@ -13268,7 +10900,7 @@
           <a:bodyPr wrap="square" lIns="0" tIns="0" rIns="0" bIns="0" rtlCol="0" anchor="t"/>
           <a:lstStyle/>
           <a:p>
-            <a:pPr indent="0" marL="0">
+            <a:pPr marL="0" indent="0">
               <a:buNone/>
             </a:pPr>
             <a:r>
@@ -13307,7 +10939,7 @@
           <a:bodyPr wrap="square" lIns="0" tIns="0" rIns="0" bIns="0" rtlCol="0" anchor="t"/>
           <a:lstStyle/>
           <a:p>
-            <a:pPr indent="0" marL="0">
+            <a:pPr marL="0" indent="0">
               <a:buNone/>
             </a:pPr>
             <a:r>
@@ -13319,22 +10951,55 @@
                 <a:ea typeface="맑은 고딕" pitchFamily="34" charset="-122"/>
                 <a:cs typeface="맑은 고딕" pitchFamily="34" charset="-120"/>
               </a:rPr>
-              <a:t>사진 리포트로 정리</a:t>
+              <a:t>사진 리포트 자동 정리</a:t>
             </a:r>
             <a:endParaRPr lang="en-US" sz="1100" dirty="0"/>
           </a:p>
         </p:txBody>
       </p:sp>
-      <p:sp>
-        <p:nvSpPr>
-          <p:cNvPr id="57" name="Text 48"/>
-          <p:cNvSpPr txBox="1"/>
-          <p:nvPr/>
-        </p:nvSpPr>
-        <p:spPr>
-          <a:xfrm>
-            <a:off x="6507328" y="5733288"/>
-            <a:ext cx="4952848" cy="228600"/>
+    </p:spTree>
+  </p:cSld>
+  <p:clrMapOvr>
+    <a:masterClrMapping/>
+  </p:clrMapOvr>
+</p:sld>
+</file>
+
+<file path=ppt/slides/slide8.xml><?xml version="1.0" encoding="utf-8"?>
+<p:sld xmlns:a="http://schemas.openxmlformats.org/drawingml/2006/main" xmlns:r="http://schemas.openxmlformats.org/officeDocument/2006/relationships" xmlns:p="http://schemas.openxmlformats.org/presentationml/2006/main">
+  <p:cSld name="Slide 2">
+    <p:bg>
+      <p:bgPr>
+        <a:solidFill>
+          <a:srgbClr val="FFFFFF"/>
+        </a:solidFill>
+        <a:effectLst/>
+      </p:bgPr>
+    </p:bg>
+    <p:spTree>
+      <p:nvGrpSpPr>
+        <p:cNvPr id="1" name=""/>
+        <p:cNvGrpSpPr/>
+        <p:nvPr/>
+      </p:nvGrpSpPr>
+      <p:grpSpPr>
+        <a:xfrm>
+          <a:off x="0" y="0"/>
+          <a:ext cx="0" cy="0"/>
+          <a:chOff x="0" y="0"/>
+          <a:chExt cx="0" cy="0"/>
+        </a:xfrm>
+      </p:grpSpPr>
+      <p:sp>
+        <p:nvSpPr>
+          <p:cNvPr id="2" name="Text 0"/>
+          <p:cNvSpPr txBox="1"/>
+          <p:nvPr/>
+        </p:nvSpPr>
+        <p:spPr>
+          <a:xfrm>
+            <a:off x="548640" y="292608"/>
+            <a:ext cx="7315200" cy="274320"/>
           </a:xfrm>
           <a:prstGeom prst="rect">
             <a:avLst/>
@@ -13346,11 +11011,89 @@
           <a:bodyPr wrap="square" lIns="0" tIns="0" rIns="0" bIns="0" rtlCol="0" anchor="t"/>
           <a:lstStyle/>
           <a:p>
-            <a:pPr indent="0" marL="0">
-              <a:buNone/>
-            </a:pPr>
-            <a:r>
-              <a:rPr lang="en-US" sz="1000" i="1" dirty="0">
+            <a:pPr marL="0" indent="0">
+              <a:buNone/>
+            </a:pPr>
+            <a:r>
+              <a:rPr lang="en-US" sz="1200" b="1" kern="0" spc="100" dirty="0">
+                <a:solidFill>
+                  <a:srgbClr val="B5501F"/>
+                </a:solidFill>
+                <a:latin typeface="맑은 고딕" pitchFamily="34" charset="0"/>
+                <a:ea typeface="맑은 고딕" pitchFamily="34" charset="-122"/>
+                <a:cs typeface="맑은 고딕" pitchFamily="34" charset="-120"/>
+              </a:rPr>
+              <a:t>MARKET SIZE</a:t>
+            </a:r>
+            <a:endParaRPr lang="en-US" sz="1200" dirty="0"/>
+          </a:p>
+        </p:txBody>
+      </p:sp>
+      <p:sp>
+        <p:nvSpPr>
+          <p:cNvPr id="3" name="Text 1"/>
+          <p:cNvSpPr txBox="1"/>
+          <p:nvPr/>
+        </p:nvSpPr>
+        <p:spPr>
+          <a:xfrm>
+            <a:off x="548640" y="566928"/>
+            <a:ext cx="11094415" cy="640080"/>
+          </a:xfrm>
+          <a:prstGeom prst="rect">
+            <a:avLst/>
+          </a:prstGeom>
+          <a:noFill/>
+          <a:ln/>
+        </p:spPr>
+        <p:txBody>
+          <a:bodyPr wrap="square" lIns="0" tIns="0" rIns="0" bIns="0" rtlCol="0" anchor="ctr"/>
+          <a:lstStyle/>
+          <a:p>
+            <a:pPr marL="0" indent="0">
+              <a:buNone/>
+            </a:pPr>
+            <a:r>
+              <a:rPr lang="en-US" sz="2800" b="1" dirty="0">
+                <a:solidFill>
+                  <a:srgbClr val="2B2D31"/>
+                </a:solidFill>
+                <a:latin typeface="맑은 고딕" pitchFamily="34" charset="0"/>
+                <a:ea typeface="맑은 고딕" pitchFamily="34" charset="-122"/>
+                <a:cs typeface="맑은 고딕" pitchFamily="34" charset="-120"/>
+              </a:rPr>
+              <a:t>시장 규모 (국내)</a:t>
+            </a:r>
+            <a:endParaRPr lang="en-US" sz="2800" dirty="0"/>
+          </a:p>
+        </p:txBody>
+      </p:sp>
+      <p:sp>
+        <p:nvSpPr>
+          <p:cNvPr id="4" name="Text 2"/>
+          <p:cNvSpPr txBox="1"/>
+          <p:nvPr/>
+        </p:nvSpPr>
+        <p:spPr>
+          <a:xfrm>
+            <a:off x="548640" y="6446520"/>
+            <a:ext cx="6400800" cy="274320"/>
+          </a:xfrm>
+          <a:prstGeom prst="rect">
+            <a:avLst/>
+          </a:prstGeom>
+          <a:noFill/>
+          <a:ln/>
+        </p:spPr>
+        <p:txBody>
+          <a:bodyPr wrap="square" lIns="0" tIns="0" rIns="0" bIns="0" rtlCol="0" anchor="t"/>
+          <a:lstStyle/>
+          <a:p>
+            <a:pPr marL="0" indent="0">
+              <a:buNone/>
+            </a:pPr>
+            <a:r>
+              <a:rPr lang="en-US" sz="900" dirty="0">
                 <a:solidFill>
                   <a:srgbClr val="A3A7AD"/>
                 </a:solidFill>
@@ -13358,9 +11101,914 @@
                 <a:ea typeface="맑은 고딕" pitchFamily="34" charset="-122"/>
                 <a:cs typeface="맑은 고딕" pitchFamily="34" charset="-120"/>
               </a:rPr>
-              <a:t>미국 현장 인터뷰 (Deepwater · MISTRAS · Brown Corrosion 등)</a:t>
-            </a:r>
-            <a:endParaRPr lang="en-US" sz="1000" dirty="0"/>
+              <a:t>MLC  ·  제주 A-STREAM 2026</a:t>
+            </a:r>
+            <a:endParaRPr lang="en-US" sz="900" dirty="0"/>
+          </a:p>
+        </p:txBody>
+      </p:sp>
+      <p:sp>
+        <p:nvSpPr>
+          <p:cNvPr id="5" name="Text 3"/>
+          <p:cNvSpPr txBox="1"/>
+          <p:nvPr/>
+        </p:nvSpPr>
+        <p:spPr>
+          <a:xfrm>
+            <a:off x="10728655" y="6446520"/>
+            <a:ext cx="914400" cy="274320"/>
+          </a:xfrm>
+          <a:prstGeom prst="rect">
+            <a:avLst/>
+          </a:prstGeom>
+          <a:noFill/>
+          <a:ln/>
+        </p:spPr>
+        <p:txBody>
+          <a:bodyPr wrap="square" lIns="0" tIns="0" rIns="0" bIns="0" rtlCol="0" anchor="t"/>
+          <a:lstStyle/>
+          <a:p>
+            <a:pPr marL="0" indent="0" algn="r">
+              <a:buNone/>
+            </a:pPr>
+            <a:r>
+              <a:rPr lang="en-US" sz="900" dirty="0">
+                <a:solidFill>
+                  <a:srgbClr val="A3A7AD"/>
+                </a:solidFill>
+                <a:latin typeface="맑은 고딕" pitchFamily="34" charset="0"/>
+                <a:ea typeface="맑은 고딕" pitchFamily="34" charset="-122"/>
+                <a:cs typeface="맑은 고딕" pitchFamily="34" charset="-120"/>
+              </a:rPr>
+              <a:t>8</a:t>
+            </a:r>
+            <a:endParaRPr lang="en-US" sz="900" dirty="0"/>
+          </a:p>
+        </p:txBody>
+      </p:sp>
+      <p:sp>
+        <p:nvSpPr>
+          <p:cNvPr id="6" name="Shape 4"/>
+          <p:cNvSpPr/>
+          <p:nvPr/>
+        </p:nvSpPr>
+        <p:spPr>
+          <a:xfrm>
+            <a:off x="6492240" y="1508760"/>
+            <a:ext cx="4663440" cy="4663440"/>
+          </a:xfrm>
+          <a:prstGeom prst="ellipse">
+            <a:avLst/>
+          </a:prstGeom>
+          <a:solidFill>
+            <a:srgbClr val="B5501F"/>
+          </a:solidFill>
+          <a:ln w="31750">
+            <a:solidFill>
+              <a:srgbClr val="FFFFFF"/>
+            </a:solidFill>
+            <a:prstDash val="solid"/>
+          </a:ln>
+        </p:spPr>
+      </p:sp>
+      <p:sp>
+        <p:nvSpPr>
+          <p:cNvPr id="7" name="Shape 5"/>
+          <p:cNvSpPr/>
+          <p:nvPr/>
+        </p:nvSpPr>
+        <p:spPr>
+          <a:xfrm>
+            <a:off x="7246620" y="3017520"/>
+            <a:ext cx="3154680" cy="3154680"/>
+          </a:xfrm>
+          <a:prstGeom prst="ellipse">
+            <a:avLst/>
+          </a:prstGeom>
+          <a:solidFill>
+            <a:srgbClr val="E8A87C"/>
+          </a:solidFill>
+          <a:ln w="31750">
+            <a:solidFill>
+              <a:srgbClr val="FFFFFF"/>
+            </a:solidFill>
+            <a:prstDash val="solid"/>
+          </a:ln>
+        </p:spPr>
+      </p:sp>
+      <p:sp>
+        <p:nvSpPr>
+          <p:cNvPr id="8" name="Shape 6"/>
+          <p:cNvSpPr/>
+          <p:nvPr/>
+        </p:nvSpPr>
+        <p:spPr>
+          <a:xfrm>
+            <a:off x="7932420" y="4389120"/>
+            <a:ext cx="1783080" cy="1783080"/>
+          </a:xfrm>
+          <a:prstGeom prst="ellipse">
+            <a:avLst/>
+          </a:prstGeom>
+          <a:solidFill>
+            <a:srgbClr val="FFFFFF"/>
+          </a:solidFill>
+          <a:ln w="31750">
+            <a:solidFill>
+              <a:srgbClr val="FFFFFF"/>
+            </a:solidFill>
+            <a:prstDash val="solid"/>
+          </a:ln>
+        </p:spPr>
+      </p:sp>
+      <p:sp>
+        <p:nvSpPr>
+          <p:cNvPr id="9" name="Text 7"/>
+          <p:cNvSpPr txBox="1"/>
+          <p:nvPr/>
+        </p:nvSpPr>
+        <p:spPr>
+          <a:xfrm>
+            <a:off x="7543800" y="1783080"/>
+            <a:ext cx="2560320" cy="777240"/>
+          </a:xfrm>
+          <a:prstGeom prst="rect">
+            <a:avLst/>
+          </a:prstGeom>
+          <a:noFill/>
+          <a:ln/>
+        </p:spPr>
+        <p:txBody>
+          <a:bodyPr wrap="square" lIns="0" tIns="0" rIns="0" bIns="0" rtlCol="0" anchor="ctr"/>
+          <a:lstStyle/>
+          <a:p>
+            <a:pPr marL="0" indent="0" algn="ctr">
+              <a:buNone/>
+            </a:pPr>
+            <a:r>
+              <a:rPr lang="en-US" sz="2000" b="1" dirty="0">
+                <a:solidFill>
+                  <a:srgbClr val="FFFFFF"/>
+                </a:solidFill>
+                <a:latin typeface="맑은 고딕" pitchFamily="34" charset="0"/>
+                <a:ea typeface="맑은 고딕" pitchFamily="34" charset="-122"/>
+                <a:cs typeface="맑은 고딕" pitchFamily="34" charset="-120"/>
+              </a:rPr>
+              <a:t>TAM</a:t>
+            </a:r>
+            <a:endParaRPr lang="en-US" sz="1400" dirty="0"/>
+          </a:p>
+          <a:p>
+            <a:pPr marL="0" indent="0" algn="ctr">
+              <a:buNone/>
+            </a:pPr>
+            <a:r>
+              <a:rPr lang="en-US" sz="2200" b="1" dirty="0">
+                <a:solidFill>
+                  <a:srgbClr val="FFFFFF"/>
+                </a:solidFill>
+                <a:latin typeface="맑은 고딕" pitchFamily="34" charset="0"/>
+                <a:ea typeface="맑은 고딕" pitchFamily="34" charset="-122"/>
+                <a:cs typeface="맑은 고딕" pitchFamily="34" charset="-120"/>
+              </a:rPr>
+              <a:t>5,192억 원</a:t>
+            </a:r>
+            <a:endParaRPr lang="en-US" sz="1400" dirty="0"/>
+          </a:p>
+        </p:txBody>
+      </p:sp>
+      <p:sp>
+        <p:nvSpPr>
+          <p:cNvPr id="10" name="Text 8"/>
+          <p:cNvSpPr txBox="1"/>
+          <p:nvPr/>
+        </p:nvSpPr>
+        <p:spPr>
+          <a:xfrm>
+            <a:off x="7543800" y="3246120"/>
+            <a:ext cx="2560320" cy="777240"/>
+          </a:xfrm>
+          <a:prstGeom prst="rect">
+            <a:avLst/>
+          </a:prstGeom>
+          <a:noFill/>
+          <a:ln/>
+        </p:spPr>
+        <p:txBody>
+          <a:bodyPr wrap="square" lIns="0" tIns="0" rIns="0" bIns="0" rtlCol="0" anchor="ctr"/>
+          <a:lstStyle/>
+          <a:p>
+            <a:pPr marL="0" indent="0" algn="ctr">
+              <a:buNone/>
+            </a:pPr>
+            <a:r>
+              <a:rPr lang="en-US" sz="1800" b="1" dirty="0">
+                <a:solidFill>
+                  <a:srgbClr val="FFFFFF"/>
+                </a:solidFill>
+                <a:latin typeface="맑은 고딕" pitchFamily="34" charset="0"/>
+                <a:ea typeface="맑은 고딕" pitchFamily="34" charset="-122"/>
+                <a:cs typeface="맑은 고딕" pitchFamily="34" charset="-120"/>
+              </a:rPr>
+              <a:t>SAM</a:t>
+            </a:r>
+            <a:endParaRPr lang="en-US" sz="1400" dirty="0"/>
+          </a:p>
+          <a:p>
+            <a:pPr marL="0" indent="0" algn="ctr">
+              <a:buNone/>
+            </a:pPr>
+            <a:r>
+              <a:rPr lang="en-US" sz="1900" b="1" dirty="0">
+                <a:solidFill>
+                  <a:srgbClr val="FFFFFF"/>
+                </a:solidFill>
+                <a:latin typeface="맑은 고딕" pitchFamily="34" charset="0"/>
+                <a:ea typeface="맑은 고딕" pitchFamily="34" charset="-122"/>
+                <a:cs typeface="맑은 고딕" pitchFamily="34" charset="-120"/>
+              </a:rPr>
+              <a:t>1,667억 원</a:t>
+            </a:r>
+            <a:endParaRPr lang="en-US" sz="1400" dirty="0"/>
+          </a:p>
+        </p:txBody>
+      </p:sp>
+      <p:sp>
+        <p:nvSpPr>
+          <p:cNvPr id="11" name="Text 9"/>
+          <p:cNvSpPr txBox="1"/>
+          <p:nvPr/>
+        </p:nvSpPr>
+        <p:spPr>
+          <a:xfrm>
+            <a:off x="7543800" y="4896612"/>
+            <a:ext cx="2560320" cy="777240"/>
+          </a:xfrm>
+          <a:prstGeom prst="rect">
+            <a:avLst/>
+          </a:prstGeom>
+          <a:noFill/>
+          <a:ln/>
+        </p:spPr>
+        <p:txBody>
+          <a:bodyPr wrap="square" lIns="0" tIns="0" rIns="0" bIns="0" rtlCol="0" anchor="ctr"/>
+          <a:lstStyle/>
+          <a:p>
+            <a:pPr marL="0" indent="0" algn="ctr">
+              <a:buNone/>
+            </a:pPr>
+            <a:r>
+              <a:rPr lang="en-US" sz="1600" b="1" dirty="0">
+                <a:solidFill>
+                  <a:srgbClr val="B5501F"/>
+                </a:solidFill>
+                <a:latin typeface="맑은 고딕" pitchFamily="34" charset="0"/>
+                <a:ea typeface="맑은 고딕" pitchFamily="34" charset="-122"/>
+                <a:cs typeface="맑은 고딕" pitchFamily="34" charset="-120"/>
+              </a:rPr>
+              <a:t>SOM</a:t>
+            </a:r>
+            <a:endParaRPr lang="en-US" sz="1400" dirty="0"/>
+          </a:p>
+          <a:p>
+            <a:pPr marL="0" indent="0" algn="ctr">
+              <a:buNone/>
+            </a:pPr>
+            <a:r>
+              <a:rPr lang="en-US" sz="1600" b="1" dirty="0">
+                <a:solidFill>
+                  <a:srgbClr val="B5501F"/>
+                </a:solidFill>
+                <a:latin typeface="맑은 고딕" pitchFamily="34" charset="0"/>
+                <a:ea typeface="맑은 고딕" pitchFamily="34" charset="-122"/>
+                <a:cs typeface="맑은 고딕" pitchFamily="34" charset="-120"/>
+              </a:rPr>
+              <a:t>17억 원</a:t>
+            </a:r>
+            <a:endParaRPr lang="en-US" sz="1400" dirty="0"/>
+          </a:p>
+        </p:txBody>
+      </p:sp>
+      <p:sp>
+        <p:nvSpPr>
+          <p:cNvPr id="12" name="Shape 10"/>
+          <p:cNvSpPr/>
+          <p:nvPr/>
+        </p:nvSpPr>
+        <p:spPr>
+          <a:xfrm>
+            <a:off x="548640" y="1618488"/>
+            <a:ext cx="329184" cy="329184"/>
+          </a:xfrm>
+          <a:prstGeom prst="ellipse">
+            <a:avLst/>
+          </a:prstGeom>
+          <a:solidFill>
+            <a:srgbClr val="B5501F"/>
+          </a:solidFill>
+          <a:ln w="19050">
+            <a:solidFill>
+              <a:srgbClr val="FFFFFF"/>
+            </a:solidFill>
+            <a:prstDash val="solid"/>
+          </a:ln>
+        </p:spPr>
+      </p:sp>
+      <p:sp>
+        <p:nvSpPr>
+          <p:cNvPr id="13" name="Text 11"/>
+          <p:cNvSpPr txBox="1"/>
+          <p:nvPr/>
+        </p:nvSpPr>
+        <p:spPr>
+          <a:xfrm>
+            <a:off x="1005840" y="1563624"/>
+            <a:ext cx="4937760" cy="411480"/>
+          </a:xfrm>
+          <a:prstGeom prst="rect">
+            <a:avLst/>
+          </a:prstGeom>
+          <a:noFill/>
+          <a:ln/>
+        </p:spPr>
+        <p:txBody>
+          <a:bodyPr wrap="square" lIns="0" tIns="0" rIns="0" bIns="0" rtlCol="0" anchor="ctr"/>
+          <a:lstStyle/>
+          <a:p>
+            <a:pPr marL="0" indent="0">
+              <a:buNone/>
+            </a:pPr>
+            <a:r>
+              <a:rPr lang="en-US" sz="2000" b="1" dirty="0">
+                <a:solidFill>
+                  <a:srgbClr val="2B2D31"/>
+                </a:solidFill>
+                <a:latin typeface="맑은 고딕" pitchFamily="34" charset="0"/>
+                <a:ea typeface="맑은 고딕" pitchFamily="34" charset="-122"/>
+                <a:cs typeface="맑은 고딕" pitchFamily="34" charset="-120"/>
+              </a:rPr>
+              <a:t>TAM  5,192억 원</a:t>
+            </a:r>
+            <a:endParaRPr lang="en-US" sz="2000" dirty="0"/>
+          </a:p>
+        </p:txBody>
+      </p:sp>
+      <p:sp>
+        <p:nvSpPr>
+          <p:cNvPr id="14" name="Shape 12"/>
+          <p:cNvSpPr/>
+          <p:nvPr/>
+        </p:nvSpPr>
+        <p:spPr>
+          <a:xfrm>
+            <a:off x="3749040" y="1783080"/>
+            <a:ext cx="3703320" cy="384048"/>
+          </a:xfrm>
+          <a:prstGeom prst="line">
+            <a:avLst/>
+          </a:prstGeom>
+          <a:noFill/>
+          <a:ln w="15875">
+            <a:solidFill>
+              <a:srgbClr val="B5501F"/>
+            </a:solidFill>
+            <a:prstDash val="dash"/>
+          </a:ln>
+        </p:spPr>
+      </p:sp>
+      <p:sp>
+        <p:nvSpPr>
+          <p:cNvPr id="15" name="Text 13"/>
+          <p:cNvSpPr txBox="1"/>
+          <p:nvPr/>
+        </p:nvSpPr>
+        <p:spPr>
+          <a:xfrm>
+            <a:off x="1005840" y="2011680"/>
+            <a:ext cx="4480560" cy="274320"/>
+          </a:xfrm>
+          <a:prstGeom prst="rect">
+            <a:avLst/>
+          </a:prstGeom>
+          <a:noFill/>
+          <a:ln/>
+        </p:spPr>
+        <p:txBody>
+          <a:bodyPr wrap="square" lIns="0" tIns="0" rIns="0" bIns="0" rtlCol="0" anchor="t"/>
+          <a:lstStyle/>
+          <a:p>
+            <a:pPr marL="0" indent="0">
+              <a:buNone/>
+            </a:pPr>
+            <a:r>
+              <a:rPr lang="en-US" sz="1300" dirty="0">
+                <a:solidFill>
+                  <a:srgbClr val="2B2D31"/>
+                </a:solidFill>
+                <a:latin typeface="맑은 고딕" pitchFamily="34" charset="0"/>
+                <a:ea typeface="맑은 고딕" pitchFamily="34" charset="-122"/>
+                <a:cs typeface="맑은 고딕" pitchFamily="34" charset="-120"/>
+              </a:rPr>
+              <a:t>시설물 안전점검 · 진단 시장</a:t>
+            </a:r>
+            <a:endParaRPr lang="en-US" sz="1300" dirty="0"/>
+          </a:p>
+        </p:txBody>
+      </p:sp>
+      <p:sp>
+        <p:nvSpPr>
+          <p:cNvPr id="16" name="Text 14"/>
+          <p:cNvSpPr txBox="1"/>
+          <p:nvPr/>
+        </p:nvSpPr>
+        <p:spPr>
+          <a:xfrm>
+            <a:off x="1005840" y="2295144"/>
+            <a:ext cx="4480560" cy="256032"/>
+          </a:xfrm>
+          <a:prstGeom prst="rect">
+            <a:avLst/>
+          </a:prstGeom>
+          <a:noFill/>
+          <a:ln/>
+        </p:spPr>
+        <p:txBody>
+          <a:bodyPr wrap="square" lIns="0" tIns="0" rIns="0" bIns="0" rtlCol="0" anchor="t"/>
+          <a:lstStyle/>
+          <a:p>
+            <a:pPr marL="0" indent="0">
+              <a:buNone/>
+            </a:pPr>
+            <a:r>
+              <a:rPr lang="en-US" sz="1200" b="1" dirty="0">
+                <a:solidFill>
+                  <a:srgbClr val="B5501F"/>
+                </a:solidFill>
+                <a:latin typeface="맑은 고딕" pitchFamily="34" charset="0"/>
+                <a:ea typeface="맑은 고딕" pitchFamily="34" charset="-122"/>
+                <a:cs typeface="맑은 고딕" pitchFamily="34" charset="-120"/>
+              </a:rPr>
+              <a:t>연 15% 성장 ('17 → '21)</a:t>
+            </a:r>
+            <a:endParaRPr lang="en-US" sz="1200" dirty="0"/>
+          </a:p>
+        </p:txBody>
+      </p:sp>
+      <p:sp>
+        <p:nvSpPr>
+          <p:cNvPr id="17" name="Text 15"/>
+          <p:cNvSpPr txBox="1"/>
+          <p:nvPr/>
+        </p:nvSpPr>
+        <p:spPr>
+          <a:xfrm>
+            <a:off x="1005840" y="2560320"/>
+            <a:ext cx="4480560" cy="256032"/>
+          </a:xfrm>
+          <a:prstGeom prst="rect">
+            <a:avLst/>
+          </a:prstGeom>
+          <a:noFill/>
+          <a:ln/>
+        </p:spPr>
+        <p:txBody>
+          <a:bodyPr wrap="square" lIns="0" tIns="0" rIns="0" bIns="0" rtlCol="0" anchor="t"/>
+          <a:lstStyle/>
+          <a:p>
+            <a:pPr marL="0" indent="0">
+              <a:buNone/>
+            </a:pPr>
+            <a:r>
+              <a:rPr lang="en-US" sz="950" i="1" dirty="0">
+                <a:solidFill>
+                  <a:srgbClr val="A3A7AD"/>
+                </a:solidFill>
+                <a:latin typeface="맑은 고딕" pitchFamily="34" charset="0"/>
+                <a:ea typeface="맑은 고딕" pitchFamily="34" charset="-122"/>
+                <a:cs typeface="맑은 고딕" pitchFamily="34" charset="-120"/>
+              </a:rPr>
+              <a:t>국토교통부 제5차 시설물 안전 및 유지관리 기본계획 (2021년 기준)</a:t>
+            </a:r>
+            <a:endParaRPr lang="en-US" sz="950" dirty="0"/>
+          </a:p>
+        </p:txBody>
+      </p:sp>
+      <p:sp>
+        <p:nvSpPr>
+          <p:cNvPr id="18" name="Shape 16"/>
+          <p:cNvSpPr/>
+          <p:nvPr/>
+        </p:nvSpPr>
+        <p:spPr>
+          <a:xfrm>
+            <a:off x="548640" y="3035808"/>
+            <a:ext cx="329184" cy="329184"/>
+          </a:xfrm>
+          <a:prstGeom prst="ellipse">
+            <a:avLst/>
+          </a:prstGeom>
+          <a:solidFill>
+            <a:srgbClr val="E8A87C"/>
+          </a:solidFill>
+          <a:ln w="19050">
+            <a:solidFill>
+              <a:srgbClr val="FFFFFF"/>
+            </a:solidFill>
+            <a:prstDash val="solid"/>
+          </a:ln>
+        </p:spPr>
+      </p:sp>
+      <p:sp>
+        <p:nvSpPr>
+          <p:cNvPr id="19" name="Text 17"/>
+          <p:cNvSpPr txBox="1"/>
+          <p:nvPr/>
+        </p:nvSpPr>
+        <p:spPr>
+          <a:xfrm>
+            <a:off x="1005840" y="2980944"/>
+            <a:ext cx="4937760" cy="411480"/>
+          </a:xfrm>
+          <a:prstGeom prst="rect">
+            <a:avLst/>
+          </a:prstGeom>
+          <a:noFill/>
+          <a:ln/>
+        </p:spPr>
+        <p:txBody>
+          <a:bodyPr wrap="square" lIns="0" tIns="0" rIns="0" bIns="0" rtlCol="0" anchor="ctr"/>
+          <a:lstStyle/>
+          <a:p>
+            <a:pPr marL="0" indent="0">
+              <a:buNone/>
+            </a:pPr>
+            <a:r>
+              <a:rPr lang="en-US" sz="2000" b="1" dirty="0">
+                <a:solidFill>
+                  <a:srgbClr val="2B2D31"/>
+                </a:solidFill>
+                <a:latin typeface="맑은 고딕" pitchFamily="34" charset="0"/>
+                <a:ea typeface="맑은 고딕" pitchFamily="34" charset="-122"/>
+                <a:cs typeface="맑은 고딕" pitchFamily="34" charset="-120"/>
+              </a:rPr>
+              <a:t>SAM  1,667억 원</a:t>
+            </a:r>
+            <a:endParaRPr lang="en-US" sz="2000" dirty="0"/>
+          </a:p>
+        </p:txBody>
+      </p:sp>
+      <p:sp>
+        <p:nvSpPr>
+          <p:cNvPr id="20" name="Shape 18"/>
+          <p:cNvSpPr/>
+          <p:nvPr/>
+        </p:nvSpPr>
+        <p:spPr>
+          <a:xfrm>
+            <a:off x="3749040" y="3200400"/>
+            <a:ext cx="3703320" cy="429768"/>
+          </a:xfrm>
+          <a:prstGeom prst="line">
+            <a:avLst/>
+          </a:prstGeom>
+          <a:noFill/>
+          <a:ln w="15875">
+            <a:solidFill>
+              <a:srgbClr val="E8A87C"/>
+            </a:solidFill>
+            <a:prstDash val="dash"/>
+          </a:ln>
+        </p:spPr>
+      </p:sp>
+      <p:sp>
+        <p:nvSpPr>
+          <p:cNvPr id="21" name="Text 19"/>
+          <p:cNvSpPr txBox="1"/>
+          <p:nvPr/>
+        </p:nvSpPr>
+        <p:spPr>
+          <a:xfrm>
+            <a:off x="1005840" y="3429000"/>
+            <a:ext cx="4480560" cy="274320"/>
+          </a:xfrm>
+          <a:prstGeom prst="rect">
+            <a:avLst/>
+          </a:prstGeom>
+          <a:noFill/>
+          <a:ln/>
+        </p:spPr>
+        <p:txBody>
+          <a:bodyPr wrap="square" lIns="0" tIns="0" rIns="0" bIns="0" rtlCol="0" anchor="t"/>
+          <a:lstStyle/>
+          <a:p>
+            <a:pPr marL="0" indent="0">
+              <a:buNone/>
+            </a:pPr>
+            <a:r>
+              <a:rPr lang="en-US" sz="1300" dirty="0">
+                <a:solidFill>
+                  <a:srgbClr val="2B2D31"/>
+                </a:solidFill>
+                <a:latin typeface="맑은 고딕" pitchFamily="34" charset="0"/>
+                <a:ea typeface="맑은 고딕" pitchFamily="34" charset="-122"/>
+                <a:cs typeface="맑은 고딕" pitchFamily="34" charset="-120"/>
+              </a:rPr>
+              <a:t>드론 측량 · 점검 · 관측 시장</a:t>
+            </a:r>
+            <a:endParaRPr lang="en-US" sz="1300" dirty="0"/>
+          </a:p>
+        </p:txBody>
+      </p:sp>
+      <p:sp>
+        <p:nvSpPr>
+          <p:cNvPr id="22" name="Text 20"/>
+          <p:cNvSpPr txBox="1"/>
+          <p:nvPr/>
+        </p:nvSpPr>
+        <p:spPr>
+          <a:xfrm>
+            <a:off x="1005840" y="3712464"/>
+            <a:ext cx="4480560" cy="256032"/>
+          </a:xfrm>
+          <a:prstGeom prst="rect">
+            <a:avLst/>
+          </a:prstGeom>
+          <a:noFill/>
+          <a:ln/>
+        </p:spPr>
+        <p:txBody>
+          <a:bodyPr wrap="square" lIns="0" tIns="0" rIns="0" bIns="0" rtlCol="0" anchor="t"/>
+          <a:lstStyle/>
+          <a:p>
+            <a:pPr marL="0" indent="0">
+              <a:buNone/>
+            </a:pPr>
+            <a:r>
+              <a:rPr lang="en-US" sz="1200" b="1" dirty="0">
+                <a:solidFill>
+                  <a:srgbClr val="B5501F"/>
+                </a:solidFill>
+                <a:latin typeface="맑은 고딕" pitchFamily="34" charset="0"/>
+                <a:ea typeface="맑은 고딕" pitchFamily="34" charset="-122"/>
+                <a:cs typeface="맑은 고딕" pitchFamily="34" charset="-120"/>
+              </a:rPr>
+              <a:t>드론 활용 분야 중 26%</a:t>
+            </a:r>
+            <a:endParaRPr lang="en-US" sz="1200" dirty="0"/>
+          </a:p>
+        </p:txBody>
+      </p:sp>
+      <p:sp>
+        <p:nvSpPr>
+          <p:cNvPr id="23" name="Text 21"/>
+          <p:cNvSpPr txBox="1"/>
+          <p:nvPr/>
+        </p:nvSpPr>
+        <p:spPr>
+          <a:xfrm>
+            <a:off x="1005840" y="3977640"/>
+            <a:ext cx="4480560" cy="256032"/>
+          </a:xfrm>
+          <a:prstGeom prst="rect">
+            <a:avLst/>
+          </a:prstGeom>
+          <a:noFill/>
+          <a:ln/>
+        </p:spPr>
+        <p:txBody>
+          <a:bodyPr wrap="square" lIns="0" tIns="0" rIns="0" bIns="0" rtlCol="0" anchor="t"/>
+          <a:lstStyle/>
+          <a:p>
+            <a:pPr marL="0" indent="0">
+              <a:buNone/>
+            </a:pPr>
+            <a:r>
+              <a:rPr lang="en-US" sz="950" i="1" dirty="0">
+                <a:solidFill>
+                  <a:srgbClr val="A3A7AD"/>
+                </a:solidFill>
+                <a:latin typeface="맑은 고딕" pitchFamily="34" charset="0"/>
+                <a:ea typeface="맑은 고딕" pitchFamily="34" charset="-122"/>
+                <a:cs typeface="맑은 고딕" pitchFamily="34" charset="-120"/>
+              </a:rPr>
+              <a:t>드론정보포털 활용업체 시장 통계</a:t>
+            </a:r>
+            <a:endParaRPr lang="en-US" sz="950" dirty="0"/>
+          </a:p>
+        </p:txBody>
+      </p:sp>
+      <p:sp>
+        <p:nvSpPr>
+          <p:cNvPr id="24" name="Shape 22"/>
+          <p:cNvSpPr/>
+          <p:nvPr/>
+        </p:nvSpPr>
+        <p:spPr>
+          <a:xfrm>
+            <a:off x="548640" y="4453128"/>
+            <a:ext cx="329184" cy="329184"/>
+          </a:xfrm>
+          <a:prstGeom prst="ellipse">
+            <a:avLst/>
+          </a:prstGeom>
+          <a:solidFill>
+            <a:srgbClr val="2B2D31"/>
+          </a:solidFill>
+          <a:ln w="19050">
+            <a:solidFill>
+              <a:srgbClr val="FFFFFF"/>
+            </a:solidFill>
+            <a:prstDash val="solid"/>
+          </a:ln>
+        </p:spPr>
+      </p:sp>
+      <p:sp>
+        <p:nvSpPr>
+          <p:cNvPr id="25" name="Text 23"/>
+          <p:cNvSpPr txBox="1"/>
+          <p:nvPr/>
+        </p:nvSpPr>
+        <p:spPr>
+          <a:xfrm>
+            <a:off x="1005840" y="4398264"/>
+            <a:ext cx="4937760" cy="411480"/>
+          </a:xfrm>
+          <a:prstGeom prst="rect">
+            <a:avLst/>
+          </a:prstGeom>
+          <a:noFill/>
+          <a:ln/>
+        </p:spPr>
+        <p:txBody>
+          <a:bodyPr wrap="square" lIns="0" tIns="0" rIns="0" bIns="0" rtlCol="0" anchor="ctr"/>
+          <a:lstStyle/>
+          <a:p>
+            <a:pPr marL="0" indent="0">
+              <a:buNone/>
+            </a:pPr>
+            <a:r>
+              <a:rPr lang="en-US" sz="2000" b="1" dirty="0">
+                <a:solidFill>
+                  <a:srgbClr val="2B2D31"/>
+                </a:solidFill>
+                <a:latin typeface="맑은 고딕" pitchFamily="34" charset="0"/>
+                <a:ea typeface="맑은 고딕" pitchFamily="34" charset="-122"/>
+                <a:cs typeface="맑은 고딕" pitchFamily="34" charset="-120"/>
+              </a:rPr>
+              <a:t>SOM  17억 원</a:t>
+            </a:r>
+            <a:endParaRPr lang="en-US" sz="2000" dirty="0"/>
+          </a:p>
+        </p:txBody>
+      </p:sp>
+      <p:sp>
+        <p:nvSpPr>
+          <p:cNvPr id="26" name="Shape 24"/>
+          <p:cNvSpPr/>
+          <p:nvPr/>
+        </p:nvSpPr>
+        <p:spPr>
+          <a:xfrm>
+            <a:off x="3749040" y="4617720"/>
+            <a:ext cx="3703320" cy="662940"/>
+          </a:xfrm>
+          <a:prstGeom prst="line">
+            <a:avLst/>
+          </a:prstGeom>
+          <a:noFill/>
+          <a:ln w="15875">
+            <a:solidFill>
+              <a:srgbClr val="A3A7AD"/>
+            </a:solidFill>
+            <a:prstDash val="dash"/>
+          </a:ln>
+        </p:spPr>
+      </p:sp>
+      <p:sp>
+        <p:nvSpPr>
+          <p:cNvPr id="27" name="Text 25"/>
+          <p:cNvSpPr txBox="1"/>
+          <p:nvPr/>
+        </p:nvSpPr>
+        <p:spPr>
+          <a:xfrm>
+            <a:off x="1005840" y="4846320"/>
+            <a:ext cx="4480560" cy="274320"/>
+          </a:xfrm>
+          <a:prstGeom prst="rect">
+            <a:avLst/>
+          </a:prstGeom>
+          <a:noFill/>
+          <a:ln/>
+        </p:spPr>
+        <p:txBody>
+          <a:bodyPr wrap="square" lIns="0" tIns="0" rIns="0" bIns="0" rtlCol="0" anchor="t"/>
+          <a:lstStyle/>
+          <a:p>
+            <a:pPr marL="0" indent="0">
+              <a:buNone/>
+            </a:pPr>
+            <a:r>
+              <a:rPr lang="en-US" altLang="ko-KR" sz="1300" dirty="0">
+                <a:solidFill>
+                  <a:srgbClr val="2B2D31"/>
+                </a:solidFill>
+                <a:latin typeface="맑은 고딕" pitchFamily="34" charset="0"/>
+                <a:ea typeface="맑은 고딕" pitchFamily="34" charset="-122"/>
+                <a:cs typeface="맑은 고딕" pitchFamily="34" charset="-120"/>
+              </a:rPr>
+              <a:t>MLC </a:t>
+            </a:r>
+            <a:r>
+              <a:rPr lang="en-US" sz="1300" dirty="0" err="1">
+                <a:solidFill>
+                  <a:srgbClr val="2B2D31"/>
+                </a:solidFill>
+                <a:latin typeface="맑은 고딕" pitchFamily="34" charset="0"/>
+                <a:ea typeface="맑은 고딕" pitchFamily="34" charset="-122"/>
+                <a:cs typeface="맑은 고딕" pitchFamily="34" charset="-120"/>
+              </a:rPr>
+              <a:t>목표</a:t>
+            </a:r>
+            <a:r>
+              <a:rPr lang="en-US" sz="1300" dirty="0">
+                <a:solidFill>
+                  <a:srgbClr val="2B2D31"/>
+                </a:solidFill>
+                <a:latin typeface="맑은 고딕" pitchFamily="34" charset="0"/>
+                <a:ea typeface="맑은 고딕" pitchFamily="34" charset="-122"/>
+                <a:cs typeface="맑은 고딕" pitchFamily="34" charset="-120"/>
+              </a:rPr>
+              <a:t>: SAM의 1%</a:t>
+            </a:r>
+            <a:endParaRPr lang="en-US" sz="1300" dirty="0"/>
+          </a:p>
+        </p:txBody>
+      </p:sp>
+      <p:sp>
+        <p:nvSpPr>
+          <p:cNvPr id="28" name="Text 26"/>
+          <p:cNvSpPr txBox="1"/>
+          <p:nvPr/>
+        </p:nvSpPr>
+        <p:spPr>
+          <a:xfrm>
+            <a:off x="1005840" y="5129784"/>
+            <a:ext cx="4480560" cy="256032"/>
+          </a:xfrm>
+          <a:prstGeom prst="rect">
+            <a:avLst/>
+          </a:prstGeom>
+          <a:noFill/>
+          <a:ln/>
+        </p:spPr>
+        <p:txBody>
+          <a:bodyPr wrap="square" lIns="0" tIns="0" rIns="0" bIns="0" rtlCol="0" anchor="t"/>
+          <a:lstStyle/>
+          <a:p>
+            <a:pPr marL="0" indent="0">
+              <a:buNone/>
+            </a:pPr>
+            <a:r>
+              <a:rPr lang="en-US" sz="1200" b="1" dirty="0">
+                <a:solidFill>
+                  <a:srgbClr val="B5501F"/>
+                </a:solidFill>
+                <a:latin typeface="맑은 고딕" pitchFamily="34" charset="0"/>
+                <a:ea typeface="맑은 고딕" pitchFamily="34" charset="-122"/>
+                <a:cs typeface="맑은 고딕" pitchFamily="34" charset="-120"/>
+              </a:rPr>
+              <a:t>해양 · 항만 강구조물 · 해상풍력부터</a:t>
+            </a:r>
+            <a:endParaRPr lang="en-US" sz="1200" dirty="0"/>
+          </a:p>
+        </p:txBody>
+      </p:sp>
+      <p:sp>
+        <p:nvSpPr>
+          <p:cNvPr id="29" name="Text 27"/>
+          <p:cNvSpPr txBox="1"/>
+          <p:nvPr/>
+        </p:nvSpPr>
+        <p:spPr>
+          <a:xfrm>
+            <a:off x="1005840" y="5394960"/>
+            <a:ext cx="4480560" cy="256032"/>
+          </a:xfrm>
+          <a:prstGeom prst="rect">
+            <a:avLst/>
+          </a:prstGeom>
+          <a:noFill/>
+          <a:ln/>
+        </p:spPr>
+        <p:txBody>
+          <a:bodyPr wrap="square" lIns="0" tIns="0" rIns="0" bIns="0" rtlCol="0" anchor="t"/>
+          <a:lstStyle/>
+          <a:p>
+            <a:pPr marL="0" indent="0">
+              <a:buNone/>
+            </a:pPr>
+            <a:endParaRPr lang="en-US" sz="950" dirty="0"/>
           </a:p>
         </p:txBody>
       </p:sp>
@@ -13380,6 +12028,7 @@
         <a:solidFill>
           <a:srgbClr val="FFFFFF"/>
         </a:solidFill>
+        <a:effectLst/>
       </p:bgPr>
     </p:bg>
     <p:spTree>
@@ -13417,11 +12066,11 @@
           <a:bodyPr wrap="square" lIns="0" tIns="0" rIns="0" bIns="0" rtlCol="0" anchor="t"/>
           <a:lstStyle/>
           <a:p>
-            <a:pPr indent="0" marL="0">
-              <a:buNone/>
-            </a:pPr>
-            <a:r>
-              <a:rPr lang="en-US" sz="1200" b="1" spc="100" kern="0" dirty="0">
+            <a:pPr marL="0" indent="0">
+              <a:buNone/>
+            </a:pPr>
+            <a:r>
+              <a:rPr lang="en-US" sz="1200" b="1" kern="0" spc="100" dirty="0">
                 <a:solidFill>
                   <a:srgbClr val="B5501F"/>
                 </a:solidFill>
@@ -13429,7 +12078,7 @@
                 <a:ea typeface="맑은 고딕" pitchFamily="34" charset="-122"/>
                 <a:cs typeface="맑은 고딕" pitchFamily="34" charset="-120"/>
               </a:rPr>
-              <a:t>MARKET SIZE</a:t>
+              <a:t>BUSINESS MODEL</a:t>
             </a:r>
             <a:endParaRPr lang="en-US" sz="1200" dirty="0"/>
           </a:p>
@@ -13456,7 +12105,7 @@
           <a:bodyPr wrap="square" lIns="0" tIns="0" rIns="0" bIns="0" rtlCol="0" anchor="ctr"/>
           <a:lstStyle/>
           <a:p>
-            <a:pPr indent="0" marL="0">
+            <a:pPr marL="0" indent="0">
               <a:buNone/>
             </a:pPr>
             <a:r>
@@ -13468,7 +12117,7 @@
                 <a:ea typeface="맑은 고딕" pitchFamily="34" charset="-122"/>
                 <a:cs typeface="맑은 고딕" pitchFamily="34" charset="-120"/>
               </a:rPr>
-              <a:t>시장 규모 (국내)</a:t>
+              <a:t>비즈니스 모델</a:t>
             </a:r>
             <a:endParaRPr lang="en-US" sz="2800" dirty="0"/>
           </a:p>
@@ -13495,7 +12144,7 @@
           <a:bodyPr wrap="square" lIns="0" tIns="0" rIns="0" bIns="0" rtlCol="0" anchor="t"/>
           <a:lstStyle/>
           <a:p>
-            <a:pPr indent="0" marL="0">
+            <a:pPr marL="0" indent="0">
               <a:buNone/>
             </a:pPr>
             <a:r>
@@ -13534,7 +12183,7 @@
           <a:bodyPr wrap="square" lIns="0" tIns="0" rIns="0" bIns="0" rtlCol="0" anchor="t"/>
           <a:lstStyle/>
           <a:p>
-            <a:pPr algn="r" indent="0" marL="0">
+            <a:pPr marL="0" indent="0" algn="r">
               <a:buNone/>
             </a:pPr>
             <a:r>
@@ -13546,7 +12195,7 @@
                 <a:ea typeface="맑은 고딕" pitchFamily="34" charset="-122"/>
                 <a:cs typeface="맑은 고딕" pitchFamily="34" charset="-120"/>
               </a:rPr>
-              <a:t>8</a:t>
+              <a:t>9</a:t>
             </a:r>
             <a:endParaRPr lang="en-US" sz="900" dirty="0"/>
           </a:p>
@@ -13560,18 +12209,20 @@
         </p:nvSpPr>
         <p:spPr>
           <a:xfrm>
-            <a:off x="6492240" y="1508760"/>
-            <a:ext cx="4663440" cy="4663440"/>
-          </a:xfrm>
-          <a:prstGeom prst="ellipse">
-            <a:avLst/>
+            <a:off x="548640" y="1463040"/>
+            <a:ext cx="2377440" cy="1600200"/>
+          </a:xfrm>
+          <a:prstGeom prst="roundRect">
+            <a:avLst>
+              <a:gd name="adj" fmla="val 5714"/>
+            </a:avLst>
           </a:prstGeom>
           <a:solidFill>
-            <a:srgbClr val="B5501F"/>
+            <a:srgbClr val="FFFFFF"/>
           </a:solidFill>
-          <a:ln w="31750">
+          <a:ln w="15875">
             <a:solidFill>
-              <a:srgbClr val="FFFFFF"/>
+              <a:srgbClr val="1F5F7A"/>
             </a:solidFill>
             <a:prstDash val="solid"/>
           </a:ln>
@@ -13585,43 +12236,147 @@
         </p:nvSpPr>
         <p:spPr>
           <a:xfrm>
-            <a:off x="7246620" y="3017520"/>
-            <a:ext cx="3154680" cy="3154680"/>
+            <a:off x="1463040" y="1627632"/>
+            <a:ext cx="548640" cy="548640"/>
           </a:xfrm>
           <a:prstGeom prst="ellipse">
             <a:avLst/>
           </a:prstGeom>
           <a:solidFill>
-            <a:srgbClr val="E8A87C"/>
+            <a:srgbClr val="1F5F7A"/>
           </a:solidFill>
-          <a:ln w="31750">
+          <a:ln w="12700">
             <a:solidFill>
-              <a:srgbClr val="FFFFFF"/>
+              <a:srgbClr val="1F5F7A"/>
             </a:solidFill>
             <a:prstDash val="solid"/>
           </a:ln>
         </p:spPr>
       </p:sp>
-      <p:sp>
-        <p:nvSpPr>
-          <p:cNvPr id="8" name="Shape 6"/>
+      <p:pic>
+        <p:nvPicPr>
+          <p:cNvPr id="8" name="Image 0" descr="preencoded.png"/>
+          <p:cNvPicPr>
+            <a:picLocks noChangeAspect="1"/>
+          </p:cNvPicPr>
+          <p:nvPr/>
+        </p:nvPicPr>
+        <p:blipFill>
+          <a:blip r:embed="rId3"/>
+          <a:stretch>
+            <a:fillRect/>
+          </a:stretch>
+        </p:blipFill>
+        <p:spPr>
+          <a:xfrm>
+            <a:off x="1605686" y="1770278"/>
+            <a:ext cx="263347" cy="263347"/>
+          </a:xfrm>
+          <a:prstGeom prst="rect">
+            <a:avLst/>
+          </a:prstGeom>
+        </p:spPr>
+      </p:pic>
+      <p:sp>
+        <p:nvSpPr>
+          <p:cNvPr id="9" name="Text 6"/>
+          <p:cNvSpPr txBox="1"/>
+          <p:nvPr/>
+        </p:nvSpPr>
+        <p:spPr>
+          <a:xfrm>
+            <a:off x="548640" y="2212848"/>
+            <a:ext cx="2377440" cy="365760"/>
+          </a:xfrm>
+          <a:prstGeom prst="rect">
+            <a:avLst/>
+          </a:prstGeom>
+          <a:noFill/>
+          <a:ln/>
+        </p:spPr>
+        <p:txBody>
+          <a:bodyPr wrap="square" lIns="0" tIns="0" rIns="0" bIns="0" rtlCol="0" anchor="ctr"/>
+          <a:lstStyle/>
+          <a:p>
+            <a:pPr marL="0" indent="0" algn="ctr">
+              <a:buNone/>
+            </a:pPr>
+            <a:r>
+              <a:rPr lang="en-US" sz="1800" b="1" dirty="0">
+                <a:solidFill>
+                  <a:srgbClr val="1F5F7A"/>
+                </a:solidFill>
+                <a:latin typeface="맑은 고딕" pitchFamily="34" charset="0"/>
+                <a:ea typeface="맑은 고딕" pitchFamily="34" charset="-122"/>
+                <a:cs typeface="맑은 고딕" pitchFamily="34" charset="-120"/>
+              </a:rPr>
+              <a:t>파트너</a:t>
+            </a:r>
+            <a:endParaRPr lang="en-US" sz="1800" dirty="0"/>
+          </a:p>
+        </p:txBody>
+      </p:sp>
+      <p:sp>
+        <p:nvSpPr>
+          <p:cNvPr id="10" name="Text 7"/>
+          <p:cNvSpPr txBox="1"/>
+          <p:nvPr/>
+        </p:nvSpPr>
+        <p:spPr>
+          <a:xfrm>
+            <a:off x="640080" y="2578608"/>
+            <a:ext cx="2194560" cy="274320"/>
+          </a:xfrm>
+          <a:prstGeom prst="rect">
+            <a:avLst/>
+          </a:prstGeom>
+          <a:noFill/>
+          <a:ln/>
+        </p:spPr>
+        <p:txBody>
+          <a:bodyPr wrap="square" lIns="0" tIns="0" rIns="0" bIns="0" rtlCol="0" anchor="t"/>
+          <a:lstStyle/>
+          <a:p>
+            <a:pPr marL="0" indent="0" algn="ctr">
+              <a:buNone/>
+            </a:pPr>
+            <a:r>
+              <a:rPr lang="en-US" sz="1150" dirty="0">
+                <a:solidFill>
+                  <a:srgbClr val="6B6F76"/>
+                </a:solidFill>
+                <a:latin typeface="맑은 고딕" pitchFamily="34" charset="0"/>
+                <a:ea typeface="맑은 고딕" pitchFamily="34" charset="-122"/>
+                <a:cs typeface="맑은 고딕" pitchFamily="34" charset="-120"/>
+              </a:rPr>
+              <a:t>드론 운용사 · 방식 전문 업체</a:t>
+            </a:r>
+            <a:endParaRPr lang="en-US" sz="1150" dirty="0"/>
+          </a:p>
+        </p:txBody>
+      </p:sp>
+      <p:sp>
+        <p:nvSpPr>
+          <p:cNvPr id="11" name="Shape 8"/>
           <p:cNvSpPr/>
           <p:nvPr/>
         </p:nvSpPr>
         <p:spPr>
           <a:xfrm>
-            <a:off x="7932420" y="4389120"/>
-            <a:ext cx="1783080" cy="1783080"/>
-          </a:xfrm>
-          <a:prstGeom prst="ellipse">
-            <a:avLst/>
+            <a:off x="4907128" y="1463040"/>
+            <a:ext cx="2377440" cy="1600200"/>
+          </a:xfrm>
+          <a:prstGeom prst="roundRect">
+            <a:avLst>
+              <a:gd name="adj" fmla="val 5714"/>
+            </a:avLst>
           </a:prstGeom>
           <a:solidFill>
             <a:srgbClr val="FFFFFF"/>
           </a:solidFill>
-          <a:ln w="31750">
+          <a:ln w="15875">
             <a:solidFill>
-              <a:srgbClr val="FFFFFF"/>
+              <a:srgbClr val="2B2D31"/>
             </a:solidFill>
             <a:prstDash val="solid"/>
           </a:ln>
@@ -13629,207 +12384,63 @@
       </p:sp>
       <p:sp>
         <p:nvSpPr>
-          <p:cNvPr id="9" name="Text 7"/>
-          <p:cNvSpPr txBox="1"/>
-          <p:nvPr/>
-        </p:nvSpPr>
-        <p:spPr>
-          <a:xfrm>
-            <a:off x="7543800" y="1783080"/>
-            <a:ext cx="2560320" cy="777240"/>
-          </a:xfrm>
-          <a:prstGeom prst="rect">
-            <a:avLst/>
-          </a:prstGeom>
-          <a:noFill/>
-          <a:ln/>
-        </p:spPr>
-        <p:txBody>
-          <a:bodyPr wrap="square" lIns="0" tIns="0" rIns="0" bIns="0" rtlCol="0" anchor="ctr"/>
-          <a:lstStyle/>
-          <a:p>
-            <a:pPr algn="ctr" indent="0" marL="0">
-              <a:buNone/>
-            </a:pPr>
-            <a:r>
-              <a:rPr lang="en-US" sz="2000" b="1" dirty="0">
-                <a:solidFill>
-                  <a:srgbClr val="FFFFFF"/>
-                </a:solidFill>
-                <a:latin typeface="맑은 고딕" pitchFamily="34" charset="0"/>
-                <a:ea typeface="맑은 고딕" pitchFamily="34" charset="-122"/>
-                <a:cs typeface="맑은 고딕" pitchFamily="34" charset="-120"/>
-              </a:rPr>
-              <a:t>TAM</a:t>
-            </a:r>
-            <a:endParaRPr lang="en-US" sz="1400" dirty="0"/>
-          </a:p>
-          <a:p>
-            <a:pPr algn="ctr" indent="0" marL="0">
-              <a:buNone/>
-            </a:pPr>
-            <a:r>
-              <a:rPr lang="en-US" sz="2200" b="1" dirty="0">
-                <a:solidFill>
-                  <a:srgbClr val="FFFFFF"/>
-                </a:solidFill>
-                <a:latin typeface="맑은 고딕" pitchFamily="34" charset="0"/>
-                <a:ea typeface="맑은 고딕" pitchFamily="34" charset="-122"/>
-                <a:cs typeface="맑은 고딕" pitchFamily="34" charset="-120"/>
-              </a:rPr>
-              <a:t>5,192억 원</a:t>
-            </a:r>
-            <a:endParaRPr lang="en-US" sz="1400" dirty="0"/>
-          </a:p>
-        </p:txBody>
-      </p:sp>
-      <p:sp>
-        <p:nvSpPr>
-          <p:cNvPr id="10" name="Text 8"/>
-          <p:cNvSpPr txBox="1"/>
-          <p:nvPr/>
-        </p:nvSpPr>
-        <p:spPr>
-          <a:xfrm>
-            <a:off x="7543800" y="3246120"/>
-            <a:ext cx="2560320" cy="777240"/>
-          </a:xfrm>
-          <a:prstGeom prst="rect">
-            <a:avLst/>
-          </a:prstGeom>
-          <a:noFill/>
-          <a:ln/>
-        </p:spPr>
-        <p:txBody>
-          <a:bodyPr wrap="square" lIns="0" tIns="0" rIns="0" bIns="0" rtlCol="0" anchor="ctr"/>
-          <a:lstStyle/>
-          <a:p>
-            <a:pPr algn="ctr" indent="0" marL="0">
-              <a:buNone/>
-            </a:pPr>
-            <a:r>
-              <a:rPr lang="en-US" sz="1800" b="1" dirty="0">
-                <a:solidFill>
-                  <a:srgbClr val="FFFFFF"/>
-                </a:solidFill>
-                <a:latin typeface="맑은 고딕" pitchFamily="34" charset="0"/>
-                <a:ea typeface="맑은 고딕" pitchFamily="34" charset="-122"/>
-                <a:cs typeface="맑은 고딕" pitchFamily="34" charset="-120"/>
-              </a:rPr>
-              <a:t>SAM</a:t>
-            </a:r>
-            <a:endParaRPr lang="en-US" sz="1400" dirty="0"/>
-          </a:p>
-          <a:p>
-            <a:pPr algn="ctr" indent="0" marL="0">
-              <a:buNone/>
-            </a:pPr>
-            <a:r>
-              <a:rPr lang="en-US" sz="1900" b="1" dirty="0">
-                <a:solidFill>
-                  <a:srgbClr val="FFFFFF"/>
-                </a:solidFill>
-                <a:latin typeface="맑은 고딕" pitchFamily="34" charset="0"/>
-                <a:ea typeface="맑은 고딕" pitchFamily="34" charset="-122"/>
-                <a:cs typeface="맑은 고딕" pitchFamily="34" charset="-120"/>
-              </a:rPr>
-              <a:t>1,667억 원</a:t>
-            </a:r>
-            <a:endParaRPr lang="en-US" sz="1400" dirty="0"/>
-          </a:p>
-        </p:txBody>
-      </p:sp>
-      <p:sp>
-        <p:nvSpPr>
-          <p:cNvPr id="11" name="Text 9"/>
-          <p:cNvSpPr txBox="1"/>
-          <p:nvPr/>
-        </p:nvSpPr>
-        <p:spPr>
-          <a:xfrm>
-            <a:off x="7543800" y="4896612"/>
-            <a:ext cx="2560320" cy="777240"/>
-          </a:xfrm>
-          <a:prstGeom prst="rect">
-            <a:avLst/>
-          </a:prstGeom>
-          <a:noFill/>
-          <a:ln/>
-        </p:spPr>
-        <p:txBody>
-          <a:bodyPr wrap="square" lIns="0" tIns="0" rIns="0" bIns="0" rtlCol="0" anchor="ctr"/>
-          <a:lstStyle/>
-          <a:p>
-            <a:pPr algn="ctr" indent="0" marL="0">
-              <a:buNone/>
-            </a:pPr>
-            <a:r>
-              <a:rPr lang="en-US" sz="1600" b="1" dirty="0">
-                <a:solidFill>
-                  <a:srgbClr val="B5501F"/>
-                </a:solidFill>
-                <a:latin typeface="맑은 고딕" pitchFamily="34" charset="0"/>
-                <a:ea typeface="맑은 고딕" pitchFamily="34" charset="-122"/>
-                <a:cs typeface="맑은 고딕" pitchFamily="34" charset="-120"/>
-              </a:rPr>
-              <a:t>SOM</a:t>
-            </a:r>
-            <a:endParaRPr lang="en-US" sz="1400" dirty="0"/>
-          </a:p>
-          <a:p>
-            <a:pPr algn="ctr" indent="0" marL="0">
-              <a:buNone/>
-            </a:pPr>
-            <a:r>
-              <a:rPr lang="en-US" sz="1600" b="1" dirty="0">
-                <a:solidFill>
-                  <a:srgbClr val="B5501F"/>
-                </a:solidFill>
-                <a:latin typeface="맑은 고딕" pitchFamily="34" charset="0"/>
-                <a:ea typeface="맑은 고딕" pitchFamily="34" charset="-122"/>
-                <a:cs typeface="맑은 고딕" pitchFamily="34" charset="-120"/>
-              </a:rPr>
-              <a:t>17억 원</a:t>
-            </a:r>
-            <a:endParaRPr lang="en-US" sz="1400" dirty="0"/>
-          </a:p>
-        </p:txBody>
-      </p:sp>
-      <p:sp>
-        <p:nvSpPr>
-          <p:cNvPr id="12" name="Shape 10"/>
+          <p:cNvPr id="12" name="Shape 9"/>
           <p:cNvSpPr/>
           <p:nvPr/>
         </p:nvSpPr>
         <p:spPr>
           <a:xfrm>
-            <a:off x="548640" y="1618488"/>
-            <a:ext cx="329184" cy="329184"/>
+            <a:off x="5821528" y="1627632"/>
+            <a:ext cx="548640" cy="548640"/>
           </a:xfrm>
           <a:prstGeom prst="ellipse">
             <a:avLst/>
           </a:prstGeom>
           <a:solidFill>
-            <a:srgbClr val="B5501F"/>
+            <a:srgbClr val="2B2D31"/>
           </a:solidFill>
-          <a:ln w="19050">
+          <a:ln w="12700">
             <a:solidFill>
-              <a:srgbClr val="FFFFFF"/>
+              <a:srgbClr val="2B2D31"/>
             </a:solidFill>
             <a:prstDash val="solid"/>
           </a:ln>
         </p:spPr>
       </p:sp>
-      <p:sp>
-        <p:nvSpPr>
-          <p:cNvPr id="13" name="Text 11"/>
-          <p:cNvSpPr txBox="1"/>
-          <p:nvPr/>
-        </p:nvSpPr>
-        <p:spPr>
-          <a:xfrm>
-            <a:off x="1005840" y="1563624"/>
-            <a:ext cx="4937760" cy="411480"/>
+      <p:pic>
+        <p:nvPicPr>
+          <p:cNvPr id="13" name="Image 1" descr="preencoded.png"/>
+          <p:cNvPicPr>
+            <a:picLocks noChangeAspect="1"/>
+          </p:cNvPicPr>
+          <p:nvPr/>
+        </p:nvPicPr>
+        <p:blipFill>
+          <a:blip r:embed="rId4"/>
+          <a:stretch>
+            <a:fillRect/>
+          </a:stretch>
+        </p:blipFill>
+        <p:spPr>
+          <a:xfrm>
+            <a:off x="5964174" y="1770278"/>
+            <a:ext cx="263347" cy="263347"/>
+          </a:xfrm>
+          <a:prstGeom prst="rect">
+            <a:avLst/>
+          </a:prstGeom>
+        </p:spPr>
+      </p:pic>
+      <p:sp>
+        <p:nvSpPr>
+          <p:cNvPr id="14" name="Text 10"/>
+          <p:cNvSpPr txBox="1"/>
+          <p:nvPr/>
+        </p:nvSpPr>
+        <p:spPr>
+          <a:xfrm>
+            <a:off x="4907128" y="2212848"/>
+            <a:ext cx="2377440" cy="365760"/>
           </a:xfrm>
           <a:prstGeom prst="rect">
             <a:avLst/>
@@ -13841,11 +12452,11 @@
           <a:bodyPr wrap="square" lIns="0" tIns="0" rIns="0" bIns="0" rtlCol="0" anchor="ctr"/>
           <a:lstStyle/>
           <a:p>
-            <a:pPr indent="0" marL="0">
-              <a:buNone/>
-            </a:pPr>
-            <a:r>
-              <a:rPr lang="en-US" sz="2000" b="1" dirty="0">
+            <a:pPr marL="0" indent="0" algn="ctr">
+              <a:buNone/>
+            </a:pPr>
+            <a:r>
+              <a:rPr lang="en-US" sz="1800" b="1" dirty="0">
                 <a:solidFill>
                   <a:srgbClr val="2B2D31"/>
                 </a:solidFill>
@@ -13853,187 +12464,137 @@
                 <a:ea typeface="맑은 고딕" pitchFamily="34" charset="-122"/>
                 <a:cs typeface="맑은 고딕" pitchFamily="34" charset="-120"/>
               </a:rPr>
-              <a:t>TAM  5,192억 원</a:t>
-            </a:r>
-            <a:endParaRPr lang="en-US" sz="2000" dirty="0"/>
-          </a:p>
-        </p:txBody>
-      </p:sp>
-      <p:sp>
-        <p:nvSpPr>
-          <p:cNvPr id="14" name="Shape 12"/>
+              <a:t>MLC</a:t>
+            </a:r>
+            <a:endParaRPr lang="en-US" sz="1800" dirty="0"/>
+          </a:p>
+        </p:txBody>
+      </p:sp>
+      <p:sp>
+        <p:nvSpPr>
+          <p:cNvPr id="15" name="Text 11"/>
+          <p:cNvSpPr txBox="1"/>
+          <p:nvPr/>
+        </p:nvSpPr>
+        <p:spPr>
+          <a:xfrm>
+            <a:off x="4998568" y="2578608"/>
+            <a:ext cx="2194560" cy="274320"/>
+          </a:xfrm>
+          <a:prstGeom prst="rect">
+            <a:avLst/>
+          </a:prstGeom>
+          <a:noFill/>
+          <a:ln/>
+        </p:spPr>
+        <p:txBody>
+          <a:bodyPr wrap="square" lIns="0" tIns="0" rIns="0" bIns="0" rtlCol="0" anchor="t"/>
+          <a:lstStyle/>
+          <a:p>
+            <a:pPr marL="0" indent="0" algn="ctr">
+              <a:buNone/>
+            </a:pPr>
+            <a:r>
+              <a:rPr lang="en-US" sz="1150" dirty="0">
+                <a:solidFill>
+                  <a:srgbClr val="6B6F76"/>
+                </a:solidFill>
+                <a:latin typeface="맑은 고딕" pitchFamily="34" charset="0"/>
+                <a:ea typeface="맑은 고딕" pitchFamily="34" charset="-122"/>
+                <a:cs typeface="맑은 고딕" pitchFamily="34" charset="-120"/>
+              </a:rPr>
+              <a:t>녹 색 기반 위험도 분석</a:t>
+            </a:r>
+            <a:endParaRPr lang="en-US" sz="1150" dirty="0"/>
+          </a:p>
+        </p:txBody>
+      </p:sp>
+      <p:sp>
+        <p:nvSpPr>
+          <p:cNvPr id="16" name="Shape 12"/>
           <p:cNvSpPr/>
           <p:nvPr/>
         </p:nvSpPr>
         <p:spPr>
           <a:xfrm>
-            <a:off x="3749040" y="1783080"/>
-            <a:ext cx="3703320" cy="384048"/>
-          </a:xfrm>
-          <a:prstGeom prst="line">
-            <a:avLst/>
-          </a:prstGeom>
-          <a:noFill/>
+            <a:off x="9265615" y="1463040"/>
+            <a:ext cx="2377440" cy="1600200"/>
+          </a:xfrm>
+          <a:prstGeom prst="roundRect">
+            <a:avLst>
+              <a:gd name="adj" fmla="val 5714"/>
+            </a:avLst>
+          </a:prstGeom>
+          <a:solidFill>
+            <a:srgbClr val="FFFFFF"/>
+          </a:solidFill>
           <a:ln w="15875">
             <a:solidFill>
               <a:srgbClr val="B5501F"/>
             </a:solidFill>
-            <a:prstDash val="dash"/>
+            <a:prstDash val="solid"/>
           </a:ln>
         </p:spPr>
       </p:sp>
       <p:sp>
         <p:nvSpPr>
-          <p:cNvPr id="15" name="Text 13"/>
-          <p:cNvSpPr txBox="1"/>
-          <p:nvPr/>
-        </p:nvSpPr>
-        <p:spPr>
-          <a:xfrm>
-            <a:off x="1005840" y="2011680"/>
-            <a:ext cx="4480560" cy="274320"/>
-          </a:xfrm>
-          <a:prstGeom prst="rect">
-            <a:avLst/>
-          </a:prstGeom>
-          <a:noFill/>
-          <a:ln/>
-        </p:spPr>
-        <p:txBody>
-          <a:bodyPr wrap="square" lIns="0" tIns="0" rIns="0" bIns="0" rtlCol="0" anchor="t"/>
-          <a:lstStyle/>
-          <a:p>
-            <a:pPr indent="0" marL="0">
-              <a:buNone/>
-            </a:pPr>
-            <a:r>
-              <a:rPr lang="en-US" sz="1300" dirty="0">
-                <a:solidFill>
-                  <a:srgbClr val="2B2D31"/>
-                </a:solidFill>
-                <a:latin typeface="맑은 고딕" pitchFamily="34" charset="0"/>
-                <a:ea typeface="맑은 고딕" pitchFamily="34" charset="-122"/>
-                <a:cs typeface="맑은 고딕" pitchFamily="34" charset="-120"/>
-              </a:rPr>
-              <a:t>시설물 안전점검 · 진단 시장</a:t>
-            </a:r>
-            <a:endParaRPr lang="en-US" sz="1300" dirty="0"/>
-          </a:p>
-        </p:txBody>
-      </p:sp>
-      <p:sp>
-        <p:nvSpPr>
-          <p:cNvPr id="16" name="Text 14"/>
-          <p:cNvSpPr txBox="1"/>
-          <p:nvPr/>
-        </p:nvSpPr>
-        <p:spPr>
-          <a:xfrm>
-            <a:off x="1005840" y="2295144"/>
-            <a:ext cx="4480560" cy="256032"/>
-          </a:xfrm>
-          <a:prstGeom prst="rect">
-            <a:avLst/>
-          </a:prstGeom>
-          <a:noFill/>
-          <a:ln/>
-        </p:spPr>
-        <p:txBody>
-          <a:bodyPr wrap="square" lIns="0" tIns="0" rIns="0" bIns="0" rtlCol="0" anchor="t"/>
-          <a:lstStyle/>
-          <a:p>
-            <a:pPr indent="0" marL="0">
-              <a:buNone/>
-            </a:pPr>
-            <a:r>
-              <a:rPr lang="en-US" sz="1200" b="1" dirty="0">
-                <a:solidFill>
-                  <a:srgbClr val="B5501F"/>
-                </a:solidFill>
-                <a:latin typeface="맑은 고딕" pitchFamily="34" charset="0"/>
-                <a:ea typeface="맑은 고딕" pitchFamily="34" charset="-122"/>
-                <a:cs typeface="맑은 고딕" pitchFamily="34" charset="-120"/>
-              </a:rPr>
-              <a:t>연 15% 성장 ('17 → '21)</a:t>
-            </a:r>
-            <a:endParaRPr lang="en-US" sz="1200" dirty="0"/>
-          </a:p>
-        </p:txBody>
-      </p:sp>
-      <p:sp>
-        <p:nvSpPr>
-          <p:cNvPr id="17" name="Text 15"/>
-          <p:cNvSpPr txBox="1"/>
-          <p:nvPr/>
-        </p:nvSpPr>
-        <p:spPr>
-          <a:xfrm>
-            <a:off x="1005840" y="2560320"/>
-            <a:ext cx="4480560" cy="256032"/>
-          </a:xfrm>
-          <a:prstGeom prst="rect">
-            <a:avLst/>
-          </a:prstGeom>
-          <a:noFill/>
-          <a:ln/>
-        </p:spPr>
-        <p:txBody>
-          <a:bodyPr wrap="square" lIns="0" tIns="0" rIns="0" bIns="0" rtlCol="0" anchor="t"/>
-          <a:lstStyle/>
-          <a:p>
-            <a:pPr indent="0" marL="0">
-              <a:buNone/>
-            </a:pPr>
-            <a:r>
-              <a:rPr lang="en-US" sz="950" i="1" dirty="0">
-                <a:solidFill>
-                  <a:srgbClr val="A3A7AD"/>
-                </a:solidFill>
-                <a:latin typeface="맑은 고딕" pitchFamily="34" charset="0"/>
-                <a:ea typeface="맑은 고딕" pitchFamily="34" charset="-122"/>
-                <a:cs typeface="맑은 고딕" pitchFamily="34" charset="-120"/>
-              </a:rPr>
-              <a:t>국토교통부 제5차 시설물 안전 및 유지관리 기본계획 (2021년 기준)</a:t>
-            </a:r>
-            <a:endParaRPr lang="en-US" sz="950" dirty="0"/>
-          </a:p>
-        </p:txBody>
-      </p:sp>
-      <p:sp>
-        <p:nvSpPr>
-          <p:cNvPr id="18" name="Shape 16"/>
+          <p:cNvPr id="17" name="Shape 13"/>
           <p:cNvSpPr/>
           <p:nvPr/>
         </p:nvSpPr>
         <p:spPr>
           <a:xfrm>
-            <a:off x="548640" y="3035808"/>
-            <a:ext cx="329184" cy="329184"/>
+            <a:off x="10180015" y="1627632"/>
+            <a:ext cx="548640" cy="548640"/>
           </a:xfrm>
           <a:prstGeom prst="ellipse">
             <a:avLst/>
           </a:prstGeom>
           <a:solidFill>
-            <a:srgbClr val="E8A87C"/>
+            <a:srgbClr val="B5501F"/>
           </a:solidFill>
-          <a:ln w="19050">
+          <a:ln w="12700">
             <a:solidFill>
-              <a:srgbClr val="FFFFFF"/>
+              <a:srgbClr val="B5501F"/>
             </a:solidFill>
             <a:prstDash val="solid"/>
           </a:ln>
         </p:spPr>
       </p:sp>
-      <p:sp>
-        <p:nvSpPr>
-          <p:cNvPr id="19" name="Text 17"/>
-          <p:cNvSpPr txBox="1"/>
-          <p:nvPr/>
-        </p:nvSpPr>
-        <p:spPr>
-          <a:xfrm>
-            <a:off x="1005840" y="2980944"/>
-            <a:ext cx="4937760" cy="411480"/>
+      <p:pic>
+        <p:nvPicPr>
+          <p:cNvPr id="18" name="Image 2" descr="preencoded.png"/>
+          <p:cNvPicPr>
+            <a:picLocks noChangeAspect="1"/>
+          </p:cNvPicPr>
+          <p:nvPr/>
+        </p:nvPicPr>
+        <p:blipFill>
+          <a:blip r:embed="rId5"/>
+          <a:stretch>
+            <a:fillRect/>
+          </a:stretch>
+        </p:blipFill>
+        <p:spPr>
+          <a:xfrm>
+            <a:off x="10322662" y="1770278"/>
+            <a:ext cx="263347" cy="263347"/>
+          </a:xfrm>
+          <a:prstGeom prst="rect">
+            <a:avLst/>
+          </a:prstGeom>
+        </p:spPr>
+      </p:pic>
+      <p:sp>
+        <p:nvSpPr>
+          <p:cNvPr id="19" name="Text 14"/>
+          <p:cNvSpPr txBox="1"/>
+          <p:nvPr/>
+        </p:nvSpPr>
+        <p:spPr>
+          <a:xfrm>
+            <a:off x="9265615" y="2366011"/>
+            <a:ext cx="2377440" cy="365760"/>
           </a:xfrm>
           <a:prstGeom prst="rect">
             <a:avLst/>
@@ -14045,42 +12606,435 @@
           <a:bodyPr wrap="square" lIns="0" tIns="0" rIns="0" bIns="0" rtlCol="0" anchor="ctr"/>
           <a:lstStyle/>
           <a:p>
-            <a:pPr indent="0" marL="0">
-              <a:buNone/>
-            </a:pPr>
-            <a:r>
-              <a:rPr lang="en-US" sz="2000" b="1" dirty="0">
-                <a:solidFill>
-                  <a:srgbClr val="2B2D31"/>
-                </a:solidFill>
-                <a:latin typeface="맑은 고딕" pitchFamily="34" charset="0"/>
-                <a:ea typeface="맑은 고딕" pitchFamily="34" charset="-122"/>
-                <a:cs typeface="맑은 고딕" pitchFamily="34" charset="-120"/>
-              </a:rPr>
-              <a:t>SAM  1,667억 원</a:t>
-            </a:r>
-            <a:endParaRPr lang="en-US" sz="2000" dirty="0"/>
-          </a:p>
-        </p:txBody>
-      </p:sp>
-      <p:sp>
-        <p:nvSpPr>
-          <p:cNvPr id="20" name="Shape 18"/>
+            <a:pPr algn="ctr"/>
+            <a:r>
+              <a:rPr lang="en-US" altLang="ko-KR" sz="1800" b="1" dirty="0" err="1">
+                <a:solidFill>
+                  <a:srgbClr val="B5501F"/>
+                </a:solidFill>
+                <a:latin typeface="맑은 고딕" pitchFamily="34" charset="0"/>
+                <a:ea typeface="맑은 고딕" pitchFamily="34" charset="-122"/>
+                <a:cs typeface="맑은 고딕" pitchFamily="34" charset="-120"/>
+              </a:rPr>
+              <a:t>해양</a:t>
+            </a:r>
+            <a:r>
+              <a:rPr lang="en-US" altLang="ko-KR" sz="1800" b="1" dirty="0">
+                <a:solidFill>
+                  <a:srgbClr val="B5501F"/>
+                </a:solidFill>
+                <a:latin typeface="맑은 고딕" pitchFamily="34" charset="0"/>
+                <a:ea typeface="맑은 고딕" pitchFamily="34" charset="-122"/>
+                <a:cs typeface="맑은 고딕" pitchFamily="34" charset="-120"/>
+              </a:rPr>
+              <a:t> </a:t>
+            </a:r>
+            <a:r>
+              <a:rPr lang="en-US" altLang="ko-KR" sz="1800" b="1" dirty="0" err="1">
+                <a:solidFill>
+                  <a:srgbClr val="B5501F"/>
+                </a:solidFill>
+                <a:latin typeface="맑은 고딕" pitchFamily="34" charset="0"/>
+                <a:ea typeface="맑은 고딕" pitchFamily="34" charset="-122"/>
+                <a:cs typeface="맑은 고딕" pitchFamily="34" charset="-120"/>
+              </a:rPr>
+              <a:t>석유</a:t>
+            </a:r>
+            <a:endParaRPr lang="en-US" altLang="ko-KR" b="1" dirty="0">
+              <a:solidFill>
+                <a:srgbClr val="B5501F"/>
+              </a:solidFill>
+              <a:latin typeface="맑은 고딕" pitchFamily="34" charset="0"/>
+              <a:ea typeface="맑은 고딕" pitchFamily="34" charset="-122"/>
+              <a:cs typeface="맑은 고딕" pitchFamily="34" charset="-120"/>
+            </a:endParaRPr>
+          </a:p>
+          <a:p>
+            <a:pPr algn="ctr"/>
+            <a:r>
+              <a:rPr lang="en-US" altLang="ko-KR" sz="1800" b="1" dirty="0">
+                <a:solidFill>
+                  <a:srgbClr val="B5501F"/>
+                </a:solidFill>
+                <a:latin typeface="맑은 고딕" pitchFamily="34" charset="0"/>
+                <a:ea typeface="맑은 고딕" pitchFamily="34" charset="-122"/>
+                <a:cs typeface="맑은 고딕" pitchFamily="34" charset="-120"/>
+              </a:rPr>
+              <a:t> </a:t>
+            </a:r>
+            <a:r>
+              <a:rPr lang="en-US" altLang="ko-KR" sz="1800" b="1" dirty="0" err="1">
+                <a:solidFill>
+                  <a:srgbClr val="B5501F"/>
+                </a:solidFill>
+                <a:latin typeface="맑은 고딕" pitchFamily="34" charset="0"/>
+                <a:ea typeface="맑은 고딕" pitchFamily="34" charset="-122"/>
+                <a:cs typeface="맑은 고딕" pitchFamily="34" charset="-120"/>
+              </a:rPr>
+              <a:t>가스</a:t>
+            </a:r>
+            <a:r>
+              <a:rPr lang="en-US" altLang="ko-KR" sz="1800" b="1" dirty="0">
+                <a:solidFill>
+                  <a:srgbClr val="B5501F"/>
+                </a:solidFill>
+                <a:latin typeface="맑은 고딕" pitchFamily="34" charset="0"/>
+                <a:ea typeface="맑은 고딕" pitchFamily="34" charset="-122"/>
+                <a:cs typeface="맑은 고딕" pitchFamily="34" charset="-120"/>
+              </a:rPr>
+              <a:t> </a:t>
+            </a:r>
+            <a:r>
+              <a:rPr lang="en-US" altLang="ko-KR" sz="1800" b="1" dirty="0" err="1">
+                <a:solidFill>
+                  <a:srgbClr val="B5501F"/>
+                </a:solidFill>
+                <a:latin typeface="맑은 고딕" pitchFamily="34" charset="0"/>
+                <a:ea typeface="맑은 고딕" pitchFamily="34" charset="-122"/>
+                <a:cs typeface="맑은 고딕" pitchFamily="34" charset="-120"/>
+              </a:rPr>
+              <a:t>운영사</a:t>
+            </a:r>
+            <a:endParaRPr lang="en-US" altLang="ko-KR" sz="1800" b="1" dirty="0">
+              <a:solidFill>
+                <a:srgbClr val="B5501F"/>
+              </a:solidFill>
+            </a:endParaRPr>
+          </a:p>
+        </p:txBody>
+      </p:sp>
+      <p:sp>
+        <p:nvSpPr>
+          <p:cNvPr id="21" name="Text 16"/>
+          <p:cNvSpPr txBox="1"/>
+          <p:nvPr/>
+        </p:nvSpPr>
+        <p:spPr>
+          <a:xfrm>
+            <a:off x="3063240" y="1696212"/>
+            <a:ext cx="1706728" cy="274320"/>
+          </a:xfrm>
+          <a:prstGeom prst="rect">
+            <a:avLst/>
+          </a:prstGeom>
+          <a:noFill/>
+          <a:ln/>
+        </p:spPr>
+        <p:txBody>
+          <a:bodyPr wrap="square" lIns="0" tIns="0" rIns="0" bIns="0" rtlCol="0" anchor="t"/>
+          <a:lstStyle/>
+          <a:p>
+            <a:pPr marL="0" indent="0" algn="ctr">
+              <a:buNone/>
+            </a:pPr>
+            <a:r>
+              <a:rPr lang="en-US" sz="1300" b="1" dirty="0">
+                <a:solidFill>
+                  <a:srgbClr val="B5501F"/>
+                </a:solidFill>
+                <a:latin typeface="맑은 고딕" pitchFamily="34" charset="0"/>
+                <a:ea typeface="맑은 고딕" pitchFamily="34" charset="-122"/>
+                <a:cs typeface="맑은 고딕" pitchFamily="34" charset="-120"/>
+              </a:rPr>
+              <a:t>촬영 데이터 · 소개</a:t>
+            </a:r>
+            <a:endParaRPr lang="en-US" sz="1300" dirty="0"/>
+          </a:p>
+        </p:txBody>
+      </p:sp>
+      <p:sp>
+        <p:nvSpPr>
+          <p:cNvPr id="22" name="Shape 17"/>
           <p:cNvSpPr/>
           <p:nvPr/>
         </p:nvSpPr>
         <p:spPr>
           <a:xfrm>
-            <a:off x="3749040" y="3200400"/>
-            <a:ext cx="3703320" cy="429768"/>
+            <a:off x="3063240" y="2034540"/>
+            <a:ext cx="1706728" cy="0"/>
           </a:xfrm>
           <a:prstGeom prst="line">
             <a:avLst/>
           </a:prstGeom>
           <a:noFill/>
-          <a:ln w="15875">
+          <a:ln w="28575">
             <a:solidFill>
-              <a:srgbClr val="E8A87C"/>
+              <a:srgbClr val="B5501F"/>
+            </a:solidFill>
+            <a:prstDash val="solid"/>
+            <a:tailEnd type="triangle"/>
+          </a:ln>
+        </p:spPr>
+      </p:sp>
+      <p:sp>
+        <p:nvSpPr>
+          <p:cNvPr id="23" name="Shape 18"/>
+          <p:cNvSpPr/>
+          <p:nvPr/>
+        </p:nvSpPr>
+        <p:spPr>
+          <a:xfrm>
+            <a:off x="3063240" y="2491740"/>
+            <a:ext cx="1706728" cy="0"/>
+          </a:xfrm>
+          <a:prstGeom prst="line">
+            <a:avLst/>
+          </a:prstGeom>
+          <a:noFill/>
+          <a:ln w="28575">
+            <a:solidFill>
+              <a:srgbClr val="1F5F7A"/>
+            </a:solidFill>
+            <a:prstDash val="dash"/>
+            <a:headEnd type="triangle"/>
+          </a:ln>
+        </p:spPr>
+      </p:sp>
+      <p:sp>
+        <p:nvSpPr>
+          <p:cNvPr id="24" name="Text 19"/>
+          <p:cNvSpPr txBox="1"/>
+          <p:nvPr/>
+        </p:nvSpPr>
+        <p:spPr>
+          <a:xfrm>
+            <a:off x="3063240" y="2564892"/>
+            <a:ext cx="1706728" cy="274320"/>
+          </a:xfrm>
+          <a:prstGeom prst="rect">
+            <a:avLst/>
+          </a:prstGeom>
+          <a:noFill/>
+          <a:ln/>
+        </p:spPr>
+        <p:txBody>
+          <a:bodyPr wrap="square" lIns="0" tIns="0" rIns="0" bIns="0" rtlCol="0" anchor="t"/>
+          <a:lstStyle/>
+          <a:p>
+            <a:pPr marL="0" indent="0" algn="ctr">
+              <a:buNone/>
+            </a:pPr>
+            <a:r>
+              <a:rPr lang="en-US" sz="1300" b="1" dirty="0">
+                <a:solidFill>
+                  <a:srgbClr val="1F5F7A"/>
+                </a:solidFill>
+                <a:latin typeface="맑은 고딕" pitchFamily="34" charset="0"/>
+                <a:ea typeface="맑은 고딕" pitchFamily="34" charset="-122"/>
+                <a:cs typeface="맑은 고딕" pitchFamily="34" charset="-120"/>
+              </a:rPr>
+              <a:t>촬영비 · 소개 수수료</a:t>
+            </a:r>
+            <a:endParaRPr lang="en-US" sz="1300" dirty="0"/>
+          </a:p>
+        </p:txBody>
+      </p:sp>
+      <p:sp>
+        <p:nvSpPr>
+          <p:cNvPr id="25" name="Text 20"/>
+          <p:cNvSpPr txBox="1"/>
+          <p:nvPr/>
+        </p:nvSpPr>
+        <p:spPr>
+          <a:xfrm>
+            <a:off x="7421728" y="1696212"/>
+            <a:ext cx="1706728" cy="274320"/>
+          </a:xfrm>
+          <a:prstGeom prst="rect">
+            <a:avLst/>
+          </a:prstGeom>
+          <a:noFill/>
+          <a:ln/>
+        </p:spPr>
+        <p:txBody>
+          <a:bodyPr wrap="square" lIns="0" tIns="0" rIns="0" bIns="0" rtlCol="0" anchor="t"/>
+          <a:lstStyle/>
+          <a:p>
+            <a:pPr marL="0" indent="0" algn="ctr">
+              <a:buNone/>
+            </a:pPr>
+            <a:r>
+              <a:rPr lang="en-US" sz="1300" b="1" dirty="0">
+                <a:solidFill>
+                  <a:srgbClr val="B5501F"/>
+                </a:solidFill>
+                <a:latin typeface="맑은 고딕" pitchFamily="34" charset="0"/>
+                <a:ea typeface="맑은 고딕" pitchFamily="34" charset="-122"/>
+                <a:cs typeface="맑은 고딕" pitchFamily="34" charset="-120"/>
+              </a:rPr>
+              <a:t>점검 우선순위 리포트</a:t>
+            </a:r>
+            <a:endParaRPr lang="en-US" sz="1300" dirty="0"/>
+          </a:p>
+        </p:txBody>
+      </p:sp>
+      <p:sp>
+        <p:nvSpPr>
+          <p:cNvPr id="26" name="Shape 21"/>
+          <p:cNvSpPr/>
+          <p:nvPr/>
+        </p:nvSpPr>
+        <p:spPr>
+          <a:xfrm>
+            <a:off x="7421728" y="2034540"/>
+            <a:ext cx="1706728" cy="0"/>
+          </a:xfrm>
+          <a:prstGeom prst="line">
+            <a:avLst/>
+          </a:prstGeom>
+          <a:noFill/>
+          <a:ln w="28575">
+            <a:solidFill>
+              <a:srgbClr val="B5501F"/>
+            </a:solidFill>
+            <a:prstDash val="solid"/>
+            <a:tailEnd type="triangle"/>
+          </a:ln>
+        </p:spPr>
+      </p:sp>
+      <p:sp>
+        <p:nvSpPr>
+          <p:cNvPr id="27" name="Shape 22"/>
+          <p:cNvSpPr/>
+          <p:nvPr/>
+        </p:nvSpPr>
+        <p:spPr>
+          <a:xfrm>
+            <a:off x="7421728" y="2491740"/>
+            <a:ext cx="1706728" cy="0"/>
+          </a:xfrm>
+          <a:prstGeom prst="line">
+            <a:avLst/>
+          </a:prstGeom>
+          <a:noFill/>
+          <a:ln w="28575">
+            <a:solidFill>
+              <a:srgbClr val="1F5F7A"/>
+            </a:solidFill>
+            <a:prstDash val="dash"/>
+            <a:headEnd type="triangle"/>
+          </a:ln>
+        </p:spPr>
+      </p:sp>
+      <p:sp>
+        <p:nvSpPr>
+          <p:cNvPr id="28" name="Text 23"/>
+          <p:cNvSpPr txBox="1"/>
+          <p:nvPr/>
+        </p:nvSpPr>
+        <p:spPr>
+          <a:xfrm>
+            <a:off x="7421728" y="2564892"/>
+            <a:ext cx="1706728" cy="274320"/>
+          </a:xfrm>
+          <a:prstGeom prst="rect">
+            <a:avLst/>
+          </a:prstGeom>
+          <a:noFill/>
+          <a:ln/>
+        </p:spPr>
+        <p:txBody>
+          <a:bodyPr wrap="square" lIns="0" tIns="0" rIns="0" bIns="0" rtlCol="0" anchor="t"/>
+          <a:lstStyle/>
+          <a:p>
+            <a:pPr marL="0" indent="0" algn="ctr">
+              <a:buNone/>
+            </a:pPr>
+            <a:r>
+              <a:rPr lang="en-US" sz="1300" b="1" dirty="0">
+                <a:solidFill>
+                  <a:srgbClr val="1F5F7A"/>
+                </a:solidFill>
+                <a:latin typeface="맑은 고딕" pitchFamily="34" charset="0"/>
+                <a:ea typeface="맑은 고딕" pitchFamily="34" charset="-122"/>
+                <a:cs typeface="맑은 고딕" pitchFamily="34" charset="-120"/>
+              </a:rPr>
+              <a:t>점검 건당 · 구독 요금</a:t>
+            </a:r>
+            <a:endParaRPr lang="en-US" sz="1300" dirty="0"/>
+          </a:p>
+        </p:txBody>
+      </p:sp>
+      <p:sp>
+        <p:nvSpPr>
+          <p:cNvPr id="29" name="Shape 24"/>
+          <p:cNvSpPr/>
+          <p:nvPr/>
+        </p:nvSpPr>
+        <p:spPr>
+          <a:xfrm>
+            <a:off x="8625535" y="960120"/>
+            <a:ext cx="411480" cy="0"/>
+          </a:xfrm>
+          <a:prstGeom prst="line">
+            <a:avLst/>
+          </a:prstGeom>
+          <a:noFill/>
+          <a:ln w="28575">
+            <a:solidFill>
+              <a:srgbClr val="B5501F"/>
+            </a:solidFill>
+            <a:prstDash val="solid"/>
+          </a:ln>
+        </p:spPr>
+      </p:sp>
+      <p:sp>
+        <p:nvSpPr>
+          <p:cNvPr id="30" name="Text 25"/>
+          <p:cNvSpPr txBox="1"/>
+          <p:nvPr/>
+        </p:nvSpPr>
+        <p:spPr>
+          <a:xfrm>
+            <a:off x="9128455" y="841248"/>
+            <a:ext cx="914400" cy="237744"/>
+          </a:xfrm>
+          <a:prstGeom prst="rect">
+            <a:avLst/>
+          </a:prstGeom>
+          <a:noFill/>
+          <a:ln/>
+        </p:spPr>
+        <p:txBody>
+          <a:bodyPr wrap="square" lIns="0" tIns="0" rIns="0" bIns="0" rtlCol="0" anchor="t"/>
+          <a:lstStyle/>
+          <a:p>
+            <a:pPr marL="0" indent="0">
+              <a:buNone/>
+            </a:pPr>
+            <a:r>
+              <a:rPr lang="en-US" sz="1100" b="1" dirty="0">
+                <a:solidFill>
+                  <a:srgbClr val="B5501F"/>
+                </a:solidFill>
+                <a:latin typeface="맑은 고딕" pitchFamily="34" charset="0"/>
+                <a:ea typeface="맑은 고딕" pitchFamily="34" charset="-122"/>
+                <a:cs typeface="맑은 고딕" pitchFamily="34" charset="-120"/>
+              </a:rPr>
+              <a:t>가치 흐름</a:t>
+            </a:r>
+            <a:endParaRPr lang="en-US" sz="1100" dirty="0"/>
+          </a:p>
+        </p:txBody>
+      </p:sp>
+      <p:sp>
+        <p:nvSpPr>
+          <p:cNvPr id="31" name="Shape 26"/>
+          <p:cNvSpPr/>
+          <p:nvPr/>
+        </p:nvSpPr>
+        <p:spPr>
+          <a:xfrm>
+            <a:off x="10102516" y="960120"/>
+            <a:ext cx="534699" cy="0"/>
+          </a:xfrm>
+          <a:prstGeom prst="line">
+            <a:avLst/>
+          </a:prstGeom>
+          <a:noFill/>
+          <a:ln w="28575">
+            <a:solidFill>
+              <a:srgbClr val="1F5F7A"/>
             </a:solidFill>
             <a:prstDash val="dash"/>
           </a:ln>
@@ -14088,14 +13042,14 @@
       </p:sp>
       <p:sp>
         <p:nvSpPr>
-          <p:cNvPr id="21" name="Text 19"/>
-          <p:cNvSpPr txBox="1"/>
-          <p:nvPr/>
-        </p:nvSpPr>
-        <p:spPr>
-          <a:xfrm>
-            <a:off x="1005840" y="3429000"/>
-            <a:ext cx="4480560" cy="274320"/>
+          <p:cNvPr id="32" name="Text 27"/>
+          <p:cNvSpPr txBox="1"/>
+          <p:nvPr/>
+        </p:nvSpPr>
+        <p:spPr>
+          <a:xfrm>
+            <a:off x="10728655" y="841248"/>
+            <a:ext cx="914400" cy="237744"/>
           </a:xfrm>
           <a:prstGeom prst="rect">
             <a:avLst/>
@@ -14107,11 +13061,165 @@
           <a:bodyPr wrap="square" lIns="0" tIns="0" rIns="0" bIns="0" rtlCol="0" anchor="t"/>
           <a:lstStyle/>
           <a:p>
-            <a:pPr indent="0" marL="0">
-              <a:buNone/>
-            </a:pPr>
-            <a:r>
-              <a:rPr lang="en-US" sz="1300" dirty="0">
+            <a:pPr marL="0" indent="0">
+              <a:buNone/>
+            </a:pPr>
+            <a:r>
+              <a:rPr lang="en-US" sz="1100" b="1" dirty="0">
+                <a:solidFill>
+                  <a:srgbClr val="1F5F7A"/>
+                </a:solidFill>
+                <a:latin typeface="맑은 고딕" pitchFamily="34" charset="0"/>
+                <a:ea typeface="맑은 고딕" pitchFamily="34" charset="-122"/>
+                <a:cs typeface="맑은 고딕" pitchFamily="34" charset="-120"/>
+              </a:rPr>
+              <a:t>돈 흐름</a:t>
+            </a:r>
+            <a:endParaRPr lang="en-US" sz="1100" dirty="0"/>
+          </a:p>
+        </p:txBody>
+      </p:sp>
+      <p:sp>
+        <p:nvSpPr>
+          <p:cNvPr id="33" name="Shape 28"/>
+          <p:cNvSpPr/>
+          <p:nvPr/>
+        </p:nvSpPr>
+        <p:spPr>
+          <a:xfrm>
+            <a:off x="548640" y="3429000"/>
+            <a:ext cx="3576218" cy="2514600"/>
+          </a:xfrm>
+          <a:prstGeom prst="roundRect">
+            <a:avLst>
+              <a:gd name="adj" fmla="val 2909"/>
+            </a:avLst>
+          </a:prstGeom>
+          <a:solidFill>
+            <a:srgbClr val="FBEDE4"/>
+          </a:solidFill>
+          <a:ln w="12700">
+            <a:solidFill>
+              <a:srgbClr val="FBEDE4"/>
+            </a:solidFill>
+            <a:prstDash val="solid"/>
+          </a:ln>
+        </p:spPr>
+      </p:sp>
+      <p:sp>
+        <p:nvSpPr>
+          <p:cNvPr id="34" name="Text 29"/>
+          <p:cNvSpPr txBox="1"/>
+          <p:nvPr/>
+        </p:nvSpPr>
+        <p:spPr>
+          <a:xfrm>
+            <a:off x="777240" y="3566160"/>
+            <a:ext cx="3210458" cy="320040"/>
+          </a:xfrm>
+          <a:prstGeom prst="rect">
+            <a:avLst/>
+          </a:prstGeom>
+          <a:noFill/>
+          <a:ln/>
+        </p:spPr>
+        <p:txBody>
+          <a:bodyPr wrap="square" lIns="0" tIns="0" rIns="0" bIns="0" rtlCol="0" anchor="t"/>
+          <a:lstStyle/>
+          <a:p>
+            <a:pPr marL="0" indent="0">
+              <a:buNone/>
+            </a:pPr>
+            <a:r>
+              <a:rPr lang="en-US" sz="1400" b="1" dirty="0">
+                <a:solidFill>
+                  <a:srgbClr val="B5501F"/>
+                </a:solidFill>
+                <a:latin typeface="맑은 고딕" pitchFamily="34" charset="0"/>
+                <a:ea typeface="맑은 고딕" pitchFamily="34" charset="-122"/>
+                <a:cs typeface="맑은 고딕" pitchFamily="34" charset="-120"/>
+              </a:rPr>
+              <a:t>매출원</a:t>
+            </a:r>
+            <a:endParaRPr lang="en-US" sz="1400" dirty="0"/>
+          </a:p>
+        </p:txBody>
+      </p:sp>
+      <p:sp>
+        <p:nvSpPr>
+          <p:cNvPr id="35" name="Shape 30"/>
+          <p:cNvSpPr/>
+          <p:nvPr/>
+        </p:nvSpPr>
+        <p:spPr>
+          <a:xfrm>
+            <a:off x="777240" y="4014216"/>
+            <a:ext cx="402336" cy="402336"/>
+          </a:xfrm>
+          <a:prstGeom prst="ellipse">
+            <a:avLst/>
+          </a:prstGeom>
+          <a:solidFill>
+            <a:srgbClr val="B5501F"/>
+          </a:solidFill>
+          <a:ln w="12700">
+            <a:solidFill>
+              <a:srgbClr val="B5501F"/>
+            </a:solidFill>
+            <a:prstDash val="solid"/>
+          </a:ln>
+        </p:spPr>
+      </p:sp>
+      <p:pic>
+        <p:nvPicPr>
+          <p:cNvPr id="36" name="Image 3" descr="preencoded.png"/>
+          <p:cNvPicPr>
+            <a:picLocks noChangeAspect="1"/>
+          </p:cNvPicPr>
+          <p:nvPr/>
+        </p:nvPicPr>
+        <p:blipFill>
+          <a:blip r:embed="rId6"/>
+          <a:stretch>
+            <a:fillRect/>
+          </a:stretch>
+        </p:blipFill>
+        <p:spPr>
+          <a:xfrm>
+            <a:off x="881847" y="4118823"/>
+            <a:ext cx="193121" cy="193121"/>
+          </a:xfrm>
+          <a:prstGeom prst="rect">
+            <a:avLst/>
+          </a:prstGeom>
+        </p:spPr>
+      </p:pic>
+      <p:sp>
+        <p:nvSpPr>
+          <p:cNvPr id="37" name="Text 31"/>
+          <p:cNvSpPr txBox="1"/>
+          <p:nvPr/>
+        </p:nvSpPr>
+        <p:spPr>
+          <a:xfrm>
+            <a:off x="1298448" y="3995928"/>
+            <a:ext cx="2661818" cy="256032"/>
+          </a:xfrm>
+          <a:prstGeom prst="rect">
+            <a:avLst/>
+          </a:prstGeom>
+          <a:noFill/>
+          <a:ln/>
+        </p:spPr>
+        <p:txBody>
+          <a:bodyPr wrap="square" lIns="0" tIns="0" rIns="0" bIns="0" rtlCol="0" anchor="t"/>
+          <a:lstStyle/>
+          <a:p>
+            <a:pPr marL="0" indent="0">
+              <a:buNone/>
+            </a:pPr>
+            <a:r>
+              <a:rPr lang="en-US" sz="1300" b="1" dirty="0">
                 <a:solidFill>
                   <a:srgbClr val="2B2D31"/>
                 </a:solidFill>
@@ -14119,7 +13227,7 @@
                 <a:ea typeface="맑은 고딕" pitchFamily="34" charset="-122"/>
                 <a:cs typeface="맑은 고딕" pitchFamily="34" charset="-120"/>
               </a:rPr>
-              <a:t>드론 측량 · 점검 · 관측 시장</a:t>
+              <a:t>점검 건당 요금</a:t>
             </a:r>
             <a:endParaRPr lang="en-US" sz="1300" dirty="0"/>
           </a:p>
@@ -14127,14 +13235,14 @@
       </p:sp>
       <p:sp>
         <p:nvSpPr>
-          <p:cNvPr id="22" name="Text 20"/>
-          <p:cNvSpPr txBox="1"/>
-          <p:nvPr/>
-        </p:nvSpPr>
-        <p:spPr>
-          <a:xfrm>
-            <a:off x="1005840" y="3712464"/>
-            <a:ext cx="4480560" cy="256032"/>
+          <p:cNvPr id="38" name="Text 32"/>
+          <p:cNvSpPr txBox="1"/>
+          <p:nvPr/>
+        </p:nvSpPr>
+        <p:spPr>
+          <a:xfrm>
+            <a:off x="1298448" y="4251960"/>
+            <a:ext cx="2661818" cy="237744"/>
           </a:xfrm>
           <a:prstGeom prst="rect">
             <a:avLst/>
@@ -14146,34 +13254,83 @@
           <a:bodyPr wrap="square" lIns="0" tIns="0" rIns="0" bIns="0" rtlCol="0" anchor="t"/>
           <a:lstStyle/>
           <a:p>
-            <a:pPr indent="0" marL="0">
-              <a:buNone/>
-            </a:pPr>
-            <a:r>
-              <a:rPr lang="en-US" sz="1200" b="1" dirty="0">
-                <a:solidFill>
-                  <a:srgbClr val="B5501F"/>
-                </a:solidFill>
-                <a:latin typeface="맑은 고딕" pitchFamily="34" charset="0"/>
-                <a:ea typeface="맑은 고딕" pitchFamily="34" charset="-122"/>
-                <a:cs typeface="맑은 고딕" pitchFamily="34" charset="-120"/>
-              </a:rPr>
-              <a:t>드론 활용 분야 중 26%</a:t>
-            </a:r>
-            <a:endParaRPr lang="en-US" sz="1200" dirty="0"/>
-          </a:p>
-        </p:txBody>
-      </p:sp>
-      <p:sp>
-        <p:nvSpPr>
-          <p:cNvPr id="23" name="Text 21"/>
-          <p:cNvSpPr txBox="1"/>
-          <p:nvPr/>
-        </p:nvSpPr>
-        <p:spPr>
-          <a:xfrm>
-            <a:off x="1005840" y="3977640"/>
-            <a:ext cx="4480560" cy="256032"/>
+            <a:pPr marL="0" indent="0">
+              <a:buNone/>
+            </a:pPr>
+            <a:r>
+              <a:rPr lang="en-US" sz="1050" dirty="0">
+                <a:solidFill>
+                  <a:srgbClr val="6B6F76"/>
+                </a:solidFill>
+                <a:latin typeface="맑은 고딕" pitchFamily="34" charset="0"/>
+                <a:ea typeface="맑은 고딕" pitchFamily="34" charset="-122"/>
+                <a:cs typeface="맑은 고딕" pitchFamily="34" charset="-120"/>
+              </a:rPr>
+              <a:t>구조물 1기 스캔 · 리포트</a:t>
+            </a:r>
+            <a:endParaRPr lang="en-US" sz="1050" dirty="0"/>
+          </a:p>
+        </p:txBody>
+      </p:sp>
+      <p:sp>
+        <p:nvSpPr>
+          <p:cNvPr id="39" name="Shape 33"/>
+          <p:cNvSpPr/>
+          <p:nvPr/>
+        </p:nvSpPr>
+        <p:spPr>
+          <a:xfrm>
+            <a:off x="777240" y="4581144"/>
+            <a:ext cx="402336" cy="402336"/>
+          </a:xfrm>
+          <a:prstGeom prst="ellipse">
+            <a:avLst/>
+          </a:prstGeom>
+          <a:solidFill>
+            <a:srgbClr val="B5501F"/>
+          </a:solidFill>
+          <a:ln w="12700">
+            <a:solidFill>
+              <a:srgbClr val="B5501F"/>
+            </a:solidFill>
+            <a:prstDash val="solid"/>
+          </a:ln>
+        </p:spPr>
+      </p:sp>
+      <p:pic>
+        <p:nvPicPr>
+          <p:cNvPr id="40" name="Image 4" descr="preencoded.png"/>
+          <p:cNvPicPr>
+            <a:picLocks noChangeAspect="1"/>
+          </p:cNvPicPr>
+          <p:nvPr/>
+        </p:nvPicPr>
+        <p:blipFill>
+          <a:blip r:embed="rId7"/>
+          <a:stretch>
+            <a:fillRect/>
+          </a:stretch>
+        </p:blipFill>
+        <p:spPr>
+          <a:xfrm>
+            <a:off x="881847" y="4685751"/>
+            <a:ext cx="193121" cy="193121"/>
+          </a:xfrm>
+          <a:prstGeom prst="rect">
+            <a:avLst/>
+          </a:prstGeom>
+        </p:spPr>
+      </p:pic>
+      <p:sp>
+        <p:nvSpPr>
+          <p:cNvPr id="41" name="Text 34"/>
+          <p:cNvSpPr txBox="1"/>
+          <p:nvPr/>
+        </p:nvSpPr>
+        <p:spPr>
+          <a:xfrm>
+            <a:off x="1298448" y="4562856"/>
+            <a:ext cx="2661818" cy="256032"/>
           </a:xfrm>
           <a:prstGeom prst="rect">
             <a:avLst/>
@@ -14185,34 +13342,266 @@
           <a:bodyPr wrap="square" lIns="0" tIns="0" rIns="0" bIns="0" rtlCol="0" anchor="t"/>
           <a:lstStyle/>
           <a:p>
-            <a:pPr indent="0" marL="0">
-              <a:buNone/>
-            </a:pPr>
-            <a:r>
-              <a:rPr lang="en-US" sz="950" i="1" dirty="0">
-                <a:solidFill>
-                  <a:srgbClr val="A3A7AD"/>
-                </a:solidFill>
-                <a:latin typeface="맑은 고딕" pitchFamily="34" charset="0"/>
-                <a:ea typeface="맑은 고딕" pitchFamily="34" charset="-122"/>
-                <a:cs typeface="맑은 고딕" pitchFamily="34" charset="-120"/>
-              </a:rPr>
-              <a:t>드론정보포털 활용업체 시장 통계</a:t>
-            </a:r>
-            <a:endParaRPr lang="en-US" sz="950" dirty="0"/>
-          </a:p>
-        </p:txBody>
-      </p:sp>
-      <p:sp>
-        <p:nvSpPr>
-          <p:cNvPr id="24" name="Shape 22"/>
+            <a:pPr marL="0" indent="0">
+              <a:buNone/>
+            </a:pPr>
+            <a:r>
+              <a:rPr lang="en-US" sz="1300" b="1" dirty="0">
+                <a:solidFill>
+                  <a:srgbClr val="2B2D31"/>
+                </a:solidFill>
+                <a:latin typeface="맑은 고딕" pitchFamily="34" charset="0"/>
+                <a:ea typeface="맑은 고딕" pitchFamily="34" charset="-122"/>
+                <a:cs typeface="맑은 고딕" pitchFamily="34" charset="-120"/>
+              </a:rPr>
+              <a:t>연 구독</a:t>
+            </a:r>
+            <a:endParaRPr lang="en-US" sz="1300" dirty="0"/>
+          </a:p>
+        </p:txBody>
+      </p:sp>
+      <p:sp>
+        <p:nvSpPr>
+          <p:cNvPr id="42" name="Text 35"/>
+          <p:cNvSpPr txBox="1"/>
+          <p:nvPr/>
+        </p:nvSpPr>
+        <p:spPr>
+          <a:xfrm>
+            <a:off x="1298448" y="4818888"/>
+            <a:ext cx="2661818" cy="237744"/>
+          </a:xfrm>
+          <a:prstGeom prst="rect">
+            <a:avLst/>
+          </a:prstGeom>
+          <a:noFill/>
+          <a:ln/>
+        </p:spPr>
+        <p:txBody>
+          <a:bodyPr wrap="square" lIns="0" tIns="0" rIns="0" bIns="0" rtlCol="0" anchor="t"/>
+          <a:lstStyle/>
+          <a:p>
+            <a:pPr marL="0" indent="0">
+              <a:buNone/>
+            </a:pPr>
+            <a:r>
+              <a:rPr lang="en-US" sz="1050" dirty="0">
+                <a:solidFill>
+                  <a:srgbClr val="6B6F76"/>
+                </a:solidFill>
+                <a:latin typeface="맑은 고딕" pitchFamily="34" charset="0"/>
+                <a:ea typeface="맑은 고딕" pitchFamily="34" charset="-122"/>
+                <a:cs typeface="맑은 고딕" pitchFamily="34" charset="-120"/>
+              </a:rPr>
+              <a:t>주기 점검 + 이력 관리</a:t>
+            </a:r>
+            <a:endParaRPr lang="en-US" sz="1050" dirty="0"/>
+          </a:p>
+        </p:txBody>
+      </p:sp>
+      <p:sp>
+        <p:nvSpPr>
+          <p:cNvPr id="43" name="Shape 36"/>
           <p:cNvSpPr/>
           <p:nvPr/>
         </p:nvSpPr>
         <p:spPr>
           <a:xfrm>
-            <a:off x="548640" y="4453128"/>
-            <a:ext cx="329184" cy="329184"/>
+            <a:off x="777240" y="5148072"/>
+            <a:ext cx="402336" cy="402336"/>
+          </a:xfrm>
+          <a:prstGeom prst="ellipse">
+            <a:avLst/>
+          </a:prstGeom>
+          <a:solidFill>
+            <a:srgbClr val="B5501F"/>
+          </a:solidFill>
+          <a:ln w="12700">
+            <a:solidFill>
+              <a:srgbClr val="B5501F"/>
+            </a:solidFill>
+            <a:prstDash val="solid"/>
+          </a:ln>
+        </p:spPr>
+      </p:sp>
+      <p:pic>
+        <p:nvPicPr>
+          <p:cNvPr id="44" name="Image 5" descr="preencoded.png"/>
+          <p:cNvPicPr>
+            <a:picLocks noChangeAspect="1"/>
+          </p:cNvPicPr>
+          <p:nvPr/>
+        </p:nvPicPr>
+        <p:blipFill>
+          <a:blip r:embed="rId8"/>
+          <a:stretch>
+            <a:fillRect/>
+          </a:stretch>
+        </p:blipFill>
+        <p:spPr>
+          <a:xfrm>
+            <a:off x="881847" y="5252679"/>
+            <a:ext cx="193121" cy="193121"/>
+          </a:xfrm>
+          <a:prstGeom prst="rect">
+            <a:avLst/>
+          </a:prstGeom>
+        </p:spPr>
+      </p:pic>
+      <p:sp>
+        <p:nvSpPr>
+          <p:cNvPr id="45" name="Text 37"/>
+          <p:cNvSpPr txBox="1"/>
+          <p:nvPr/>
+        </p:nvSpPr>
+        <p:spPr>
+          <a:xfrm>
+            <a:off x="1298448" y="5129784"/>
+            <a:ext cx="2661818" cy="256032"/>
+          </a:xfrm>
+          <a:prstGeom prst="rect">
+            <a:avLst/>
+          </a:prstGeom>
+          <a:noFill/>
+          <a:ln/>
+        </p:spPr>
+        <p:txBody>
+          <a:bodyPr wrap="square" lIns="0" tIns="0" rIns="0" bIns="0" rtlCol="0" anchor="t"/>
+          <a:lstStyle/>
+          <a:p>
+            <a:pPr marL="0" indent="0">
+              <a:buNone/>
+            </a:pPr>
+            <a:r>
+              <a:rPr lang="en-US" sz="1300" b="1" dirty="0">
+                <a:solidFill>
+                  <a:srgbClr val="2B2D31"/>
+                </a:solidFill>
+                <a:latin typeface="맑은 고딕" pitchFamily="34" charset="0"/>
+                <a:ea typeface="맑은 고딕" pitchFamily="34" charset="-122"/>
+                <a:cs typeface="맑은 고딕" pitchFamily="34" charset="-120"/>
+              </a:rPr>
+              <a:t>데이터 라이선스 (장기)</a:t>
+            </a:r>
+            <a:endParaRPr lang="en-US" sz="1300" dirty="0"/>
+          </a:p>
+        </p:txBody>
+      </p:sp>
+      <p:sp>
+        <p:nvSpPr>
+          <p:cNvPr id="46" name="Text 38"/>
+          <p:cNvSpPr txBox="1"/>
+          <p:nvPr/>
+        </p:nvSpPr>
+        <p:spPr>
+          <a:xfrm>
+            <a:off x="1298448" y="5385816"/>
+            <a:ext cx="2661818" cy="237744"/>
+          </a:xfrm>
+          <a:prstGeom prst="rect">
+            <a:avLst/>
+          </a:prstGeom>
+          <a:noFill/>
+          <a:ln/>
+        </p:spPr>
+        <p:txBody>
+          <a:bodyPr wrap="square" lIns="0" tIns="0" rIns="0" bIns="0" rtlCol="0" anchor="t"/>
+          <a:lstStyle/>
+          <a:p>
+            <a:pPr marL="0" indent="0">
+              <a:buNone/>
+            </a:pPr>
+            <a:r>
+              <a:rPr lang="en-US" sz="1050" dirty="0">
+                <a:solidFill>
+                  <a:srgbClr val="6B6F76"/>
+                </a:solidFill>
+                <a:latin typeface="맑은 고딕" pitchFamily="34" charset="0"/>
+                <a:ea typeface="맑은 고딕" pitchFamily="34" charset="-122"/>
+                <a:cs typeface="맑은 고딕" pitchFamily="34" charset="-120"/>
+              </a:rPr>
+              <a:t>드론 · 점검 업체 대상 분석 엔진</a:t>
+            </a:r>
+            <a:endParaRPr lang="en-US" sz="1050" dirty="0"/>
+          </a:p>
+        </p:txBody>
+      </p:sp>
+      <p:sp>
+        <p:nvSpPr>
+          <p:cNvPr id="47" name="Shape 39"/>
+          <p:cNvSpPr/>
+          <p:nvPr/>
+        </p:nvSpPr>
+        <p:spPr>
+          <a:xfrm>
+            <a:off x="4307738" y="3429000"/>
+            <a:ext cx="3576218" cy="2514600"/>
+          </a:xfrm>
+          <a:prstGeom prst="roundRect">
+            <a:avLst>
+              <a:gd name="adj" fmla="val 2909"/>
+            </a:avLst>
+          </a:prstGeom>
+          <a:solidFill>
+            <a:srgbClr val="F3F4F6"/>
+          </a:solidFill>
+          <a:ln w="12700">
+            <a:solidFill>
+              <a:srgbClr val="F3F4F6"/>
+            </a:solidFill>
+            <a:prstDash val="solid"/>
+          </a:ln>
+        </p:spPr>
+      </p:sp>
+      <p:sp>
+        <p:nvSpPr>
+          <p:cNvPr id="48" name="Text 40"/>
+          <p:cNvSpPr txBox="1"/>
+          <p:nvPr/>
+        </p:nvSpPr>
+        <p:spPr>
+          <a:xfrm>
+            <a:off x="4536338" y="3566160"/>
+            <a:ext cx="3210458" cy="320040"/>
+          </a:xfrm>
+          <a:prstGeom prst="rect">
+            <a:avLst/>
+          </a:prstGeom>
+          <a:noFill/>
+          <a:ln/>
+        </p:spPr>
+        <p:txBody>
+          <a:bodyPr wrap="square" lIns="0" tIns="0" rIns="0" bIns="0" rtlCol="0" anchor="t"/>
+          <a:lstStyle/>
+          <a:p>
+            <a:pPr marL="0" indent="0">
+              <a:buNone/>
+            </a:pPr>
+            <a:r>
+              <a:rPr lang="en-US" sz="1400" b="1" dirty="0">
+                <a:solidFill>
+                  <a:srgbClr val="2B2D31"/>
+                </a:solidFill>
+                <a:latin typeface="맑은 고딕" pitchFamily="34" charset="0"/>
+                <a:ea typeface="맑은 고딕" pitchFamily="34" charset="-122"/>
+                <a:cs typeface="맑은 고딕" pitchFamily="34" charset="-120"/>
+              </a:rPr>
+              <a:t>비용 구조</a:t>
+            </a:r>
+            <a:endParaRPr lang="en-US" sz="1400" dirty="0"/>
+          </a:p>
+        </p:txBody>
+      </p:sp>
+      <p:sp>
+        <p:nvSpPr>
+          <p:cNvPr id="49" name="Shape 41"/>
+          <p:cNvSpPr/>
+          <p:nvPr/>
+        </p:nvSpPr>
+        <p:spPr>
+          <a:xfrm>
+            <a:off x="4536338" y="4014216"/>
+            <a:ext cx="402336" cy="402336"/>
           </a:xfrm>
           <a:prstGeom prst="ellipse">
             <a:avLst/>
@@ -14220,40 +13609,64 @@
           <a:solidFill>
             <a:srgbClr val="2B2D31"/>
           </a:solidFill>
-          <a:ln w="19050">
+          <a:ln w="12700">
             <a:solidFill>
-              <a:srgbClr val="FFFFFF"/>
+              <a:srgbClr val="2B2D31"/>
             </a:solidFill>
             <a:prstDash val="solid"/>
           </a:ln>
         </p:spPr>
       </p:sp>
-      <p:sp>
-        <p:nvSpPr>
-          <p:cNvPr id="25" name="Text 23"/>
-          <p:cNvSpPr txBox="1"/>
-          <p:nvPr/>
-        </p:nvSpPr>
-        <p:spPr>
-          <a:xfrm>
-            <a:off x="1005840" y="4398264"/>
-            <a:ext cx="4937760" cy="411480"/>
-          </a:xfrm>
-          <a:prstGeom prst="rect">
-            <a:avLst/>
-          </a:prstGeom>
-          <a:noFill/>
-          <a:ln/>
-        </p:spPr>
-        <p:txBody>
-          <a:bodyPr wrap="square" lIns="0" tIns="0" rIns="0" bIns="0" rtlCol="0" anchor="ctr"/>
-          <a:lstStyle/>
-          <a:p>
-            <a:pPr indent="0" marL="0">
-              <a:buNone/>
-            </a:pPr>
-            <a:r>
-              <a:rPr lang="en-US" sz="2000" b="1" dirty="0">
+      <p:pic>
+        <p:nvPicPr>
+          <p:cNvPr id="50" name="Image 6" descr="preencoded.png"/>
+          <p:cNvPicPr>
+            <a:picLocks noChangeAspect="1"/>
+          </p:cNvPicPr>
+          <p:nvPr/>
+        </p:nvPicPr>
+        <p:blipFill>
+          <a:blip r:embed="rId3"/>
+          <a:stretch>
+            <a:fillRect/>
+          </a:stretch>
+        </p:blipFill>
+        <p:spPr>
+          <a:xfrm>
+            <a:off x="4640946" y="4118823"/>
+            <a:ext cx="193121" cy="193121"/>
+          </a:xfrm>
+          <a:prstGeom prst="rect">
+            <a:avLst/>
+          </a:prstGeom>
+        </p:spPr>
+      </p:pic>
+      <p:sp>
+        <p:nvSpPr>
+          <p:cNvPr id="51" name="Text 42"/>
+          <p:cNvSpPr txBox="1"/>
+          <p:nvPr/>
+        </p:nvSpPr>
+        <p:spPr>
+          <a:xfrm>
+            <a:off x="5057546" y="3995928"/>
+            <a:ext cx="2661818" cy="256032"/>
+          </a:xfrm>
+          <a:prstGeom prst="rect">
+            <a:avLst/>
+          </a:prstGeom>
+          <a:noFill/>
+          <a:ln/>
+        </p:spPr>
+        <p:txBody>
+          <a:bodyPr wrap="square" lIns="0" tIns="0" rIns="0" bIns="0" rtlCol="0" anchor="t"/>
+          <a:lstStyle/>
+          <a:p>
+            <a:pPr marL="0" indent="0">
+              <a:buNone/>
+            </a:pPr>
+            <a:r>
+              <a:rPr lang="en-US" sz="1300" b="1" dirty="0">
                 <a:solidFill>
                   <a:srgbClr val="2B2D31"/>
                 </a:solidFill>
@@ -14261,45 +13674,110 @@
                 <a:ea typeface="맑은 고딕" pitchFamily="34" charset="-122"/>
                 <a:cs typeface="맑은 고딕" pitchFamily="34" charset="-120"/>
               </a:rPr>
-              <a:t>SOM  17억 원</a:t>
-            </a:r>
-            <a:endParaRPr lang="en-US" sz="2000" dirty="0"/>
-          </a:p>
-        </p:txBody>
-      </p:sp>
-      <p:sp>
-        <p:nvSpPr>
-          <p:cNvPr id="26" name="Shape 24"/>
+              <a:t>드론 · 촬영 운용</a:t>
+            </a:r>
+            <a:endParaRPr lang="en-US" sz="1300" dirty="0"/>
+          </a:p>
+        </p:txBody>
+      </p:sp>
+      <p:sp>
+        <p:nvSpPr>
+          <p:cNvPr id="52" name="Text 43"/>
+          <p:cNvSpPr txBox="1"/>
+          <p:nvPr/>
+        </p:nvSpPr>
+        <p:spPr>
+          <a:xfrm>
+            <a:off x="5057546" y="4251960"/>
+            <a:ext cx="2661818" cy="237744"/>
+          </a:xfrm>
+          <a:prstGeom prst="rect">
+            <a:avLst/>
+          </a:prstGeom>
+          <a:noFill/>
+          <a:ln/>
+        </p:spPr>
+        <p:txBody>
+          <a:bodyPr wrap="square" lIns="0" tIns="0" rIns="0" bIns="0" rtlCol="0" anchor="t"/>
+          <a:lstStyle/>
+          <a:p>
+            <a:pPr marL="0" indent="0">
+              <a:buNone/>
+            </a:pPr>
+            <a:r>
+              <a:rPr lang="en-US" sz="1050" dirty="0">
+                <a:solidFill>
+                  <a:srgbClr val="6B6F76"/>
+                </a:solidFill>
+                <a:latin typeface="맑은 고딕" pitchFamily="34" charset="0"/>
+                <a:ea typeface="맑은 고딕" pitchFamily="34" charset="-122"/>
+                <a:cs typeface="맑은 고딕" pitchFamily="34" charset="-120"/>
+              </a:rPr>
+              <a:t>파트너 촬영 대행</a:t>
+            </a:r>
+            <a:endParaRPr lang="en-US" sz="1050" dirty="0"/>
+          </a:p>
+        </p:txBody>
+      </p:sp>
+      <p:sp>
+        <p:nvSpPr>
+          <p:cNvPr id="53" name="Shape 44"/>
           <p:cNvSpPr/>
           <p:nvPr/>
         </p:nvSpPr>
         <p:spPr>
           <a:xfrm>
-            <a:off x="3749040" y="4617720"/>
-            <a:ext cx="3703320" cy="662940"/>
-          </a:xfrm>
-          <a:prstGeom prst="line">
-            <a:avLst/>
-          </a:prstGeom>
-          <a:noFill/>
-          <a:ln w="15875">
+            <a:off x="4536338" y="4581144"/>
+            <a:ext cx="402336" cy="402336"/>
+          </a:xfrm>
+          <a:prstGeom prst="ellipse">
+            <a:avLst/>
+          </a:prstGeom>
+          <a:solidFill>
+            <a:srgbClr val="2B2D31"/>
+          </a:solidFill>
+          <a:ln w="12700">
             <a:solidFill>
-              <a:srgbClr val="A3A7AD"/>
+              <a:srgbClr val="2B2D31"/>
             </a:solidFill>
-            <a:prstDash val="dash"/>
+            <a:prstDash val="solid"/>
           </a:ln>
         </p:spPr>
       </p:sp>
-      <p:sp>
-        <p:nvSpPr>
-          <p:cNvPr id="27" name="Text 25"/>
-          <p:cNvSpPr txBox="1"/>
-          <p:nvPr/>
-        </p:nvSpPr>
-        <p:spPr>
-          <a:xfrm>
-            <a:off x="1005840" y="4846320"/>
-            <a:ext cx="4480560" cy="274320"/>
+      <p:pic>
+        <p:nvPicPr>
+          <p:cNvPr id="54" name="Image 7" descr="preencoded.png"/>
+          <p:cNvPicPr>
+            <a:picLocks noChangeAspect="1"/>
+          </p:cNvPicPr>
+          <p:nvPr/>
+        </p:nvPicPr>
+        <p:blipFill>
+          <a:blip r:embed="rId9"/>
+          <a:stretch>
+            <a:fillRect/>
+          </a:stretch>
+        </p:blipFill>
+        <p:spPr>
+          <a:xfrm>
+            <a:off x="4640946" y="4685751"/>
+            <a:ext cx="193121" cy="193121"/>
+          </a:xfrm>
+          <a:prstGeom prst="rect">
+            <a:avLst/>
+          </a:prstGeom>
+        </p:spPr>
+      </p:pic>
+      <p:sp>
+        <p:nvSpPr>
+          <p:cNvPr id="55" name="Text 45"/>
+          <p:cNvSpPr txBox="1"/>
+          <p:nvPr/>
+        </p:nvSpPr>
+        <p:spPr>
+          <a:xfrm>
+            <a:off x="5057546" y="4562856"/>
+            <a:ext cx="2661818" cy="256032"/>
           </a:xfrm>
           <a:prstGeom prst="rect">
             <a:avLst/>
@@ -14311,11 +13789,11 @@
           <a:bodyPr wrap="square" lIns="0" tIns="0" rIns="0" bIns="0" rtlCol="0" anchor="t"/>
           <a:lstStyle/>
           <a:p>
-            <a:pPr indent="0" marL="0">
-              <a:buNone/>
-            </a:pPr>
-            <a:r>
-              <a:rPr lang="en-US" sz="1300" dirty="0">
+            <a:pPr marL="0" indent="0">
+              <a:buNone/>
+            </a:pPr>
+            <a:r>
+              <a:rPr lang="en-US" sz="1300" b="1" dirty="0">
                 <a:solidFill>
                   <a:srgbClr val="2B2D31"/>
                 </a:solidFill>
@@ -14323,7 +13801,7 @@
                 <a:ea typeface="맑은 고딕" pitchFamily="34" charset="-122"/>
                 <a:cs typeface="맑은 고딕" pitchFamily="34" charset="-120"/>
               </a:rPr>
-              <a:t>3년 내 목표: SAM의 1%</a:t>
+              <a:t>모델 R&amp;D · 현장 시험</a:t>
             </a:r>
             <a:endParaRPr lang="en-US" sz="1300" dirty="0"/>
           </a:p>
@@ -14331,14 +13809,14 @@
       </p:sp>
       <p:sp>
         <p:nvSpPr>
-          <p:cNvPr id="28" name="Text 26"/>
-          <p:cNvSpPr txBox="1"/>
-          <p:nvPr/>
-        </p:nvSpPr>
-        <p:spPr>
-          <a:xfrm>
-            <a:off x="1005840" y="5129784"/>
-            <a:ext cx="4480560" cy="256032"/>
+          <p:cNvPr id="56" name="Text 46"/>
+          <p:cNvSpPr txBox="1"/>
+          <p:nvPr/>
+        </p:nvSpPr>
+        <p:spPr>
+          <a:xfrm>
+            <a:off x="5057546" y="4818888"/>
+            <a:ext cx="2661818" cy="237744"/>
           </a:xfrm>
           <a:prstGeom prst="rect">
             <a:avLst/>
@@ -14350,34 +13828,61 @@
           <a:bodyPr wrap="square" lIns="0" tIns="0" rIns="0" bIns="0" rtlCol="0" anchor="t"/>
           <a:lstStyle/>
           <a:p>
-            <a:pPr indent="0" marL="0">
-              <a:buNone/>
-            </a:pPr>
-            <a:r>
-              <a:rPr lang="en-US" sz="1200" b="1" dirty="0">
-                <a:solidFill>
-                  <a:srgbClr val="B5501F"/>
-                </a:solidFill>
-                <a:latin typeface="맑은 고딕" pitchFamily="34" charset="0"/>
-                <a:ea typeface="맑은 고딕" pitchFamily="34" charset="-122"/>
-                <a:cs typeface="맑은 고딕" pitchFamily="34" charset="-120"/>
-              </a:rPr>
-              <a:t>해양 · 항만 강구조물 · 해상풍력부터</a:t>
-            </a:r>
-            <a:endParaRPr lang="en-US" sz="1200" dirty="0"/>
-          </a:p>
-        </p:txBody>
-      </p:sp>
-      <p:sp>
-        <p:nvSpPr>
-          <p:cNvPr id="29" name="Text 27"/>
-          <p:cNvSpPr txBox="1"/>
-          <p:nvPr/>
-        </p:nvSpPr>
-        <p:spPr>
-          <a:xfrm>
-            <a:off x="1005840" y="5394960"/>
-            <a:ext cx="4480560" cy="256032"/>
+            <a:pPr marL="0" indent="0">
+              <a:buNone/>
+            </a:pPr>
+            <a:r>
+              <a:rPr lang="en-US" sz="1050" dirty="0">
+                <a:solidFill>
+                  <a:srgbClr val="6B6F76"/>
+                </a:solidFill>
+                <a:latin typeface="맑은 고딕" pitchFamily="34" charset="0"/>
+                <a:ea typeface="맑은 고딕" pitchFamily="34" charset="-122"/>
+                <a:cs typeface="맑은 고딕" pitchFamily="34" charset="-120"/>
+              </a:rPr>
+              <a:t>두께 데이터 결합 · 정확도 향상</a:t>
+            </a:r>
+            <a:endParaRPr lang="en-US" sz="1050" dirty="0"/>
+          </a:p>
+        </p:txBody>
+      </p:sp>
+      <p:sp>
+        <p:nvSpPr>
+          <p:cNvPr id="57" name="Shape 47"/>
+          <p:cNvSpPr/>
+          <p:nvPr/>
+        </p:nvSpPr>
+        <p:spPr>
+          <a:xfrm>
+            <a:off x="8066837" y="3429000"/>
+            <a:ext cx="3576218" cy="2514600"/>
+          </a:xfrm>
+          <a:prstGeom prst="roundRect">
+            <a:avLst>
+              <a:gd name="adj" fmla="val 2909"/>
+            </a:avLst>
+          </a:prstGeom>
+          <a:solidFill>
+            <a:srgbClr val="E3EFF4"/>
+          </a:solidFill>
+          <a:ln w="12700">
+            <a:solidFill>
+              <a:srgbClr val="E3EFF4"/>
+            </a:solidFill>
+            <a:prstDash val="solid"/>
+          </a:ln>
+        </p:spPr>
+      </p:sp>
+      <p:sp>
+        <p:nvSpPr>
+          <p:cNvPr id="58" name="Text 48"/>
+          <p:cNvSpPr txBox="1"/>
+          <p:nvPr/>
+        </p:nvSpPr>
+        <p:spPr>
+          <a:xfrm>
+            <a:off x="8295437" y="3566160"/>
+            <a:ext cx="3210458" cy="320040"/>
           </a:xfrm>
           <a:prstGeom prst="rect">
             <a:avLst/>
@@ -14389,21 +13894,275 @@
           <a:bodyPr wrap="square" lIns="0" tIns="0" rIns="0" bIns="0" rtlCol="0" anchor="t"/>
           <a:lstStyle/>
           <a:p>
-            <a:pPr indent="0" marL="0">
-              <a:buNone/>
-            </a:pPr>
-            <a:r>
-              <a:rPr lang="en-US" sz="950" i="1" dirty="0">
-                <a:solidFill>
-                  <a:srgbClr val="A3A7AD"/>
-                </a:solidFill>
-                <a:latin typeface="맑은 고딕" pitchFamily="34" charset="0"/>
-                <a:ea typeface="맑은 고딕" pitchFamily="34" charset="-122"/>
-                <a:cs typeface="맑은 고딕" pitchFamily="34" charset="-120"/>
-              </a:rPr>
-              <a:t>MLC 목표 (가정)</a:t>
-            </a:r>
-            <a:endParaRPr lang="en-US" sz="950" dirty="0"/>
+            <a:pPr marL="0" indent="0">
+              <a:buNone/>
+            </a:pPr>
+            <a:r>
+              <a:rPr lang="en-US" sz="1400" b="1" dirty="0">
+                <a:solidFill>
+                  <a:srgbClr val="1F5F7A"/>
+                </a:solidFill>
+                <a:latin typeface="맑은 고딕" pitchFamily="34" charset="0"/>
+                <a:ea typeface="맑은 고딕" pitchFamily="34" charset="-122"/>
+                <a:cs typeface="맑은 고딕" pitchFamily="34" charset="-120"/>
+              </a:rPr>
+              <a:t>고객이 아끼는 비용</a:t>
+            </a:r>
+            <a:endParaRPr lang="en-US" sz="1400" dirty="0"/>
+          </a:p>
+        </p:txBody>
+      </p:sp>
+      <p:sp>
+        <p:nvSpPr>
+          <p:cNvPr id="59" name="Shape 49"/>
+          <p:cNvSpPr/>
+          <p:nvPr/>
+        </p:nvSpPr>
+        <p:spPr>
+          <a:xfrm>
+            <a:off x="8295437" y="4014216"/>
+            <a:ext cx="402336" cy="402336"/>
+          </a:xfrm>
+          <a:prstGeom prst="ellipse">
+            <a:avLst/>
+          </a:prstGeom>
+          <a:solidFill>
+            <a:srgbClr val="1F5F7A"/>
+          </a:solidFill>
+          <a:ln w="12700">
+            <a:solidFill>
+              <a:srgbClr val="1F5F7A"/>
+            </a:solidFill>
+            <a:prstDash val="solid"/>
+          </a:ln>
+        </p:spPr>
+      </p:sp>
+      <p:pic>
+        <p:nvPicPr>
+          <p:cNvPr id="60" name="Image 8" descr="preencoded.png"/>
+          <p:cNvPicPr>
+            <a:picLocks noChangeAspect="1"/>
+          </p:cNvPicPr>
+          <p:nvPr/>
+        </p:nvPicPr>
+        <p:blipFill>
+          <a:blip r:embed="rId10"/>
+          <a:stretch>
+            <a:fillRect/>
+          </a:stretch>
+        </p:blipFill>
+        <p:spPr>
+          <a:xfrm>
+            <a:off x="8400044" y="4118823"/>
+            <a:ext cx="193121" cy="193121"/>
+          </a:xfrm>
+          <a:prstGeom prst="rect">
+            <a:avLst/>
+          </a:prstGeom>
+        </p:spPr>
+      </p:pic>
+      <p:sp>
+        <p:nvSpPr>
+          <p:cNvPr id="61" name="Text 50"/>
+          <p:cNvSpPr txBox="1"/>
+          <p:nvPr/>
+        </p:nvSpPr>
+        <p:spPr>
+          <a:xfrm>
+            <a:off x="8816645" y="3995928"/>
+            <a:ext cx="2661818" cy="256032"/>
+          </a:xfrm>
+          <a:prstGeom prst="rect">
+            <a:avLst/>
+          </a:prstGeom>
+          <a:noFill/>
+          <a:ln/>
+        </p:spPr>
+        <p:txBody>
+          <a:bodyPr wrap="square" lIns="0" tIns="0" rIns="0" bIns="0" rtlCol="0" anchor="t"/>
+          <a:lstStyle/>
+          <a:p>
+            <a:pPr marL="0" indent="0">
+              <a:buNone/>
+            </a:pPr>
+            <a:r>
+              <a:rPr lang="en-US" sz="1300" b="1" dirty="0">
+                <a:solidFill>
+                  <a:srgbClr val="2B2D31"/>
+                </a:solidFill>
+                <a:latin typeface="맑은 고딕" pitchFamily="34" charset="0"/>
+                <a:ea typeface="맑은 고딕" pitchFamily="34" charset="-122"/>
+                <a:cs typeface="맑은 고딕" pitchFamily="34" charset="-120"/>
+              </a:rPr>
+              <a:t>선박 용선 · 기상 대기</a:t>
+            </a:r>
+            <a:endParaRPr lang="en-US" sz="1300" dirty="0"/>
+          </a:p>
+        </p:txBody>
+      </p:sp>
+      <p:sp>
+        <p:nvSpPr>
+          <p:cNvPr id="62" name="Text 51"/>
+          <p:cNvSpPr txBox="1"/>
+          <p:nvPr/>
+        </p:nvSpPr>
+        <p:spPr>
+          <a:xfrm>
+            <a:off x="8816645" y="4251960"/>
+            <a:ext cx="2661818" cy="237744"/>
+          </a:xfrm>
+          <a:prstGeom prst="rect">
+            <a:avLst/>
+          </a:prstGeom>
+          <a:noFill/>
+          <a:ln/>
+        </p:spPr>
+        <p:txBody>
+          <a:bodyPr wrap="square" lIns="0" tIns="0" rIns="0" bIns="0" rtlCol="0" anchor="t"/>
+          <a:lstStyle/>
+          <a:p>
+            <a:pPr marL="0" indent="0">
+              <a:buNone/>
+            </a:pPr>
+            <a:r>
+              <a:rPr lang="en-US" sz="1050" dirty="0">
+                <a:solidFill>
+                  <a:srgbClr val="6B6F76"/>
+                </a:solidFill>
+                <a:latin typeface="맑은 고딕" pitchFamily="34" charset="0"/>
+                <a:ea typeface="맑은 고딕" pitchFamily="34" charset="-122"/>
+                <a:cs typeface="맑은 고딕" pitchFamily="34" charset="-120"/>
+              </a:rPr>
+              <a:t>위험 지점 우선 투입</a:t>
+            </a:r>
+            <a:endParaRPr lang="en-US" sz="1050" dirty="0"/>
+          </a:p>
+        </p:txBody>
+      </p:sp>
+      <p:sp>
+        <p:nvSpPr>
+          <p:cNvPr id="63" name="Shape 52"/>
+          <p:cNvSpPr/>
+          <p:nvPr/>
+        </p:nvSpPr>
+        <p:spPr>
+          <a:xfrm>
+            <a:off x="8295437" y="4581144"/>
+            <a:ext cx="402336" cy="402336"/>
+          </a:xfrm>
+          <a:prstGeom prst="ellipse">
+            <a:avLst/>
+          </a:prstGeom>
+          <a:solidFill>
+            <a:srgbClr val="1F5F7A"/>
+          </a:solidFill>
+          <a:ln w="12700">
+            <a:solidFill>
+              <a:srgbClr val="1F5F7A"/>
+            </a:solidFill>
+            <a:prstDash val="solid"/>
+          </a:ln>
+        </p:spPr>
+      </p:sp>
+      <p:pic>
+        <p:nvPicPr>
+          <p:cNvPr id="64" name="Image 9" descr="preencoded.png"/>
+          <p:cNvPicPr>
+            <a:picLocks noChangeAspect="1"/>
+          </p:cNvPicPr>
+          <p:nvPr/>
+        </p:nvPicPr>
+        <p:blipFill>
+          <a:blip r:embed="rId11"/>
+          <a:stretch>
+            <a:fillRect/>
+          </a:stretch>
+        </p:blipFill>
+        <p:spPr>
+          <a:xfrm>
+            <a:off x="8400044" y="4685751"/>
+            <a:ext cx="193121" cy="193121"/>
+          </a:xfrm>
+          <a:prstGeom prst="rect">
+            <a:avLst/>
+          </a:prstGeom>
+        </p:spPr>
+      </p:pic>
+      <p:sp>
+        <p:nvSpPr>
+          <p:cNvPr id="65" name="Text 53"/>
+          <p:cNvSpPr txBox="1"/>
+          <p:nvPr/>
+        </p:nvSpPr>
+        <p:spPr>
+          <a:xfrm>
+            <a:off x="8816645" y="4562856"/>
+            <a:ext cx="2661818" cy="256032"/>
+          </a:xfrm>
+          <a:prstGeom prst="rect">
+            <a:avLst/>
+          </a:prstGeom>
+          <a:noFill/>
+          <a:ln/>
+        </p:spPr>
+        <p:txBody>
+          <a:bodyPr wrap="square" lIns="0" tIns="0" rIns="0" bIns="0" rtlCol="0" anchor="t"/>
+          <a:lstStyle/>
+          <a:p>
+            <a:pPr marL="0" indent="0">
+              <a:buNone/>
+            </a:pPr>
+            <a:r>
+              <a:rPr lang="en-US" sz="1300" b="1" dirty="0">
+                <a:solidFill>
+                  <a:srgbClr val="2B2D31"/>
+                </a:solidFill>
+                <a:latin typeface="맑은 고딕" pitchFamily="34" charset="0"/>
+                <a:ea typeface="맑은 고딕" pitchFamily="34" charset="-122"/>
+                <a:cs typeface="맑은 고딕" pitchFamily="34" charset="-120"/>
+              </a:rPr>
+              <a:t>리프트 · 로프 액세스</a:t>
+            </a:r>
+            <a:endParaRPr lang="en-US" sz="1300" dirty="0"/>
+          </a:p>
+        </p:txBody>
+      </p:sp>
+      <p:sp>
+        <p:nvSpPr>
+          <p:cNvPr id="66" name="Text 54"/>
+          <p:cNvSpPr txBox="1"/>
+          <p:nvPr/>
+        </p:nvSpPr>
+        <p:spPr>
+          <a:xfrm>
+            <a:off x="8816645" y="4818888"/>
+            <a:ext cx="2661818" cy="237744"/>
+          </a:xfrm>
+          <a:prstGeom prst="rect">
+            <a:avLst/>
+          </a:prstGeom>
+          <a:noFill/>
+          <a:ln/>
+        </p:spPr>
+        <p:txBody>
+          <a:bodyPr wrap="square" lIns="0" tIns="0" rIns="0" bIns="0" rtlCol="0" anchor="t"/>
+          <a:lstStyle/>
+          <a:p>
+            <a:pPr marL="0" indent="0">
+              <a:buNone/>
+            </a:pPr>
+            <a:r>
+              <a:rPr lang="en-US" sz="1050" dirty="0">
+                <a:solidFill>
+                  <a:srgbClr val="6B6F76"/>
+                </a:solidFill>
+                <a:latin typeface="맑은 고딕" pitchFamily="34" charset="0"/>
+                <a:ea typeface="맑은 고딕" pitchFamily="34" charset="-122"/>
+                <a:cs typeface="맑은 고딕" pitchFamily="34" charset="-120"/>
+              </a:rPr>
+              <a:t>필요 구간만 · 출동 사전 판단</a:t>
+            </a:r>
+            <a:endParaRPr lang="en-US" sz="1050" dirty="0"/>
           </a:p>
         </p:txBody>
       </p:sp>
